--- a/docs/activities/Unit-04-Discrete.pptx
+++ b/docs/activities/Unit-04-Discrete.pptx
@@ -13,6 +13,7 @@
     <p:sldId id="261" r:id="rId7"/>
     <p:sldId id="262" r:id="rId8"/>
     <p:sldId id="263" r:id="rId9"/>
+    <p:sldId id="264" r:id="rId10"/>
   </p:sldIdLst>
   <p:sldSz cx="9144000" cy="6858000" type="screen4x3"/>
   <p:notesSz cx="6858000" cy="9144000"/>
@@ -3516,7 +3517,7 @@
             </a:pPr>
             <a:r>
               <a:rPr/>
-              <a:t>Probability</a:t>
+              <a:t>Discrete Random Variable</a:t>
             </a:r>
           </a:p>
         </p:txBody>
@@ -3667,6 +3668,6285 @@
 </file>
 
 <file path=ppt/slides/slide7.xml><?xml version="1.0" encoding="utf-8"?>
+<p:sld xmlns:a="http://schemas.openxmlformats.org/drawingml/2006/main" xmlns:r="http://schemas.openxmlformats.org/officeDocument/2006/relationships" xmlns:p="http://schemas.openxmlformats.org/presentationml/2006/main">
+  <p:cSld>
+    <p:spTree>
+      <p:nvGrpSpPr>
+        <p:cNvPr id="1" name=""/>
+        <p:cNvGrpSpPr/>
+        <p:nvPr/>
+      </p:nvGrpSpPr>
+      <p:grpSpPr>
+        <a:xfrm>
+          <a:off x="0" y="0"/>
+          <a:ext cx="0" cy="0"/>
+          <a:chOff x="0" y="0"/>
+          <a:chExt cx="0" cy="0"/>
+        </a:xfrm>
+      </p:grpSpPr>
+      <p:sp>
+        <p:nvSpPr>
+          <p:cNvPr id="2" name="Title Placeholder 1"/>
+          <p:cNvSpPr>
+            <a:spLocks noGrp="1"/>
+          </p:cNvSpPr>
+          <p:nvPr>
+            <p:ph type="title"/>
+          </p:nvPr>
+        </p:nvSpPr>
+        <p:spPr bwMode="auto">
+          <a:xfrm>
+            <a:off x="433680" y="423297"/>
+            <a:ext cx="8229600" cy="784602"/>
+          </a:xfrm>
+          <a:prstGeom prst="rect">
+            <a:avLst/>
+          </a:prstGeom>
+          <a:noFill/>
+          <a:ln w="9525">
+            <a:noFill/>
+            <a:miter lim="800000"/>
+            <a:headEnd/>
+            <a:tailEnd/>
+          </a:ln>
+        </p:spPr>
+        <p:txBody>
+          <a:bodyPr/>
+          <a:lstStyle/>
+          <a:p>
+            <a:pPr lvl="0" indent="0" marL="0">
+              <a:buNone/>
+            </a:pPr>
+            <a:r>
+              <a:rPr/>
+              <a:t>Bernoulli Distribution</a:t>
+            </a:r>
+          </a:p>
+        </p:txBody>
+      </p:sp>
+      <mc:AlternateContent xmlns:mc="http://schemas.openxmlformats.org/markup-compatibility/2006">
+        <mc:Choice xmlns:a14="http://schemas.microsoft.com/office/drawing/2010/main" Requires="a14">
+          <p:sp>
+            <p:nvSpPr>
+              <p:cNvPr id="3" name="Text Placeholder 2"/>
+              <p:cNvSpPr>
+                <a:spLocks noGrp="1"/>
+              </p:cNvSpPr>
+              <p:nvPr>
+                <p:ph idx="1"/>
+              </p:nvPr>
+            </p:nvSpPr>
+            <p:spPr/>
+            <p:txBody>
+              <a:bodyPr/>
+              <a:lstStyle/>
+              <a:p>
+                <a:pPr lvl="0" indent="0" marL="0">
+                  <a:spcBef>
+                    <a:spcPts val="3000"/>
+                  </a:spcBef>
+                  <a:buNone/>
+                </a:pPr>
+                <a:r>
+                  <a:rPr b="1"/>
+                  <a:t>Idea</a:t>
+                </a:r>
+              </a:p>
+              <a:p>
+                <a:pPr lvl="0"/>
+                <a:r>
+                  <a:rPr/>
+                  <a:t>A </a:t>
+                </a:r>
+                <a:r>
+                  <a:rPr b="1"/>
+                  <a:t>Bernoulli experiment</a:t>
+                </a:r>
+                <a:r>
+                  <a:rPr/>
+                  <a:t> has exactly two possible outcomes.</a:t>
+                </a:r>
+              </a:p>
+              <a:p>
+                <a:pPr lvl="0"/>
+                <a:r>
+                  <a:rPr/>
+                  <a:t>One outcome is called </a:t>
+                </a:r>
+                <a:r>
+                  <a:rPr b="1"/>
+                  <a:t>success</a:t>
+                </a:r>
+                <a:r>
+                  <a:rPr/>
+                  <a:t>, and the other is called </a:t>
+                </a:r>
+                <a:r>
+                  <a:rPr b="1"/>
+                  <a:t>failure</a:t>
+                </a:r>
+                <a:r>
+                  <a:rPr/>
+                  <a:t>.</a:t>
+                </a:r>
+              </a:p>
+              <a:p>
+                <a:pPr lvl="1"/>
+                <a:r>
+                  <a:rPr/>
+                  <a:t>For example, we can define “rolling a six” as a </a:t>
+                </a:r>
+                <a:r>
+                  <a:rPr b="1"/>
+                  <a:t>success</a:t>
+                </a:r>
+                <a:r>
+                  <a:rPr/>
+                  <a:t>.</a:t>
+                </a:r>
+              </a:p>
+              <a:p>
+                <a:pPr lvl="1"/>
+                <a:r>
+                  <a:rPr/>
+                  <a:t>We can define “an item is defective” as a </a:t>
+                </a:r>
+                <a:r>
+                  <a:rPr b="1"/>
+                  <a:t>success</a:t>
+                </a:r>
+                <a:r>
+                  <a:rPr/>
+                  <a:t>.</a:t>
+                </a:r>
+              </a:p>
+              <a:p>
+                <a:pPr lvl="0"/>
+                <a:r>
+                  <a:rPr/>
+                  <a:t>Let </a:t>
+                </a:r>
+                <a14:m>
+                  <m:oMath xmlns:m="http://schemas.openxmlformats.org/officeDocument/2006/math">
+                    <m:r>
+                      <m:t>p</m:t>
+                    </m:r>
+                  </m:oMath>
+                </a14:m>
+                <a:r>
+                  <a:rPr/>
+                  <a:t> be the probability that the experiment results in a success.</a:t>
+                </a:r>
+              </a:p>
+              <a:p>
+                <a:pPr lvl="0"/>
+                <a:r>
+                  <a:rPr/>
+                  <a:t>Define the discrete random variable</a:t>
+                </a:r>
+              </a:p>
+              <a:p>
+                <a:pPr lvl="0" indent="0" marL="0">
+                  <a:buNone/>
+                </a:pPr>
+                <a14:m>
+                  <m:oMathPara xmlns:m="http://schemas.openxmlformats.org/officeDocument/2006/math">
+                    <m:oMathParaPr>
+                      <m:jc m:val="center"/>
+                    </m:oMathParaPr>
+                    <m:oMath>
+                      <m:r>
+                        <m:t>X</m:t>
+                      </m:r>
+                      <m:r>
+                        <m:rPr>
+                          <m:sty m:val="p"/>
+                        </m:rPr>
+                        <m:t>=</m:t>
+                      </m:r>
+                      <m:d>
+                        <m:dPr>
+                          <m:begChr m:val="{"/>
+                          <m:sepChr m:val=""/>
+                          <m:endChr m:val=""/>
+                          <m:grow/>
+                        </m:dPr>
+                        <m:e>
+                          <m:m>
+                            <m:mPr>
+                              <m:baseJc m:val="center"/>
+                              <m:plcHide m:val="on"/>
+                              <m:mcs>
+                                <m:mc>
+                                  <m:mcPr>
+                                    <m:mcJc m:val="left"/>
+                                    <m:count m:val="1"/>
+                                  </m:mcPr>
+                                </m:mc>
+                                <m:mc>
+                                  <m:mcPr>
+                                    <m:mcJc m:val="left"/>
+                                    <m:count m:val="1"/>
+                                  </m:mcPr>
+                                </m:mc>
+                              </m:mcs>
+                            </m:mPr>
+                            <m:mr>
+                              <m:e>
+                                <m:r>
+                                  <m:t>1</m:t>
+                                </m:r>
+                                <m:r>
+                                  <m:rPr>
+                                    <m:sty m:val="p"/>
+                                  </m:rPr>
+                                  <m:t>,</m:t>
+                                </m:r>
+                              </m:e>
+                              <m:e>
+                                <m:r>
+                                  <m:rPr>
+                                    <m:nor/>
+                                    <m:sty m:val="p"/>
+                                  </m:rPr>
+                                  <m:t>if the experiment is a success</m:t>
+                                </m:r>
+                                <m:r>
+                                  <m:rPr>
+                                    <m:sty m:val="p"/>
+                                  </m:rPr>
+                                  <m:t>,</m:t>
+                                </m:r>
+                              </m:e>
+                            </m:mr>
+                            <m:mr>
+                              <m:e>
+                                <m:r>
+                                  <m:t>0</m:t>
+                                </m:r>
+                                <m:r>
+                                  <m:rPr>
+                                    <m:sty m:val="p"/>
+                                  </m:rPr>
+                                  <m:t>,</m:t>
+                                </m:r>
+                              </m:e>
+                              <m:e>
+                                <m:r>
+                                  <m:rPr>
+                                    <m:nor/>
+                                    <m:sty m:val="p"/>
+                                  </m:rPr>
+                                  <m:t>if the experiment is a failure</m:t>
+                                </m:r>
+                                <m:r>
+                                  <m:rPr>
+                                    <m:sty m:val="p"/>
+                                  </m:rPr>
+                                  <m:t>.</m:t>
+                                </m:r>
+                              </m:e>
+                            </m:mr>
+                          </m:m>
+                        </m:e>
+                      </m:d>
+                    </m:oMath>
+                  </m:oMathPara>
+                </a14:m>
+              </a:p>
+              <a:p>
+                <a:pPr lvl="0"/>
+                <a:r>
+                  <a:rPr/>
+                  <a:t>Then</a:t>
+                </a:r>
+              </a:p>
+              <a:p>
+                <a:pPr lvl="0" indent="0" marL="0">
+                  <a:buNone/>
+                </a:pPr>
+                <a14:m>
+                  <m:oMathPara xmlns:m="http://schemas.openxmlformats.org/officeDocument/2006/math">
+                    <m:oMathParaPr>
+                      <m:jc m:val="center"/>
+                    </m:oMathParaPr>
+                    <m:oMath>
+                      <m:r>
+                        <m:t>P</m:t>
+                      </m:r>
+                      <m:d>
+                        <m:dPr>
+                          <m:begChr m:val="("/>
+                          <m:sepChr m:val=""/>
+                          <m:endChr m:val=")"/>
+                          <m:grow/>
+                        </m:dPr>
+                        <m:e>
+                          <m:r>
+                            <m:t>X</m:t>
+                          </m:r>
+                          <m:r>
+                            <m:rPr>
+                              <m:sty m:val="p"/>
+                            </m:rPr>
+                            <m:t>=</m:t>
+                          </m:r>
+                          <m:r>
+                            <m:t>1</m:t>
+                          </m:r>
+                        </m:e>
+                      </m:d>
+                      <m:r>
+                        <m:rPr>
+                          <m:sty m:val="p"/>
+                        </m:rPr>
+                        <m:t>=</m:t>
+                      </m:r>
+                      <m:r>
+                        <m:t>p</m:t>
+                      </m:r>
+                    </m:oMath>
+                  </m:oMathPara>
+                </a14:m>
+              </a:p>
+              <a:p>
+                <a:pPr lvl="0" indent="0" marL="0">
+                  <a:buNone/>
+                </a:pPr>
+                <a:r>
+                  <a:rPr/>
+                  <a:t>and</a:t>
+                </a:r>
+              </a:p>
+              <a:p>
+                <a:pPr lvl="0" indent="0" marL="0">
+                  <a:buNone/>
+                </a:pPr>
+                <a14:m>
+                  <m:oMathPara xmlns:m="http://schemas.openxmlformats.org/officeDocument/2006/math">
+                    <m:oMathParaPr>
+                      <m:jc m:val="center"/>
+                    </m:oMathParaPr>
+                    <m:oMath>
+                      <m:r>
+                        <m:t>P</m:t>
+                      </m:r>
+                      <m:d>
+                        <m:dPr>
+                          <m:begChr m:val="("/>
+                          <m:sepChr m:val=""/>
+                          <m:endChr m:val=")"/>
+                          <m:grow/>
+                        </m:dPr>
+                        <m:e>
+                          <m:r>
+                            <m:t>X</m:t>
+                          </m:r>
+                          <m:r>
+                            <m:rPr>
+                              <m:sty m:val="p"/>
+                            </m:rPr>
+                            <m:t>=</m:t>
+                          </m:r>
+                          <m:r>
+                            <m:t>0</m:t>
+                          </m:r>
+                        </m:e>
+                      </m:d>
+                      <m:r>
+                        <m:rPr>
+                          <m:sty m:val="p"/>
+                        </m:rPr>
+                        <m:t>=</m:t>
+                      </m:r>
+                      <m:r>
+                        <m:t>1</m:t>
+                      </m:r>
+                      <m:r>
+                        <m:rPr>
+                          <m:sty m:val="p"/>
+                        </m:rPr>
+                        <m:t>−</m:t>
+                      </m:r>
+                      <m:r>
+                        <m:t>p</m:t>
+                      </m:r>
+                      <m:r>
+                        <m:rPr>
+                          <m:sty m:val="p"/>
+                        </m:rPr>
+                        <m:t>.</m:t>
+                      </m:r>
+                    </m:oMath>
+                  </m:oMathPara>
+                </a14:m>
+              </a:p>
+              <a:p>
+                <a:pPr lvl="0"/>
+                <a:r>
+                  <a:rPr/>
+                  <a:t>Therefore, the probability mass function (PMF) of </a:t>
+                </a:r>
+                <a14:m>
+                  <m:oMath xmlns:m="http://schemas.openxmlformats.org/officeDocument/2006/math">
+                    <m:r>
+                      <m:t>X</m:t>
+                    </m:r>
+                  </m:oMath>
+                </a14:m>
+                <a:r>
+                  <a:rPr/>
+                  <a:t> is</a:t>
+                </a:r>
+              </a:p>
+              <a:p>
+                <a:pPr lvl="0" indent="0" marL="0">
+                  <a:buNone/>
+                </a:pPr>
+                <a14:m>
+                  <m:oMathPara xmlns:m="http://schemas.openxmlformats.org/officeDocument/2006/math">
+                    <m:oMathParaPr>
+                      <m:jc m:val="center"/>
+                    </m:oMathParaPr>
+                    <m:oMath>
+                      <m:r>
+                        <m:t>p</m:t>
+                      </m:r>
+                      <m:d>
+                        <m:dPr>
+                          <m:begChr m:val="("/>
+                          <m:sepChr m:val=""/>
+                          <m:endChr m:val=")"/>
+                          <m:grow/>
+                        </m:dPr>
+                        <m:e>
+                          <m:r>
+                            <m:t>x</m:t>
+                          </m:r>
+                        </m:e>
+                      </m:d>
+                      <m:r>
+                        <m:rPr>
+                          <m:sty m:val="p"/>
+                        </m:rPr>
+                        <m:t>=</m:t>
+                      </m:r>
+                      <m:d>
+                        <m:dPr>
+                          <m:begChr m:val="{"/>
+                          <m:sepChr m:val=""/>
+                          <m:endChr m:val=""/>
+                          <m:grow/>
+                        </m:dPr>
+                        <m:e>
+                          <m:m>
+                            <m:mPr>
+                              <m:baseJc m:val="center"/>
+                              <m:plcHide m:val="on"/>
+                              <m:mcs>
+                                <m:mc>
+                                  <m:mcPr>
+                                    <m:mcJc m:val="left"/>
+                                    <m:count m:val="1"/>
+                                  </m:mcPr>
+                                </m:mc>
+                                <m:mc>
+                                  <m:mcPr>
+                                    <m:mcJc m:val="left"/>
+                                    <m:count m:val="1"/>
+                                  </m:mcPr>
+                                </m:mc>
+                              </m:mcs>
+                            </m:mPr>
+                            <m:mr>
+                              <m:e>
+                                <m:r>
+                                  <m:t>p</m:t>
+                                </m:r>
+                                <m:r>
+                                  <m:rPr>
+                                    <m:sty m:val="p"/>
+                                  </m:rPr>
+                                  <m:t>,</m:t>
+                                </m:r>
+                              </m:e>
+                              <m:e>
+                                <m:r>
+                                  <m:t>x</m:t>
+                                </m:r>
+                                <m:r>
+                                  <m:rPr>
+                                    <m:sty m:val="p"/>
+                                  </m:rPr>
+                                  <m:t>=</m:t>
+                                </m:r>
+                                <m:r>
+                                  <m:t>1</m:t>
+                                </m:r>
+                                <m:r>
+                                  <m:rPr>
+                                    <m:sty m:val="p"/>
+                                  </m:rPr>
+                                  <m:t>,</m:t>
+                                </m:r>
+                              </m:e>
+                            </m:mr>
+                            <m:mr>
+                              <m:e>
+                                <m:r>
+                                  <m:t>1</m:t>
+                                </m:r>
+                                <m:r>
+                                  <m:rPr>
+                                    <m:sty m:val="p"/>
+                                  </m:rPr>
+                                  <m:t>−</m:t>
+                                </m:r>
+                                <m:r>
+                                  <m:t>p</m:t>
+                                </m:r>
+                                <m:r>
+                                  <m:rPr>
+                                    <m:sty m:val="p"/>
+                                  </m:rPr>
+                                  <m:t>,</m:t>
+                                </m:r>
+                              </m:e>
+                              <m:e>
+                                <m:r>
+                                  <m:t>x</m:t>
+                                </m:r>
+                                <m:r>
+                                  <m:rPr>
+                                    <m:sty m:val="p"/>
+                                  </m:rPr>
+                                  <m:t>=</m:t>
+                                </m:r>
+                                <m:r>
+                                  <m:t>0</m:t>
+                                </m:r>
+                                <m:r>
+                                  <m:rPr>
+                                    <m:sty m:val="p"/>
+                                  </m:rPr>
+                                  <m:t>.</m:t>
+                                </m:r>
+                              </m:e>
+                            </m:mr>
+                          </m:m>
+                        </m:e>
+                      </m:d>
+                    </m:oMath>
+                  </m:oMathPara>
+                </a14:m>
+              </a:p>
+              <a:p>
+                <a:pPr lvl="0" indent="0" marL="0">
+                  <a:spcBef>
+                    <a:spcPts val="3000"/>
+                  </a:spcBef>
+                  <a:buNone/>
+                </a:pPr>
+                <a:r>
+                  <a:rPr b="1"/>
+                  <a:t>Formula</a:t>
+                </a:r>
+              </a:p>
+              <a:p>
+                <a:pPr lvl="0"/>
+                <a:r>
+                  <a:rPr/>
+                  <a:t>A discrete random variable </a:t>
+                </a:r>
+                <a14:m>
+                  <m:oMath xmlns:m="http://schemas.openxmlformats.org/officeDocument/2006/math">
+                    <m:r>
+                      <m:t>X</m:t>
+                    </m:r>
+                  </m:oMath>
+                </a14:m>
+                <a:r>
+                  <a:rPr/>
+                  <a:t> has the </a:t>
+                </a:r>
+                <a:r>
+                  <a:rPr b="1"/>
+                  <a:t>Bernoulli distribution</a:t>
+                </a:r>
+                <a:r>
+                  <a:rPr/>
+                  <a:t> with parameter </a:t>
+                </a:r>
+                <a14:m>
+                  <m:oMath xmlns:m="http://schemas.openxmlformats.org/officeDocument/2006/math">
+                    <m:r>
+                      <m:t>p</m:t>
+                    </m:r>
+                  </m:oMath>
+                </a14:m>
+                <a:r>
+                  <a:rPr/>
+                  <a:t> (A parameter is a fixed number that describes or controls a probability distribution) if</a:t>
+                </a:r>
+              </a:p>
+              <a:p>
+                <a:pPr lvl="0" indent="0" marL="0">
+                  <a:buNone/>
+                </a:pPr>
+                <a14:m>
+                  <m:oMathPara xmlns:m="http://schemas.openxmlformats.org/officeDocument/2006/math">
+                    <m:oMathParaPr>
+                      <m:jc m:val="center"/>
+                    </m:oMathParaPr>
+                    <m:oMath>
+                      <m:r>
+                        <m:t>P</m:t>
+                      </m:r>
+                      <m:d>
+                        <m:dPr>
+                          <m:begChr m:val="("/>
+                          <m:sepChr m:val=""/>
+                          <m:endChr m:val=")"/>
+                          <m:grow/>
+                        </m:dPr>
+                        <m:e>
+                          <m:r>
+                            <m:t>X</m:t>
+                          </m:r>
+                          <m:r>
+                            <m:rPr>
+                              <m:sty m:val="p"/>
+                            </m:rPr>
+                            <m:t>=</m:t>
+                          </m:r>
+                          <m:r>
+                            <m:t>1</m:t>
+                          </m:r>
+                        </m:e>
+                      </m:d>
+                      <m:r>
+                        <m:rPr>
+                          <m:sty m:val="p"/>
+                        </m:rPr>
+                        <m:t>=</m:t>
+                      </m:r>
+                      <m:r>
+                        <m:t>p</m:t>
+                      </m:r>
+                    </m:oMath>
+                  </m:oMathPara>
+                </a14:m>
+              </a:p>
+              <a:p>
+                <a:pPr lvl="0" indent="0" marL="0">
+                  <a:buNone/>
+                </a:pPr>
+                <a:r>
+                  <a:rPr/>
+                  <a:t>and</a:t>
+                </a:r>
+              </a:p>
+              <a:p>
+                <a:pPr lvl="0" indent="0" marL="0">
+                  <a:buNone/>
+                </a:pPr>
+                <a14:m>
+                  <m:oMathPara xmlns:m="http://schemas.openxmlformats.org/officeDocument/2006/math">
+                    <m:oMathParaPr>
+                      <m:jc m:val="center"/>
+                    </m:oMathParaPr>
+                    <m:oMath>
+                      <m:r>
+                        <m:t>P</m:t>
+                      </m:r>
+                      <m:d>
+                        <m:dPr>
+                          <m:begChr m:val="("/>
+                          <m:sepChr m:val=""/>
+                          <m:endChr m:val=")"/>
+                          <m:grow/>
+                        </m:dPr>
+                        <m:e>
+                          <m:r>
+                            <m:t>X</m:t>
+                          </m:r>
+                          <m:r>
+                            <m:rPr>
+                              <m:sty m:val="p"/>
+                            </m:rPr>
+                            <m:t>=</m:t>
+                          </m:r>
+                          <m:r>
+                            <m:t>0</m:t>
+                          </m:r>
+                        </m:e>
+                      </m:d>
+                      <m:r>
+                        <m:rPr>
+                          <m:sty m:val="p"/>
+                        </m:rPr>
+                        <m:t>=</m:t>
+                      </m:r>
+                      <m:r>
+                        <m:t>1</m:t>
+                      </m:r>
+                      <m:r>
+                        <m:rPr>
+                          <m:sty m:val="p"/>
+                        </m:rPr>
+                        <m:t>−</m:t>
+                      </m:r>
+                      <m:r>
+                        <m:t>p</m:t>
+                      </m:r>
+                      <m:r>
+                        <m:rPr>
+                          <m:sty m:val="p"/>
+                        </m:rPr>
+                        <m:t>.</m:t>
+                      </m:r>
+                    </m:oMath>
+                  </m:oMathPara>
+                </a14:m>
+              </a:p>
+              <a:p>
+                <a:pPr lvl="0"/>
+                <a:r>
+                  <a:rPr/>
+                  <a:t>The probability mass function (PMF) of </a:t>
+                </a:r>
+                <a14:m>
+                  <m:oMath xmlns:m="http://schemas.openxmlformats.org/officeDocument/2006/math">
+                    <m:r>
+                      <m:t>X</m:t>
+                    </m:r>
+                  </m:oMath>
+                </a14:m>
+                <a:r>
+                  <a:rPr/>
+                  <a:t> is</a:t>
+                </a:r>
+              </a:p>
+              <a:p>
+                <a:pPr lvl="0" indent="0" marL="0">
+                  <a:buNone/>
+                </a:pPr>
+                <a14:m>
+                  <m:oMathPara xmlns:m="http://schemas.openxmlformats.org/officeDocument/2006/math">
+                    <m:oMathParaPr>
+                      <m:jc m:val="center"/>
+                    </m:oMathParaPr>
+                    <m:oMath>
+                      <m:r>
+                        <m:t>p</m:t>
+                      </m:r>
+                      <m:d>
+                        <m:dPr>
+                          <m:begChr m:val="("/>
+                          <m:sepChr m:val=""/>
+                          <m:endChr m:val=")"/>
+                          <m:grow/>
+                        </m:dPr>
+                        <m:e>
+                          <m:r>
+                            <m:t>x</m:t>
+                          </m:r>
+                        </m:e>
+                      </m:d>
+                      <m:r>
+                        <m:rPr>
+                          <m:sty m:val="p"/>
+                        </m:rPr>
+                        <m:t>=</m:t>
+                      </m:r>
+                      <m:d>
+                        <m:dPr>
+                          <m:begChr m:val="{"/>
+                          <m:sepChr m:val=""/>
+                          <m:endChr m:val=""/>
+                          <m:grow/>
+                        </m:dPr>
+                        <m:e>
+                          <m:m>
+                            <m:mPr>
+                              <m:baseJc m:val="center"/>
+                              <m:plcHide m:val="on"/>
+                              <m:mcs>
+                                <m:mc>
+                                  <m:mcPr>
+                                    <m:mcJc m:val="left"/>
+                                    <m:count m:val="1"/>
+                                  </m:mcPr>
+                                </m:mc>
+                                <m:mc>
+                                  <m:mcPr>
+                                    <m:mcJc m:val="left"/>
+                                    <m:count m:val="1"/>
+                                  </m:mcPr>
+                                </m:mc>
+                              </m:mcs>
+                            </m:mPr>
+                            <m:mr>
+                              <m:e>
+                                <m:r>
+                                  <m:t>p</m:t>
+                                </m:r>
+                                <m:r>
+                                  <m:rPr>
+                                    <m:sty m:val="p"/>
+                                  </m:rPr>
+                                  <m:t>,</m:t>
+                                </m:r>
+                              </m:e>
+                              <m:e>
+                                <m:r>
+                                  <m:t>x</m:t>
+                                </m:r>
+                                <m:r>
+                                  <m:rPr>
+                                    <m:sty m:val="p"/>
+                                  </m:rPr>
+                                  <m:t>=</m:t>
+                                </m:r>
+                                <m:r>
+                                  <m:t>1</m:t>
+                                </m:r>
+                                <m:r>
+                                  <m:rPr>
+                                    <m:sty m:val="p"/>
+                                  </m:rPr>
+                                  <m:t>,</m:t>
+                                </m:r>
+                              </m:e>
+                            </m:mr>
+                            <m:mr>
+                              <m:e>
+                                <m:r>
+                                  <m:t>1</m:t>
+                                </m:r>
+                                <m:r>
+                                  <m:rPr>
+                                    <m:sty m:val="p"/>
+                                  </m:rPr>
+                                  <m:t>−</m:t>
+                                </m:r>
+                                <m:r>
+                                  <m:t>p</m:t>
+                                </m:r>
+                                <m:r>
+                                  <m:rPr>
+                                    <m:sty m:val="p"/>
+                                  </m:rPr>
+                                  <m:t>,</m:t>
+                                </m:r>
+                              </m:e>
+                              <m:e>
+                                <m:r>
+                                  <m:t>x</m:t>
+                                </m:r>
+                                <m:r>
+                                  <m:rPr>
+                                    <m:sty m:val="p"/>
+                                  </m:rPr>
+                                  <m:t>=</m:t>
+                                </m:r>
+                                <m:r>
+                                  <m:t>0</m:t>
+                                </m:r>
+                                <m:r>
+                                  <m:rPr>
+                                    <m:sty m:val="p"/>
+                                  </m:rPr>
+                                  <m:t>.</m:t>
+                                </m:r>
+                              </m:e>
+                            </m:mr>
+                          </m:m>
+                        </m:e>
+                      </m:d>
+                    </m:oMath>
+                  </m:oMathPara>
+                </a14:m>
+              </a:p>
+              <a:p>
+                <a:pPr lvl="0"/>
+                <a:r>
+                  <a:rPr/>
+                  <a:t>Equivalently,</a:t>
+                </a:r>
+              </a:p>
+              <a:p>
+                <a:pPr lvl="0" indent="0" marL="0">
+                  <a:buNone/>
+                </a:pPr>
+                <a14:m>
+                  <m:oMathPara xmlns:m="http://schemas.openxmlformats.org/officeDocument/2006/math">
+                    <m:oMathParaPr>
+                      <m:jc m:val="center"/>
+                    </m:oMathParaPr>
+                    <m:oMath>
+                      <m:r>
+                        <m:t>p</m:t>
+                      </m:r>
+                      <m:d>
+                        <m:dPr>
+                          <m:begChr m:val="("/>
+                          <m:sepChr m:val=""/>
+                          <m:endChr m:val=")"/>
+                          <m:grow/>
+                        </m:dPr>
+                        <m:e>
+                          <m:r>
+                            <m:t>x</m:t>
+                          </m:r>
+                        </m:e>
+                      </m:d>
+                      <m:r>
+                        <m:rPr>
+                          <m:sty m:val="p"/>
+                        </m:rPr>
+                        <m:t>=</m:t>
+                      </m:r>
+                      <m:sSup>
+                        <m:e>
+                          <m:r>
+                            <m:t>p</m:t>
+                          </m:r>
+                        </m:e>
+                        <m:sup>
+                          <m:r>
+                            <m:t>x</m:t>
+                          </m:r>
+                        </m:sup>
+                      </m:sSup>
+                      <m:sSup>
+                        <m:e>
+                          <m:d>
+                            <m:dPr>
+                              <m:begChr m:val="("/>
+                              <m:sepChr m:val=""/>
+                              <m:endChr m:val=")"/>
+                              <m:grow/>
+                            </m:dPr>
+                            <m:e>
+                              <m:r>
+                                <m:t>1</m:t>
+                              </m:r>
+                              <m:r>
+                                <m:rPr>
+                                  <m:sty m:val="p"/>
+                                </m:rPr>
+                                <m:t>−</m:t>
+                              </m:r>
+                              <m:r>
+                                <m:t>p</m:t>
+                              </m:r>
+                            </m:e>
+                          </m:d>
+                        </m:e>
+                        <m:sup>
+                          <m:r>
+                            <m:t>1</m:t>
+                          </m:r>
+                          <m:r>
+                            <m:rPr>
+                              <m:sty m:val="p"/>
+                            </m:rPr>
+                            <m:t>−</m:t>
+                          </m:r>
+                          <m:r>
+                            <m:t>x</m:t>
+                          </m:r>
+                        </m:sup>
+                      </m:sSup>
+                      <m:r>
+                        <m:rPr>
+                          <m:sty m:val="p"/>
+                        </m:rPr>
+                        <m:t>,</m:t>
+                      </m:r>
+                      <m:r>
+                        <m:t>  </m:t>
+                      </m:r>
+                      <m:r>
+                        <m:t>x</m:t>
+                      </m:r>
+                      <m:r>
+                        <m:rPr>
+                          <m:sty m:val="p"/>
+                        </m:rPr>
+                        <m:t>=</m:t>
+                      </m:r>
+                      <m:r>
+                        <m:t>0</m:t>
+                      </m:r>
+                      <m:r>
+                        <m:rPr>
+                          <m:sty m:val="p"/>
+                        </m:rPr>
+                        <m:t>,</m:t>
+                      </m:r>
+                      <m:r>
+                        <m:t>1</m:t>
+                      </m:r>
+                      <m:r>
+                        <m:rPr>
+                          <m:sty m:val="p"/>
+                        </m:rPr>
+                        <m:t>.</m:t>
+                      </m:r>
+                    </m:oMath>
+                  </m:oMathPara>
+                </a14:m>
+              </a:p>
+              <a:p>
+                <a:pPr lvl="0"/>
+                <a:r>
+                  <a:rPr/>
+                  <a:t>The parameter </a:t>
+                </a:r>
+                <a14:m>
+                  <m:oMath xmlns:m="http://schemas.openxmlformats.org/officeDocument/2006/math">
+                    <m:r>
+                      <m:t>p</m:t>
+                    </m:r>
+                  </m:oMath>
+                </a14:m>
+                <a:r>
+                  <a:rPr/>
+                  <a:t> can be any number between </a:t>
+                </a:r>
+                <a14:m>
+                  <m:oMath xmlns:m="http://schemas.openxmlformats.org/officeDocument/2006/math">
+                    <m:r>
+                      <m:t>0</m:t>
+                    </m:r>
+                  </m:oMath>
+                </a14:m>
+                <a:r>
+                  <a:rPr/>
+                  <a:t> and </a:t>
+                </a:r>
+                <a14:m>
+                  <m:oMath xmlns:m="http://schemas.openxmlformats.org/officeDocument/2006/math">
+                    <m:r>
+                      <m:t>1</m:t>
+                    </m:r>
+                  </m:oMath>
+                </a14:m>
+                <a:r>
+                  <a:rPr/>
+                  <a:t>.</a:t>
+                </a:r>
+              </a:p>
+              <a:p>
+                <a:pPr lvl="0"/>
+                <a:r>
+                  <a:rPr/>
+                  <a:t>The mean and variance are</a:t>
+                </a:r>
+              </a:p>
+              <a:p>
+                <a:pPr lvl="0" indent="0" marL="0">
+                  <a:buNone/>
+                </a:pPr>
+                <a14:m>
+                  <m:oMathPara xmlns:m="http://schemas.openxmlformats.org/officeDocument/2006/math">
+                    <m:oMathParaPr>
+                      <m:jc m:val="center"/>
+                    </m:oMathParaPr>
+                    <m:oMath>
+                      <m:r>
+                        <m:t>E</m:t>
+                      </m:r>
+                      <m:d>
+                        <m:dPr>
+                          <m:begChr m:val="("/>
+                          <m:sepChr m:val=""/>
+                          <m:endChr m:val=")"/>
+                          <m:grow/>
+                        </m:dPr>
+                        <m:e>
+                          <m:r>
+                            <m:t>X</m:t>
+                          </m:r>
+                        </m:e>
+                      </m:d>
+                      <m:r>
+                        <m:rPr>
+                          <m:sty m:val="p"/>
+                        </m:rPr>
+                        <m:t>=</m:t>
+                      </m:r>
+                      <m:r>
+                        <m:t>p</m:t>
+                      </m:r>
+                    </m:oMath>
+                  </m:oMathPara>
+                </a14:m>
+              </a:p>
+              <a:p>
+                <a:pPr lvl="0" indent="0" marL="0">
+                  <a:buNone/>
+                </a:pPr>
+                <a:r>
+                  <a:rPr/>
+                  <a:t>and</a:t>
+                </a:r>
+              </a:p>
+              <a:p>
+                <a:pPr lvl="0" indent="0" marL="0">
+                  <a:buNone/>
+                </a:pPr>
+                <a14:m>
+                  <m:oMathPara xmlns:m="http://schemas.openxmlformats.org/officeDocument/2006/math">
+                    <m:oMathParaPr>
+                      <m:jc m:val="center"/>
+                    </m:oMathParaPr>
+                    <m:oMath>
+                      <m:r>
+                        <m:t>V</m:t>
+                      </m:r>
+                      <m:d>
+                        <m:dPr>
+                          <m:begChr m:val="("/>
+                          <m:sepChr m:val=""/>
+                          <m:endChr m:val=")"/>
+                          <m:grow/>
+                        </m:dPr>
+                        <m:e>
+                          <m:r>
+                            <m:t>X</m:t>
+                          </m:r>
+                        </m:e>
+                      </m:d>
+                      <m:r>
+                        <m:rPr>
+                          <m:sty m:val="p"/>
+                        </m:rPr>
+                        <m:t>=</m:t>
+                      </m:r>
+                      <m:r>
+                        <m:t>p</m:t>
+                      </m:r>
+                      <m:d>
+                        <m:dPr>
+                          <m:begChr m:val="("/>
+                          <m:sepChr m:val=""/>
+                          <m:endChr m:val=")"/>
+                          <m:grow/>
+                        </m:dPr>
+                        <m:e>
+                          <m:r>
+                            <m:t>1</m:t>
+                          </m:r>
+                          <m:r>
+                            <m:rPr>
+                              <m:sty m:val="p"/>
+                            </m:rPr>
+                            <m:t>−</m:t>
+                          </m:r>
+                          <m:r>
+                            <m:t>p</m:t>
+                          </m:r>
+                        </m:e>
+                      </m:d>
+                      <m:r>
+                        <m:rPr>
+                          <m:sty m:val="p"/>
+                        </m:rPr>
+                        <m:t>.</m:t>
+                      </m:r>
+                    </m:oMath>
+                  </m:oMathPara>
+                </a14:m>
+              </a:p>
+              <a:p>
+                <a:pPr lvl="0" indent="0" marL="0">
+                  <a:spcBef>
+                    <a:spcPts val="3000"/>
+                  </a:spcBef>
+                  <a:buNone/>
+                </a:pPr>
+                <a:r>
+                  <a:rPr b="1"/>
+                  <a:t>Bernoulli Trials</a:t>
+                </a:r>
+              </a:p>
+              <a:p>
+                <a:pPr lvl="0"/>
+                <a:r>
+                  <a:rPr/>
+                  <a:t>A sequence of </a:t>
+                </a:r>
+                <a:r>
+                  <a:rPr b="1"/>
+                  <a:t>independent Bernoulli experiments</a:t>
+                </a:r>
+                <a:r>
+                  <a:rPr/>
+                  <a:t> with the same probability of success </a:t>
+                </a:r>
+                <a14:m>
+                  <m:oMath xmlns:m="http://schemas.openxmlformats.org/officeDocument/2006/math">
+                    <m:r>
+                      <m:t>p</m:t>
+                    </m:r>
+                  </m:oMath>
+                </a14:m>
+                <a:r>
+                  <a:rPr/>
+                  <a:t> is called a sequence of </a:t>
+                </a:r>
+                <a:r>
+                  <a:rPr b="1"/>
+                  <a:t>Bernoulli trials</a:t>
+                </a:r>
+                <a:r>
+                  <a:rPr/>
+                  <a:t>.</a:t>
+                </a:r>
+              </a:p>
+              <a:p>
+                <a:pPr lvl="0"/>
+                <a:r>
+                  <a:rPr b="1"/>
+                  <a:t>Examples:</a:t>
+                </a:r>
+              </a:p>
+              <a:p>
+                <a:pPr lvl="1"/>
+                <a:r>
+                  <a:rPr/>
+                  <a:t>Tossing a coin 10 times.</a:t>
+                </a:r>
+              </a:p>
+              <a:p>
+                <a:pPr lvl="1"/>
+                <a:r>
+                  <a:rPr/>
+                  <a:t>Rolling a die 8 times and recording each time whether we get a six.</a:t>
+                </a:r>
+              </a:p>
+              <a:p>
+                <a:pPr lvl="1"/>
+                <a:r>
+                  <a:rPr/>
+                  <a:t>Inspecting 50 manufactured items for defects.</a:t>
+                </a:r>
+              </a:p>
+              <a:p>
+                <a:pPr lvl="0"/>
+                <a:r>
+                  <a:rPr/>
+                  <a:t>With Bernoulli trials, we are usually interested in the </a:t>
+                </a:r>
+                <a:r>
+                  <a:rPr b="1"/>
+                  <a:t>total number of successes</a:t>
+                </a:r>
+                <a:r>
+                  <a:rPr/>
+                  <a:t>.</a:t>
+                </a:r>
+              </a:p>
+              <a:p>
+                <a:pPr lvl="0"/>
+                <a:r>
+                  <a:rPr/>
+                  <a:t>For example:</a:t>
+                </a:r>
+              </a:p>
+              <a:p>
+                <a:pPr lvl="1"/>
+                <a:r>
+                  <a:rPr/>
+                  <a:t>Out of 10 tosses, how many heads did we get?</a:t>
+                </a:r>
+              </a:p>
+              <a:p>
+                <a:pPr lvl="1"/>
+                <a:r>
+                  <a:rPr/>
+                  <a:t>How many sixes did we get in 8 rolls of a die?</a:t>
+                </a:r>
+              </a:p>
+              <a:p>
+                <a:pPr lvl="1"/>
+                <a:r>
+                  <a:rPr/>
+                  <a:t>Out of 50 manufactured items, how many are defective?</a:t>
+                </a:r>
+              </a:p>
+              <a:p>
+                <a:pPr lvl="0" indent="0" marL="0">
+                  <a:spcBef>
+                    <a:spcPts val="3000"/>
+                  </a:spcBef>
+                  <a:buNone/>
+                </a:pPr>
+                <a:r>
+                  <a:rPr b="1"/>
+                  <a:t>Bernoulli Trials: Example</a:t>
+                </a:r>
+              </a:p>
+              <a:p>
+                <a:pPr lvl="0"/>
+                <a:r>
+                  <a:rPr/>
+                  <a:t>Suppose </a:t>
+                </a:r>
+                <a14:m>
+                  <m:oMath xmlns:m="http://schemas.openxmlformats.org/officeDocument/2006/math">
+                    <m:r>
+                      <m:t>n</m:t>
+                    </m:r>
+                    <m:r>
+                      <m:rPr>
+                        <m:sty m:val="p"/>
+                      </m:rPr>
+                      <m:t>=</m:t>
+                    </m:r>
+                    <m:r>
+                      <m:t>5</m:t>
+                    </m:r>
+                  </m:oMath>
+                </a14:m>
+                <a:r>
+                  <a:rPr/>
+                  <a:t> items are manufactured </a:t>
+                </a:r>
+                <a:r>
+                  <a:rPr b="1"/>
+                  <a:t>independently</a:t>
+                </a:r>
+                <a:r>
+                  <a:rPr/>
+                  <a:t> of each other.</a:t>
+                </a:r>
+              </a:p>
+              <a:p>
+                <a:pPr lvl="0"/>
+                <a:r>
+                  <a:rPr/>
+                  <a:t>Define:</a:t>
+                </a:r>
+              </a:p>
+              <a:p>
+                <a:pPr lvl="1"/>
+                <a14:m>
+                  <m:oMath xmlns:m="http://schemas.openxmlformats.org/officeDocument/2006/math">
+                    <m:r>
+                      <m:t>B</m:t>
+                    </m:r>
+                    <m:r>
+                      <m:rPr>
+                        <m:sty m:val="p"/>
+                      </m:rPr>
+                      <m:t>=</m:t>
+                    </m:r>
+                  </m:oMath>
+                </a14:m>
+                <a:r>
+                  <a:rPr/>
+                  <a:t> success (defect)</a:t>
+                </a:r>
+              </a:p>
+              <a:p>
+                <a:pPr lvl="1"/>
+                <a14:m>
+                  <m:oMath xmlns:m="http://schemas.openxmlformats.org/officeDocument/2006/math">
+                    <m:r>
+                      <m:t>A</m:t>
+                    </m:r>
+                    <m:r>
+                      <m:rPr>
+                        <m:sty m:val="p"/>
+                      </m:rPr>
+                      <m:t>=</m:t>
+                    </m:r>
+                  </m:oMath>
+                </a14:m>
+                <a:r>
+                  <a:rPr/>
+                  <a:t> failure (no defect)</a:t>
+                </a:r>
+              </a:p>
+              <a:p>
+                <a:pPr lvl="0"/>
+                <a:r>
+                  <a:rPr/>
+                  <a:t>Suppose the probability of a defect is</a:t>
+                </a:r>
+              </a:p>
+              <a:p>
+                <a:pPr lvl="0" indent="0" marL="0">
+                  <a:buNone/>
+                </a:pPr>
+                <a14:m>
+                  <m:oMathPara xmlns:m="http://schemas.openxmlformats.org/officeDocument/2006/math">
+                    <m:oMathParaPr>
+                      <m:jc m:val="center"/>
+                    </m:oMathParaPr>
+                    <m:oMath>
+                      <m:r>
+                        <m:t>p</m:t>
+                      </m:r>
+                      <m:r>
+                        <m:rPr>
+                          <m:sty m:val="p"/>
+                        </m:rPr>
+                        <m:t>=</m:t>
+                      </m:r>
+                      <m:r>
+                        <m:t>0.05</m:t>
+                      </m:r>
+                      <m:r>
+                        <m:rPr>
+                          <m:sty m:val="p"/>
+                        </m:rPr>
+                        <m:t>.</m:t>
+                      </m:r>
+                    </m:oMath>
+                  </m:oMathPara>
+                </a14:m>
+              </a:p>
+              <a:p>
+                <a:pPr lvl="0"/>
+                <a:r>
+                  <a:rPr/>
+                  <a:t>Let</a:t>
+                </a:r>
+              </a:p>
+              <a:p>
+                <a:pPr lvl="0" indent="0" marL="0">
+                  <a:buNone/>
+                </a:pPr>
+                <a14:m>
+                  <m:oMathPara xmlns:m="http://schemas.openxmlformats.org/officeDocument/2006/math">
+                    <m:oMathParaPr>
+                      <m:jc m:val="center"/>
+                    </m:oMathParaPr>
+                    <m:oMath>
+                      <m:sSub>
+                        <m:e>
+                          <m:r>
+                            <m:t>X</m:t>
+                          </m:r>
+                        </m:e>
+                        <m:sub>
+                          <m:r>
+                            <m:t>i</m:t>
+                          </m:r>
+                        </m:sub>
+                      </m:sSub>
+                      <m:r>
+                        <m:rPr>
+                          <m:sty m:val="p"/>
+                        </m:rPr>
+                        <m:t>=</m:t>
+                      </m:r>
+                      <m:d>
+                        <m:dPr>
+                          <m:begChr m:val="{"/>
+                          <m:sepChr m:val=""/>
+                          <m:endChr m:val=""/>
+                          <m:grow/>
+                        </m:dPr>
+                        <m:e>
+                          <m:m>
+                            <m:mPr>
+                              <m:baseJc m:val="center"/>
+                              <m:plcHide m:val="on"/>
+                              <m:mcs>
+                                <m:mc>
+                                  <m:mcPr>
+                                    <m:mcJc m:val="left"/>
+                                    <m:count m:val="1"/>
+                                  </m:mcPr>
+                                </m:mc>
+                                <m:mc>
+                                  <m:mcPr>
+                                    <m:mcJc m:val="left"/>
+                                    <m:count m:val="1"/>
+                                  </m:mcPr>
+                                </m:mc>
+                              </m:mcs>
+                            </m:mPr>
+                            <m:mr>
+                              <m:e>
+                                <m:r>
+                                  <m:t>1</m:t>
+                                </m:r>
+                                <m:r>
+                                  <m:rPr>
+                                    <m:sty m:val="p"/>
+                                  </m:rPr>
+                                  <m:t>,</m:t>
+                                </m:r>
+                              </m:e>
+                              <m:e>
+                                <m:r>
+                                  <m:rPr>
+                                    <m:nor/>
+                                    <m:sty m:val="p"/>
+                                  </m:rPr>
+                                  <m:t>if the </m:t>
+                                </m:r>
+                                <m:r>
+                                  <m:t>i</m:t>
+                                </m:r>
+                                <m:r>
+                                  <m:rPr>
+                                    <m:nor/>
+                                    <m:sty m:val="p"/>
+                                  </m:rPr>
+                                  <m:t>th item is defective</m:t>
+                                </m:r>
+                                <m:r>
+                                  <m:rPr>
+                                    <m:sty m:val="p"/>
+                                  </m:rPr>
+                                  <m:t>,</m:t>
+                                </m:r>
+                              </m:e>
+                            </m:mr>
+                            <m:mr>
+                              <m:e>
+                                <m:r>
+                                  <m:t>0</m:t>
+                                </m:r>
+                                <m:r>
+                                  <m:rPr>
+                                    <m:sty m:val="p"/>
+                                  </m:rPr>
+                                  <m:t>,</m:t>
+                                </m:r>
+                              </m:e>
+                              <m:e>
+                                <m:r>
+                                  <m:rPr>
+                                    <m:nor/>
+                                    <m:sty m:val="p"/>
+                                  </m:rPr>
+                                  <m:t>otherwise</m:t>
+                                </m:r>
+                                <m:r>
+                                  <m:rPr>
+                                    <m:sty m:val="p"/>
+                                  </m:rPr>
+                                  <m:t>.</m:t>
+                                </m:r>
+                              </m:e>
+                            </m:mr>
+                          </m:m>
+                        </m:e>
+                      </m:d>
+                    </m:oMath>
+                  </m:oMathPara>
+                </a14:m>
+              </a:p>
+              <a:p>
+                <a:pPr lvl="0"/>
+                <a:r>
+                  <a:rPr/>
+                  <a:t>Let</a:t>
+                </a:r>
+              </a:p>
+              <a:p>
+                <a:pPr lvl="0" indent="0" marL="0">
+                  <a:buNone/>
+                </a:pPr>
+                <a14:m>
+                  <m:oMathPara xmlns:m="http://schemas.openxmlformats.org/officeDocument/2006/math">
+                    <m:oMathParaPr>
+                      <m:jc m:val="center"/>
+                    </m:oMathParaPr>
+                    <m:oMath>
+                      <m:r>
+                        <m:t>Y</m:t>
+                      </m:r>
+                      <m:r>
+                        <m:rPr>
+                          <m:sty m:val="p"/>
+                        </m:rPr>
+                        <m:t>=</m:t>
+                      </m:r>
+                      <m:r>
+                        <m:rPr>
+                          <m:nor/>
+                          <m:sty m:val="p"/>
+                        </m:rPr>
+                        <m:t>total number of defects</m:t>
+                      </m:r>
+                      <m:r>
+                        <m:rPr>
+                          <m:sty m:val="p"/>
+                        </m:rPr>
+                        <m:t>.</m:t>
+                      </m:r>
+                    </m:oMath>
+                  </m:oMathPara>
+                </a14:m>
+              </a:p>
+              <a:p>
+                <a:pPr lvl="0"/>
+                <a:r>
+                  <a:rPr/>
+                  <a:t>Therefore,</a:t>
+                </a:r>
+              </a:p>
+              <a:p>
+                <a:pPr lvl="0" indent="0" marL="0">
+                  <a:buNone/>
+                </a:pPr>
+                <a14:m>
+                  <m:oMathPara xmlns:m="http://schemas.openxmlformats.org/officeDocument/2006/math">
+                    <m:oMathParaPr>
+                      <m:jc m:val="center"/>
+                    </m:oMathParaPr>
+                    <m:oMath>
+                      <m:r>
+                        <m:t>Y</m:t>
+                      </m:r>
+                      <m:r>
+                        <m:rPr>
+                          <m:sty m:val="p"/>
+                        </m:rPr>
+                        <m:t>=</m:t>
+                      </m:r>
+                      <m:sSub>
+                        <m:e>
+                          <m:r>
+                            <m:t>X</m:t>
+                          </m:r>
+                        </m:e>
+                        <m:sub>
+                          <m:r>
+                            <m:t>1</m:t>
+                          </m:r>
+                        </m:sub>
+                      </m:sSub>
+                      <m:r>
+                        <m:rPr>
+                          <m:sty m:val="p"/>
+                        </m:rPr>
+                        <m:t>+</m:t>
+                      </m:r>
+                      <m:sSub>
+                        <m:e>
+                          <m:r>
+                            <m:t>X</m:t>
+                          </m:r>
+                        </m:e>
+                        <m:sub>
+                          <m:r>
+                            <m:t>2</m:t>
+                          </m:r>
+                        </m:sub>
+                      </m:sSub>
+                      <m:r>
+                        <m:rPr>
+                          <m:sty m:val="p"/>
+                        </m:rPr>
+                        <m:t>+</m:t>
+                      </m:r>
+                      <m:sSub>
+                        <m:e>
+                          <m:r>
+                            <m:t>X</m:t>
+                          </m:r>
+                        </m:e>
+                        <m:sub>
+                          <m:r>
+                            <m:t>3</m:t>
+                          </m:r>
+                        </m:sub>
+                      </m:sSub>
+                      <m:r>
+                        <m:rPr>
+                          <m:sty m:val="p"/>
+                        </m:rPr>
+                        <m:t>+</m:t>
+                      </m:r>
+                      <m:sSub>
+                        <m:e>
+                          <m:r>
+                            <m:t>X</m:t>
+                          </m:r>
+                        </m:e>
+                        <m:sub>
+                          <m:r>
+                            <m:t>4</m:t>
+                          </m:r>
+                        </m:sub>
+                      </m:sSub>
+                      <m:r>
+                        <m:rPr>
+                          <m:sty m:val="p"/>
+                        </m:rPr>
+                        <m:t>+</m:t>
+                      </m:r>
+                      <m:sSub>
+                        <m:e>
+                          <m:r>
+                            <m:t>X</m:t>
+                          </m:r>
+                        </m:e>
+                        <m:sub>
+                          <m:r>
+                            <m:t>5</m:t>
+                          </m:r>
+                        </m:sub>
+                      </m:sSub>
+                      <m:r>
+                        <m:rPr>
+                          <m:sty m:val="p"/>
+                        </m:rPr>
+                        <m:t>.</m:t>
+                      </m:r>
+                    </m:oMath>
+                  </m:oMathPara>
+                </a14:m>
+              </a:p>
+              <a:p>
+                <a:pPr lvl="0"/>
+                <a:r>
+                  <a:rPr/>
+                  <a:t>The possible values of </a:t>
+                </a:r>
+                <a14:m>
+                  <m:oMath xmlns:m="http://schemas.openxmlformats.org/officeDocument/2006/math">
+                    <m:r>
+                      <m:t>Y</m:t>
+                    </m:r>
+                  </m:oMath>
+                </a14:m>
+                <a:r>
+                  <a:rPr/>
+                  <a:t> are</a:t>
+                </a:r>
+              </a:p>
+              <a:p>
+                <a:pPr lvl="0" indent="0" marL="0">
+                  <a:buNone/>
+                </a:pPr>
+                <a14:m>
+                  <m:oMathPara xmlns:m="http://schemas.openxmlformats.org/officeDocument/2006/math">
+                    <m:oMathParaPr>
+                      <m:jc m:val="center"/>
+                    </m:oMathParaPr>
+                    <m:oMath>
+                      <m:r>
+                        <m:t>Y</m:t>
+                      </m:r>
+                      <m:r>
+                        <m:rPr>
+                          <m:sty m:val="p"/>
+                        </m:rPr>
+                        <m:t>=</m:t>
+                      </m:r>
+                      <m:r>
+                        <m:rPr>
+                          <m:sty m:val="p"/>
+                        </m:rPr>
+                        <m:t>{</m:t>
+                      </m:r>
+                      <m:r>
+                        <m:t>0</m:t>
+                      </m:r>
+                      <m:r>
+                        <m:rPr>
+                          <m:sty m:val="p"/>
+                        </m:rPr>
+                        <m:t>,</m:t>
+                      </m:r>
+                      <m:r>
+                        <m:t>1</m:t>
+                      </m:r>
+                      <m:r>
+                        <m:rPr>
+                          <m:sty m:val="p"/>
+                        </m:rPr>
+                        <m:t>,</m:t>
+                      </m:r>
+                      <m:r>
+                        <m:t>2</m:t>
+                      </m:r>
+                      <m:r>
+                        <m:rPr>
+                          <m:sty m:val="p"/>
+                        </m:rPr>
+                        <m:t>,</m:t>
+                      </m:r>
+                      <m:r>
+                        <m:t>3</m:t>
+                      </m:r>
+                      <m:r>
+                        <m:rPr>
+                          <m:sty m:val="p"/>
+                        </m:rPr>
+                        <m:t>,</m:t>
+                      </m:r>
+                      <m:r>
+                        <m:t>4</m:t>
+                      </m:r>
+                      <m:r>
+                        <m:rPr>
+                          <m:sty m:val="p"/>
+                        </m:rPr>
+                        <m:t>,</m:t>
+                      </m:r>
+                      <m:r>
+                        <m:t>5</m:t>
+                      </m:r>
+                      <m:r>
+                        <m:rPr>
+                          <m:sty m:val="p"/>
+                        </m:rPr>
+                        <m:t>}</m:t>
+                      </m:r>
+                      <m:r>
+                        <m:rPr>
+                          <m:sty m:val="p"/>
+                        </m:rPr>
+                        <m:t>.</m:t>
+                      </m:r>
+                    </m:oMath>
+                  </m:oMathPara>
+                </a14:m>
+              </a:p>
+              <a:p>
+                <a:pPr lvl="0" indent="0" marL="0">
+                  <a:spcBef>
+                    <a:spcPts val="3000"/>
+                  </a:spcBef>
+                  <a:buNone/>
+                </a:pPr>
+                <a:r>
+                  <a:rPr b="1"/>
+                  <a:t>Bernoulli Trials: Possible Outcomes</a:t>
+                </a:r>
+              </a:p>
+              <a:p>
+                <a:pPr lvl="0"/>
+                <a:r>
+                  <a:rPr/>
+                  <a:t>The table below shows all possible outcomes of the five Bernoulli trials and the corresponding value of </a:t>
+                </a:r>
+                <a14:m>
+                  <m:oMath xmlns:m="http://schemas.openxmlformats.org/officeDocument/2006/math">
+                    <m:r>
+                      <m:t>Y</m:t>
+                    </m:r>
+                  </m:oMath>
+                </a14:m>
+                <a:r>
+                  <a:rPr/>
+                  <a:t>.</a:t>
+                </a:r>
+              </a:p>
+              <a:p>
+                <a:pPr lvl="0" indent="0" marL="0">
+                  <a:spcBef>
+                    <a:spcPts val="3000"/>
+                  </a:spcBef>
+                  <a:buNone/>
+                </a:pPr>
+                <a:r>
+                  <a:rPr b="1"/>
+                  <a:t>Bernoulli Trials: Probability of an Outcome</a:t>
+                </a:r>
+              </a:p>
+              <a:p>
+                <a:pPr lvl="0"/>
+                <a:r>
+                  <a:rPr/>
+                  <a:t>The Bernoulli random variables </a:t>
+                </a:r>
+                <a14:m>
+                  <m:oMath xmlns:m="http://schemas.openxmlformats.org/officeDocument/2006/math">
+                    <m:sSub>
+                      <m:e>
+                        <m:r>
+                          <m:t>X</m:t>
+                        </m:r>
+                      </m:e>
+                      <m:sub>
+                        <m:r>
+                          <m:t>i</m:t>
+                        </m:r>
+                      </m:sub>
+                    </m:sSub>
+                  </m:oMath>
+                </a14:m>
+                <a:r>
+                  <a:rPr/>
+                  <a:t> are </a:t>
+                </a:r>
+                <a:r>
+                  <a:rPr b="1"/>
+                  <a:t>independent</a:t>
+                </a:r>
+                <a:r>
+                  <a:rPr/>
+                  <a:t>.</a:t>
+                </a:r>
+              </a:p>
+              <a:p>
+                <a:pPr lvl="0"/>
+                <a:r>
+                  <a:rPr/>
+                  <a:t>Therefore, using basic probability rules we get,</a:t>
+                </a:r>
+              </a:p>
+              <a:p>
+                <a:pPr lvl="0" indent="0" marL="0">
+                  <a:buNone/>
+                </a:pPr>
+                <a14:m>
+                  <m:oMathPara xmlns:m="http://schemas.openxmlformats.org/officeDocument/2006/math">
+                    <m:oMathParaPr>
+                      <m:jc m:val="center"/>
+                    </m:oMathParaPr>
+                    <m:oMath>
+                      <m:r>
+                        <m:t>P</m:t>
+                      </m:r>
+                      <m:d>
+                        <m:dPr>
+                          <m:begChr m:val="("/>
+                          <m:sepChr m:val=""/>
+                          <m:endChr m:val=")"/>
+                          <m:grow/>
+                        </m:dPr>
+                        <m:e>
+                          <m:r>
+                            <m:t>A</m:t>
+                          </m:r>
+                          <m:r>
+                            <m:t>A</m:t>
+                          </m:r>
+                          <m:r>
+                            <m:t>B</m:t>
+                          </m:r>
+                          <m:r>
+                            <m:t>A</m:t>
+                          </m:r>
+                          <m:r>
+                            <m:t>B</m:t>
+                          </m:r>
+                        </m:e>
+                      </m:d>
+                      <m:r>
+                        <m:rPr>
+                          <m:sty m:val="p"/>
+                        </m:rPr>
+                        <m:t>=</m:t>
+                      </m:r>
+                      <m:r>
+                        <m:t>P</m:t>
+                      </m:r>
+                      <m:d>
+                        <m:dPr>
+                          <m:begChr m:val="("/>
+                          <m:sepChr m:val=""/>
+                          <m:endChr m:val=")"/>
+                          <m:grow/>
+                        </m:dPr>
+                        <m:e>
+                          <m:sSub>
+                            <m:e>
+                              <m:r>
+                                <m:t>X</m:t>
+                              </m:r>
+                            </m:e>
+                            <m:sub>
+                              <m:r>
+                                <m:t>1</m:t>
+                              </m:r>
+                            </m:sub>
+                          </m:sSub>
+                          <m:r>
+                            <m:rPr>
+                              <m:sty m:val="p"/>
+                            </m:rPr>
+                            <m:t>=</m:t>
+                          </m:r>
+                          <m:r>
+                            <m:t>0</m:t>
+                          </m:r>
+                          <m:r>
+                            <m:rPr>
+                              <m:nor/>
+                              <m:sty m:val="p"/>
+                            </m:rPr>
+                            <m:t> and </m:t>
+                          </m:r>
+                          <m:sSub>
+                            <m:e>
+                              <m:r>
+                                <m:t>X</m:t>
+                              </m:r>
+                            </m:e>
+                            <m:sub>
+                              <m:r>
+                                <m:t>2</m:t>
+                              </m:r>
+                            </m:sub>
+                          </m:sSub>
+                          <m:r>
+                            <m:rPr>
+                              <m:sty m:val="p"/>
+                            </m:rPr>
+                            <m:t>=</m:t>
+                          </m:r>
+                          <m:r>
+                            <m:t>0</m:t>
+                          </m:r>
+                          <m:r>
+                            <m:rPr>
+                              <m:nor/>
+                              <m:sty m:val="p"/>
+                            </m:rPr>
+                            <m:t> and </m:t>
+                          </m:r>
+                          <m:sSub>
+                            <m:e>
+                              <m:r>
+                                <m:t>X</m:t>
+                              </m:r>
+                            </m:e>
+                            <m:sub>
+                              <m:r>
+                                <m:t>3</m:t>
+                              </m:r>
+                            </m:sub>
+                          </m:sSub>
+                          <m:r>
+                            <m:rPr>
+                              <m:sty m:val="p"/>
+                            </m:rPr>
+                            <m:t>=</m:t>
+                          </m:r>
+                          <m:r>
+                            <m:t>1</m:t>
+                          </m:r>
+                          <m:r>
+                            <m:rPr>
+                              <m:nor/>
+                              <m:sty m:val="p"/>
+                            </m:rPr>
+                            <m:t> and </m:t>
+                          </m:r>
+                          <m:sSub>
+                            <m:e>
+                              <m:r>
+                                <m:t>X</m:t>
+                              </m:r>
+                            </m:e>
+                            <m:sub>
+                              <m:r>
+                                <m:t>4</m:t>
+                              </m:r>
+                            </m:sub>
+                          </m:sSub>
+                          <m:r>
+                            <m:rPr>
+                              <m:sty m:val="p"/>
+                            </m:rPr>
+                            <m:t>=</m:t>
+                          </m:r>
+                          <m:r>
+                            <m:t>0</m:t>
+                          </m:r>
+                          <m:r>
+                            <m:rPr>
+                              <m:nor/>
+                              <m:sty m:val="p"/>
+                            </m:rPr>
+                            <m:t> and </m:t>
+                          </m:r>
+                          <m:sSub>
+                            <m:e>
+                              <m:r>
+                                <m:t>X</m:t>
+                              </m:r>
+                            </m:e>
+                            <m:sub>
+                              <m:r>
+                                <m:t>5</m:t>
+                              </m:r>
+                            </m:sub>
+                          </m:sSub>
+                          <m:r>
+                            <m:rPr>
+                              <m:sty m:val="p"/>
+                            </m:rPr>
+                            <m:t>=</m:t>
+                          </m:r>
+                          <m:r>
+                            <m:t>1</m:t>
+                          </m:r>
+                        </m:e>
+                      </m:d>
+                    </m:oMath>
+                  </m:oMathPara>
+                </a14:m>
+              </a:p>
+              <a:p>
+                <a:pPr lvl="0" indent="0" marL="0">
+                  <a:buNone/>
+                </a:pPr>
+                <a14:m>
+                  <m:oMathPara xmlns:m="http://schemas.openxmlformats.org/officeDocument/2006/math">
+                    <m:oMathParaPr>
+                      <m:jc m:val="center"/>
+                    </m:oMathParaPr>
+                    <m:oMath>
+                      <m:r>
+                        <m:rPr>
+                          <m:sty m:val="p"/>
+                        </m:rPr>
+                        <m:t>=</m:t>
+                      </m:r>
+                      <m:r>
+                        <m:t>P</m:t>
+                      </m:r>
+                      <m:d>
+                        <m:dPr>
+                          <m:begChr m:val="("/>
+                          <m:sepChr m:val=""/>
+                          <m:endChr m:val=")"/>
+                          <m:grow/>
+                        </m:dPr>
+                        <m:e>
+                          <m:sSub>
+                            <m:e>
+                              <m:r>
+                                <m:t>X</m:t>
+                              </m:r>
+                            </m:e>
+                            <m:sub>
+                              <m:r>
+                                <m:t>1</m:t>
+                              </m:r>
+                            </m:sub>
+                          </m:sSub>
+                          <m:r>
+                            <m:rPr>
+                              <m:sty m:val="p"/>
+                            </m:rPr>
+                            <m:t>=</m:t>
+                          </m:r>
+                          <m:r>
+                            <m:t>0</m:t>
+                          </m:r>
+                        </m:e>
+                      </m:d>
+                      <m:r>
+                        <m:t>P</m:t>
+                      </m:r>
+                      <m:d>
+                        <m:dPr>
+                          <m:begChr m:val="("/>
+                          <m:sepChr m:val=""/>
+                          <m:endChr m:val=")"/>
+                          <m:grow/>
+                        </m:dPr>
+                        <m:e>
+                          <m:sSub>
+                            <m:e>
+                              <m:r>
+                                <m:t>X</m:t>
+                              </m:r>
+                            </m:e>
+                            <m:sub>
+                              <m:r>
+                                <m:t>2</m:t>
+                              </m:r>
+                            </m:sub>
+                          </m:sSub>
+                          <m:r>
+                            <m:rPr>
+                              <m:sty m:val="p"/>
+                            </m:rPr>
+                            <m:t>=</m:t>
+                          </m:r>
+                          <m:r>
+                            <m:t>0</m:t>
+                          </m:r>
+                        </m:e>
+                      </m:d>
+                      <m:r>
+                        <m:t>P</m:t>
+                      </m:r>
+                      <m:d>
+                        <m:dPr>
+                          <m:begChr m:val="("/>
+                          <m:sepChr m:val=""/>
+                          <m:endChr m:val=")"/>
+                          <m:grow/>
+                        </m:dPr>
+                        <m:e>
+                          <m:sSub>
+                            <m:e>
+                              <m:r>
+                                <m:t>X</m:t>
+                              </m:r>
+                            </m:e>
+                            <m:sub>
+                              <m:r>
+                                <m:t>3</m:t>
+                              </m:r>
+                            </m:sub>
+                          </m:sSub>
+                          <m:r>
+                            <m:rPr>
+                              <m:sty m:val="p"/>
+                            </m:rPr>
+                            <m:t>=</m:t>
+                          </m:r>
+                          <m:r>
+                            <m:t>1</m:t>
+                          </m:r>
+                        </m:e>
+                      </m:d>
+                      <m:r>
+                        <m:t>P</m:t>
+                      </m:r>
+                      <m:d>
+                        <m:dPr>
+                          <m:begChr m:val="("/>
+                          <m:sepChr m:val=""/>
+                          <m:endChr m:val=")"/>
+                          <m:grow/>
+                        </m:dPr>
+                        <m:e>
+                          <m:sSub>
+                            <m:e>
+                              <m:r>
+                                <m:t>X</m:t>
+                              </m:r>
+                            </m:e>
+                            <m:sub>
+                              <m:r>
+                                <m:t>4</m:t>
+                              </m:r>
+                            </m:sub>
+                          </m:sSub>
+                          <m:r>
+                            <m:rPr>
+                              <m:sty m:val="p"/>
+                            </m:rPr>
+                            <m:t>=</m:t>
+                          </m:r>
+                          <m:r>
+                            <m:t>0</m:t>
+                          </m:r>
+                        </m:e>
+                      </m:d>
+                      <m:r>
+                        <m:t>P</m:t>
+                      </m:r>
+                      <m:d>
+                        <m:dPr>
+                          <m:begChr m:val="("/>
+                          <m:sepChr m:val=""/>
+                          <m:endChr m:val=")"/>
+                          <m:grow/>
+                        </m:dPr>
+                        <m:e>
+                          <m:sSub>
+                            <m:e>
+                              <m:r>
+                                <m:t>X</m:t>
+                              </m:r>
+                            </m:e>
+                            <m:sub>
+                              <m:r>
+                                <m:t>5</m:t>
+                              </m:r>
+                            </m:sub>
+                          </m:sSub>
+                          <m:r>
+                            <m:rPr>
+                              <m:sty m:val="p"/>
+                            </m:rPr>
+                            <m:t>=</m:t>
+                          </m:r>
+                          <m:r>
+                            <m:t>1</m:t>
+                          </m:r>
+                        </m:e>
+                      </m:d>
+                    </m:oMath>
+                  </m:oMathPara>
+                </a14:m>
+              </a:p>
+              <a:p>
+                <a:pPr lvl="0" indent="0" marL="0">
+                  <a:buNone/>
+                </a:pPr>
+                <a14:m>
+                  <m:oMathPara xmlns:m="http://schemas.openxmlformats.org/officeDocument/2006/math">
+                    <m:oMathParaPr>
+                      <m:jc m:val="center"/>
+                    </m:oMathParaPr>
+                    <m:oMath>
+                      <m:r>
+                        <m:rPr>
+                          <m:sty m:val="p"/>
+                        </m:rPr>
+                        <m:t>=</m:t>
+                      </m:r>
+                      <m:d>
+                        <m:dPr>
+                          <m:begChr m:val="("/>
+                          <m:sepChr m:val=""/>
+                          <m:endChr m:val=")"/>
+                          <m:grow/>
+                        </m:dPr>
+                        <m:e>
+                          <m:r>
+                            <m:t>0.95</m:t>
+                          </m:r>
+                        </m:e>
+                      </m:d>
+                      <m:d>
+                        <m:dPr>
+                          <m:begChr m:val="("/>
+                          <m:sepChr m:val=""/>
+                          <m:endChr m:val=")"/>
+                          <m:grow/>
+                        </m:dPr>
+                        <m:e>
+                          <m:r>
+                            <m:t>0.95</m:t>
+                          </m:r>
+                        </m:e>
+                      </m:d>
+                      <m:d>
+                        <m:dPr>
+                          <m:begChr m:val="("/>
+                          <m:sepChr m:val=""/>
+                          <m:endChr m:val=")"/>
+                          <m:grow/>
+                        </m:dPr>
+                        <m:e>
+                          <m:r>
+                            <m:t>0.05</m:t>
+                          </m:r>
+                        </m:e>
+                      </m:d>
+                      <m:d>
+                        <m:dPr>
+                          <m:begChr m:val="("/>
+                          <m:sepChr m:val=""/>
+                          <m:endChr m:val=")"/>
+                          <m:grow/>
+                        </m:dPr>
+                        <m:e>
+                          <m:r>
+                            <m:t>0.95</m:t>
+                          </m:r>
+                        </m:e>
+                      </m:d>
+                      <m:d>
+                        <m:dPr>
+                          <m:begChr m:val="("/>
+                          <m:sepChr m:val=""/>
+                          <m:endChr m:val=")"/>
+                          <m:grow/>
+                        </m:dPr>
+                        <m:e>
+                          <m:r>
+                            <m:t>0.05</m:t>
+                          </m:r>
+                        </m:e>
+                      </m:d>
+                    </m:oMath>
+                  </m:oMathPara>
+                </a14:m>
+              </a:p>
+              <a:p>
+                <a:pPr lvl="0" indent="0" marL="0">
+                  <a:buNone/>
+                </a:pPr>
+                <a14:m>
+                  <m:oMathPara xmlns:m="http://schemas.openxmlformats.org/officeDocument/2006/math">
+                    <m:oMathParaPr>
+                      <m:jc m:val="center"/>
+                    </m:oMathParaPr>
+                    <m:oMath>
+                      <m:r>
+                        <m:rPr>
+                          <m:sty m:val="p"/>
+                        </m:rPr>
+                        <m:t>=</m:t>
+                      </m:r>
+                      <m:sSup>
+                        <m:e>
+                          <m:r>
+                            <m:t>0.05</m:t>
+                          </m:r>
+                        </m:e>
+                        <m:sup>
+                          <m:r>
+                            <m:t>2</m:t>
+                          </m:r>
+                        </m:sup>
+                      </m:sSup>
+                      <m:sSup>
+                        <m:e>
+                          <m:d>
+                            <m:dPr>
+                              <m:begChr m:val="("/>
+                              <m:sepChr m:val=""/>
+                              <m:endChr m:val=")"/>
+                              <m:grow/>
+                            </m:dPr>
+                            <m:e>
+                              <m:r>
+                                <m:t>0.95</m:t>
+                              </m:r>
+                            </m:e>
+                          </m:d>
+                        </m:e>
+                        <m:sup>
+                          <m:r>
+                            <m:t>3</m:t>
+                          </m:r>
+                        </m:sup>
+                      </m:sSup>
+                    </m:oMath>
+                  </m:oMathPara>
+                </a14:m>
+              </a:p>
+              <a:p>
+                <a:pPr lvl="0"/>
+                <a:r>
+                  <a:rPr/>
+                  <a:t>Similarly,</a:t>
+                </a:r>
+              </a:p>
+              <a:p>
+                <a:pPr lvl="0" indent="0" marL="0">
+                  <a:buNone/>
+                </a:pPr>
+                <a14:m>
+                  <m:oMathPara xmlns:m="http://schemas.openxmlformats.org/officeDocument/2006/math">
+                    <m:oMathParaPr>
+                      <m:jc m:val="center"/>
+                    </m:oMathParaPr>
+                    <m:oMath>
+                      <m:r>
+                        <m:t>P</m:t>
+                      </m:r>
+                      <m:d>
+                        <m:dPr>
+                          <m:begChr m:val="("/>
+                          <m:sepChr m:val=""/>
+                          <m:endChr m:val=")"/>
+                          <m:grow/>
+                        </m:dPr>
+                        <m:e>
+                          <m:r>
+                            <m:t>B</m:t>
+                          </m:r>
+                          <m:r>
+                            <m:t>A</m:t>
+                          </m:r>
+                          <m:r>
+                            <m:t>A</m:t>
+                          </m:r>
+                          <m:r>
+                            <m:t>A</m:t>
+                          </m:r>
+                          <m:r>
+                            <m:t>B</m:t>
+                          </m:r>
+                        </m:e>
+                      </m:d>
+                      <m:r>
+                        <m:rPr>
+                          <m:sty m:val="p"/>
+                        </m:rPr>
+                        <m:t>=</m:t>
+                      </m:r>
+                      <m:sSup>
+                        <m:e>
+                          <m:r>
+                            <m:t>0.05</m:t>
+                          </m:r>
+                        </m:e>
+                        <m:sup>
+                          <m:r>
+                            <m:t>2</m:t>
+                          </m:r>
+                        </m:sup>
+                      </m:sSup>
+                      <m:sSup>
+                        <m:e>
+                          <m:d>
+                            <m:dPr>
+                              <m:begChr m:val="("/>
+                              <m:sepChr m:val=""/>
+                              <m:endChr m:val=")"/>
+                              <m:grow/>
+                            </m:dPr>
+                            <m:e>
+                              <m:r>
+                                <m:t>0.95</m:t>
+                              </m:r>
+                            </m:e>
+                          </m:d>
+                        </m:e>
+                        <m:sup>
+                          <m:r>
+                            <m:t>3</m:t>
+                          </m:r>
+                        </m:sup>
+                      </m:sSup>
+                      <m:r>
+                        <m:rPr>
+                          <m:sty m:val="p"/>
+                        </m:rPr>
+                        <m:t>.</m:t>
+                      </m:r>
+                    </m:oMath>
+                  </m:oMathPara>
+                </a14:m>
+              </a:p>
+              <a:p>
+                <a:pPr lvl="0"/>
+                <a:r>
+                  <a:rPr/>
+                  <a:t>Thus, the probability of </a:t>
+                </a:r>
+                <a:r>
+                  <a:rPr b="1"/>
+                  <a:t>each particular outcome containing exactly 2 defects</a:t>
+                </a:r>
+                <a:r>
+                  <a:rPr/>
+                  <a:t> is</a:t>
+                </a:r>
+              </a:p>
+              <a:p>
+                <a:pPr lvl="0" indent="0" marL="0">
+                  <a:buNone/>
+                </a:pPr>
+                <a14:m>
+                  <m:oMathPara xmlns:m="http://schemas.openxmlformats.org/officeDocument/2006/math">
+                    <m:oMathParaPr>
+                      <m:jc m:val="center"/>
+                    </m:oMathParaPr>
+                    <m:oMath>
+                      <m:sSup>
+                        <m:e>
+                          <m:r>
+                            <m:t>0.05</m:t>
+                          </m:r>
+                        </m:e>
+                        <m:sup>
+                          <m:r>
+                            <m:t>2</m:t>
+                          </m:r>
+                        </m:sup>
+                      </m:sSup>
+                      <m:sSup>
+                        <m:e>
+                          <m:d>
+                            <m:dPr>
+                              <m:begChr m:val="("/>
+                              <m:sepChr m:val=""/>
+                              <m:endChr m:val=")"/>
+                              <m:grow/>
+                            </m:dPr>
+                            <m:e>
+                              <m:r>
+                                <m:t>0.95</m:t>
+                              </m:r>
+                            </m:e>
+                          </m:d>
+                        </m:e>
+                        <m:sup>
+                          <m:r>
+                            <m:t>3</m:t>
+                          </m:r>
+                        </m:sup>
+                      </m:sSup>
+                      <m:r>
+                        <m:rPr>
+                          <m:sty m:val="p"/>
+                        </m:rPr>
+                        <m:t>.</m:t>
+                      </m:r>
+                    </m:oMath>
+                  </m:oMathPara>
+                </a14:m>
+              </a:p>
+              <a:p>
+                <a:pPr lvl="0" indent="0" marL="0">
+                  <a:spcBef>
+                    <a:spcPts val="3000"/>
+                  </a:spcBef>
+                  <a:buNone/>
+                </a:pPr>
+                <a:r>
+                  <a:rPr b="1"/>
+                  <a:t>Bernoulli Trials: Number of Outcomes</a:t>
+                </a:r>
+              </a:p>
+              <a:p>
+                <a:pPr lvl="0"/>
+                <a:r>
+                  <a:rPr/>
+                  <a:t>We want to find</a:t>
+                </a:r>
+              </a:p>
+              <a:p>
+                <a:pPr lvl="0" indent="0" marL="0">
+                  <a:buNone/>
+                </a:pPr>
+                <a14:m>
+                  <m:oMathPara xmlns:m="http://schemas.openxmlformats.org/officeDocument/2006/math">
+                    <m:oMathParaPr>
+                      <m:jc m:val="center"/>
+                    </m:oMathParaPr>
+                    <m:oMath>
+                      <m:r>
+                        <m:t>P</m:t>
+                      </m:r>
+                      <m:d>
+                        <m:dPr>
+                          <m:begChr m:val="("/>
+                          <m:sepChr m:val=""/>
+                          <m:endChr m:val=")"/>
+                          <m:grow/>
+                        </m:dPr>
+                        <m:e>
+                          <m:r>
+                            <m:t>Y</m:t>
+                          </m:r>
+                          <m:r>
+                            <m:rPr>
+                              <m:sty m:val="p"/>
+                            </m:rPr>
+                            <m:t>=</m:t>
+                          </m:r>
+                          <m:r>
+                            <m:t>2</m:t>
+                          </m:r>
+                        </m:e>
+                      </m:d>
+                      <m:r>
+                        <m:rPr>
+                          <m:sty m:val="p"/>
+                        </m:rPr>
+                        <m:t>.</m:t>
+                      </m:r>
+                    </m:oMath>
+                  </m:oMathPara>
+                </a14:m>
+              </a:p>
+              <a:p>
+                <a:pPr lvl="0"/>
+                <a:r>
+                  <a:rPr/>
+                  <a:t>Each particular outcome containing exactly 2 defects has probability</a:t>
+                </a:r>
+              </a:p>
+              <a:p>
+                <a:pPr lvl="0" indent="0" marL="0">
+                  <a:buNone/>
+                </a:pPr>
+                <a14:m>
+                  <m:oMathPara xmlns:m="http://schemas.openxmlformats.org/officeDocument/2006/math">
+                    <m:oMathParaPr>
+                      <m:jc m:val="center"/>
+                    </m:oMathParaPr>
+                    <m:oMath>
+                      <m:sSup>
+                        <m:e>
+                          <m:r>
+                            <m:t>0.05</m:t>
+                          </m:r>
+                        </m:e>
+                        <m:sup>
+                          <m:r>
+                            <m:t>2</m:t>
+                          </m:r>
+                        </m:sup>
+                      </m:sSup>
+                      <m:sSup>
+                        <m:e>
+                          <m:d>
+                            <m:dPr>
+                              <m:begChr m:val="("/>
+                              <m:sepChr m:val=""/>
+                              <m:endChr m:val=")"/>
+                              <m:grow/>
+                            </m:dPr>
+                            <m:e>
+                              <m:r>
+                                <m:t>0.95</m:t>
+                              </m:r>
+                            </m:e>
+                          </m:d>
+                        </m:e>
+                        <m:sup>
+                          <m:r>
+                            <m:t>3</m:t>
+                          </m:r>
+                        </m:sup>
+                      </m:sSup>
+                      <m:r>
+                        <m:rPr>
+                          <m:sty m:val="p"/>
+                        </m:rPr>
+                        <m:t>.</m:t>
+                      </m:r>
+                    </m:oMath>
+                  </m:oMathPara>
+                </a14:m>
+              </a:p>
+              <a:p>
+                <a:pPr lvl="0"/>
+                <a:r>
+                  <a:rPr/>
+                  <a:t>Therefore,</a:t>
+                </a:r>
+              </a:p>
+              <a:p>
+                <a:pPr lvl="0" indent="0" marL="0">
+                  <a:buNone/>
+                </a:pPr>
+                <a14:m>
+                  <m:oMathPara xmlns:m="http://schemas.openxmlformats.org/officeDocument/2006/math">
+                    <m:oMathParaPr>
+                      <m:jc m:val="center"/>
+                    </m:oMathParaPr>
+                    <m:oMath>
+                      <m:r>
+                        <m:t>P</m:t>
+                      </m:r>
+                      <m:d>
+                        <m:dPr>
+                          <m:begChr m:val="("/>
+                          <m:sepChr m:val=""/>
+                          <m:endChr m:val=")"/>
+                          <m:grow/>
+                        </m:dPr>
+                        <m:e>
+                          <m:r>
+                            <m:t>Y</m:t>
+                          </m:r>
+                          <m:r>
+                            <m:rPr>
+                              <m:sty m:val="p"/>
+                            </m:rPr>
+                            <m:t>=</m:t>
+                          </m:r>
+                          <m:r>
+                            <m:t>2</m:t>
+                          </m:r>
+                        </m:e>
+                      </m:d>
+                      <m:r>
+                        <m:rPr>
+                          <m:sty m:val="p"/>
+                        </m:rPr>
+                        <m:t>=</m:t>
+                      </m:r>
+                      <m:d>
+                        <m:dPr>
+                          <m:begChr m:val="("/>
+                          <m:sepChr m:val=""/>
+                          <m:endChr m:val=")"/>
+                          <m:grow/>
+                        </m:dPr>
+                        <m:e>
+                          <m:r>
+                            <m:rPr>
+                              <m:nor/>
+                              <m:sty m:val="p"/>
+                            </m:rPr>
+                            <m:t>number of outcomes with 2 defects</m:t>
+                          </m:r>
+                        </m:e>
+                      </m:d>
+                      <m:r>
+                        <m:rPr>
+                          <m:sty m:val="p"/>
+                        </m:rPr>
+                        <m:t>×</m:t>
+                      </m:r>
+                      <m:sSup>
+                        <m:e>
+                          <m:r>
+                            <m:t>0.05</m:t>
+                          </m:r>
+                        </m:e>
+                        <m:sup>
+                          <m:r>
+                            <m:t>2</m:t>
+                          </m:r>
+                        </m:sup>
+                      </m:sSup>
+                      <m:sSup>
+                        <m:e>
+                          <m:d>
+                            <m:dPr>
+                              <m:begChr m:val="("/>
+                              <m:sepChr m:val=""/>
+                              <m:endChr m:val=")"/>
+                              <m:grow/>
+                            </m:dPr>
+                            <m:e>
+                              <m:r>
+                                <m:t>0.95</m:t>
+                              </m:r>
+                            </m:e>
+                          </m:d>
+                        </m:e>
+                        <m:sup>
+                          <m:r>
+                            <m:t>3</m:t>
+                          </m:r>
+                        </m:sup>
+                      </m:sSup>
+                      <m:r>
+                        <m:rPr>
+                          <m:sty m:val="p"/>
+                        </m:rPr>
+                        <m:t>.</m:t>
+                      </m:r>
+                    </m:oMath>
+                  </m:oMathPara>
+                </a14:m>
+              </a:p>
+              <a:p>
+                <a:pPr lvl="0"/>
+                <a:r>
+                  <a:rPr/>
+                  <a:t>How many different outcomes of 5 items contain exactly 2 defects?</a:t>
+                </a:r>
+              </a:p>
+              <a:p>
+                <a:pPr lvl="0" indent="0" marL="0">
+                  <a:buNone/>
+                </a:pPr>
+                <a14:m>
+                  <m:oMathPara xmlns:m="http://schemas.openxmlformats.org/officeDocument/2006/math">
+                    <m:oMathParaPr>
+                      <m:jc m:val="center"/>
+                    </m:oMathParaPr>
+                    <m:oMath>
+                      <m:d>
+                        <m:dPr>
+                          <m:begChr m:val="("/>
+                          <m:sepChr m:val=""/>
+                          <m:endChr m:val=")"/>
+                          <m:grow/>
+                        </m:dPr>
+                        <m:e>
+                          <m:f>
+                            <m:fPr>
+                              <m:type m:val="noBar"/>
+                            </m:fPr>
+                            <m:num>
+                              <m:r>
+                                <m:t>5</m:t>
+                              </m:r>
+                            </m:num>
+                            <m:den>
+                              <m:r>
+                                <m:t>2</m:t>
+                              </m:r>
+                            </m:den>
+                          </m:f>
+                        </m:e>
+                      </m:d>
+                      <m:r>
+                        <m:rPr>
+                          <m:sty m:val="p"/>
+                        </m:rPr>
+                        <m:t>=</m:t>
+                      </m:r>
+                      <m:f>
+                        <m:fPr>
+                          <m:type m:val="bar"/>
+                        </m:fPr>
+                        <m:num>
+                          <m:r>
+                            <m:t>5</m:t>
+                          </m:r>
+                          <m:r>
+                            <m:rPr>
+                              <m:sty m:val="p"/>
+                            </m:rPr>
+                            <m:t>!</m:t>
+                          </m:r>
+                        </m:num>
+                        <m:den>
+                          <m:r>
+                            <m:t>2</m:t>
+                          </m:r>
+                          <m:r>
+                            <m:rPr>
+                              <m:sty m:val="p"/>
+                            </m:rPr>
+                            <m:t>!</m:t>
+                          </m:r>
+                          <m:r>
+                            <m:t>3</m:t>
+                          </m:r>
+                          <m:r>
+                            <m:rPr>
+                              <m:sty m:val="p"/>
+                            </m:rPr>
+                            <m:t>!</m:t>
+                          </m:r>
+                        </m:den>
+                      </m:f>
+                      <m:r>
+                        <m:rPr>
+                          <m:sty m:val="p"/>
+                        </m:rPr>
+                        <m:t>=</m:t>
+                      </m:r>
+                      <m:r>
+                        <m:t>10</m:t>
+                      </m:r>
+                      <m:r>
+                        <m:rPr>
+                          <m:sty m:val="p"/>
+                        </m:rPr>
+                        <m:t>.</m:t>
+                      </m:r>
+                    </m:oMath>
+                  </m:oMathPara>
+                </a14:m>
+              </a:p>
+              <a:p>
+                <a:pPr lvl="0"/>
+                <a:r>
+                  <a:rPr/>
+                  <a:t>Therefore,</a:t>
+                </a:r>
+              </a:p>
+              <a:p>
+                <a:pPr lvl="0" indent="0" marL="0">
+                  <a:buNone/>
+                </a:pPr>
+                <a14:m>
+                  <m:oMathPara xmlns:m="http://schemas.openxmlformats.org/officeDocument/2006/math">
+                    <m:oMathParaPr>
+                      <m:jc m:val="center"/>
+                    </m:oMathParaPr>
+                    <m:oMath>
+                      <m:r>
+                        <m:t>P</m:t>
+                      </m:r>
+                      <m:d>
+                        <m:dPr>
+                          <m:begChr m:val="("/>
+                          <m:sepChr m:val=""/>
+                          <m:endChr m:val=")"/>
+                          <m:grow/>
+                        </m:dPr>
+                        <m:e>
+                          <m:r>
+                            <m:t>Y</m:t>
+                          </m:r>
+                          <m:r>
+                            <m:rPr>
+                              <m:sty m:val="p"/>
+                            </m:rPr>
+                            <m:t>=</m:t>
+                          </m:r>
+                          <m:r>
+                            <m:t>2</m:t>
+                          </m:r>
+                        </m:e>
+                      </m:d>
+                      <m:r>
+                        <m:rPr>
+                          <m:sty m:val="p"/>
+                        </m:rPr>
+                        <m:t>=</m:t>
+                      </m:r>
+                      <m:d>
+                        <m:dPr>
+                          <m:begChr m:val="("/>
+                          <m:sepChr m:val=""/>
+                          <m:endChr m:val=")"/>
+                          <m:grow/>
+                        </m:dPr>
+                        <m:e>
+                          <m:f>
+                            <m:fPr>
+                              <m:type m:val="noBar"/>
+                            </m:fPr>
+                            <m:num>
+                              <m:r>
+                                <m:t>5</m:t>
+                              </m:r>
+                            </m:num>
+                            <m:den>
+                              <m:r>
+                                <m:t>2</m:t>
+                              </m:r>
+                            </m:den>
+                          </m:f>
+                        </m:e>
+                      </m:d>
+                      <m:sSup>
+                        <m:e>
+                          <m:d>
+                            <m:dPr>
+                              <m:begChr m:val="("/>
+                              <m:sepChr m:val=""/>
+                              <m:endChr m:val=")"/>
+                              <m:grow/>
+                            </m:dPr>
+                            <m:e>
+                              <m:r>
+                                <m:t>0.05</m:t>
+                              </m:r>
+                            </m:e>
+                          </m:d>
+                        </m:e>
+                        <m:sup>
+                          <m:r>
+                            <m:t>2</m:t>
+                          </m:r>
+                        </m:sup>
+                      </m:sSup>
+                      <m:sSup>
+                        <m:e>
+                          <m:d>
+                            <m:dPr>
+                              <m:begChr m:val="("/>
+                              <m:sepChr m:val=""/>
+                              <m:endChr m:val=")"/>
+                              <m:grow/>
+                            </m:dPr>
+                            <m:e>
+                              <m:r>
+                                <m:t>0.95</m:t>
+                              </m:r>
+                            </m:e>
+                          </m:d>
+                        </m:e>
+                        <m:sup>
+                          <m:r>
+                            <m:t>3</m:t>
+                          </m:r>
+                        </m:sup>
+                      </m:sSup>
+                      <m:r>
+                        <m:rPr>
+                          <m:sty m:val="p"/>
+                        </m:rPr>
+                        <m:t>.</m:t>
+                      </m:r>
+                    </m:oMath>
+                  </m:oMathPara>
+                </a14:m>
+              </a:p>
+              <a:p>
+                <a:pPr lvl="0" indent="0" marL="0">
+                  <a:spcBef>
+                    <a:spcPts val="3000"/>
+                  </a:spcBef>
+                  <a:buNone/>
+                </a:pPr>
+                <a:r>
+                  <a:rPr b="1"/>
+                  <a:t>Bernoulli Trials Leading to ?</a:t>
+                </a:r>
+              </a:p>
+              <a:p>
+                <a:pPr lvl="0"/>
+                <a:r>
+                  <a:rPr/>
+                  <a:t>We can group all possible outcomes of the Bernoulli trials according to the value of </a:t>
+                </a:r>
+                <a14:m>
+                  <m:oMath xmlns:m="http://schemas.openxmlformats.org/officeDocument/2006/math">
+                    <m:r>
+                      <m:t>Y</m:t>
+                    </m:r>
+                  </m:oMath>
+                </a14:m>
+                <a:r>
+                  <a:rPr/>
+                  <a:t>.</a:t>
+                </a:r>
+              </a:p>
+              <a:p>
+                <a:pPr lvl="0"/>
+                <a:r>
+                  <a:rPr/>
+                  <a:t>The probability mass function of </a:t>
+                </a:r>
+                <a14:m>
+                  <m:oMath xmlns:m="http://schemas.openxmlformats.org/officeDocument/2006/math">
+                    <m:r>
+                      <m:t>Y</m:t>
+                    </m:r>
+                  </m:oMath>
+                </a14:m>
+                <a:r>
+                  <a:rPr/>
+                  <a:t> is</a:t>
+                </a:r>
+              </a:p>
+              <a:p>
+                <a:pPr lvl="0" indent="0" marL="0">
+                  <a:buNone/>
+                </a:pPr>
+                <a14:m>
+                  <m:oMathPara xmlns:m="http://schemas.openxmlformats.org/officeDocument/2006/math">
+                    <m:oMathParaPr>
+                      <m:jc m:val="center"/>
+                    </m:oMathParaPr>
+                    <m:oMath>
+                      <m:r>
+                        <m:t>P</m:t>
+                      </m:r>
+                      <m:d>
+                        <m:dPr>
+                          <m:begChr m:val="("/>
+                          <m:sepChr m:val=""/>
+                          <m:endChr m:val=")"/>
+                          <m:grow/>
+                        </m:dPr>
+                        <m:e>
+                          <m:r>
+                            <m:t>Y</m:t>
+                          </m:r>
+                          <m:r>
+                            <m:rPr>
+                              <m:sty m:val="p"/>
+                            </m:rPr>
+                            <m:t>=</m:t>
+                          </m:r>
+                          <m:r>
+                            <m:t>0</m:t>
+                          </m:r>
+                        </m:e>
+                      </m:d>
+                      <m:r>
+                        <m:rPr>
+                          <m:sty m:val="p"/>
+                        </m:rPr>
+                        <m:t>=</m:t>
+                      </m:r>
+                      <m:r>
+                        <m:t>1</m:t>
+                      </m:r>
+                      <m:sSup>
+                        <m:e>
+                          <m:d>
+                            <m:dPr>
+                              <m:begChr m:val="("/>
+                              <m:sepChr m:val=""/>
+                              <m:endChr m:val=")"/>
+                              <m:grow/>
+                            </m:dPr>
+                            <m:e>
+                              <m:r>
+                                <m:t>0.05</m:t>
+                              </m:r>
+                            </m:e>
+                          </m:d>
+                        </m:e>
+                        <m:sup>
+                          <m:r>
+                            <m:t>0</m:t>
+                          </m:r>
+                        </m:sup>
+                      </m:sSup>
+                      <m:sSup>
+                        <m:e>
+                          <m:d>
+                            <m:dPr>
+                              <m:begChr m:val="("/>
+                              <m:sepChr m:val=""/>
+                              <m:endChr m:val=")"/>
+                              <m:grow/>
+                            </m:dPr>
+                            <m:e>
+                              <m:r>
+                                <m:t>0.95</m:t>
+                              </m:r>
+                            </m:e>
+                          </m:d>
+                        </m:e>
+                        <m:sup>
+                          <m:r>
+                            <m:t>5</m:t>
+                          </m:r>
+                        </m:sup>
+                      </m:sSup>
+                      <m:r>
+                        <m:rPr>
+                          <m:sty m:val="p"/>
+                        </m:rPr>
+                        <m:t>,</m:t>
+                      </m:r>
+                    </m:oMath>
+                  </m:oMathPara>
+                </a14:m>
+              </a:p>
+              <a:p>
+                <a:pPr lvl="0" indent="0" marL="0">
+                  <a:buNone/>
+                </a:pPr>
+                <a14:m>
+                  <m:oMathPara xmlns:m="http://schemas.openxmlformats.org/officeDocument/2006/math">
+                    <m:oMathParaPr>
+                      <m:jc m:val="center"/>
+                    </m:oMathParaPr>
+                    <m:oMath>
+                      <m:r>
+                        <m:t>P</m:t>
+                      </m:r>
+                      <m:d>
+                        <m:dPr>
+                          <m:begChr m:val="("/>
+                          <m:sepChr m:val=""/>
+                          <m:endChr m:val=")"/>
+                          <m:grow/>
+                        </m:dPr>
+                        <m:e>
+                          <m:r>
+                            <m:t>Y</m:t>
+                          </m:r>
+                          <m:r>
+                            <m:rPr>
+                              <m:sty m:val="p"/>
+                            </m:rPr>
+                            <m:t>=</m:t>
+                          </m:r>
+                          <m:r>
+                            <m:t>1</m:t>
+                          </m:r>
+                        </m:e>
+                      </m:d>
+                      <m:r>
+                        <m:rPr>
+                          <m:sty m:val="p"/>
+                        </m:rPr>
+                        <m:t>=</m:t>
+                      </m:r>
+                      <m:r>
+                        <m:t>5</m:t>
+                      </m:r>
+                      <m:sSup>
+                        <m:e>
+                          <m:d>
+                            <m:dPr>
+                              <m:begChr m:val="("/>
+                              <m:sepChr m:val=""/>
+                              <m:endChr m:val=")"/>
+                              <m:grow/>
+                            </m:dPr>
+                            <m:e>
+                              <m:r>
+                                <m:t>0.05</m:t>
+                              </m:r>
+                            </m:e>
+                          </m:d>
+                        </m:e>
+                        <m:sup>
+                          <m:r>
+                            <m:t>1</m:t>
+                          </m:r>
+                        </m:sup>
+                      </m:sSup>
+                      <m:sSup>
+                        <m:e>
+                          <m:d>
+                            <m:dPr>
+                              <m:begChr m:val="("/>
+                              <m:sepChr m:val=""/>
+                              <m:endChr m:val=")"/>
+                              <m:grow/>
+                            </m:dPr>
+                            <m:e>
+                              <m:r>
+                                <m:t>0.95</m:t>
+                              </m:r>
+                            </m:e>
+                          </m:d>
+                        </m:e>
+                        <m:sup>
+                          <m:r>
+                            <m:t>4</m:t>
+                          </m:r>
+                        </m:sup>
+                      </m:sSup>
+                      <m:r>
+                        <m:rPr>
+                          <m:sty m:val="p"/>
+                        </m:rPr>
+                        <m:t>,</m:t>
+                      </m:r>
+                    </m:oMath>
+                  </m:oMathPara>
+                </a14:m>
+              </a:p>
+              <a:p>
+                <a:pPr lvl="0" indent="0" marL="0">
+                  <a:buNone/>
+                </a:pPr>
+                <a14:m>
+                  <m:oMathPara xmlns:m="http://schemas.openxmlformats.org/officeDocument/2006/math">
+                    <m:oMathParaPr>
+                      <m:jc m:val="center"/>
+                    </m:oMathParaPr>
+                    <m:oMath>
+                      <m:r>
+                        <m:t>P</m:t>
+                      </m:r>
+                      <m:d>
+                        <m:dPr>
+                          <m:begChr m:val="("/>
+                          <m:sepChr m:val=""/>
+                          <m:endChr m:val=")"/>
+                          <m:grow/>
+                        </m:dPr>
+                        <m:e>
+                          <m:r>
+                            <m:t>Y</m:t>
+                          </m:r>
+                          <m:r>
+                            <m:rPr>
+                              <m:sty m:val="p"/>
+                            </m:rPr>
+                            <m:t>=</m:t>
+                          </m:r>
+                          <m:r>
+                            <m:t>2</m:t>
+                          </m:r>
+                        </m:e>
+                      </m:d>
+                      <m:r>
+                        <m:rPr>
+                          <m:sty m:val="p"/>
+                        </m:rPr>
+                        <m:t>=</m:t>
+                      </m:r>
+                      <m:r>
+                        <m:t>10</m:t>
+                      </m:r>
+                      <m:sSup>
+                        <m:e>
+                          <m:d>
+                            <m:dPr>
+                              <m:begChr m:val="("/>
+                              <m:sepChr m:val=""/>
+                              <m:endChr m:val=")"/>
+                              <m:grow/>
+                            </m:dPr>
+                            <m:e>
+                              <m:r>
+                                <m:t>0.05</m:t>
+                              </m:r>
+                            </m:e>
+                          </m:d>
+                        </m:e>
+                        <m:sup>
+                          <m:r>
+                            <m:t>2</m:t>
+                          </m:r>
+                        </m:sup>
+                      </m:sSup>
+                      <m:sSup>
+                        <m:e>
+                          <m:d>
+                            <m:dPr>
+                              <m:begChr m:val="("/>
+                              <m:sepChr m:val=""/>
+                              <m:endChr m:val=")"/>
+                              <m:grow/>
+                            </m:dPr>
+                            <m:e>
+                              <m:r>
+                                <m:t>0.95</m:t>
+                              </m:r>
+                            </m:e>
+                          </m:d>
+                        </m:e>
+                        <m:sup>
+                          <m:r>
+                            <m:t>3</m:t>
+                          </m:r>
+                        </m:sup>
+                      </m:sSup>
+                      <m:r>
+                        <m:rPr>
+                          <m:sty m:val="p"/>
+                        </m:rPr>
+                        <m:t>,</m:t>
+                      </m:r>
+                    </m:oMath>
+                  </m:oMathPara>
+                </a14:m>
+              </a:p>
+              <a:p>
+                <a:pPr lvl="0" indent="0" marL="0">
+                  <a:buNone/>
+                </a:pPr>
+                <a14:m>
+                  <m:oMathPara xmlns:m="http://schemas.openxmlformats.org/officeDocument/2006/math">
+                    <m:oMathParaPr>
+                      <m:jc m:val="center"/>
+                    </m:oMathParaPr>
+                    <m:oMath>
+                      <m:r>
+                        <m:t>P</m:t>
+                      </m:r>
+                      <m:d>
+                        <m:dPr>
+                          <m:begChr m:val="("/>
+                          <m:sepChr m:val=""/>
+                          <m:endChr m:val=")"/>
+                          <m:grow/>
+                        </m:dPr>
+                        <m:e>
+                          <m:r>
+                            <m:t>Y</m:t>
+                          </m:r>
+                          <m:r>
+                            <m:rPr>
+                              <m:sty m:val="p"/>
+                            </m:rPr>
+                            <m:t>=</m:t>
+                          </m:r>
+                          <m:r>
+                            <m:t>3</m:t>
+                          </m:r>
+                        </m:e>
+                      </m:d>
+                      <m:r>
+                        <m:rPr>
+                          <m:sty m:val="p"/>
+                        </m:rPr>
+                        <m:t>=</m:t>
+                      </m:r>
+                      <m:r>
+                        <m:t>10</m:t>
+                      </m:r>
+                      <m:sSup>
+                        <m:e>
+                          <m:d>
+                            <m:dPr>
+                              <m:begChr m:val="("/>
+                              <m:sepChr m:val=""/>
+                              <m:endChr m:val=")"/>
+                              <m:grow/>
+                            </m:dPr>
+                            <m:e>
+                              <m:r>
+                                <m:t>0.05</m:t>
+                              </m:r>
+                            </m:e>
+                          </m:d>
+                        </m:e>
+                        <m:sup>
+                          <m:r>
+                            <m:t>3</m:t>
+                          </m:r>
+                        </m:sup>
+                      </m:sSup>
+                      <m:sSup>
+                        <m:e>
+                          <m:d>
+                            <m:dPr>
+                              <m:begChr m:val="("/>
+                              <m:sepChr m:val=""/>
+                              <m:endChr m:val=")"/>
+                              <m:grow/>
+                            </m:dPr>
+                            <m:e>
+                              <m:r>
+                                <m:t>0.95</m:t>
+                              </m:r>
+                            </m:e>
+                          </m:d>
+                        </m:e>
+                        <m:sup>
+                          <m:r>
+                            <m:t>2</m:t>
+                          </m:r>
+                        </m:sup>
+                      </m:sSup>
+                      <m:r>
+                        <m:rPr>
+                          <m:sty m:val="p"/>
+                        </m:rPr>
+                        <m:t>,</m:t>
+                      </m:r>
+                    </m:oMath>
+                  </m:oMathPara>
+                </a14:m>
+              </a:p>
+              <a:p>
+                <a:pPr lvl="0" indent="0" marL="0">
+                  <a:buNone/>
+                </a:pPr>
+                <a14:m>
+                  <m:oMathPara xmlns:m="http://schemas.openxmlformats.org/officeDocument/2006/math">
+                    <m:oMathParaPr>
+                      <m:jc m:val="center"/>
+                    </m:oMathParaPr>
+                    <m:oMath>
+                      <m:r>
+                        <m:t>P</m:t>
+                      </m:r>
+                      <m:d>
+                        <m:dPr>
+                          <m:begChr m:val="("/>
+                          <m:sepChr m:val=""/>
+                          <m:endChr m:val=")"/>
+                          <m:grow/>
+                        </m:dPr>
+                        <m:e>
+                          <m:r>
+                            <m:t>Y</m:t>
+                          </m:r>
+                          <m:r>
+                            <m:rPr>
+                              <m:sty m:val="p"/>
+                            </m:rPr>
+                            <m:t>=</m:t>
+                          </m:r>
+                          <m:r>
+                            <m:t>4</m:t>
+                          </m:r>
+                        </m:e>
+                      </m:d>
+                      <m:r>
+                        <m:rPr>
+                          <m:sty m:val="p"/>
+                        </m:rPr>
+                        <m:t>=</m:t>
+                      </m:r>
+                      <m:r>
+                        <m:t>5</m:t>
+                      </m:r>
+                      <m:sSup>
+                        <m:e>
+                          <m:d>
+                            <m:dPr>
+                              <m:begChr m:val="("/>
+                              <m:sepChr m:val=""/>
+                              <m:endChr m:val=")"/>
+                              <m:grow/>
+                            </m:dPr>
+                            <m:e>
+                              <m:r>
+                                <m:t>0.05</m:t>
+                              </m:r>
+                            </m:e>
+                          </m:d>
+                        </m:e>
+                        <m:sup>
+                          <m:r>
+                            <m:t>4</m:t>
+                          </m:r>
+                        </m:sup>
+                      </m:sSup>
+                      <m:sSup>
+                        <m:e>
+                          <m:d>
+                            <m:dPr>
+                              <m:begChr m:val="("/>
+                              <m:sepChr m:val=""/>
+                              <m:endChr m:val=")"/>
+                              <m:grow/>
+                            </m:dPr>
+                            <m:e>
+                              <m:r>
+                                <m:t>0.95</m:t>
+                              </m:r>
+                            </m:e>
+                          </m:d>
+                        </m:e>
+                        <m:sup>
+                          <m:r>
+                            <m:t>1</m:t>
+                          </m:r>
+                        </m:sup>
+                      </m:sSup>
+                      <m:r>
+                        <m:rPr>
+                          <m:sty m:val="p"/>
+                        </m:rPr>
+                        <m:t>,</m:t>
+                      </m:r>
+                    </m:oMath>
+                  </m:oMathPara>
+                </a14:m>
+              </a:p>
+              <a:p>
+                <a:pPr lvl="0" indent="0" marL="0">
+                  <a:buNone/>
+                </a:pPr>
+                <a:r>
+                  <a:rPr/>
+                  <a:t>and</a:t>
+                </a:r>
+              </a:p>
+              <a:p>
+                <a:pPr lvl="0" indent="0" marL="0">
+                  <a:buNone/>
+                </a:pPr>
+                <a14:m>
+                  <m:oMathPara xmlns:m="http://schemas.openxmlformats.org/officeDocument/2006/math">
+                    <m:oMathParaPr>
+                      <m:jc m:val="center"/>
+                    </m:oMathParaPr>
+                    <m:oMath>
+                      <m:r>
+                        <m:t>P</m:t>
+                      </m:r>
+                      <m:d>
+                        <m:dPr>
+                          <m:begChr m:val="("/>
+                          <m:sepChr m:val=""/>
+                          <m:endChr m:val=")"/>
+                          <m:grow/>
+                        </m:dPr>
+                        <m:e>
+                          <m:r>
+                            <m:t>Y</m:t>
+                          </m:r>
+                          <m:r>
+                            <m:rPr>
+                              <m:sty m:val="p"/>
+                            </m:rPr>
+                            <m:t>=</m:t>
+                          </m:r>
+                          <m:r>
+                            <m:t>5</m:t>
+                          </m:r>
+                        </m:e>
+                      </m:d>
+                      <m:r>
+                        <m:rPr>
+                          <m:sty m:val="p"/>
+                        </m:rPr>
+                        <m:t>=</m:t>
+                      </m:r>
+                      <m:r>
+                        <m:t>1</m:t>
+                      </m:r>
+                      <m:sSup>
+                        <m:e>
+                          <m:d>
+                            <m:dPr>
+                              <m:begChr m:val="("/>
+                              <m:sepChr m:val=""/>
+                              <m:endChr m:val=")"/>
+                              <m:grow/>
+                            </m:dPr>
+                            <m:e>
+                              <m:r>
+                                <m:t>0.05</m:t>
+                              </m:r>
+                            </m:e>
+                          </m:d>
+                        </m:e>
+                        <m:sup>
+                          <m:r>
+                            <m:t>5</m:t>
+                          </m:r>
+                        </m:sup>
+                      </m:sSup>
+                      <m:sSup>
+                        <m:e>
+                          <m:d>
+                            <m:dPr>
+                              <m:begChr m:val="("/>
+                              <m:sepChr m:val=""/>
+                              <m:endChr m:val=")"/>
+                              <m:grow/>
+                            </m:dPr>
+                            <m:e>
+                              <m:r>
+                                <m:t>0.95</m:t>
+                              </m:r>
+                            </m:e>
+                          </m:d>
+                        </m:e>
+                        <m:sup>
+                          <m:r>
+                            <m:t>0</m:t>
+                          </m:r>
+                        </m:sup>
+                      </m:sSup>
+                      <m:r>
+                        <m:rPr>
+                          <m:sty m:val="p"/>
+                        </m:rPr>
+                        <m:t>.</m:t>
+                      </m:r>
+                    </m:oMath>
+                  </m:oMathPara>
+                </a14:m>
+              </a:p>
+              <a:p>
+                <a:pPr lvl="0"/>
+                <a:r>
+                  <a:rPr/>
+                  <a:t>Therefore, the PMF of </a:t>
+                </a:r>
+                <a14:m>
+                  <m:oMath xmlns:m="http://schemas.openxmlformats.org/officeDocument/2006/math">
+                    <m:r>
+                      <m:t>Y</m:t>
+                    </m:r>
+                  </m:oMath>
+                </a14:m>
+                <a:r>
+                  <a:rPr/>
+                  <a:t> can be written as</a:t>
+                </a:r>
+              </a:p>
+              <a:p>
+                <a:pPr lvl="0" indent="0" marL="0">
+                  <a:buNone/>
+                </a:pPr>
+                <a14:m>
+                  <m:oMathPara xmlns:m="http://schemas.openxmlformats.org/officeDocument/2006/math">
+                    <m:oMathParaPr>
+                      <m:jc m:val="center"/>
+                    </m:oMathParaPr>
+                    <m:oMath>
+                      <m:r>
+                        <m:t>P</m:t>
+                      </m:r>
+                      <m:d>
+                        <m:dPr>
+                          <m:begChr m:val="("/>
+                          <m:sepChr m:val=""/>
+                          <m:endChr m:val=")"/>
+                          <m:grow/>
+                        </m:dPr>
+                        <m:e>
+                          <m:r>
+                            <m:t>Y</m:t>
+                          </m:r>
+                          <m:r>
+                            <m:rPr>
+                              <m:sty m:val="p"/>
+                            </m:rPr>
+                            <m:t>=</m:t>
+                          </m:r>
+                          <m:r>
+                            <m:t>x</m:t>
+                          </m:r>
+                        </m:e>
+                      </m:d>
+                      <m:r>
+                        <m:rPr>
+                          <m:sty m:val="p"/>
+                        </m:rPr>
+                        <m:t>=</m:t>
+                      </m:r>
+                      <m:d>
+                        <m:dPr>
+                          <m:begChr m:val="("/>
+                          <m:sepChr m:val=""/>
+                          <m:endChr m:val=")"/>
+                          <m:grow/>
+                        </m:dPr>
+                        <m:e>
+                          <m:f>
+                            <m:fPr>
+                              <m:type m:val="noBar"/>
+                            </m:fPr>
+                            <m:num>
+                              <m:r>
+                                <m:t>5</m:t>
+                              </m:r>
+                            </m:num>
+                            <m:den>
+                              <m:r>
+                                <m:t>x</m:t>
+                              </m:r>
+                            </m:den>
+                          </m:f>
+                        </m:e>
+                      </m:d>
+                      <m:sSup>
+                        <m:e>
+                          <m:d>
+                            <m:dPr>
+                              <m:begChr m:val="("/>
+                              <m:sepChr m:val=""/>
+                              <m:endChr m:val=")"/>
+                              <m:grow/>
+                            </m:dPr>
+                            <m:e>
+                              <m:r>
+                                <m:t>0.05</m:t>
+                              </m:r>
+                            </m:e>
+                          </m:d>
+                        </m:e>
+                        <m:sup>
+                          <m:r>
+                            <m:t>x</m:t>
+                          </m:r>
+                        </m:sup>
+                      </m:sSup>
+                      <m:sSup>
+                        <m:e>
+                          <m:d>
+                            <m:dPr>
+                              <m:begChr m:val="("/>
+                              <m:sepChr m:val=""/>
+                              <m:endChr m:val=")"/>
+                              <m:grow/>
+                            </m:dPr>
+                            <m:e>
+                              <m:r>
+                                <m:t>0.95</m:t>
+                              </m:r>
+                            </m:e>
+                          </m:d>
+                        </m:e>
+                        <m:sup>
+                          <m:r>
+                            <m:t>5</m:t>
+                          </m:r>
+                          <m:r>
+                            <m:rPr>
+                              <m:sty m:val="p"/>
+                            </m:rPr>
+                            <m:t>−</m:t>
+                          </m:r>
+                          <m:r>
+                            <m:t>x</m:t>
+                          </m:r>
+                        </m:sup>
+                      </m:sSup>
+                      <m:r>
+                        <m:rPr>
+                          <m:sty m:val="p"/>
+                        </m:rPr>
+                        <m:t>,</m:t>
+                      </m:r>
+                      <m:r>
+                        <m:t>  </m:t>
+                      </m:r>
+                      <m:r>
+                        <m:t>x</m:t>
+                      </m:r>
+                      <m:r>
+                        <m:rPr>
+                          <m:sty m:val="p"/>
+                        </m:rPr>
+                        <m:t>=</m:t>
+                      </m:r>
+                      <m:r>
+                        <m:t>0</m:t>
+                      </m:r>
+                      <m:r>
+                        <m:rPr>
+                          <m:sty m:val="p"/>
+                        </m:rPr>
+                        <m:t>,</m:t>
+                      </m:r>
+                      <m:r>
+                        <m:t>1</m:t>
+                      </m:r>
+                      <m:r>
+                        <m:rPr>
+                          <m:sty m:val="p"/>
+                        </m:rPr>
+                        <m:t>,</m:t>
+                      </m:r>
+                      <m:r>
+                        <m:rPr>
+                          <m:sty m:val="p"/>
+                        </m:rPr>
+                        <m:t>…</m:t>
+                      </m:r>
+                      <m:r>
+                        <m:rPr>
+                          <m:sty m:val="p"/>
+                        </m:rPr>
+                        <m:t>,</m:t>
+                      </m:r>
+                      <m:r>
+                        <m:t>5</m:t>
+                      </m:r>
+                      <m:r>
+                        <m:rPr>
+                          <m:sty m:val="p"/>
+                        </m:rPr>
+                        <m:t>.</m:t>
+                      </m:r>
+                    </m:oMath>
+                  </m:oMathPara>
+                </a14:m>
+              </a:p>
+              <a:p>
+                <a:pPr lvl="0"/>
+                <a:r>
+                  <a:rPr/>
+                  <a:t>The distribution of </a:t>
+                </a:r>
+                <a14:m>
+                  <m:oMath xmlns:m="http://schemas.openxmlformats.org/officeDocument/2006/math">
+                    <m:r>
+                      <m:t>Y</m:t>
+                    </m:r>
+                  </m:oMath>
+                </a14:m>
+                <a:r>
+                  <a:rPr/>
+                  <a:t> is called the </a:t>
+                </a:r>
+                <a:r>
+                  <a:rPr b="1"/>
+                  <a:t>Binomial distribution</a:t>
+                </a:r>
+                <a:r>
+                  <a:rPr/>
+                  <a:t>.</a:t>
+                </a:r>
+              </a:p>
+            </p:txBody>
+          </p:sp>
+        </mc:Choice>
+      </mc:AlternateContent>
+      <p:sp>
+        <p:nvSpPr>
+          <p:cNvPr id="4" name="Slide Number Placeholder 3"/>
+          <p:cNvSpPr>
+            <a:spLocks noGrp="1"/>
+          </p:cNvSpPr>
+          <p:nvPr>
+            <p:ph idx="10" sz="quarter" type="sldNum"/>
+          </p:nvPr>
+        </p:nvSpPr>
+        <p:spPr/>
+        <p:txBody>
+          <a:bodyPr/>
+          <a:lstStyle/>
+          <a:p>
+            <a:fld id="{9C13042B-154E-4D18-B726-07B2F714EFCF}" type="slidenum">
+              <a:rPr lang="en-US" smtClean="0"/>
+              <a:pPr/>
+              <a:t>‹#›</a:t>
+            </a:fld>
+            <a:endParaRPr dirty="0" lang="en-US"/>
+          </a:p>
+        </p:txBody>
+      </p:sp>
+    </p:spTree>
+  </p:cSld>
+  <p:timing>
+    <p:tnLst>
+      <p:par>
+        <p:cTn id="1" dur="indefinite" restart="never" nodeType="tmRoot">
+          <p:childTnLst>
+            <p:seq concurrent="1" nextAc="seek">
+              <p:cTn id="2" dur="indefinite" nodeType="mainSeq">
+                <p:childTnLst>
+                  <p:par>
+                    <p:cTn id="3" fill="hold">
+                      <p:stCondLst>
+                        <p:cond delay="indefinite"/>
+                      </p:stCondLst>
+                      <p:childTnLst>
+                        <p:par>
+                          <p:cTn id="4" fill="hold">
+                            <p:stCondLst>
+                              <p:cond delay="0"/>
+                            </p:stCondLst>
+                            <p:childTnLst>
+                              <p:par>
+                                <p:cTn id="5" presetID="1" presetClass="entr" presetSubtype="0" fill="hold" grpId="0" nodeType="clickEffect">
+                                  <p:stCondLst>
+                                    <p:cond delay="0"/>
+                                  </p:stCondLst>
+                                  <p:childTnLst>
+                                    <p:set>
+                                      <p:cBhvr>
+                                        <p:cTn id="6" dur="1" fill="hold">
+                                          <p:stCondLst>
+                                            <p:cond delay="0"/>
+                                          </p:stCondLst>
+                                        </p:cTn>
+                                        <p:tgtEl>
+                                          <p:spTgt spid="3">
+                                            <p:txEl>
+                                              <p:pRg st="1" end="1"/>
+                                            </p:txEl>
+                                          </p:spTgt>
+                                        </p:tgtEl>
+                                        <p:attrNameLst>
+                                          <p:attrName>style.visibility</p:attrName>
+                                        </p:attrNameLst>
+                                      </p:cBhvr>
+                                      <p:to>
+                                        <p:strVal val="visible"/>
+                                      </p:to>
+                                    </p:set>
+                                  </p:childTnLst>
+                                </p:cTn>
+                              </p:par>
+                            </p:childTnLst>
+                          </p:cTn>
+                        </p:par>
+                      </p:childTnLst>
+                    </p:cTn>
+                  </p:par>
+                  <p:par>
+                    <p:cTn id="7" fill="hold">
+                      <p:stCondLst>
+                        <p:cond delay="indefinite"/>
+                      </p:stCondLst>
+                      <p:childTnLst>
+                        <p:par>
+                          <p:cTn id="8" fill="hold">
+                            <p:stCondLst>
+                              <p:cond delay="0"/>
+                            </p:stCondLst>
+                            <p:childTnLst>
+                              <p:par>
+                                <p:cTn id="9" presetID="1" presetClass="entr" presetSubtype="0" fill="hold" grpId="0" nodeType="clickEffect">
+                                  <p:stCondLst>
+                                    <p:cond delay="0"/>
+                                  </p:stCondLst>
+                                  <p:childTnLst>
+                                    <p:set>
+                                      <p:cBhvr>
+                                        <p:cTn id="10" dur="1" fill="hold">
+                                          <p:stCondLst>
+                                            <p:cond delay="0"/>
+                                          </p:stCondLst>
+                                        </p:cTn>
+                                        <p:tgtEl>
+                                          <p:spTgt spid="3">
+                                            <p:txEl>
+                                              <p:pRg st="2" end="2"/>
+                                            </p:txEl>
+                                          </p:spTgt>
+                                        </p:tgtEl>
+                                        <p:attrNameLst>
+                                          <p:attrName>style.visibility</p:attrName>
+                                        </p:attrNameLst>
+                                      </p:cBhvr>
+                                      <p:to>
+                                        <p:strVal val="visible"/>
+                                      </p:to>
+                                    </p:set>
+                                  </p:childTnLst>
+                                </p:cTn>
+                              </p:par>
+                            </p:childTnLst>
+                          </p:cTn>
+                        </p:par>
+                      </p:childTnLst>
+                    </p:cTn>
+                  </p:par>
+                  <p:par>
+                    <p:cTn id="11" fill="hold">
+                      <p:stCondLst>
+                        <p:cond delay="indefinite"/>
+                      </p:stCondLst>
+                      <p:childTnLst>
+                        <p:par>
+                          <p:cTn id="12" fill="hold">
+                            <p:stCondLst>
+                              <p:cond delay="0"/>
+                            </p:stCondLst>
+                            <p:childTnLst>
+                              <p:par>
+                                <p:cTn id="13" presetID="1" presetClass="entr" presetSubtype="0" fill="hold" grpId="0" nodeType="clickEffect">
+                                  <p:stCondLst>
+                                    <p:cond delay="0"/>
+                                  </p:stCondLst>
+                                  <p:childTnLst>
+                                    <p:set>
+                                      <p:cBhvr>
+                                        <p:cTn id="14" dur="1" fill="hold">
+                                          <p:stCondLst>
+                                            <p:cond delay="0"/>
+                                          </p:stCondLst>
+                                        </p:cTn>
+                                        <p:tgtEl>
+                                          <p:spTgt spid="3">
+                                            <p:txEl>
+                                              <p:pRg st="3" end="3"/>
+                                            </p:txEl>
+                                          </p:spTgt>
+                                        </p:tgtEl>
+                                        <p:attrNameLst>
+                                          <p:attrName>style.visibility</p:attrName>
+                                        </p:attrNameLst>
+                                      </p:cBhvr>
+                                      <p:to>
+                                        <p:strVal val="visible"/>
+                                      </p:to>
+                                    </p:set>
+                                  </p:childTnLst>
+                                </p:cTn>
+                              </p:par>
+                            </p:childTnLst>
+                          </p:cTn>
+                        </p:par>
+                      </p:childTnLst>
+                    </p:cTn>
+                  </p:par>
+                  <p:par>
+                    <p:cTn id="15" fill="hold">
+                      <p:stCondLst>
+                        <p:cond delay="indefinite"/>
+                      </p:stCondLst>
+                      <p:childTnLst>
+                        <p:par>
+                          <p:cTn id="16" fill="hold">
+                            <p:stCondLst>
+                              <p:cond delay="0"/>
+                            </p:stCondLst>
+                            <p:childTnLst>
+                              <p:par>
+                                <p:cTn id="17" presetID="1" presetClass="entr" presetSubtype="0" fill="hold" grpId="0" nodeType="clickEffect">
+                                  <p:stCondLst>
+                                    <p:cond delay="0"/>
+                                  </p:stCondLst>
+                                  <p:childTnLst>
+                                    <p:set>
+                                      <p:cBhvr>
+                                        <p:cTn id="18" dur="1" fill="hold">
+                                          <p:stCondLst>
+                                            <p:cond delay="0"/>
+                                          </p:stCondLst>
+                                        </p:cTn>
+                                        <p:tgtEl>
+                                          <p:spTgt spid="3">
+                                            <p:txEl>
+                                              <p:pRg st="4" end="4"/>
+                                            </p:txEl>
+                                          </p:spTgt>
+                                        </p:tgtEl>
+                                        <p:attrNameLst>
+                                          <p:attrName>style.visibility</p:attrName>
+                                        </p:attrNameLst>
+                                      </p:cBhvr>
+                                      <p:to>
+                                        <p:strVal val="visible"/>
+                                      </p:to>
+                                    </p:set>
+                                  </p:childTnLst>
+                                </p:cTn>
+                              </p:par>
+                            </p:childTnLst>
+                          </p:cTn>
+                        </p:par>
+                      </p:childTnLst>
+                    </p:cTn>
+                  </p:par>
+                  <p:par>
+                    <p:cTn id="19" fill="hold">
+                      <p:stCondLst>
+                        <p:cond delay="indefinite"/>
+                      </p:stCondLst>
+                      <p:childTnLst>
+                        <p:par>
+                          <p:cTn id="20" fill="hold">
+                            <p:stCondLst>
+                              <p:cond delay="0"/>
+                            </p:stCondLst>
+                            <p:childTnLst>
+                              <p:par>
+                                <p:cTn id="21" presetID="1" presetClass="entr" presetSubtype="0" fill="hold" grpId="0" nodeType="clickEffect">
+                                  <p:stCondLst>
+                                    <p:cond delay="0"/>
+                                  </p:stCondLst>
+                                  <p:childTnLst>
+                                    <p:set>
+                                      <p:cBhvr>
+                                        <p:cTn id="22" dur="1" fill="hold">
+                                          <p:stCondLst>
+                                            <p:cond delay="0"/>
+                                          </p:stCondLst>
+                                        </p:cTn>
+                                        <p:tgtEl>
+                                          <p:spTgt spid="3">
+                                            <p:txEl>
+                                              <p:pRg st="5" end="5"/>
+                                            </p:txEl>
+                                          </p:spTgt>
+                                        </p:tgtEl>
+                                        <p:attrNameLst>
+                                          <p:attrName>style.visibility</p:attrName>
+                                        </p:attrNameLst>
+                                      </p:cBhvr>
+                                      <p:to>
+                                        <p:strVal val="visible"/>
+                                      </p:to>
+                                    </p:set>
+                                  </p:childTnLst>
+                                </p:cTn>
+                              </p:par>
+                            </p:childTnLst>
+                          </p:cTn>
+                        </p:par>
+                      </p:childTnLst>
+                    </p:cTn>
+                  </p:par>
+                  <p:par>
+                    <p:cTn id="23" fill="hold">
+                      <p:stCondLst>
+                        <p:cond delay="indefinite"/>
+                      </p:stCondLst>
+                      <p:childTnLst>
+                        <p:par>
+                          <p:cTn id="24" fill="hold">
+                            <p:stCondLst>
+                              <p:cond delay="0"/>
+                            </p:stCondLst>
+                            <p:childTnLst>
+                              <p:par>
+                                <p:cTn id="25" presetID="1" presetClass="entr" presetSubtype="0" fill="hold" grpId="0" nodeType="clickEffect">
+                                  <p:stCondLst>
+                                    <p:cond delay="0"/>
+                                  </p:stCondLst>
+                                  <p:childTnLst>
+                                    <p:set>
+                                      <p:cBhvr>
+                                        <p:cTn id="26" dur="1" fill="hold">
+                                          <p:stCondLst>
+                                            <p:cond delay="0"/>
+                                          </p:stCondLst>
+                                        </p:cTn>
+                                        <p:tgtEl>
+                                          <p:spTgt spid="3">
+                                            <p:txEl>
+                                              <p:pRg st="6" end="6"/>
+                                            </p:txEl>
+                                          </p:spTgt>
+                                        </p:tgtEl>
+                                        <p:attrNameLst>
+                                          <p:attrName>style.visibility</p:attrName>
+                                        </p:attrNameLst>
+                                      </p:cBhvr>
+                                      <p:to>
+                                        <p:strVal val="visible"/>
+                                      </p:to>
+                                    </p:set>
+                                  </p:childTnLst>
+                                </p:cTn>
+                              </p:par>
+                            </p:childTnLst>
+                          </p:cTn>
+                        </p:par>
+                      </p:childTnLst>
+                    </p:cTn>
+                  </p:par>
+                  <p:par>
+                    <p:cTn id="27" fill="hold">
+                      <p:stCondLst>
+                        <p:cond delay="indefinite"/>
+                      </p:stCondLst>
+                      <p:childTnLst>
+                        <p:par>
+                          <p:cTn id="28" fill="hold">
+                            <p:stCondLst>
+                              <p:cond delay="0"/>
+                            </p:stCondLst>
+                            <p:childTnLst>
+                              <p:par>
+                                <p:cTn id="29" presetID="1" presetClass="entr" presetSubtype="0" fill="hold" grpId="0" nodeType="clickEffect">
+                                  <p:stCondLst>
+                                    <p:cond delay="0"/>
+                                  </p:stCondLst>
+                                  <p:childTnLst>
+                                    <p:set>
+                                      <p:cBhvr>
+                                        <p:cTn id="30" dur="1" fill="hold">
+                                          <p:stCondLst>
+                                            <p:cond delay="0"/>
+                                          </p:stCondLst>
+                                        </p:cTn>
+                                        <p:tgtEl>
+                                          <p:spTgt spid="3">
+                                            <p:txEl>
+                                              <p:pRg st="8" end="8"/>
+                                            </p:txEl>
+                                          </p:spTgt>
+                                        </p:tgtEl>
+                                        <p:attrNameLst>
+                                          <p:attrName>style.visibility</p:attrName>
+                                        </p:attrNameLst>
+                                      </p:cBhvr>
+                                      <p:to>
+                                        <p:strVal val="visible"/>
+                                      </p:to>
+                                    </p:set>
+                                  </p:childTnLst>
+                                </p:cTn>
+                              </p:par>
+                            </p:childTnLst>
+                          </p:cTn>
+                        </p:par>
+                      </p:childTnLst>
+                    </p:cTn>
+                  </p:par>
+                  <p:par>
+                    <p:cTn id="31" fill="hold">
+                      <p:stCondLst>
+                        <p:cond delay="indefinite"/>
+                      </p:stCondLst>
+                      <p:childTnLst>
+                        <p:par>
+                          <p:cTn id="32" fill="hold">
+                            <p:stCondLst>
+                              <p:cond delay="0"/>
+                            </p:stCondLst>
+                            <p:childTnLst>
+                              <p:par>
+                                <p:cTn id="33" presetID="1" presetClass="entr" presetSubtype="0" fill="hold" grpId="0" nodeType="clickEffect">
+                                  <p:stCondLst>
+                                    <p:cond delay="0"/>
+                                  </p:stCondLst>
+                                  <p:childTnLst>
+                                    <p:set>
+                                      <p:cBhvr>
+                                        <p:cTn id="34" dur="1" fill="hold">
+                                          <p:stCondLst>
+                                            <p:cond delay="0"/>
+                                          </p:stCondLst>
+                                        </p:cTn>
+                                        <p:tgtEl>
+                                          <p:spTgt spid="3">
+                                            <p:txEl>
+                                              <p:pRg st="12" end="12"/>
+                                            </p:txEl>
+                                          </p:spTgt>
+                                        </p:tgtEl>
+                                        <p:attrNameLst>
+                                          <p:attrName>style.visibility</p:attrName>
+                                        </p:attrNameLst>
+                                      </p:cBhvr>
+                                      <p:to>
+                                        <p:strVal val="visible"/>
+                                      </p:to>
+                                    </p:set>
+                                  </p:childTnLst>
+                                </p:cTn>
+                              </p:par>
+                            </p:childTnLst>
+                          </p:cTn>
+                        </p:par>
+                      </p:childTnLst>
+                    </p:cTn>
+                  </p:par>
+                  <p:par>
+                    <p:cTn id="35" fill="hold">
+                      <p:stCondLst>
+                        <p:cond delay="indefinite"/>
+                      </p:stCondLst>
+                      <p:childTnLst>
+                        <p:par>
+                          <p:cTn id="36" fill="hold">
+                            <p:stCondLst>
+                              <p:cond delay="0"/>
+                            </p:stCondLst>
+                            <p:childTnLst>
+                              <p:par>
+                                <p:cTn id="37" presetID="1" presetClass="entr" presetSubtype="0" fill="hold" grpId="0" nodeType="clickEffect">
+                                  <p:stCondLst>
+                                    <p:cond delay="0"/>
+                                  </p:stCondLst>
+                                  <p:childTnLst>
+                                    <p:set>
+                                      <p:cBhvr>
+                                        <p:cTn id="38" dur="1" fill="hold">
+                                          <p:stCondLst>
+                                            <p:cond delay="0"/>
+                                          </p:stCondLst>
+                                        </p:cTn>
+                                        <p:tgtEl>
+                                          <p:spTgt spid="3">
+                                            <p:txEl>
+                                              <p:pRg st="15" end="15"/>
+                                            </p:txEl>
+                                          </p:spTgt>
+                                        </p:tgtEl>
+                                        <p:attrNameLst>
+                                          <p:attrName>style.visibility</p:attrName>
+                                        </p:attrNameLst>
+                                      </p:cBhvr>
+                                      <p:to>
+                                        <p:strVal val="visible"/>
+                                      </p:to>
+                                    </p:set>
+                                  </p:childTnLst>
+                                </p:cTn>
+                              </p:par>
+                            </p:childTnLst>
+                          </p:cTn>
+                        </p:par>
+                      </p:childTnLst>
+                    </p:cTn>
+                  </p:par>
+                  <p:par>
+                    <p:cTn id="39" fill="hold">
+                      <p:stCondLst>
+                        <p:cond delay="indefinite"/>
+                      </p:stCondLst>
+                      <p:childTnLst>
+                        <p:par>
+                          <p:cTn id="40" fill="hold">
+                            <p:stCondLst>
+                              <p:cond delay="0"/>
+                            </p:stCondLst>
+                            <p:childTnLst>
+                              <p:par>
+                                <p:cTn id="41" presetID="1" presetClass="entr" presetSubtype="0" fill="hold" grpId="0" nodeType="clickEffect">
+                                  <p:stCondLst>
+                                    <p:cond delay="0"/>
+                                  </p:stCondLst>
+                                  <p:childTnLst>
+                                    <p:set>
+                                      <p:cBhvr>
+                                        <p:cTn id="42" dur="1" fill="hold">
+                                          <p:stCondLst>
+                                            <p:cond delay="0"/>
+                                          </p:stCondLst>
+                                        </p:cTn>
+                                        <p:tgtEl>
+                                          <p:spTgt spid="3">
+                                            <p:txEl>
+                                              <p:pRg st="19" end="19"/>
+                                            </p:txEl>
+                                          </p:spTgt>
+                                        </p:tgtEl>
+                                        <p:attrNameLst>
+                                          <p:attrName>style.visibility</p:attrName>
+                                        </p:attrNameLst>
+                                      </p:cBhvr>
+                                      <p:to>
+                                        <p:strVal val="visible"/>
+                                      </p:to>
+                                    </p:set>
+                                  </p:childTnLst>
+                                </p:cTn>
+                              </p:par>
+                            </p:childTnLst>
+                          </p:cTn>
+                        </p:par>
+                      </p:childTnLst>
+                    </p:cTn>
+                  </p:par>
+                  <p:par>
+                    <p:cTn id="43" fill="hold">
+                      <p:stCondLst>
+                        <p:cond delay="indefinite"/>
+                      </p:stCondLst>
+                      <p:childTnLst>
+                        <p:par>
+                          <p:cTn id="44" fill="hold">
+                            <p:stCondLst>
+                              <p:cond delay="0"/>
+                            </p:stCondLst>
+                            <p:childTnLst>
+                              <p:par>
+                                <p:cTn id="45" presetID="1" presetClass="entr" presetSubtype="0" fill="hold" grpId="0" nodeType="clickEffect">
+                                  <p:stCondLst>
+                                    <p:cond delay="0"/>
+                                  </p:stCondLst>
+                                  <p:childTnLst>
+                                    <p:set>
+                                      <p:cBhvr>
+                                        <p:cTn id="46" dur="1" fill="hold">
+                                          <p:stCondLst>
+                                            <p:cond delay="0"/>
+                                          </p:stCondLst>
+                                        </p:cTn>
+                                        <p:tgtEl>
+                                          <p:spTgt spid="3">
+                                            <p:txEl>
+                                              <p:pRg st="21" end="21"/>
+                                            </p:txEl>
+                                          </p:spTgt>
+                                        </p:tgtEl>
+                                        <p:attrNameLst>
+                                          <p:attrName>style.visibility</p:attrName>
+                                        </p:attrNameLst>
+                                      </p:cBhvr>
+                                      <p:to>
+                                        <p:strVal val="visible"/>
+                                      </p:to>
+                                    </p:set>
+                                  </p:childTnLst>
+                                </p:cTn>
+                              </p:par>
+                            </p:childTnLst>
+                          </p:cTn>
+                        </p:par>
+                      </p:childTnLst>
+                    </p:cTn>
+                  </p:par>
+                  <p:par>
+                    <p:cTn id="47" fill="hold">
+                      <p:stCondLst>
+                        <p:cond delay="indefinite"/>
+                      </p:stCondLst>
+                      <p:childTnLst>
+                        <p:par>
+                          <p:cTn id="48" fill="hold">
+                            <p:stCondLst>
+                              <p:cond delay="0"/>
+                            </p:stCondLst>
+                            <p:childTnLst>
+                              <p:par>
+                                <p:cTn id="49" presetID="1" presetClass="entr" presetSubtype="0" fill="hold" grpId="0" nodeType="clickEffect">
+                                  <p:stCondLst>
+                                    <p:cond delay="0"/>
+                                  </p:stCondLst>
+                                  <p:childTnLst>
+                                    <p:set>
+                                      <p:cBhvr>
+                                        <p:cTn id="50" dur="1" fill="hold">
+                                          <p:stCondLst>
+                                            <p:cond delay="0"/>
+                                          </p:stCondLst>
+                                        </p:cTn>
+                                        <p:tgtEl>
+                                          <p:spTgt spid="3">
+                                            <p:txEl>
+                                              <p:pRg st="23" end="23"/>
+                                            </p:txEl>
+                                          </p:spTgt>
+                                        </p:tgtEl>
+                                        <p:attrNameLst>
+                                          <p:attrName>style.visibility</p:attrName>
+                                        </p:attrNameLst>
+                                      </p:cBhvr>
+                                      <p:to>
+                                        <p:strVal val="visible"/>
+                                      </p:to>
+                                    </p:set>
+                                  </p:childTnLst>
+                                </p:cTn>
+                              </p:par>
+                            </p:childTnLst>
+                          </p:cTn>
+                        </p:par>
+                      </p:childTnLst>
+                    </p:cTn>
+                  </p:par>
+                  <p:par>
+                    <p:cTn id="51" fill="hold">
+                      <p:stCondLst>
+                        <p:cond delay="indefinite"/>
+                      </p:stCondLst>
+                      <p:childTnLst>
+                        <p:par>
+                          <p:cTn id="52" fill="hold">
+                            <p:stCondLst>
+                              <p:cond delay="0"/>
+                            </p:stCondLst>
+                            <p:childTnLst>
+                              <p:par>
+                                <p:cTn id="53" presetID="1" presetClass="entr" presetSubtype="0" fill="hold" grpId="0" nodeType="clickEffect">
+                                  <p:stCondLst>
+                                    <p:cond delay="0"/>
+                                  </p:stCondLst>
+                                  <p:childTnLst>
+                                    <p:set>
+                                      <p:cBhvr>
+                                        <p:cTn id="54" dur="1" fill="hold">
+                                          <p:stCondLst>
+                                            <p:cond delay="0"/>
+                                          </p:stCondLst>
+                                        </p:cTn>
+                                        <p:tgtEl>
+                                          <p:spTgt spid="3">
+                                            <p:txEl>
+                                              <p:pRg st="24" end="24"/>
+                                            </p:txEl>
+                                          </p:spTgt>
+                                        </p:tgtEl>
+                                        <p:attrNameLst>
+                                          <p:attrName>style.visibility</p:attrName>
+                                        </p:attrNameLst>
+                                      </p:cBhvr>
+                                      <p:to>
+                                        <p:strVal val="visible"/>
+                                      </p:to>
+                                    </p:set>
+                                  </p:childTnLst>
+                                </p:cTn>
+                              </p:par>
+                            </p:childTnLst>
+                          </p:cTn>
+                        </p:par>
+                      </p:childTnLst>
+                    </p:cTn>
+                  </p:par>
+                  <p:par>
+                    <p:cTn id="55" fill="hold">
+                      <p:stCondLst>
+                        <p:cond delay="indefinite"/>
+                      </p:stCondLst>
+                      <p:childTnLst>
+                        <p:par>
+                          <p:cTn id="56" fill="hold">
+                            <p:stCondLst>
+                              <p:cond delay="0"/>
+                            </p:stCondLst>
+                            <p:childTnLst>
+                              <p:par>
+                                <p:cTn id="57" presetID="1" presetClass="entr" presetSubtype="0" fill="hold" grpId="0" nodeType="clickEffect">
+                                  <p:stCondLst>
+                                    <p:cond delay="0"/>
+                                  </p:stCondLst>
+                                  <p:childTnLst>
+                                    <p:set>
+                                      <p:cBhvr>
+                                        <p:cTn id="58" dur="1" fill="hold">
+                                          <p:stCondLst>
+                                            <p:cond delay="0"/>
+                                          </p:stCondLst>
+                                        </p:cTn>
+                                        <p:tgtEl>
+                                          <p:spTgt spid="3">
+                                            <p:txEl>
+                                              <p:pRg st="29" end="29"/>
+                                            </p:txEl>
+                                          </p:spTgt>
+                                        </p:tgtEl>
+                                        <p:attrNameLst>
+                                          <p:attrName>style.visibility</p:attrName>
+                                        </p:attrNameLst>
+                                      </p:cBhvr>
+                                      <p:to>
+                                        <p:strVal val="visible"/>
+                                      </p:to>
+                                    </p:set>
+                                  </p:childTnLst>
+                                </p:cTn>
+                              </p:par>
+                            </p:childTnLst>
+                          </p:cTn>
+                        </p:par>
+                      </p:childTnLst>
+                    </p:cTn>
+                  </p:par>
+                  <p:par>
+                    <p:cTn id="59" fill="hold">
+                      <p:stCondLst>
+                        <p:cond delay="indefinite"/>
+                      </p:stCondLst>
+                      <p:childTnLst>
+                        <p:par>
+                          <p:cTn id="60" fill="hold">
+                            <p:stCondLst>
+                              <p:cond delay="0"/>
+                            </p:stCondLst>
+                            <p:childTnLst>
+                              <p:par>
+                                <p:cTn id="61" presetID="1" presetClass="entr" presetSubtype="0" fill="hold" grpId="0" nodeType="clickEffect">
+                                  <p:stCondLst>
+                                    <p:cond delay="0"/>
+                                  </p:stCondLst>
+                                  <p:childTnLst>
+                                    <p:set>
+                                      <p:cBhvr>
+                                        <p:cTn id="62" dur="1" fill="hold">
+                                          <p:stCondLst>
+                                            <p:cond delay="0"/>
+                                          </p:stCondLst>
+                                        </p:cTn>
+                                        <p:tgtEl>
+                                          <p:spTgt spid="3">
+                                            <p:txEl>
+                                              <p:pRg st="30" end="30"/>
+                                            </p:txEl>
+                                          </p:spTgt>
+                                        </p:tgtEl>
+                                        <p:attrNameLst>
+                                          <p:attrName>style.visibility</p:attrName>
+                                        </p:attrNameLst>
+                                      </p:cBhvr>
+                                      <p:to>
+                                        <p:strVal val="visible"/>
+                                      </p:to>
+                                    </p:set>
+                                  </p:childTnLst>
+                                </p:cTn>
+                              </p:par>
+                            </p:childTnLst>
+                          </p:cTn>
+                        </p:par>
+                      </p:childTnLst>
+                    </p:cTn>
+                  </p:par>
+                  <p:par>
+                    <p:cTn id="63" fill="hold">
+                      <p:stCondLst>
+                        <p:cond delay="indefinite"/>
+                      </p:stCondLst>
+                      <p:childTnLst>
+                        <p:par>
+                          <p:cTn id="64" fill="hold">
+                            <p:stCondLst>
+                              <p:cond delay="0"/>
+                            </p:stCondLst>
+                            <p:childTnLst>
+                              <p:par>
+                                <p:cTn id="65" presetID="1" presetClass="entr" presetSubtype="0" fill="hold" grpId="0" nodeType="clickEffect">
+                                  <p:stCondLst>
+                                    <p:cond delay="0"/>
+                                  </p:stCondLst>
+                                  <p:childTnLst>
+                                    <p:set>
+                                      <p:cBhvr>
+                                        <p:cTn id="66" dur="1" fill="hold">
+                                          <p:stCondLst>
+                                            <p:cond delay="0"/>
+                                          </p:stCondLst>
+                                        </p:cTn>
+                                        <p:tgtEl>
+                                          <p:spTgt spid="3">
+                                            <p:txEl>
+                                              <p:pRg st="31" end="31"/>
+                                            </p:txEl>
+                                          </p:spTgt>
+                                        </p:tgtEl>
+                                        <p:attrNameLst>
+                                          <p:attrName>style.visibility</p:attrName>
+                                        </p:attrNameLst>
+                                      </p:cBhvr>
+                                      <p:to>
+                                        <p:strVal val="visible"/>
+                                      </p:to>
+                                    </p:set>
+                                  </p:childTnLst>
+                                </p:cTn>
+                              </p:par>
+                            </p:childTnLst>
+                          </p:cTn>
+                        </p:par>
+                      </p:childTnLst>
+                    </p:cTn>
+                  </p:par>
+                  <p:par>
+                    <p:cTn id="67" fill="hold">
+                      <p:stCondLst>
+                        <p:cond delay="indefinite"/>
+                      </p:stCondLst>
+                      <p:childTnLst>
+                        <p:par>
+                          <p:cTn id="68" fill="hold">
+                            <p:stCondLst>
+                              <p:cond delay="0"/>
+                            </p:stCondLst>
+                            <p:childTnLst>
+                              <p:par>
+                                <p:cTn id="69" presetID="1" presetClass="entr" presetSubtype="0" fill="hold" grpId="0" nodeType="clickEffect">
+                                  <p:stCondLst>
+                                    <p:cond delay="0"/>
+                                  </p:stCondLst>
+                                  <p:childTnLst>
+                                    <p:set>
+                                      <p:cBhvr>
+                                        <p:cTn id="70" dur="1" fill="hold">
+                                          <p:stCondLst>
+                                            <p:cond delay="0"/>
+                                          </p:stCondLst>
+                                        </p:cTn>
+                                        <p:tgtEl>
+                                          <p:spTgt spid="3">
+                                            <p:txEl>
+                                              <p:pRg st="32" end="32"/>
+                                            </p:txEl>
+                                          </p:spTgt>
+                                        </p:tgtEl>
+                                        <p:attrNameLst>
+                                          <p:attrName>style.visibility</p:attrName>
+                                        </p:attrNameLst>
+                                      </p:cBhvr>
+                                      <p:to>
+                                        <p:strVal val="visible"/>
+                                      </p:to>
+                                    </p:set>
+                                  </p:childTnLst>
+                                </p:cTn>
+                              </p:par>
+                            </p:childTnLst>
+                          </p:cTn>
+                        </p:par>
+                      </p:childTnLst>
+                    </p:cTn>
+                  </p:par>
+                  <p:par>
+                    <p:cTn id="71" fill="hold">
+                      <p:stCondLst>
+                        <p:cond delay="indefinite"/>
+                      </p:stCondLst>
+                      <p:childTnLst>
+                        <p:par>
+                          <p:cTn id="72" fill="hold">
+                            <p:stCondLst>
+                              <p:cond delay="0"/>
+                            </p:stCondLst>
+                            <p:childTnLst>
+                              <p:par>
+                                <p:cTn id="73" presetID="1" presetClass="entr" presetSubtype="0" fill="hold" grpId="0" nodeType="clickEffect">
+                                  <p:stCondLst>
+                                    <p:cond delay="0"/>
+                                  </p:stCondLst>
+                                  <p:childTnLst>
+                                    <p:set>
+                                      <p:cBhvr>
+                                        <p:cTn id="74" dur="1" fill="hold">
+                                          <p:stCondLst>
+                                            <p:cond delay="0"/>
+                                          </p:stCondLst>
+                                        </p:cTn>
+                                        <p:tgtEl>
+                                          <p:spTgt spid="3">
+                                            <p:txEl>
+                                              <p:pRg st="33" end="33"/>
+                                            </p:txEl>
+                                          </p:spTgt>
+                                        </p:tgtEl>
+                                        <p:attrNameLst>
+                                          <p:attrName>style.visibility</p:attrName>
+                                        </p:attrNameLst>
+                                      </p:cBhvr>
+                                      <p:to>
+                                        <p:strVal val="visible"/>
+                                      </p:to>
+                                    </p:set>
+                                  </p:childTnLst>
+                                </p:cTn>
+                              </p:par>
+                            </p:childTnLst>
+                          </p:cTn>
+                        </p:par>
+                      </p:childTnLst>
+                    </p:cTn>
+                  </p:par>
+                  <p:par>
+                    <p:cTn id="75" fill="hold">
+                      <p:stCondLst>
+                        <p:cond delay="indefinite"/>
+                      </p:stCondLst>
+                      <p:childTnLst>
+                        <p:par>
+                          <p:cTn id="76" fill="hold">
+                            <p:stCondLst>
+                              <p:cond delay="0"/>
+                            </p:stCondLst>
+                            <p:childTnLst>
+                              <p:par>
+                                <p:cTn id="77" presetID="1" presetClass="entr" presetSubtype="0" fill="hold" grpId="0" nodeType="clickEffect">
+                                  <p:stCondLst>
+                                    <p:cond delay="0"/>
+                                  </p:stCondLst>
+                                  <p:childTnLst>
+                                    <p:set>
+                                      <p:cBhvr>
+                                        <p:cTn id="78" dur="1" fill="hold">
+                                          <p:stCondLst>
+                                            <p:cond delay="0"/>
+                                          </p:stCondLst>
+                                        </p:cTn>
+                                        <p:tgtEl>
+                                          <p:spTgt spid="3">
+                                            <p:txEl>
+                                              <p:pRg st="34" end="34"/>
+                                            </p:txEl>
+                                          </p:spTgt>
+                                        </p:tgtEl>
+                                        <p:attrNameLst>
+                                          <p:attrName>style.visibility</p:attrName>
+                                        </p:attrNameLst>
+                                      </p:cBhvr>
+                                      <p:to>
+                                        <p:strVal val="visible"/>
+                                      </p:to>
+                                    </p:set>
+                                  </p:childTnLst>
+                                </p:cTn>
+                              </p:par>
+                            </p:childTnLst>
+                          </p:cTn>
+                        </p:par>
+                      </p:childTnLst>
+                    </p:cTn>
+                  </p:par>
+                  <p:par>
+                    <p:cTn id="79" fill="hold">
+                      <p:stCondLst>
+                        <p:cond delay="indefinite"/>
+                      </p:stCondLst>
+                      <p:childTnLst>
+                        <p:par>
+                          <p:cTn id="80" fill="hold">
+                            <p:stCondLst>
+                              <p:cond delay="0"/>
+                            </p:stCondLst>
+                            <p:childTnLst>
+                              <p:par>
+                                <p:cTn id="81" presetID="1" presetClass="entr" presetSubtype="0" fill="hold" grpId="0" nodeType="clickEffect">
+                                  <p:stCondLst>
+                                    <p:cond delay="0"/>
+                                  </p:stCondLst>
+                                  <p:childTnLst>
+                                    <p:set>
+                                      <p:cBhvr>
+                                        <p:cTn id="82" dur="1" fill="hold">
+                                          <p:stCondLst>
+                                            <p:cond delay="0"/>
+                                          </p:stCondLst>
+                                        </p:cTn>
+                                        <p:tgtEl>
+                                          <p:spTgt spid="3">
+                                            <p:txEl>
+                                              <p:pRg st="35" end="35"/>
+                                            </p:txEl>
+                                          </p:spTgt>
+                                        </p:tgtEl>
+                                        <p:attrNameLst>
+                                          <p:attrName>style.visibility</p:attrName>
+                                        </p:attrNameLst>
+                                      </p:cBhvr>
+                                      <p:to>
+                                        <p:strVal val="visible"/>
+                                      </p:to>
+                                    </p:set>
+                                  </p:childTnLst>
+                                </p:cTn>
+                              </p:par>
+                            </p:childTnLst>
+                          </p:cTn>
+                        </p:par>
+                      </p:childTnLst>
+                    </p:cTn>
+                  </p:par>
+                  <p:par>
+                    <p:cTn id="83" fill="hold">
+                      <p:stCondLst>
+                        <p:cond delay="indefinite"/>
+                      </p:stCondLst>
+                      <p:childTnLst>
+                        <p:par>
+                          <p:cTn id="84" fill="hold">
+                            <p:stCondLst>
+                              <p:cond delay="0"/>
+                            </p:stCondLst>
+                            <p:childTnLst>
+                              <p:par>
+                                <p:cTn id="85" presetID="1" presetClass="entr" presetSubtype="0" fill="hold" grpId="0" nodeType="clickEffect">
+                                  <p:stCondLst>
+                                    <p:cond delay="0"/>
+                                  </p:stCondLst>
+                                  <p:childTnLst>
+                                    <p:set>
+                                      <p:cBhvr>
+                                        <p:cTn id="86" dur="1" fill="hold">
+                                          <p:stCondLst>
+                                            <p:cond delay="0"/>
+                                          </p:stCondLst>
+                                        </p:cTn>
+                                        <p:tgtEl>
+                                          <p:spTgt spid="3">
+                                            <p:txEl>
+                                              <p:pRg st="36" end="36"/>
+                                            </p:txEl>
+                                          </p:spTgt>
+                                        </p:tgtEl>
+                                        <p:attrNameLst>
+                                          <p:attrName>style.visibility</p:attrName>
+                                        </p:attrNameLst>
+                                      </p:cBhvr>
+                                      <p:to>
+                                        <p:strVal val="visible"/>
+                                      </p:to>
+                                    </p:set>
+                                  </p:childTnLst>
+                                </p:cTn>
+                              </p:par>
+                            </p:childTnLst>
+                          </p:cTn>
+                        </p:par>
+                      </p:childTnLst>
+                    </p:cTn>
+                  </p:par>
+                  <p:par>
+                    <p:cTn id="87" fill="hold">
+                      <p:stCondLst>
+                        <p:cond delay="indefinite"/>
+                      </p:stCondLst>
+                      <p:childTnLst>
+                        <p:par>
+                          <p:cTn id="88" fill="hold">
+                            <p:stCondLst>
+                              <p:cond delay="0"/>
+                            </p:stCondLst>
+                            <p:childTnLst>
+                              <p:par>
+                                <p:cTn id="89" presetID="1" presetClass="entr" presetSubtype="0" fill="hold" grpId="0" nodeType="clickEffect">
+                                  <p:stCondLst>
+                                    <p:cond delay="0"/>
+                                  </p:stCondLst>
+                                  <p:childTnLst>
+                                    <p:set>
+                                      <p:cBhvr>
+                                        <p:cTn id="90" dur="1" fill="hold">
+                                          <p:stCondLst>
+                                            <p:cond delay="0"/>
+                                          </p:stCondLst>
+                                        </p:cTn>
+                                        <p:tgtEl>
+                                          <p:spTgt spid="3">
+                                            <p:txEl>
+                                              <p:pRg st="37" end="37"/>
+                                            </p:txEl>
+                                          </p:spTgt>
+                                        </p:tgtEl>
+                                        <p:attrNameLst>
+                                          <p:attrName>style.visibility</p:attrName>
+                                        </p:attrNameLst>
+                                      </p:cBhvr>
+                                      <p:to>
+                                        <p:strVal val="visible"/>
+                                      </p:to>
+                                    </p:set>
+                                  </p:childTnLst>
+                                </p:cTn>
+                              </p:par>
+                            </p:childTnLst>
+                          </p:cTn>
+                        </p:par>
+                      </p:childTnLst>
+                    </p:cTn>
+                  </p:par>
+                  <p:par>
+                    <p:cTn id="91" fill="hold">
+                      <p:stCondLst>
+                        <p:cond delay="indefinite"/>
+                      </p:stCondLst>
+                      <p:childTnLst>
+                        <p:par>
+                          <p:cTn id="92" fill="hold">
+                            <p:stCondLst>
+                              <p:cond delay="0"/>
+                            </p:stCondLst>
+                            <p:childTnLst>
+                              <p:par>
+                                <p:cTn id="93" presetID="1" presetClass="entr" presetSubtype="0" fill="hold" grpId="0" nodeType="clickEffect">
+                                  <p:stCondLst>
+                                    <p:cond delay="0"/>
+                                  </p:stCondLst>
+                                  <p:childTnLst>
+                                    <p:set>
+                                      <p:cBhvr>
+                                        <p:cTn id="94" dur="1" fill="hold">
+                                          <p:stCondLst>
+                                            <p:cond delay="0"/>
+                                          </p:stCondLst>
+                                        </p:cTn>
+                                        <p:tgtEl>
+                                          <p:spTgt spid="3">
+                                            <p:txEl>
+                                              <p:pRg st="38" end="38"/>
+                                            </p:txEl>
+                                          </p:spTgt>
+                                        </p:tgtEl>
+                                        <p:attrNameLst>
+                                          <p:attrName>style.visibility</p:attrName>
+                                        </p:attrNameLst>
+                                      </p:cBhvr>
+                                      <p:to>
+                                        <p:strVal val="visible"/>
+                                      </p:to>
+                                    </p:set>
+                                  </p:childTnLst>
+                                </p:cTn>
+                              </p:par>
+                            </p:childTnLst>
+                          </p:cTn>
+                        </p:par>
+                      </p:childTnLst>
+                    </p:cTn>
+                  </p:par>
+                  <p:par>
+                    <p:cTn id="95" fill="hold">
+                      <p:stCondLst>
+                        <p:cond delay="indefinite"/>
+                      </p:stCondLst>
+                      <p:childTnLst>
+                        <p:par>
+                          <p:cTn id="96" fill="hold">
+                            <p:stCondLst>
+                              <p:cond delay="0"/>
+                            </p:stCondLst>
+                            <p:childTnLst>
+                              <p:par>
+                                <p:cTn id="97" presetID="1" presetClass="entr" presetSubtype="0" fill="hold" grpId="0" nodeType="clickEffect">
+                                  <p:stCondLst>
+                                    <p:cond delay="0"/>
+                                  </p:stCondLst>
+                                  <p:childTnLst>
+                                    <p:set>
+                                      <p:cBhvr>
+                                        <p:cTn id="98" dur="1" fill="hold">
+                                          <p:stCondLst>
+                                            <p:cond delay="0"/>
+                                          </p:stCondLst>
+                                        </p:cTn>
+                                        <p:tgtEl>
+                                          <p:spTgt spid="3">
+                                            <p:txEl>
+                                              <p:pRg st="40" end="40"/>
+                                            </p:txEl>
+                                          </p:spTgt>
+                                        </p:tgtEl>
+                                        <p:attrNameLst>
+                                          <p:attrName>style.visibility</p:attrName>
+                                        </p:attrNameLst>
+                                      </p:cBhvr>
+                                      <p:to>
+                                        <p:strVal val="visible"/>
+                                      </p:to>
+                                    </p:set>
+                                  </p:childTnLst>
+                                </p:cTn>
+                              </p:par>
+                            </p:childTnLst>
+                          </p:cTn>
+                        </p:par>
+                      </p:childTnLst>
+                    </p:cTn>
+                  </p:par>
+                  <p:par>
+                    <p:cTn id="99" fill="hold">
+                      <p:stCondLst>
+                        <p:cond delay="indefinite"/>
+                      </p:stCondLst>
+                      <p:childTnLst>
+                        <p:par>
+                          <p:cTn id="100" fill="hold">
+                            <p:stCondLst>
+                              <p:cond delay="0"/>
+                            </p:stCondLst>
+                            <p:childTnLst>
+                              <p:par>
+                                <p:cTn id="101" presetID="1" presetClass="entr" presetSubtype="0" fill="hold" grpId="0" nodeType="clickEffect">
+                                  <p:stCondLst>
+                                    <p:cond delay="0"/>
+                                  </p:stCondLst>
+                                  <p:childTnLst>
+                                    <p:set>
+                                      <p:cBhvr>
+                                        <p:cTn id="102" dur="1" fill="hold">
+                                          <p:stCondLst>
+                                            <p:cond delay="0"/>
+                                          </p:stCondLst>
+                                        </p:cTn>
+                                        <p:tgtEl>
+                                          <p:spTgt spid="3">
+                                            <p:txEl>
+                                              <p:pRg st="41" end="41"/>
+                                            </p:txEl>
+                                          </p:spTgt>
+                                        </p:tgtEl>
+                                        <p:attrNameLst>
+                                          <p:attrName>style.visibility</p:attrName>
+                                        </p:attrNameLst>
+                                      </p:cBhvr>
+                                      <p:to>
+                                        <p:strVal val="visible"/>
+                                      </p:to>
+                                    </p:set>
+                                  </p:childTnLst>
+                                </p:cTn>
+                              </p:par>
+                            </p:childTnLst>
+                          </p:cTn>
+                        </p:par>
+                      </p:childTnLst>
+                    </p:cTn>
+                  </p:par>
+                  <p:par>
+                    <p:cTn id="103" fill="hold">
+                      <p:stCondLst>
+                        <p:cond delay="indefinite"/>
+                      </p:stCondLst>
+                      <p:childTnLst>
+                        <p:par>
+                          <p:cTn id="104" fill="hold">
+                            <p:stCondLst>
+                              <p:cond delay="0"/>
+                            </p:stCondLst>
+                            <p:childTnLst>
+                              <p:par>
+                                <p:cTn id="105" presetID="1" presetClass="entr" presetSubtype="0" fill="hold" grpId="0" nodeType="clickEffect">
+                                  <p:stCondLst>
+                                    <p:cond delay="0"/>
+                                  </p:stCondLst>
+                                  <p:childTnLst>
+                                    <p:set>
+                                      <p:cBhvr>
+                                        <p:cTn id="106" dur="1" fill="hold">
+                                          <p:stCondLst>
+                                            <p:cond delay="0"/>
+                                          </p:stCondLst>
+                                        </p:cTn>
+                                        <p:tgtEl>
+                                          <p:spTgt spid="3">
+                                            <p:txEl>
+                                              <p:pRg st="42" end="42"/>
+                                            </p:txEl>
+                                          </p:spTgt>
+                                        </p:tgtEl>
+                                        <p:attrNameLst>
+                                          <p:attrName>style.visibility</p:attrName>
+                                        </p:attrNameLst>
+                                      </p:cBhvr>
+                                      <p:to>
+                                        <p:strVal val="visible"/>
+                                      </p:to>
+                                    </p:set>
+                                  </p:childTnLst>
+                                </p:cTn>
+                              </p:par>
+                            </p:childTnLst>
+                          </p:cTn>
+                        </p:par>
+                      </p:childTnLst>
+                    </p:cTn>
+                  </p:par>
+                  <p:par>
+                    <p:cTn id="107" fill="hold">
+                      <p:stCondLst>
+                        <p:cond delay="indefinite"/>
+                      </p:stCondLst>
+                      <p:childTnLst>
+                        <p:par>
+                          <p:cTn id="108" fill="hold">
+                            <p:stCondLst>
+                              <p:cond delay="0"/>
+                            </p:stCondLst>
+                            <p:childTnLst>
+                              <p:par>
+                                <p:cTn id="109" presetID="1" presetClass="entr" presetSubtype="0" fill="hold" grpId="0" nodeType="clickEffect">
+                                  <p:stCondLst>
+                                    <p:cond delay="0"/>
+                                  </p:stCondLst>
+                                  <p:childTnLst>
+                                    <p:set>
+                                      <p:cBhvr>
+                                        <p:cTn id="110" dur="1" fill="hold">
+                                          <p:stCondLst>
+                                            <p:cond delay="0"/>
+                                          </p:stCondLst>
+                                        </p:cTn>
+                                        <p:tgtEl>
+                                          <p:spTgt spid="3">
+                                            <p:txEl>
+                                              <p:pRg st="43" end="43"/>
+                                            </p:txEl>
+                                          </p:spTgt>
+                                        </p:tgtEl>
+                                        <p:attrNameLst>
+                                          <p:attrName>style.visibility</p:attrName>
+                                        </p:attrNameLst>
+                                      </p:cBhvr>
+                                      <p:to>
+                                        <p:strVal val="visible"/>
+                                      </p:to>
+                                    </p:set>
+                                  </p:childTnLst>
+                                </p:cTn>
+                              </p:par>
+                            </p:childTnLst>
+                          </p:cTn>
+                        </p:par>
+                      </p:childTnLst>
+                    </p:cTn>
+                  </p:par>
+                  <p:par>
+                    <p:cTn id="111" fill="hold">
+                      <p:stCondLst>
+                        <p:cond delay="indefinite"/>
+                      </p:stCondLst>
+                      <p:childTnLst>
+                        <p:par>
+                          <p:cTn id="112" fill="hold">
+                            <p:stCondLst>
+                              <p:cond delay="0"/>
+                            </p:stCondLst>
+                            <p:childTnLst>
+                              <p:par>
+                                <p:cTn id="113" presetID="1" presetClass="entr" presetSubtype="0" fill="hold" grpId="0" nodeType="clickEffect">
+                                  <p:stCondLst>
+                                    <p:cond delay="0"/>
+                                  </p:stCondLst>
+                                  <p:childTnLst>
+                                    <p:set>
+                                      <p:cBhvr>
+                                        <p:cTn id="114" dur="1" fill="hold">
+                                          <p:stCondLst>
+                                            <p:cond delay="0"/>
+                                          </p:stCondLst>
+                                        </p:cTn>
+                                        <p:tgtEl>
+                                          <p:spTgt spid="3">
+                                            <p:txEl>
+                                              <p:pRg st="44" end="44"/>
+                                            </p:txEl>
+                                          </p:spTgt>
+                                        </p:tgtEl>
+                                        <p:attrNameLst>
+                                          <p:attrName>style.visibility</p:attrName>
+                                        </p:attrNameLst>
+                                      </p:cBhvr>
+                                      <p:to>
+                                        <p:strVal val="visible"/>
+                                      </p:to>
+                                    </p:set>
+                                  </p:childTnLst>
+                                </p:cTn>
+                              </p:par>
+                            </p:childTnLst>
+                          </p:cTn>
+                        </p:par>
+                      </p:childTnLst>
+                    </p:cTn>
+                  </p:par>
+                  <p:par>
+                    <p:cTn id="115" fill="hold">
+                      <p:stCondLst>
+                        <p:cond delay="indefinite"/>
+                      </p:stCondLst>
+                      <p:childTnLst>
+                        <p:par>
+                          <p:cTn id="116" fill="hold">
+                            <p:stCondLst>
+                              <p:cond delay="0"/>
+                            </p:stCondLst>
+                            <p:childTnLst>
+                              <p:par>
+                                <p:cTn id="117" presetID="1" presetClass="entr" presetSubtype="0" fill="hold" grpId="0" nodeType="clickEffect">
+                                  <p:stCondLst>
+                                    <p:cond delay="0"/>
+                                  </p:stCondLst>
+                                  <p:childTnLst>
+                                    <p:set>
+                                      <p:cBhvr>
+                                        <p:cTn id="118" dur="1" fill="hold">
+                                          <p:stCondLst>
+                                            <p:cond delay="0"/>
+                                          </p:stCondLst>
+                                        </p:cTn>
+                                        <p:tgtEl>
+                                          <p:spTgt spid="3">
+                                            <p:txEl>
+                                              <p:pRg st="46" end="46"/>
+                                            </p:txEl>
+                                          </p:spTgt>
+                                        </p:tgtEl>
+                                        <p:attrNameLst>
+                                          <p:attrName>style.visibility</p:attrName>
+                                        </p:attrNameLst>
+                                      </p:cBhvr>
+                                      <p:to>
+                                        <p:strVal val="visible"/>
+                                      </p:to>
+                                    </p:set>
+                                  </p:childTnLst>
+                                </p:cTn>
+                              </p:par>
+                            </p:childTnLst>
+                          </p:cTn>
+                        </p:par>
+                      </p:childTnLst>
+                    </p:cTn>
+                  </p:par>
+                  <p:par>
+                    <p:cTn id="119" fill="hold">
+                      <p:stCondLst>
+                        <p:cond delay="indefinite"/>
+                      </p:stCondLst>
+                      <p:childTnLst>
+                        <p:par>
+                          <p:cTn id="120" fill="hold">
+                            <p:stCondLst>
+                              <p:cond delay="0"/>
+                            </p:stCondLst>
+                            <p:childTnLst>
+                              <p:par>
+                                <p:cTn id="121" presetID="1" presetClass="entr" presetSubtype="0" fill="hold" grpId="0" nodeType="clickEffect">
+                                  <p:stCondLst>
+                                    <p:cond delay="0"/>
+                                  </p:stCondLst>
+                                  <p:childTnLst>
+                                    <p:set>
+                                      <p:cBhvr>
+                                        <p:cTn id="122" dur="1" fill="hold">
+                                          <p:stCondLst>
+                                            <p:cond delay="0"/>
+                                          </p:stCondLst>
+                                        </p:cTn>
+                                        <p:tgtEl>
+                                          <p:spTgt spid="3">
+                                            <p:txEl>
+                                              <p:pRg st="48" end="48"/>
+                                            </p:txEl>
+                                          </p:spTgt>
+                                        </p:tgtEl>
+                                        <p:attrNameLst>
+                                          <p:attrName>style.visibility</p:attrName>
+                                        </p:attrNameLst>
+                                      </p:cBhvr>
+                                      <p:to>
+                                        <p:strVal val="visible"/>
+                                      </p:to>
+                                    </p:set>
+                                  </p:childTnLst>
+                                </p:cTn>
+                              </p:par>
+                            </p:childTnLst>
+                          </p:cTn>
+                        </p:par>
+                      </p:childTnLst>
+                    </p:cTn>
+                  </p:par>
+                  <p:par>
+                    <p:cTn id="123" fill="hold">
+                      <p:stCondLst>
+                        <p:cond delay="indefinite"/>
+                      </p:stCondLst>
+                      <p:childTnLst>
+                        <p:par>
+                          <p:cTn id="124" fill="hold">
+                            <p:stCondLst>
+                              <p:cond delay="0"/>
+                            </p:stCondLst>
+                            <p:childTnLst>
+                              <p:par>
+                                <p:cTn id="125" presetID="1" presetClass="entr" presetSubtype="0" fill="hold" grpId="0" nodeType="clickEffect">
+                                  <p:stCondLst>
+                                    <p:cond delay="0"/>
+                                  </p:stCondLst>
+                                  <p:childTnLst>
+                                    <p:set>
+                                      <p:cBhvr>
+                                        <p:cTn id="126" dur="1" fill="hold">
+                                          <p:stCondLst>
+                                            <p:cond delay="0"/>
+                                          </p:stCondLst>
+                                        </p:cTn>
+                                        <p:tgtEl>
+                                          <p:spTgt spid="3">
+                                            <p:txEl>
+                                              <p:pRg st="50" end="50"/>
+                                            </p:txEl>
+                                          </p:spTgt>
+                                        </p:tgtEl>
+                                        <p:attrNameLst>
+                                          <p:attrName>style.visibility</p:attrName>
+                                        </p:attrNameLst>
+                                      </p:cBhvr>
+                                      <p:to>
+                                        <p:strVal val="visible"/>
+                                      </p:to>
+                                    </p:set>
+                                  </p:childTnLst>
+                                </p:cTn>
+                              </p:par>
+                            </p:childTnLst>
+                          </p:cTn>
+                        </p:par>
+                      </p:childTnLst>
+                    </p:cTn>
+                  </p:par>
+                  <p:par>
+                    <p:cTn id="127" fill="hold">
+                      <p:stCondLst>
+                        <p:cond delay="indefinite"/>
+                      </p:stCondLst>
+                      <p:childTnLst>
+                        <p:par>
+                          <p:cTn id="128" fill="hold">
+                            <p:stCondLst>
+                              <p:cond delay="0"/>
+                            </p:stCondLst>
+                            <p:childTnLst>
+                              <p:par>
+                                <p:cTn id="129" presetID="1" presetClass="entr" presetSubtype="0" fill="hold" grpId="0" nodeType="clickEffect">
+                                  <p:stCondLst>
+                                    <p:cond delay="0"/>
+                                  </p:stCondLst>
+                                  <p:childTnLst>
+                                    <p:set>
+                                      <p:cBhvr>
+                                        <p:cTn id="130" dur="1" fill="hold">
+                                          <p:stCondLst>
+                                            <p:cond delay="0"/>
+                                          </p:stCondLst>
+                                        </p:cTn>
+                                        <p:tgtEl>
+                                          <p:spTgt spid="3">
+                                            <p:txEl>
+                                              <p:pRg st="52" end="52"/>
+                                            </p:txEl>
+                                          </p:spTgt>
+                                        </p:tgtEl>
+                                        <p:attrNameLst>
+                                          <p:attrName>style.visibility</p:attrName>
+                                        </p:attrNameLst>
+                                      </p:cBhvr>
+                                      <p:to>
+                                        <p:strVal val="visible"/>
+                                      </p:to>
+                                    </p:set>
+                                  </p:childTnLst>
+                                </p:cTn>
+                              </p:par>
+                            </p:childTnLst>
+                          </p:cTn>
+                        </p:par>
+                      </p:childTnLst>
+                    </p:cTn>
+                  </p:par>
+                  <p:par>
+                    <p:cTn id="131" fill="hold">
+                      <p:stCondLst>
+                        <p:cond delay="indefinite"/>
+                      </p:stCondLst>
+                      <p:childTnLst>
+                        <p:par>
+                          <p:cTn id="132" fill="hold">
+                            <p:stCondLst>
+                              <p:cond delay="0"/>
+                            </p:stCondLst>
+                            <p:childTnLst>
+                              <p:par>
+                                <p:cTn id="133" presetID="1" presetClass="entr" presetSubtype="0" fill="hold" grpId="0" nodeType="clickEffect">
+                                  <p:stCondLst>
+                                    <p:cond delay="0"/>
+                                  </p:stCondLst>
+                                  <p:childTnLst>
+                                    <p:set>
+                                      <p:cBhvr>
+                                        <p:cTn id="134" dur="1" fill="hold">
+                                          <p:stCondLst>
+                                            <p:cond delay="0"/>
+                                          </p:stCondLst>
+                                        </p:cTn>
+                                        <p:tgtEl>
+                                          <p:spTgt spid="3">
+                                            <p:txEl>
+                                              <p:pRg st="55" end="55"/>
+                                            </p:txEl>
+                                          </p:spTgt>
+                                        </p:tgtEl>
+                                        <p:attrNameLst>
+                                          <p:attrName>style.visibility</p:attrName>
+                                        </p:attrNameLst>
+                                      </p:cBhvr>
+                                      <p:to>
+                                        <p:strVal val="visible"/>
+                                      </p:to>
+                                    </p:set>
+                                  </p:childTnLst>
+                                </p:cTn>
+                              </p:par>
+                            </p:childTnLst>
+                          </p:cTn>
+                        </p:par>
+                      </p:childTnLst>
+                    </p:cTn>
+                  </p:par>
+                  <p:par>
+                    <p:cTn id="135" fill="hold">
+                      <p:stCondLst>
+                        <p:cond delay="indefinite"/>
+                      </p:stCondLst>
+                      <p:childTnLst>
+                        <p:par>
+                          <p:cTn id="136" fill="hold">
+                            <p:stCondLst>
+                              <p:cond delay="0"/>
+                            </p:stCondLst>
+                            <p:childTnLst>
+                              <p:par>
+                                <p:cTn id="137" presetID="1" presetClass="entr" presetSubtype="0" fill="hold" grpId="0" nodeType="clickEffect">
+                                  <p:stCondLst>
+                                    <p:cond delay="0"/>
+                                  </p:stCondLst>
+                                  <p:childTnLst>
+                                    <p:set>
+                                      <p:cBhvr>
+                                        <p:cTn id="138" dur="1" fill="hold">
+                                          <p:stCondLst>
+                                            <p:cond delay="0"/>
+                                          </p:stCondLst>
+                                        </p:cTn>
+                                        <p:tgtEl>
+                                          <p:spTgt spid="3">
+                                            <p:txEl>
+                                              <p:pRg st="57" end="57"/>
+                                            </p:txEl>
+                                          </p:spTgt>
+                                        </p:tgtEl>
+                                        <p:attrNameLst>
+                                          <p:attrName>style.visibility</p:attrName>
+                                        </p:attrNameLst>
+                                      </p:cBhvr>
+                                      <p:to>
+                                        <p:strVal val="visible"/>
+                                      </p:to>
+                                    </p:set>
+                                  </p:childTnLst>
+                                </p:cTn>
+                              </p:par>
+                            </p:childTnLst>
+                          </p:cTn>
+                        </p:par>
+                      </p:childTnLst>
+                    </p:cTn>
+                  </p:par>
+                  <p:par>
+                    <p:cTn id="139" fill="hold">
+                      <p:stCondLst>
+                        <p:cond delay="indefinite"/>
+                      </p:stCondLst>
+                      <p:childTnLst>
+                        <p:par>
+                          <p:cTn id="140" fill="hold">
+                            <p:stCondLst>
+                              <p:cond delay="0"/>
+                            </p:stCondLst>
+                            <p:childTnLst>
+                              <p:par>
+                                <p:cTn id="141" presetID="1" presetClass="entr" presetSubtype="0" fill="hold" grpId="0" nodeType="clickEffect">
+                                  <p:stCondLst>
+                                    <p:cond delay="0"/>
+                                  </p:stCondLst>
+                                  <p:childTnLst>
+                                    <p:set>
+                                      <p:cBhvr>
+                                        <p:cTn id="142" dur="1" fill="hold">
+                                          <p:stCondLst>
+                                            <p:cond delay="0"/>
+                                          </p:stCondLst>
+                                        </p:cTn>
+                                        <p:tgtEl>
+                                          <p:spTgt spid="3">
+                                            <p:txEl>
+                                              <p:pRg st="58" end="58"/>
+                                            </p:txEl>
+                                          </p:spTgt>
+                                        </p:tgtEl>
+                                        <p:attrNameLst>
+                                          <p:attrName>style.visibility</p:attrName>
+                                        </p:attrNameLst>
+                                      </p:cBhvr>
+                                      <p:to>
+                                        <p:strVal val="visible"/>
+                                      </p:to>
+                                    </p:set>
+                                  </p:childTnLst>
+                                </p:cTn>
+                              </p:par>
+                            </p:childTnLst>
+                          </p:cTn>
+                        </p:par>
+                      </p:childTnLst>
+                    </p:cTn>
+                  </p:par>
+                  <p:par>
+                    <p:cTn id="143" fill="hold">
+                      <p:stCondLst>
+                        <p:cond delay="indefinite"/>
+                      </p:stCondLst>
+                      <p:childTnLst>
+                        <p:par>
+                          <p:cTn id="144" fill="hold">
+                            <p:stCondLst>
+                              <p:cond delay="0"/>
+                            </p:stCondLst>
+                            <p:childTnLst>
+                              <p:par>
+                                <p:cTn id="145" presetID="1" presetClass="entr" presetSubtype="0" fill="hold" grpId="0" nodeType="clickEffect">
+                                  <p:stCondLst>
+                                    <p:cond delay="0"/>
+                                  </p:stCondLst>
+                                  <p:childTnLst>
+                                    <p:set>
+                                      <p:cBhvr>
+                                        <p:cTn id="146" dur="1" fill="hold">
+                                          <p:stCondLst>
+                                            <p:cond delay="0"/>
+                                          </p:stCondLst>
+                                        </p:cTn>
+                                        <p:tgtEl>
+                                          <p:spTgt spid="3">
+                                            <p:txEl>
+                                              <p:pRg st="63" end="63"/>
+                                            </p:txEl>
+                                          </p:spTgt>
+                                        </p:tgtEl>
+                                        <p:attrNameLst>
+                                          <p:attrName>style.visibility</p:attrName>
+                                        </p:attrNameLst>
+                                      </p:cBhvr>
+                                      <p:to>
+                                        <p:strVal val="visible"/>
+                                      </p:to>
+                                    </p:set>
+                                  </p:childTnLst>
+                                </p:cTn>
+                              </p:par>
+                            </p:childTnLst>
+                          </p:cTn>
+                        </p:par>
+                      </p:childTnLst>
+                    </p:cTn>
+                  </p:par>
+                  <p:par>
+                    <p:cTn id="147" fill="hold">
+                      <p:stCondLst>
+                        <p:cond delay="indefinite"/>
+                      </p:stCondLst>
+                      <p:childTnLst>
+                        <p:par>
+                          <p:cTn id="148" fill="hold">
+                            <p:stCondLst>
+                              <p:cond delay="0"/>
+                            </p:stCondLst>
+                            <p:childTnLst>
+                              <p:par>
+                                <p:cTn id="149" presetID="1" presetClass="entr" presetSubtype="0" fill="hold" grpId="0" nodeType="clickEffect">
+                                  <p:stCondLst>
+                                    <p:cond delay="0"/>
+                                  </p:stCondLst>
+                                  <p:childTnLst>
+                                    <p:set>
+                                      <p:cBhvr>
+                                        <p:cTn id="150" dur="1" fill="hold">
+                                          <p:stCondLst>
+                                            <p:cond delay="0"/>
+                                          </p:stCondLst>
+                                        </p:cTn>
+                                        <p:tgtEl>
+                                          <p:spTgt spid="3">
+                                            <p:txEl>
+                                              <p:pRg st="65" end="65"/>
+                                            </p:txEl>
+                                          </p:spTgt>
+                                        </p:tgtEl>
+                                        <p:attrNameLst>
+                                          <p:attrName>style.visibility</p:attrName>
+                                        </p:attrNameLst>
+                                      </p:cBhvr>
+                                      <p:to>
+                                        <p:strVal val="visible"/>
+                                      </p:to>
+                                    </p:set>
+                                  </p:childTnLst>
+                                </p:cTn>
+                              </p:par>
+                            </p:childTnLst>
+                          </p:cTn>
+                        </p:par>
+                      </p:childTnLst>
+                    </p:cTn>
+                  </p:par>
+                  <p:par>
+                    <p:cTn id="151" fill="hold">
+                      <p:stCondLst>
+                        <p:cond delay="indefinite"/>
+                      </p:stCondLst>
+                      <p:childTnLst>
+                        <p:par>
+                          <p:cTn id="152" fill="hold">
+                            <p:stCondLst>
+                              <p:cond delay="0"/>
+                            </p:stCondLst>
+                            <p:childTnLst>
+                              <p:par>
+                                <p:cTn id="153" presetID="1" presetClass="entr" presetSubtype="0" fill="hold" grpId="0" nodeType="clickEffect">
+                                  <p:stCondLst>
+                                    <p:cond delay="0"/>
+                                  </p:stCondLst>
+                                  <p:childTnLst>
+                                    <p:set>
+                                      <p:cBhvr>
+                                        <p:cTn id="154" dur="1" fill="hold">
+                                          <p:stCondLst>
+                                            <p:cond delay="0"/>
+                                          </p:stCondLst>
+                                        </p:cTn>
+                                        <p:tgtEl>
+                                          <p:spTgt spid="3">
+                                            <p:txEl>
+                                              <p:pRg st="68" end="68"/>
+                                            </p:txEl>
+                                          </p:spTgt>
+                                        </p:tgtEl>
+                                        <p:attrNameLst>
+                                          <p:attrName>style.visibility</p:attrName>
+                                        </p:attrNameLst>
+                                      </p:cBhvr>
+                                      <p:to>
+                                        <p:strVal val="visible"/>
+                                      </p:to>
+                                    </p:set>
+                                  </p:childTnLst>
+                                </p:cTn>
+                              </p:par>
+                            </p:childTnLst>
+                          </p:cTn>
+                        </p:par>
+                      </p:childTnLst>
+                    </p:cTn>
+                  </p:par>
+                  <p:par>
+                    <p:cTn id="155" fill="hold">
+                      <p:stCondLst>
+                        <p:cond delay="indefinite"/>
+                      </p:stCondLst>
+                      <p:childTnLst>
+                        <p:par>
+                          <p:cTn id="156" fill="hold">
+                            <p:stCondLst>
+                              <p:cond delay="0"/>
+                            </p:stCondLst>
+                            <p:childTnLst>
+                              <p:par>
+                                <p:cTn id="157" presetID="1" presetClass="entr" presetSubtype="0" fill="hold" grpId="0" nodeType="clickEffect">
+                                  <p:stCondLst>
+                                    <p:cond delay="0"/>
+                                  </p:stCondLst>
+                                  <p:childTnLst>
+                                    <p:set>
+                                      <p:cBhvr>
+                                        <p:cTn id="158" dur="1" fill="hold">
+                                          <p:stCondLst>
+                                            <p:cond delay="0"/>
+                                          </p:stCondLst>
+                                        </p:cTn>
+                                        <p:tgtEl>
+                                          <p:spTgt spid="3">
+                                            <p:txEl>
+                                              <p:pRg st="70" end="70"/>
+                                            </p:txEl>
+                                          </p:spTgt>
+                                        </p:tgtEl>
+                                        <p:attrNameLst>
+                                          <p:attrName>style.visibility</p:attrName>
+                                        </p:attrNameLst>
+                                      </p:cBhvr>
+                                      <p:to>
+                                        <p:strVal val="visible"/>
+                                      </p:to>
+                                    </p:set>
+                                  </p:childTnLst>
+                                </p:cTn>
+                              </p:par>
+                            </p:childTnLst>
+                          </p:cTn>
+                        </p:par>
+                      </p:childTnLst>
+                    </p:cTn>
+                  </p:par>
+                  <p:par>
+                    <p:cTn id="159" fill="hold">
+                      <p:stCondLst>
+                        <p:cond delay="indefinite"/>
+                      </p:stCondLst>
+                      <p:childTnLst>
+                        <p:par>
+                          <p:cTn id="160" fill="hold">
+                            <p:stCondLst>
+                              <p:cond delay="0"/>
+                            </p:stCondLst>
+                            <p:childTnLst>
+                              <p:par>
+                                <p:cTn id="161" presetID="1" presetClass="entr" presetSubtype="0" fill="hold" grpId="0" nodeType="clickEffect">
+                                  <p:stCondLst>
+                                    <p:cond delay="0"/>
+                                  </p:stCondLst>
+                                  <p:childTnLst>
+                                    <p:set>
+                                      <p:cBhvr>
+                                        <p:cTn id="162" dur="1" fill="hold">
+                                          <p:stCondLst>
+                                            <p:cond delay="0"/>
+                                          </p:stCondLst>
+                                        </p:cTn>
+                                        <p:tgtEl>
+                                          <p:spTgt spid="3">
+                                            <p:txEl>
+                                              <p:pRg st="72" end="72"/>
+                                            </p:txEl>
+                                          </p:spTgt>
+                                        </p:tgtEl>
+                                        <p:attrNameLst>
+                                          <p:attrName>style.visibility</p:attrName>
+                                        </p:attrNameLst>
+                                      </p:cBhvr>
+                                      <p:to>
+                                        <p:strVal val="visible"/>
+                                      </p:to>
+                                    </p:set>
+                                  </p:childTnLst>
+                                </p:cTn>
+                              </p:par>
+                            </p:childTnLst>
+                          </p:cTn>
+                        </p:par>
+                      </p:childTnLst>
+                    </p:cTn>
+                  </p:par>
+                  <p:par>
+                    <p:cTn id="163" fill="hold">
+                      <p:stCondLst>
+                        <p:cond delay="indefinite"/>
+                      </p:stCondLst>
+                      <p:childTnLst>
+                        <p:par>
+                          <p:cTn id="164" fill="hold">
+                            <p:stCondLst>
+                              <p:cond delay="0"/>
+                            </p:stCondLst>
+                            <p:childTnLst>
+                              <p:par>
+                                <p:cTn id="165" presetID="1" presetClass="entr" presetSubtype="0" fill="hold" grpId="0" nodeType="clickEffect">
+                                  <p:stCondLst>
+                                    <p:cond delay="0"/>
+                                  </p:stCondLst>
+                                  <p:childTnLst>
+                                    <p:set>
+                                      <p:cBhvr>
+                                        <p:cTn id="166" dur="1" fill="hold">
+                                          <p:stCondLst>
+                                            <p:cond delay="0"/>
+                                          </p:stCondLst>
+                                        </p:cTn>
+                                        <p:tgtEl>
+                                          <p:spTgt spid="3">
+                                            <p:txEl>
+                                              <p:pRg st="74" end="74"/>
+                                            </p:txEl>
+                                          </p:spTgt>
+                                        </p:tgtEl>
+                                        <p:attrNameLst>
+                                          <p:attrName>style.visibility</p:attrName>
+                                        </p:attrNameLst>
+                                      </p:cBhvr>
+                                      <p:to>
+                                        <p:strVal val="visible"/>
+                                      </p:to>
+                                    </p:set>
+                                  </p:childTnLst>
+                                </p:cTn>
+                              </p:par>
+                            </p:childTnLst>
+                          </p:cTn>
+                        </p:par>
+                      </p:childTnLst>
+                    </p:cTn>
+                  </p:par>
+                  <p:par>
+                    <p:cTn id="167" fill="hold">
+                      <p:stCondLst>
+                        <p:cond delay="indefinite"/>
+                      </p:stCondLst>
+                      <p:childTnLst>
+                        <p:par>
+                          <p:cTn id="168" fill="hold">
+                            <p:stCondLst>
+                              <p:cond delay="0"/>
+                            </p:stCondLst>
+                            <p:childTnLst>
+                              <p:par>
+                                <p:cTn id="169" presetID="1" presetClass="entr" presetSubtype="0" fill="hold" grpId="0" nodeType="clickEffect">
+                                  <p:stCondLst>
+                                    <p:cond delay="0"/>
+                                  </p:stCondLst>
+                                  <p:childTnLst>
+                                    <p:set>
+                                      <p:cBhvr>
+                                        <p:cTn id="170" dur="1" fill="hold">
+                                          <p:stCondLst>
+                                            <p:cond delay="0"/>
+                                          </p:stCondLst>
+                                        </p:cTn>
+                                        <p:tgtEl>
+                                          <p:spTgt spid="3">
+                                            <p:txEl>
+                                              <p:pRg st="76" end="76"/>
+                                            </p:txEl>
+                                          </p:spTgt>
+                                        </p:tgtEl>
+                                        <p:attrNameLst>
+                                          <p:attrName>style.visibility</p:attrName>
+                                        </p:attrNameLst>
+                                      </p:cBhvr>
+                                      <p:to>
+                                        <p:strVal val="visible"/>
+                                      </p:to>
+                                    </p:set>
+                                  </p:childTnLst>
+                                </p:cTn>
+                              </p:par>
+                            </p:childTnLst>
+                          </p:cTn>
+                        </p:par>
+                      </p:childTnLst>
+                    </p:cTn>
+                  </p:par>
+                  <p:par>
+                    <p:cTn id="171" fill="hold">
+                      <p:stCondLst>
+                        <p:cond delay="indefinite"/>
+                      </p:stCondLst>
+                      <p:childTnLst>
+                        <p:par>
+                          <p:cTn id="172" fill="hold">
+                            <p:stCondLst>
+                              <p:cond delay="0"/>
+                            </p:stCondLst>
+                            <p:childTnLst>
+                              <p:par>
+                                <p:cTn id="173" presetID="1" presetClass="entr" presetSubtype="0" fill="hold" grpId="0" nodeType="clickEffect">
+                                  <p:stCondLst>
+                                    <p:cond delay="0"/>
+                                  </p:stCondLst>
+                                  <p:childTnLst>
+                                    <p:set>
+                                      <p:cBhvr>
+                                        <p:cTn id="174" dur="1" fill="hold">
+                                          <p:stCondLst>
+                                            <p:cond delay="0"/>
+                                          </p:stCondLst>
+                                        </p:cTn>
+                                        <p:tgtEl>
+                                          <p:spTgt spid="3">
+                                            <p:txEl>
+                                              <p:pRg st="79" end="79"/>
+                                            </p:txEl>
+                                          </p:spTgt>
+                                        </p:tgtEl>
+                                        <p:attrNameLst>
+                                          <p:attrName>style.visibility</p:attrName>
+                                        </p:attrNameLst>
+                                      </p:cBhvr>
+                                      <p:to>
+                                        <p:strVal val="visible"/>
+                                      </p:to>
+                                    </p:set>
+                                  </p:childTnLst>
+                                </p:cTn>
+                              </p:par>
+                            </p:childTnLst>
+                          </p:cTn>
+                        </p:par>
+                      </p:childTnLst>
+                    </p:cTn>
+                  </p:par>
+                  <p:par>
+                    <p:cTn id="175" fill="hold">
+                      <p:stCondLst>
+                        <p:cond delay="indefinite"/>
+                      </p:stCondLst>
+                      <p:childTnLst>
+                        <p:par>
+                          <p:cTn id="176" fill="hold">
+                            <p:stCondLst>
+                              <p:cond delay="0"/>
+                            </p:stCondLst>
+                            <p:childTnLst>
+                              <p:par>
+                                <p:cTn id="177" presetID="1" presetClass="entr" presetSubtype="0" fill="hold" grpId="0" nodeType="clickEffect">
+                                  <p:stCondLst>
+                                    <p:cond delay="0"/>
+                                  </p:stCondLst>
+                                  <p:childTnLst>
+                                    <p:set>
+                                      <p:cBhvr>
+                                        <p:cTn id="178" dur="1" fill="hold">
+                                          <p:stCondLst>
+                                            <p:cond delay="0"/>
+                                          </p:stCondLst>
+                                        </p:cTn>
+                                        <p:tgtEl>
+                                          <p:spTgt spid="3">
+                                            <p:txEl>
+                                              <p:pRg st="80" end="80"/>
+                                            </p:txEl>
+                                          </p:spTgt>
+                                        </p:tgtEl>
+                                        <p:attrNameLst>
+                                          <p:attrName>style.visibility</p:attrName>
+                                        </p:attrNameLst>
+                                      </p:cBhvr>
+                                      <p:to>
+                                        <p:strVal val="visible"/>
+                                      </p:to>
+                                    </p:set>
+                                  </p:childTnLst>
+                                </p:cTn>
+                              </p:par>
+                            </p:childTnLst>
+                          </p:cTn>
+                        </p:par>
+                      </p:childTnLst>
+                    </p:cTn>
+                  </p:par>
+                  <p:par>
+                    <p:cTn id="179" fill="hold">
+                      <p:stCondLst>
+                        <p:cond delay="indefinite"/>
+                      </p:stCondLst>
+                      <p:childTnLst>
+                        <p:par>
+                          <p:cTn id="180" fill="hold">
+                            <p:stCondLst>
+                              <p:cond delay="0"/>
+                            </p:stCondLst>
+                            <p:childTnLst>
+                              <p:par>
+                                <p:cTn id="181" presetID="1" presetClass="entr" presetSubtype="0" fill="hold" grpId="0" nodeType="clickEffect">
+                                  <p:stCondLst>
+                                    <p:cond delay="0"/>
+                                  </p:stCondLst>
+                                  <p:childTnLst>
+                                    <p:set>
+                                      <p:cBhvr>
+                                        <p:cTn id="182" dur="1" fill="hold">
+                                          <p:stCondLst>
+                                            <p:cond delay="0"/>
+                                          </p:stCondLst>
+                                        </p:cTn>
+                                        <p:tgtEl>
+                                          <p:spTgt spid="3">
+                                            <p:txEl>
+                                              <p:pRg st="88" end="88"/>
+                                            </p:txEl>
+                                          </p:spTgt>
+                                        </p:tgtEl>
+                                        <p:attrNameLst>
+                                          <p:attrName>style.visibility</p:attrName>
+                                        </p:attrNameLst>
+                                      </p:cBhvr>
+                                      <p:to>
+                                        <p:strVal val="visible"/>
+                                      </p:to>
+                                    </p:set>
+                                  </p:childTnLst>
+                                </p:cTn>
+                              </p:par>
+                            </p:childTnLst>
+                          </p:cTn>
+                        </p:par>
+                      </p:childTnLst>
+                    </p:cTn>
+                  </p:par>
+                  <p:par>
+                    <p:cTn id="183" fill="hold">
+                      <p:stCondLst>
+                        <p:cond delay="indefinite"/>
+                      </p:stCondLst>
+                      <p:childTnLst>
+                        <p:par>
+                          <p:cTn id="184" fill="hold">
+                            <p:stCondLst>
+                              <p:cond delay="0"/>
+                            </p:stCondLst>
+                            <p:childTnLst>
+                              <p:par>
+                                <p:cTn id="185" presetID="1" presetClass="entr" presetSubtype="0" fill="hold" grpId="0" nodeType="clickEffect">
+                                  <p:stCondLst>
+                                    <p:cond delay="0"/>
+                                  </p:stCondLst>
+                                  <p:childTnLst>
+                                    <p:set>
+                                      <p:cBhvr>
+                                        <p:cTn id="186" dur="1" fill="hold">
+                                          <p:stCondLst>
+                                            <p:cond delay="0"/>
+                                          </p:stCondLst>
+                                        </p:cTn>
+                                        <p:tgtEl>
+                                          <p:spTgt spid="3">
+                                            <p:txEl>
+                                              <p:pRg st="90" end="90"/>
+                                            </p:txEl>
+                                          </p:spTgt>
+                                        </p:tgtEl>
+                                        <p:attrNameLst>
+                                          <p:attrName>style.visibility</p:attrName>
+                                        </p:attrNameLst>
+                                      </p:cBhvr>
+                                      <p:to>
+                                        <p:strVal val="visible"/>
+                                      </p:to>
+                                    </p:set>
+                                  </p:childTnLst>
+                                </p:cTn>
+                              </p:par>
+                            </p:childTnLst>
+                          </p:cTn>
+                        </p:par>
+                      </p:childTnLst>
+                    </p:cTn>
+                  </p:par>
+                </p:childTnLst>
+              </p:cTn>
+              <p:prevCondLst>
+                <p:cond evt="onPrev" delay="0">
+                  <p:tgtEl>
+                    <p:sldTgt/>
+                  </p:tgtEl>
+                </p:cond>
+              </p:prevCondLst>
+              <p:nextCondLst>
+                <p:cond evt="onNext" delay="0">
+                  <p:tgtEl>
+                    <p:sldTgt/>
+                  </p:tgtEl>
+                </p:cond>
+              </p:nextCondLst>
+            </p:seq>
+          </p:childTnLst>
+        </p:cTn>
+      </p:par>
+    </p:tnLst>
+    <p:bldLst>
+      <p:bldP spid="3" grpId="0" uiExpand="1" build="p"/>
+    </p:bldLst>
+  </p:timing>
+</p:sld>
+</file>
+
+<file path=ppt/slides/slide8.xml><?xml version="1.0" encoding="utf-8"?>
 <p:sld xmlns:a="http://schemas.openxmlformats.org/drawingml/2006/main" xmlns:r="http://schemas.openxmlformats.org/officeDocument/2006/relationships" xmlns:p="http://schemas.openxmlformats.org/presentationml/2006/main">
   <p:cSld>
     <p:spTree>
@@ -4566,7 +10846,7 @@
 </p:sld>
 </file>
 
-<file path=ppt/slides/slide8.xml><?xml version="1.0" encoding="utf-8"?>
+<file path=ppt/slides/slide9.xml><?xml version="1.0" encoding="utf-8"?>
 <p:sld xmlns:a="http://schemas.openxmlformats.org/drawingml/2006/main" xmlns:r="http://schemas.openxmlformats.org/officeDocument/2006/relationships" xmlns:p="http://schemas.openxmlformats.org/presentationml/2006/main">
   <p:cSld>
     <p:spTree>

--- a/docs/activities/Unit-04-Discrete.pptx
+++ b/docs/activities/Unit-04-Discrete.pptx
@@ -14,6 +14,9 @@
     <p:sldId id="262" r:id="rId8"/>
     <p:sldId id="263" r:id="rId9"/>
     <p:sldId id="264" r:id="rId10"/>
+    <p:sldId id="265" r:id="rId11"/>
+    <p:sldId id="266" r:id="rId12"/>
+    <p:sldId id="267" r:id="rId13"/>
   </p:sldIdLst>
   <p:sldSz cx="9144000" cy="6858000" type="screen4x3"/>
   <p:notesSz cx="6858000" cy="9144000"/>
@@ -2677,997 +2680,7 @@
 </p:sld>
 </file>
 
-<file path=ppt/slides/slide2.xml><?xml version="1.0" encoding="utf-8"?>
-<p:sld xmlns:a="http://schemas.openxmlformats.org/drawingml/2006/main" xmlns:r="http://schemas.openxmlformats.org/officeDocument/2006/relationships" xmlns:p="http://schemas.openxmlformats.org/presentationml/2006/main">
-  <p:cSld>
-    <p:spTree>
-      <p:nvGrpSpPr>
-        <p:cNvPr id="1" name=""/>
-        <p:cNvGrpSpPr/>
-        <p:nvPr/>
-      </p:nvGrpSpPr>
-      <p:grpSpPr>
-        <a:xfrm>
-          <a:off x="0" y="0"/>
-          <a:ext cx="0" cy="0"/>
-          <a:chOff x="0" y="0"/>
-          <a:chExt cx="0" cy="0"/>
-        </a:xfrm>
-      </p:grpSpPr>
-      <p:sp>
-        <p:nvSpPr>
-          <p:cNvPr id="2" name="Title 1"/>
-          <p:cNvSpPr>
-            <a:spLocks noGrp="1"/>
-          </p:cNvSpPr>
-          <p:nvPr>
-            <p:ph type="title"/>
-          </p:nvPr>
-        </p:nvSpPr>
-        <p:spPr>
-          <a:xfrm>
-            <a:off x="722313" y="1660820"/>
-            <a:ext cx="7772400" cy="4108156"/>
-          </a:xfrm>
-          <a:prstGeom prst="rect">
-            <a:avLst/>
-          </a:prstGeom>
-        </p:spPr>
-        <p:txBody>
-          <a:bodyPr/>
-          <a:lstStyle/>
-          <a:p>
-            <a:pPr lvl="0" indent="0" marL="0">
-              <a:buNone/>
-            </a:pPr>
-            <a:r>
-              <a:rPr/>
-              <a:t>Resources</a:t>
-            </a:r>
-          </a:p>
-        </p:txBody>
-      </p:sp>
-      <p:sp>
-        <p:nvSpPr>
-          <p:cNvPr id="3" name="Slide Number Placeholder 2"/>
-          <p:cNvSpPr>
-            <a:spLocks noGrp="1"/>
-          </p:cNvSpPr>
-          <p:nvPr>
-            <p:ph idx="10" sz="quarter" type="sldNum"/>
-          </p:nvPr>
-        </p:nvSpPr>
-        <p:spPr/>
-        <p:txBody>
-          <a:bodyPr/>
-          <a:lstStyle/>
-          <a:p>
-            <a:fld id="{9C13042B-154E-4D18-B726-07B2F714EFCF}" type="slidenum">
-              <a:rPr lang="en-US" smtClean="0"/>
-              <a:pPr/>
-              <a:t>‹#›</a:t>
-            </a:fld>
-            <a:endParaRPr dirty="0" lang="en-US"/>
-          </a:p>
-        </p:txBody>
-      </p:sp>
-    </p:spTree>
-  </p:cSld>
-</p:sld>
-</file>
-
-<file path=ppt/slides/slide3.xml><?xml version="1.0" encoding="utf-8"?>
-<p:sld xmlns:a="http://schemas.openxmlformats.org/drawingml/2006/main" xmlns:r="http://schemas.openxmlformats.org/officeDocument/2006/relationships" xmlns:p="http://schemas.openxmlformats.org/presentationml/2006/main">
-  <p:cSld>
-    <p:spTree>
-      <p:nvGrpSpPr>
-        <p:cNvPr id="1" name=""/>
-        <p:cNvGrpSpPr/>
-        <p:nvPr/>
-      </p:nvGrpSpPr>
-      <p:grpSpPr>
-        <a:xfrm>
-          <a:off x="0" y="0"/>
-          <a:ext cx="0" cy="0"/>
-          <a:chOff x="0" y="0"/>
-          <a:chExt cx="0" cy="0"/>
-        </a:xfrm>
-      </p:grpSpPr>
-      <p:sp>
-        <p:nvSpPr>
-          <p:cNvPr id="2" name="Title Placeholder 1"/>
-          <p:cNvSpPr>
-            <a:spLocks noGrp="1"/>
-          </p:cNvSpPr>
-          <p:nvPr>
-            <p:ph type="title"/>
-          </p:nvPr>
-        </p:nvSpPr>
-        <p:spPr bwMode="auto">
-          <a:xfrm>
-            <a:off x="433680" y="423297"/>
-            <a:ext cx="8229600" cy="784602"/>
-          </a:xfrm>
-          <a:prstGeom prst="rect">
-            <a:avLst/>
-          </a:prstGeom>
-          <a:noFill/>
-          <a:ln w="9525">
-            <a:noFill/>
-            <a:miter lim="800000"/>
-            <a:headEnd/>
-            <a:tailEnd/>
-          </a:ln>
-        </p:spPr>
-        <p:txBody>
-          <a:bodyPr/>
-          <a:lstStyle/>
-          <a:p>
-            <a:pPr lvl="0" indent="0" marL="0">
-              <a:buNone/>
-            </a:pPr>
-            <a:r>
-              <a:rPr/>
-              <a:t>Handouts</a:t>
-            </a:r>
-          </a:p>
-        </p:txBody>
-      </p:sp>
-      <p:sp>
-        <p:nvSpPr>
-          <p:cNvPr id="3" name="Text Placeholder 2"/>
-          <p:cNvSpPr>
-            <a:spLocks noGrp="1"/>
-          </p:cNvSpPr>
-          <p:nvPr>
-            <p:ph idx="1"/>
-          </p:nvPr>
-        </p:nvSpPr>
-        <p:spPr/>
-        <p:txBody>
-          <a:bodyPr/>
-          <a:lstStyle/>
-          <a:p>
-            <a:pPr lvl="0"/>
-            <a:r>
-              <a:rPr/>
-              <a:t>Download the </a:t>
-            </a:r>
-            <a:r>
-              <a:rPr>
-                <a:hlinkClick r:id="rId2"/>
-              </a:rPr>
-              <a:t>Unit 04 Handout: Probability</a:t>
-            </a:r>
-            <a:r>
-              <a:rPr/>
-              <a:t> before class and bring it with you.</a:t>
-            </a:r>
-          </a:p>
-          <a:p>
-            <a:pPr lvl="0"/>
-            <a:r>
-              <a:rPr/>
-              <a:t>I will continue to post additional handouts as we progress through the course. Please watch for </a:t>
-            </a:r>
-            <a:r>
-              <a:rPr b="1"/>
-              <a:t>Canvas Announcements</a:t>
-            </a:r>
-            <a:r>
-              <a:rPr/>
-              <a:t> when a new handout becomes available.</a:t>
-            </a:r>
-          </a:p>
-          <a:p>
-            <a:pPr lvl="0"/>
-            <a:r>
-              <a:rPr/>
-              <a:t>It is very important that you </a:t>
-            </a:r>
-            <a:r>
-              <a:rPr b="1"/>
-              <a:t>bring the appropriate handout to class regularly</a:t>
-            </a:r>
-            <a:r>
-              <a:rPr/>
-              <a:t>, either as a printed copy or on your writing device.</a:t>
-            </a:r>
-          </a:p>
-        </p:txBody>
-      </p:sp>
-      <p:sp>
-        <p:nvSpPr>
-          <p:cNvPr id="4" name="Slide Number Placeholder 3"/>
-          <p:cNvSpPr>
-            <a:spLocks noGrp="1"/>
-          </p:cNvSpPr>
-          <p:nvPr>
-            <p:ph idx="10" sz="quarter" type="sldNum"/>
-          </p:nvPr>
-        </p:nvSpPr>
-        <p:spPr/>
-        <p:txBody>
-          <a:bodyPr/>
-          <a:lstStyle/>
-          <a:p>
-            <a:fld id="{9C13042B-154E-4D18-B726-07B2F714EFCF}" type="slidenum">
-              <a:rPr lang="en-US" smtClean="0"/>
-              <a:pPr/>
-              <a:t>‹#›</a:t>
-            </a:fld>
-            <a:endParaRPr dirty="0" lang="en-US"/>
-          </a:p>
-        </p:txBody>
-      </p:sp>
-    </p:spTree>
-  </p:cSld>
-  <p:timing>
-    <p:tnLst>
-      <p:par>
-        <p:cTn id="1" dur="indefinite" restart="never" nodeType="tmRoot">
-          <p:childTnLst>
-            <p:seq concurrent="1" nextAc="seek">
-              <p:cTn id="2" dur="indefinite" nodeType="mainSeq">
-                <p:childTnLst>
-                  <p:par>
-                    <p:cTn id="3" fill="hold">
-                      <p:stCondLst>
-                        <p:cond delay="indefinite"/>
-                      </p:stCondLst>
-                      <p:childTnLst>
-                        <p:par>
-                          <p:cTn id="4" fill="hold">
-                            <p:stCondLst>
-                              <p:cond delay="0"/>
-                            </p:stCondLst>
-                            <p:childTnLst>
-                              <p:par>
-                                <p:cTn id="5" presetID="1" presetClass="entr" presetSubtype="0" fill="hold" grpId="0" nodeType="clickEffect">
-                                  <p:stCondLst>
-                                    <p:cond delay="0"/>
-                                  </p:stCondLst>
-                                  <p:childTnLst>
-                                    <p:set>
-                                      <p:cBhvr>
-                                        <p:cTn id="6" dur="1" fill="hold">
-                                          <p:stCondLst>
-                                            <p:cond delay="0"/>
-                                          </p:stCondLst>
-                                        </p:cTn>
-                                        <p:tgtEl>
-                                          <p:spTgt spid="3">
-                                            <p:txEl>
-                                              <p:pRg st="0" end="0"/>
-                                            </p:txEl>
-                                          </p:spTgt>
-                                        </p:tgtEl>
-                                        <p:attrNameLst>
-                                          <p:attrName>style.visibility</p:attrName>
-                                        </p:attrNameLst>
-                                      </p:cBhvr>
-                                      <p:to>
-                                        <p:strVal val="visible"/>
-                                      </p:to>
-                                    </p:set>
-                                  </p:childTnLst>
-                                </p:cTn>
-                              </p:par>
-                            </p:childTnLst>
-                          </p:cTn>
-                        </p:par>
-                      </p:childTnLst>
-                    </p:cTn>
-                  </p:par>
-                  <p:par>
-                    <p:cTn id="7" fill="hold">
-                      <p:stCondLst>
-                        <p:cond delay="indefinite"/>
-                      </p:stCondLst>
-                      <p:childTnLst>
-                        <p:par>
-                          <p:cTn id="8" fill="hold">
-                            <p:stCondLst>
-                              <p:cond delay="0"/>
-                            </p:stCondLst>
-                            <p:childTnLst>
-                              <p:par>
-                                <p:cTn id="9" presetID="1" presetClass="entr" presetSubtype="0" fill="hold" grpId="0" nodeType="clickEffect">
-                                  <p:stCondLst>
-                                    <p:cond delay="0"/>
-                                  </p:stCondLst>
-                                  <p:childTnLst>
-                                    <p:set>
-                                      <p:cBhvr>
-                                        <p:cTn id="10" dur="1" fill="hold">
-                                          <p:stCondLst>
-                                            <p:cond delay="0"/>
-                                          </p:stCondLst>
-                                        </p:cTn>
-                                        <p:tgtEl>
-                                          <p:spTgt spid="3">
-                                            <p:txEl>
-                                              <p:pRg st="1" end="1"/>
-                                            </p:txEl>
-                                          </p:spTgt>
-                                        </p:tgtEl>
-                                        <p:attrNameLst>
-                                          <p:attrName>style.visibility</p:attrName>
-                                        </p:attrNameLst>
-                                      </p:cBhvr>
-                                      <p:to>
-                                        <p:strVal val="visible"/>
-                                      </p:to>
-                                    </p:set>
-                                  </p:childTnLst>
-                                </p:cTn>
-                              </p:par>
-                            </p:childTnLst>
-                          </p:cTn>
-                        </p:par>
-                      </p:childTnLst>
-                    </p:cTn>
-                  </p:par>
-                  <p:par>
-                    <p:cTn id="11" fill="hold">
-                      <p:stCondLst>
-                        <p:cond delay="indefinite"/>
-                      </p:stCondLst>
-                      <p:childTnLst>
-                        <p:par>
-                          <p:cTn id="12" fill="hold">
-                            <p:stCondLst>
-                              <p:cond delay="0"/>
-                            </p:stCondLst>
-                            <p:childTnLst>
-                              <p:par>
-                                <p:cTn id="13" presetID="1" presetClass="entr" presetSubtype="0" fill="hold" grpId="0" nodeType="clickEffect">
-                                  <p:stCondLst>
-                                    <p:cond delay="0"/>
-                                  </p:stCondLst>
-                                  <p:childTnLst>
-                                    <p:set>
-                                      <p:cBhvr>
-                                        <p:cTn id="14" dur="1" fill="hold">
-                                          <p:stCondLst>
-                                            <p:cond delay="0"/>
-                                          </p:stCondLst>
-                                        </p:cTn>
-                                        <p:tgtEl>
-                                          <p:spTgt spid="3">
-                                            <p:txEl>
-                                              <p:pRg st="2" end="2"/>
-                                            </p:txEl>
-                                          </p:spTgt>
-                                        </p:tgtEl>
-                                        <p:attrNameLst>
-                                          <p:attrName>style.visibility</p:attrName>
-                                        </p:attrNameLst>
-                                      </p:cBhvr>
-                                      <p:to>
-                                        <p:strVal val="visible"/>
-                                      </p:to>
-                                    </p:set>
-                                  </p:childTnLst>
-                                </p:cTn>
-                              </p:par>
-                            </p:childTnLst>
-                          </p:cTn>
-                        </p:par>
-                      </p:childTnLst>
-                    </p:cTn>
-                  </p:par>
-                </p:childTnLst>
-              </p:cTn>
-              <p:prevCondLst>
-                <p:cond evt="onPrev" delay="0">
-                  <p:tgtEl>
-                    <p:sldTgt/>
-                  </p:tgtEl>
-                </p:cond>
-              </p:prevCondLst>
-              <p:nextCondLst>
-                <p:cond evt="onNext" delay="0">
-                  <p:tgtEl>
-                    <p:sldTgt/>
-                  </p:tgtEl>
-                </p:cond>
-              </p:nextCondLst>
-            </p:seq>
-          </p:childTnLst>
-        </p:cTn>
-      </p:par>
-    </p:tnLst>
-    <p:bldLst>
-      <p:bldP spid="3" grpId="0" uiExpand="1" build="p"/>
-    </p:bldLst>
-  </p:timing>
-</p:sld>
-</file>
-
-<file path=ppt/slides/slide4.xml><?xml version="1.0" encoding="utf-8"?>
-<p:sld xmlns:a="http://schemas.openxmlformats.org/drawingml/2006/main" xmlns:r="http://schemas.openxmlformats.org/officeDocument/2006/relationships" xmlns:p="http://schemas.openxmlformats.org/presentationml/2006/main">
-  <p:cSld>
-    <p:spTree>
-      <p:nvGrpSpPr>
-        <p:cNvPr id="1" name=""/>
-        <p:cNvGrpSpPr/>
-        <p:nvPr/>
-      </p:nvGrpSpPr>
-      <p:grpSpPr>
-        <a:xfrm>
-          <a:off x="0" y="0"/>
-          <a:ext cx="0" cy="0"/>
-          <a:chOff x="0" y="0"/>
-          <a:chExt cx="0" cy="0"/>
-        </a:xfrm>
-      </p:grpSpPr>
-      <p:sp>
-        <p:nvSpPr>
-          <p:cNvPr id="2" name="Title Placeholder 1"/>
-          <p:cNvSpPr>
-            <a:spLocks noGrp="1"/>
-          </p:cNvSpPr>
-          <p:nvPr>
-            <p:ph type="title"/>
-          </p:nvPr>
-        </p:nvSpPr>
-        <p:spPr bwMode="auto">
-          <a:xfrm>
-            <a:off x="433680" y="423297"/>
-            <a:ext cx="8229600" cy="784602"/>
-          </a:xfrm>
-          <a:prstGeom prst="rect">
-            <a:avLst/>
-          </a:prstGeom>
-          <a:noFill/>
-          <a:ln w="9525">
-            <a:noFill/>
-            <a:miter lim="800000"/>
-            <a:headEnd/>
-            <a:tailEnd/>
-          </a:ln>
-        </p:spPr>
-        <p:txBody>
-          <a:bodyPr/>
-          <a:lstStyle/>
-          <a:p>
-            <a:pPr lvl="0" indent="0" marL="0">
-              <a:buNone/>
-            </a:pPr>
-            <a:r>
-              <a:rPr/>
-              <a:t>Practice Problems</a:t>
-            </a:r>
-          </a:p>
-        </p:txBody>
-      </p:sp>
-      <p:sp>
-        <p:nvSpPr>
-          <p:cNvPr id="3" name="Text Placeholder 2"/>
-          <p:cNvSpPr>
-            <a:spLocks noGrp="1"/>
-          </p:cNvSpPr>
-          <p:nvPr>
-            <p:ph idx="1"/>
-          </p:nvPr>
-        </p:nvSpPr>
-        <p:spPr/>
-        <p:txBody>
-          <a:bodyPr/>
-          <a:lstStyle/>
-          <a:p>
-            <a:pPr lvl="0"/>
-            <a:r>
-              <a:rPr b="1"/>
-              <a:t>Practice Problems (PP)</a:t>
-            </a:r>
-            <a:r>
-              <a:rPr/>
-              <a:t> are essential for strengthening your understanding, building confidence, and exploring the concepts covered in class.</a:t>
-            </a:r>
-          </a:p>
-          <a:p>
-            <a:pPr lvl="0"/>
-            <a:r>
-              <a:rPr/>
-              <a:t>The </a:t>
-            </a:r>
-            <a:r>
-              <a:rPr b="1"/>
-              <a:t>Unit 03 Practice Problems</a:t>
-            </a:r>
-            <a:r>
-              <a:rPr/>
-              <a:t> are available under the </a:t>
-            </a:r>
-            <a:r>
-              <a:rPr b="1"/>
-              <a:t>Practice Problems</a:t>
-            </a:r>
-            <a:r>
-              <a:rPr/>
-              <a:t> tab on the course website. The solutions are provided in Canvas.</a:t>
-            </a:r>
-          </a:p>
-          <a:p>
-            <a:pPr lvl="0"/>
-            <a:r>
-              <a:rPr/>
-              <a:t>Complete the relevant Practice Problems as we progress through the unit.</a:t>
-            </a:r>
-          </a:p>
-          <a:p>
-            <a:pPr lvl="0"/>
-            <a:r>
-              <a:rPr/>
-              <a:t>Make sure you have completed and reviewed the Practice Problems </a:t>
-            </a:r>
-            <a:r>
-              <a:rPr b="1"/>
-              <a:t>before attempting the corresponding HW assignment</a:t>
-            </a:r>
-            <a:r>
-              <a:rPr/>
-              <a:t>.</a:t>
-            </a:r>
-          </a:p>
-        </p:txBody>
-      </p:sp>
-      <p:sp>
-        <p:nvSpPr>
-          <p:cNvPr id="4" name="Slide Number Placeholder 3"/>
-          <p:cNvSpPr>
-            <a:spLocks noGrp="1"/>
-          </p:cNvSpPr>
-          <p:nvPr>
-            <p:ph idx="10" sz="quarter" type="sldNum"/>
-          </p:nvPr>
-        </p:nvSpPr>
-        <p:spPr/>
-        <p:txBody>
-          <a:bodyPr/>
-          <a:lstStyle/>
-          <a:p>
-            <a:fld id="{9C13042B-154E-4D18-B726-07B2F714EFCF}" type="slidenum">
-              <a:rPr lang="en-US" smtClean="0"/>
-              <a:pPr/>
-              <a:t>‹#›</a:t>
-            </a:fld>
-            <a:endParaRPr dirty="0" lang="en-US"/>
-          </a:p>
-        </p:txBody>
-      </p:sp>
-    </p:spTree>
-  </p:cSld>
-  <p:timing>
-    <p:tnLst>
-      <p:par>
-        <p:cTn id="1" dur="indefinite" restart="never" nodeType="tmRoot">
-          <p:childTnLst>
-            <p:seq concurrent="1" nextAc="seek">
-              <p:cTn id="2" dur="indefinite" nodeType="mainSeq">
-                <p:childTnLst>
-                  <p:par>
-                    <p:cTn id="3" fill="hold">
-                      <p:stCondLst>
-                        <p:cond delay="indefinite"/>
-                      </p:stCondLst>
-                      <p:childTnLst>
-                        <p:par>
-                          <p:cTn id="4" fill="hold">
-                            <p:stCondLst>
-                              <p:cond delay="0"/>
-                            </p:stCondLst>
-                            <p:childTnLst>
-                              <p:par>
-                                <p:cTn id="5" presetID="1" presetClass="entr" presetSubtype="0" fill="hold" grpId="0" nodeType="clickEffect">
-                                  <p:stCondLst>
-                                    <p:cond delay="0"/>
-                                  </p:stCondLst>
-                                  <p:childTnLst>
-                                    <p:set>
-                                      <p:cBhvr>
-                                        <p:cTn id="6" dur="1" fill="hold">
-                                          <p:stCondLst>
-                                            <p:cond delay="0"/>
-                                          </p:stCondLst>
-                                        </p:cTn>
-                                        <p:tgtEl>
-                                          <p:spTgt spid="3">
-                                            <p:txEl>
-                                              <p:pRg st="0" end="0"/>
-                                            </p:txEl>
-                                          </p:spTgt>
-                                        </p:tgtEl>
-                                        <p:attrNameLst>
-                                          <p:attrName>style.visibility</p:attrName>
-                                        </p:attrNameLst>
-                                      </p:cBhvr>
-                                      <p:to>
-                                        <p:strVal val="visible"/>
-                                      </p:to>
-                                    </p:set>
-                                  </p:childTnLst>
-                                </p:cTn>
-                              </p:par>
-                            </p:childTnLst>
-                          </p:cTn>
-                        </p:par>
-                      </p:childTnLst>
-                    </p:cTn>
-                  </p:par>
-                  <p:par>
-                    <p:cTn id="7" fill="hold">
-                      <p:stCondLst>
-                        <p:cond delay="indefinite"/>
-                      </p:stCondLst>
-                      <p:childTnLst>
-                        <p:par>
-                          <p:cTn id="8" fill="hold">
-                            <p:stCondLst>
-                              <p:cond delay="0"/>
-                            </p:stCondLst>
-                            <p:childTnLst>
-                              <p:par>
-                                <p:cTn id="9" presetID="1" presetClass="entr" presetSubtype="0" fill="hold" grpId="0" nodeType="clickEffect">
-                                  <p:stCondLst>
-                                    <p:cond delay="0"/>
-                                  </p:stCondLst>
-                                  <p:childTnLst>
-                                    <p:set>
-                                      <p:cBhvr>
-                                        <p:cTn id="10" dur="1" fill="hold">
-                                          <p:stCondLst>
-                                            <p:cond delay="0"/>
-                                          </p:stCondLst>
-                                        </p:cTn>
-                                        <p:tgtEl>
-                                          <p:spTgt spid="3">
-                                            <p:txEl>
-                                              <p:pRg st="1" end="1"/>
-                                            </p:txEl>
-                                          </p:spTgt>
-                                        </p:tgtEl>
-                                        <p:attrNameLst>
-                                          <p:attrName>style.visibility</p:attrName>
-                                        </p:attrNameLst>
-                                      </p:cBhvr>
-                                      <p:to>
-                                        <p:strVal val="visible"/>
-                                      </p:to>
-                                    </p:set>
-                                  </p:childTnLst>
-                                </p:cTn>
-                              </p:par>
-                            </p:childTnLst>
-                          </p:cTn>
-                        </p:par>
-                      </p:childTnLst>
-                    </p:cTn>
-                  </p:par>
-                  <p:par>
-                    <p:cTn id="11" fill="hold">
-                      <p:stCondLst>
-                        <p:cond delay="indefinite"/>
-                      </p:stCondLst>
-                      <p:childTnLst>
-                        <p:par>
-                          <p:cTn id="12" fill="hold">
-                            <p:stCondLst>
-                              <p:cond delay="0"/>
-                            </p:stCondLst>
-                            <p:childTnLst>
-                              <p:par>
-                                <p:cTn id="13" presetID="1" presetClass="entr" presetSubtype="0" fill="hold" grpId="0" nodeType="clickEffect">
-                                  <p:stCondLst>
-                                    <p:cond delay="0"/>
-                                  </p:stCondLst>
-                                  <p:childTnLst>
-                                    <p:set>
-                                      <p:cBhvr>
-                                        <p:cTn id="14" dur="1" fill="hold">
-                                          <p:stCondLst>
-                                            <p:cond delay="0"/>
-                                          </p:stCondLst>
-                                        </p:cTn>
-                                        <p:tgtEl>
-                                          <p:spTgt spid="3">
-                                            <p:txEl>
-                                              <p:pRg st="2" end="2"/>
-                                            </p:txEl>
-                                          </p:spTgt>
-                                        </p:tgtEl>
-                                        <p:attrNameLst>
-                                          <p:attrName>style.visibility</p:attrName>
-                                        </p:attrNameLst>
-                                      </p:cBhvr>
-                                      <p:to>
-                                        <p:strVal val="visible"/>
-                                      </p:to>
-                                    </p:set>
-                                  </p:childTnLst>
-                                </p:cTn>
-                              </p:par>
-                            </p:childTnLst>
-                          </p:cTn>
-                        </p:par>
-                      </p:childTnLst>
-                    </p:cTn>
-                  </p:par>
-                  <p:par>
-                    <p:cTn id="15" fill="hold">
-                      <p:stCondLst>
-                        <p:cond delay="indefinite"/>
-                      </p:stCondLst>
-                      <p:childTnLst>
-                        <p:par>
-                          <p:cTn id="16" fill="hold">
-                            <p:stCondLst>
-                              <p:cond delay="0"/>
-                            </p:stCondLst>
-                            <p:childTnLst>
-                              <p:par>
-                                <p:cTn id="17" presetID="1" presetClass="entr" presetSubtype="0" fill="hold" grpId="0" nodeType="clickEffect">
-                                  <p:stCondLst>
-                                    <p:cond delay="0"/>
-                                  </p:stCondLst>
-                                  <p:childTnLst>
-                                    <p:set>
-                                      <p:cBhvr>
-                                        <p:cTn id="18" dur="1" fill="hold">
-                                          <p:stCondLst>
-                                            <p:cond delay="0"/>
-                                          </p:stCondLst>
-                                        </p:cTn>
-                                        <p:tgtEl>
-                                          <p:spTgt spid="3">
-                                            <p:txEl>
-                                              <p:pRg st="3" end="3"/>
-                                            </p:txEl>
-                                          </p:spTgt>
-                                        </p:tgtEl>
-                                        <p:attrNameLst>
-                                          <p:attrName>style.visibility</p:attrName>
-                                        </p:attrNameLst>
-                                      </p:cBhvr>
-                                      <p:to>
-                                        <p:strVal val="visible"/>
-                                      </p:to>
-                                    </p:set>
-                                  </p:childTnLst>
-                                </p:cTn>
-                              </p:par>
-                            </p:childTnLst>
-                          </p:cTn>
-                        </p:par>
-                      </p:childTnLst>
-                    </p:cTn>
-                  </p:par>
-                </p:childTnLst>
-              </p:cTn>
-              <p:prevCondLst>
-                <p:cond evt="onPrev" delay="0">
-                  <p:tgtEl>
-                    <p:sldTgt/>
-                  </p:tgtEl>
-                </p:cond>
-              </p:prevCondLst>
-              <p:nextCondLst>
-                <p:cond evt="onNext" delay="0">
-                  <p:tgtEl>
-                    <p:sldTgt/>
-                  </p:tgtEl>
-                </p:cond>
-              </p:nextCondLst>
-            </p:seq>
-          </p:childTnLst>
-        </p:cTn>
-      </p:par>
-    </p:tnLst>
-    <p:bldLst>
-      <p:bldP spid="3" grpId="0" uiExpand="1" build="p"/>
-    </p:bldLst>
-  </p:timing>
-</p:sld>
-</file>
-
-<file path=ppt/slides/slide5.xml><?xml version="1.0" encoding="utf-8"?>
-<p:sld xmlns:a="http://schemas.openxmlformats.org/drawingml/2006/main" xmlns:r="http://schemas.openxmlformats.org/officeDocument/2006/relationships" xmlns:p="http://schemas.openxmlformats.org/presentationml/2006/main">
-  <p:cSld>
-    <p:spTree>
-      <p:nvGrpSpPr>
-        <p:cNvPr id="1" name=""/>
-        <p:cNvGrpSpPr/>
-        <p:nvPr/>
-      </p:nvGrpSpPr>
-      <p:grpSpPr>
-        <a:xfrm>
-          <a:off x="0" y="0"/>
-          <a:ext cx="0" cy="0"/>
-          <a:chOff x="0" y="0"/>
-          <a:chExt cx="0" cy="0"/>
-        </a:xfrm>
-      </p:grpSpPr>
-      <p:sp>
-        <p:nvSpPr>
-          <p:cNvPr id="2" name="Title 1"/>
-          <p:cNvSpPr>
-            <a:spLocks noGrp="1"/>
-          </p:cNvSpPr>
-          <p:nvPr>
-            <p:ph type="title"/>
-          </p:nvPr>
-        </p:nvSpPr>
-        <p:spPr>
-          <a:xfrm>
-            <a:off x="722313" y="1660820"/>
-            <a:ext cx="7772400" cy="4108156"/>
-          </a:xfrm>
-          <a:prstGeom prst="rect">
-            <a:avLst/>
-          </a:prstGeom>
-        </p:spPr>
-        <p:txBody>
-          <a:bodyPr/>
-          <a:lstStyle/>
-          <a:p>
-            <a:pPr lvl="0" indent="0" marL="0">
-              <a:buNone/>
-            </a:pPr>
-            <a:r>
-              <a:rPr/>
-              <a:t>Discrete Random Variable</a:t>
-            </a:r>
-          </a:p>
-        </p:txBody>
-      </p:sp>
-      <p:sp>
-        <p:nvSpPr>
-          <p:cNvPr id="3" name="Slide Number Placeholder 2"/>
-          <p:cNvSpPr>
-            <a:spLocks noGrp="1"/>
-          </p:cNvSpPr>
-          <p:nvPr>
-            <p:ph idx="10" sz="quarter" type="sldNum"/>
-          </p:nvPr>
-        </p:nvSpPr>
-        <p:spPr/>
-        <p:txBody>
-          <a:bodyPr/>
-          <a:lstStyle/>
-          <a:p>
-            <a:fld id="{9C13042B-154E-4D18-B726-07B2F714EFCF}" type="slidenum">
-              <a:rPr lang="en-US" smtClean="0"/>
-              <a:pPr/>
-              <a:t>‹#›</a:t>
-            </a:fld>
-            <a:endParaRPr dirty="0" lang="en-US"/>
-          </a:p>
-        </p:txBody>
-      </p:sp>
-    </p:spTree>
-  </p:cSld>
-</p:sld>
-</file>
-
-<file path=ppt/slides/slide6.xml><?xml version="1.0" encoding="utf-8"?>
-<p:sld xmlns:a="http://schemas.openxmlformats.org/drawingml/2006/main" xmlns:r="http://schemas.openxmlformats.org/officeDocument/2006/relationships" xmlns:p="http://schemas.openxmlformats.org/presentationml/2006/main">
-  <p:cSld>
-    <p:spTree>
-      <p:nvGrpSpPr>
-        <p:cNvPr id="1" name=""/>
-        <p:cNvGrpSpPr/>
-        <p:nvPr/>
-      </p:nvGrpSpPr>
-      <p:grpSpPr>
-        <a:xfrm>
-          <a:off x="0" y="0"/>
-          <a:ext cx="0" cy="0"/>
-          <a:chOff x="0" y="0"/>
-          <a:chExt cx="0" cy="0"/>
-        </a:xfrm>
-      </p:grpSpPr>
-      <p:sp>
-        <p:nvSpPr>
-          <p:cNvPr id="2" name="Title Placeholder 1"/>
-          <p:cNvSpPr>
-            <a:spLocks noGrp="1"/>
-          </p:cNvSpPr>
-          <p:nvPr>
-            <p:ph type="title"/>
-          </p:nvPr>
-        </p:nvSpPr>
-        <p:spPr bwMode="auto">
-          <a:xfrm>
-            <a:off x="433680" y="423297"/>
-            <a:ext cx="8229600" cy="784602"/>
-          </a:xfrm>
-          <a:prstGeom prst="rect">
-            <a:avLst/>
-          </a:prstGeom>
-          <a:noFill/>
-          <a:ln w="9525">
-            <a:noFill/>
-            <a:miter lim="800000"/>
-            <a:headEnd/>
-            <a:tailEnd/>
-          </a:ln>
-        </p:spPr>
-        <p:txBody>
-          <a:bodyPr/>
-          <a:lstStyle/>
-          <a:p>
-            <a:pPr lvl="0" indent="0" marL="0">
-              <a:buNone/>
-            </a:pPr>
-            <a:r>
-              <a:rPr/>
-              <a:t>Class Notes</a:t>
-            </a:r>
-          </a:p>
-        </p:txBody>
-      </p:sp>
-      <p:sp>
-        <p:nvSpPr>
-          <p:cNvPr id="3" name="Text Placeholder 2"/>
-          <p:cNvSpPr>
-            <a:spLocks noGrp="1"/>
-          </p:cNvSpPr>
-          <p:nvPr>
-            <p:ph idx="1"/>
-          </p:nvPr>
-        </p:nvSpPr>
-        <p:spPr/>
-        <p:txBody>
-          <a:bodyPr/>
-          <a:lstStyle/>
-          <a:p>
-            <a:pPr lvl="0"/>
-            <a:r>
-              <a:rPr/>
-              <a:t>Live class lecture notes</a:t>
-            </a:r>
-          </a:p>
-          <a:p>
-            <a:pPr lvl="0"/>
-            <a:r>
-              <a:rPr/>
-              <a:t>I usually post the class notes on Canvas by the end of the day. If you don’t see it, shoot me an email next day!</a:t>
-            </a:r>
-          </a:p>
-        </p:txBody>
-      </p:sp>
-      <p:sp>
-        <p:nvSpPr>
-          <p:cNvPr id="4" name="Slide Number Placeholder 3"/>
-          <p:cNvSpPr>
-            <a:spLocks noGrp="1"/>
-          </p:cNvSpPr>
-          <p:nvPr>
-            <p:ph idx="10" sz="quarter" type="sldNum"/>
-          </p:nvPr>
-        </p:nvSpPr>
-        <p:spPr/>
-        <p:txBody>
-          <a:bodyPr/>
-          <a:lstStyle/>
-          <a:p>
-            <a:fld id="{9C13042B-154E-4D18-B726-07B2F714EFCF}" type="slidenum">
-              <a:rPr lang="en-US" smtClean="0"/>
-              <a:pPr/>
-              <a:t>‹#›</a:t>
-            </a:fld>
-            <a:endParaRPr dirty="0" lang="en-US"/>
-          </a:p>
-        </p:txBody>
-      </p:sp>
-    </p:spTree>
-  </p:cSld>
-</p:sld>
-</file>
-
-<file path=ppt/slides/slide7.xml><?xml version="1.0" encoding="utf-8"?>
+<file path=ppt/slides/slide10.xml><?xml version="1.0" encoding="utf-8"?>
 <p:sld xmlns:a="http://schemas.openxmlformats.org/drawingml/2006/main" xmlns:r="http://schemas.openxmlformats.org/officeDocument/2006/relationships" xmlns:p="http://schemas.openxmlformats.org/presentationml/2006/main">
   <p:cSld>
     <p:spTree>
@@ -5798,191 +4811,19 @@
                 <a:pPr lvl="0" indent="0" marL="0">
                   <a:buNone/>
                 </a:pPr>
-                <a14:m>
-                  <m:oMathPara xmlns:m="http://schemas.openxmlformats.org/officeDocument/2006/math">
-                    <m:oMathParaPr>
-                      <m:jc m:val="center"/>
-                    </m:oMathParaPr>
-                    <m:oMath>
-                      <m:r>
-                        <m:rPr>
-                          <m:sty m:val="p"/>
-                        </m:rPr>
-                        <m:t>=</m:t>
-                      </m:r>
-                      <m:r>
-                        <m:t>P</m:t>
-                      </m:r>
-                      <m:d>
-                        <m:dPr>
-                          <m:begChr m:val="("/>
-                          <m:sepChr m:val=""/>
-                          <m:endChr m:val=")"/>
-                          <m:grow/>
-                        </m:dPr>
-                        <m:e>
-                          <m:sSub>
-                            <m:e>
-                              <m:r>
-                                <m:t>X</m:t>
-                              </m:r>
-                            </m:e>
-                            <m:sub>
-                              <m:r>
-                                <m:t>1</m:t>
-                              </m:r>
-                            </m:sub>
-                          </m:sSub>
-                          <m:r>
-                            <m:rPr>
-                              <m:sty m:val="p"/>
-                            </m:rPr>
-                            <m:t>=</m:t>
-                          </m:r>
-                          <m:r>
-                            <m:t>0</m:t>
-                          </m:r>
-                        </m:e>
-                      </m:d>
-                      <m:r>
-                        <m:t>P</m:t>
-                      </m:r>
-                      <m:d>
-                        <m:dPr>
-                          <m:begChr m:val="("/>
-                          <m:sepChr m:val=""/>
-                          <m:endChr m:val=")"/>
-                          <m:grow/>
-                        </m:dPr>
-                        <m:e>
-                          <m:sSub>
-                            <m:e>
-                              <m:r>
-                                <m:t>X</m:t>
-                              </m:r>
-                            </m:e>
-                            <m:sub>
-                              <m:r>
-                                <m:t>2</m:t>
-                              </m:r>
-                            </m:sub>
-                          </m:sSub>
-                          <m:r>
-                            <m:rPr>
-                              <m:sty m:val="p"/>
-                            </m:rPr>
-                            <m:t>=</m:t>
-                          </m:r>
-                          <m:r>
-                            <m:t>0</m:t>
-                          </m:r>
-                        </m:e>
-                      </m:d>
-                      <m:r>
-                        <m:t>P</m:t>
-                      </m:r>
-                      <m:d>
-                        <m:dPr>
-                          <m:begChr m:val="("/>
-                          <m:sepChr m:val=""/>
-                          <m:endChr m:val=")"/>
-                          <m:grow/>
-                        </m:dPr>
-                        <m:e>
-                          <m:sSub>
-                            <m:e>
-                              <m:r>
-                                <m:t>X</m:t>
-                              </m:r>
-                            </m:e>
-                            <m:sub>
-                              <m:r>
-                                <m:t>3</m:t>
-                              </m:r>
-                            </m:sub>
-                          </m:sSub>
-                          <m:r>
-                            <m:rPr>
-                              <m:sty m:val="p"/>
-                            </m:rPr>
-                            <m:t>=</m:t>
-                          </m:r>
-                          <m:r>
-                            <m:t>1</m:t>
-                          </m:r>
-                        </m:e>
-                      </m:d>
-                      <m:r>
-                        <m:t>P</m:t>
-                      </m:r>
-                      <m:d>
-                        <m:dPr>
-                          <m:begChr m:val="("/>
-                          <m:sepChr m:val=""/>
-                          <m:endChr m:val=")"/>
-                          <m:grow/>
-                        </m:dPr>
-                        <m:e>
-                          <m:sSub>
-                            <m:e>
-                              <m:r>
-                                <m:t>X</m:t>
-                              </m:r>
-                            </m:e>
-                            <m:sub>
-                              <m:r>
-                                <m:t>4</m:t>
-                              </m:r>
-                            </m:sub>
-                          </m:sSub>
-                          <m:r>
-                            <m:rPr>
-                              <m:sty m:val="p"/>
-                            </m:rPr>
-                            <m:t>=</m:t>
-                          </m:r>
-                          <m:r>
-                            <m:t>0</m:t>
-                          </m:r>
-                        </m:e>
-                      </m:d>
-                      <m:r>
-                        <m:t>P</m:t>
-                      </m:r>
-                      <m:d>
-                        <m:dPr>
-                          <m:begChr m:val="("/>
-                          <m:sepChr m:val=""/>
-                          <m:endChr m:val=")"/>
-                          <m:grow/>
-                        </m:dPr>
-                        <m:e>
-                          <m:sSub>
-                            <m:e>
-                              <m:r>
-                                <m:t>X</m:t>
-                              </m:r>
-                            </m:e>
-                            <m:sub>
-                              <m:r>
-                                <m:t>5</m:t>
-                              </m:r>
-                            </m:sub>
-                          </m:sSub>
-                          <m:r>
-                            <m:rPr>
-                              <m:sty m:val="p"/>
-                            </m:rPr>
-                            <m:t>=</m:t>
-                          </m:r>
-                          <m:r>
-                            <m:t>1</m:t>
-                          </m:r>
-                        </m:e>
-                      </m:d>
-                    </m:oMath>
-                  </m:oMathPara>
-                </a14:m>
+                <a:r>
+                  <a:rPr/>
+                  <a:t>$$</a:t>
+                </a:r>
+              </a:p>
+              <a:p>
+                <a:pPr lvl="0" indent="0" marL="0">
+                  <a:buNone/>
+                </a:pPr>
+                <a:r>
+                  <a:rPr/>
+                  <a:t>P(X_1=0) P(X_2=0) P(X_3=1) P(X_4=0) P(X_5=1) $$</a:t>
+                </a:r>
               </a:p>
               <a:p>
                 <a:pPr lvl="0" indent="0" marL="0">
@@ -9407,7 +8248,7 @@
                                         <p:tgtEl>
                                           <p:spTgt spid="3">
                                             <p:txEl>
-                                              <p:pRg st="63" end="63"/>
+                                              <p:pRg st="64" end="64"/>
                                             </p:txEl>
                                           </p:spTgt>
                                         </p:tgtEl>
@@ -9456,7 +8297,7 @@
                                         <p:tgtEl>
                                           <p:spTgt spid="3">
                                             <p:txEl>
-                                              <p:pRg st="65" end="65"/>
+                                              <p:pRg st="66" end="66"/>
                                             </p:txEl>
                                           </p:spTgt>
                                         </p:tgtEl>
@@ -9505,7 +8346,7 @@
                                         <p:tgtEl>
                                           <p:spTgt spid="3">
                                             <p:txEl>
-                                              <p:pRg st="68" end="68"/>
+                                              <p:pRg st="69" end="69"/>
                                             </p:txEl>
                                           </p:spTgt>
                                         </p:tgtEl>
@@ -9554,7 +8395,7 @@
                                         <p:tgtEl>
                                           <p:spTgt spid="3">
                                             <p:txEl>
-                                              <p:pRg st="70" end="70"/>
+                                              <p:pRg st="71" end="71"/>
                                             </p:txEl>
                                           </p:spTgt>
                                         </p:tgtEl>
@@ -9603,7 +8444,7 @@
                                         <p:tgtEl>
                                           <p:spTgt spid="3">
                                             <p:txEl>
-                                              <p:pRg st="72" end="72"/>
+                                              <p:pRg st="73" end="73"/>
                                             </p:txEl>
                                           </p:spTgt>
                                         </p:tgtEl>
@@ -9652,7 +8493,7 @@
                                         <p:tgtEl>
                                           <p:spTgt spid="3">
                                             <p:txEl>
-                                              <p:pRg st="74" end="74"/>
+                                              <p:pRg st="75" end="75"/>
                                             </p:txEl>
                                           </p:spTgt>
                                         </p:tgtEl>
@@ -9701,7 +8542,7 @@
                                         <p:tgtEl>
                                           <p:spTgt spid="3">
                                             <p:txEl>
-                                              <p:pRg st="76" end="76"/>
+                                              <p:pRg st="77" end="77"/>
                                             </p:txEl>
                                           </p:spTgt>
                                         </p:tgtEl>
@@ -9750,7 +8591,7 @@
                                         <p:tgtEl>
                                           <p:spTgt spid="3">
                                             <p:txEl>
-                                              <p:pRg st="79" end="79"/>
+                                              <p:pRg st="80" end="80"/>
                                             </p:txEl>
                                           </p:spTgt>
                                         </p:tgtEl>
@@ -9799,7 +8640,7 @@
                                         <p:tgtEl>
                                           <p:spTgt spid="3">
                                             <p:txEl>
-                                              <p:pRg st="80" end="80"/>
+                                              <p:pRg st="81" end="81"/>
                                             </p:txEl>
                                           </p:spTgt>
                                         </p:tgtEl>
@@ -9848,7 +8689,7 @@
                                         <p:tgtEl>
                                           <p:spTgt spid="3">
                                             <p:txEl>
-                                              <p:pRg st="88" end="88"/>
+                                              <p:pRg st="89" end="89"/>
                                             </p:txEl>
                                           </p:spTgt>
                                         </p:tgtEl>
@@ -9897,7 +8738,7 @@
                                         <p:tgtEl>
                                           <p:spTgt spid="3">
                                             <p:txEl>
-                                              <p:pRg st="90" end="90"/>
+                                              <p:pRg st="91" end="91"/>
                                             </p:txEl>
                                           </p:spTgt>
                                         </p:tgtEl>
@@ -9946,7 +8787,7 @@
 </p:sld>
 </file>
 
-<file path=ppt/slides/slide8.xml><?xml version="1.0" encoding="utf-8"?>
+<file path=ppt/slides/slide11.xml><?xml version="1.0" encoding="utf-8"?>
 <p:sld xmlns:a="http://schemas.openxmlformats.org/drawingml/2006/main" xmlns:r="http://schemas.openxmlformats.org/officeDocument/2006/relationships" xmlns:p="http://schemas.openxmlformats.org/presentationml/2006/main">
   <p:cSld>
     <p:spTree>
@@ -10846,7 +9687,7 @@
 </p:sld>
 </file>
 
-<file path=ppt/slides/slide9.xml><?xml version="1.0" encoding="utf-8"?>
+<file path=ppt/slides/slide12.xml><?xml version="1.0" encoding="utf-8"?>
 <p:sld xmlns:a="http://schemas.openxmlformats.org/drawingml/2006/main" xmlns:r="http://schemas.openxmlformats.org/officeDocument/2006/relationships" xmlns:p="http://schemas.openxmlformats.org/presentationml/2006/main">
   <p:cSld>
     <p:spTree>
@@ -11655,6 +10496,6155 @@
                                           <p:spTgt spid="3">
                                             <p:txEl>
                                               <p:pRg st="11" end="11"/>
+                                            </p:txEl>
+                                          </p:spTgt>
+                                        </p:tgtEl>
+                                        <p:attrNameLst>
+                                          <p:attrName>style.visibility</p:attrName>
+                                        </p:attrNameLst>
+                                      </p:cBhvr>
+                                      <p:to>
+                                        <p:strVal val="visible"/>
+                                      </p:to>
+                                    </p:set>
+                                  </p:childTnLst>
+                                </p:cTn>
+                              </p:par>
+                            </p:childTnLst>
+                          </p:cTn>
+                        </p:par>
+                      </p:childTnLst>
+                    </p:cTn>
+                  </p:par>
+                </p:childTnLst>
+              </p:cTn>
+              <p:prevCondLst>
+                <p:cond evt="onPrev" delay="0">
+                  <p:tgtEl>
+                    <p:sldTgt/>
+                  </p:tgtEl>
+                </p:cond>
+              </p:prevCondLst>
+              <p:nextCondLst>
+                <p:cond evt="onNext" delay="0">
+                  <p:tgtEl>
+                    <p:sldTgt/>
+                  </p:tgtEl>
+                </p:cond>
+              </p:nextCondLst>
+            </p:seq>
+          </p:childTnLst>
+        </p:cTn>
+      </p:par>
+    </p:tnLst>
+    <p:bldLst>
+      <p:bldP spid="3" grpId="0" uiExpand="1" build="p"/>
+    </p:bldLst>
+  </p:timing>
+</p:sld>
+</file>
+
+<file path=ppt/slides/slide2.xml><?xml version="1.0" encoding="utf-8"?>
+<p:sld xmlns:a="http://schemas.openxmlformats.org/drawingml/2006/main" xmlns:r="http://schemas.openxmlformats.org/officeDocument/2006/relationships" xmlns:p="http://schemas.openxmlformats.org/presentationml/2006/main">
+  <p:cSld>
+    <p:spTree>
+      <p:nvGrpSpPr>
+        <p:cNvPr id="1" name=""/>
+        <p:cNvGrpSpPr/>
+        <p:nvPr/>
+      </p:nvGrpSpPr>
+      <p:grpSpPr>
+        <a:xfrm>
+          <a:off x="0" y="0"/>
+          <a:ext cx="0" cy="0"/>
+          <a:chOff x="0" y="0"/>
+          <a:chExt cx="0" cy="0"/>
+        </a:xfrm>
+      </p:grpSpPr>
+      <p:sp>
+        <p:nvSpPr>
+          <p:cNvPr id="2" name="Title 1"/>
+          <p:cNvSpPr>
+            <a:spLocks noGrp="1"/>
+          </p:cNvSpPr>
+          <p:nvPr>
+            <p:ph type="title"/>
+          </p:nvPr>
+        </p:nvSpPr>
+        <p:spPr>
+          <a:xfrm>
+            <a:off x="722313" y="1660820"/>
+            <a:ext cx="7772400" cy="4108156"/>
+          </a:xfrm>
+          <a:prstGeom prst="rect">
+            <a:avLst/>
+          </a:prstGeom>
+        </p:spPr>
+        <p:txBody>
+          <a:bodyPr/>
+          <a:lstStyle/>
+          <a:p>
+            <a:pPr lvl="0" indent="0" marL="0">
+              <a:buNone/>
+            </a:pPr>
+            <a:r>
+              <a:rPr/>
+              <a:t>Resources</a:t>
+            </a:r>
+          </a:p>
+        </p:txBody>
+      </p:sp>
+      <p:sp>
+        <p:nvSpPr>
+          <p:cNvPr id="3" name="Slide Number Placeholder 2"/>
+          <p:cNvSpPr>
+            <a:spLocks noGrp="1"/>
+          </p:cNvSpPr>
+          <p:nvPr>
+            <p:ph idx="10" sz="quarter" type="sldNum"/>
+          </p:nvPr>
+        </p:nvSpPr>
+        <p:spPr/>
+        <p:txBody>
+          <a:bodyPr/>
+          <a:lstStyle/>
+          <a:p>
+            <a:fld id="{9C13042B-154E-4D18-B726-07B2F714EFCF}" type="slidenum">
+              <a:rPr lang="en-US" smtClean="0"/>
+              <a:pPr/>
+              <a:t>‹#›</a:t>
+            </a:fld>
+            <a:endParaRPr dirty="0" lang="en-US"/>
+          </a:p>
+        </p:txBody>
+      </p:sp>
+    </p:spTree>
+  </p:cSld>
+</p:sld>
+</file>
+
+<file path=ppt/slides/slide3.xml><?xml version="1.0" encoding="utf-8"?>
+<p:sld xmlns:a="http://schemas.openxmlformats.org/drawingml/2006/main" xmlns:r="http://schemas.openxmlformats.org/officeDocument/2006/relationships" xmlns:p="http://schemas.openxmlformats.org/presentationml/2006/main">
+  <p:cSld>
+    <p:spTree>
+      <p:nvGrpSpPr>
+        <p:cNvPr id="1" name=""/>
+        <p:cNvGrpSpPr/>
+        <p:nvPr/>
+      </p:nvGrpSpPr>
+      <p:grpSpPr>
+        <a:xfrm>
+          <a:off x="0" y="0"/>
+          <a:ext cx="0" cy="0"/>
+          <a:chOff x="0" y="0"/>
+          <a:chExt cx="0" cy="0"/>
+        </a:xfrm>
+      </p:grpSpPr>
+      <p:sp>
+        <p:nvSpPr>
+          <p:cNvPr id="2" name="Title Placeholder 1"/>
+          <p:cNvSpPr>
+            <a:spLocks noGrp="1"/>
+          </p:cNvSpPr>
+          <p:nvPr>
+            <p:ph type="title"/>
+          </p:nvPr>
+        </p:nvSpPr>
+        <p:spPr bwMode="auto">
+          <a:xfrm>
+            <a:off x="433680" y="423297"/>
+            <a:ext cx="8229600" cy="784602"/>
+          </a:xfrm>
+          <a:prstGeom prst="rect">
+            <a:avLst/>
+          </a:prstGeom>
+          <a:noFill/>
+          <a:ln w="9525">
+            <a:noFill/>
+            <a:miter lim="800000"/>
+            <a:headEnd/>
+            <a:tailEnd/>
+          </a:ln>
+        </p:spPr>
+        <p:txBody>
+          <a:bodyPr/>
+          <a:lstStyle/>
+          <a:p>
+            <a:pPr lvl="0" indent="0" marL="0">
+              <a:buNone/>
+            </a:pPr>
+            <a:r>
+              <a:rPr/>
+              <a:t>Handouts</a:t>
+            </a:r>
+          </a:p>
+        </p:txBody>
+      </p:sp>
+      <p:sp>
+        <p:nvSpPr>
+          <p:cNvPr id="3" name="Text Placeholder 2"/>
+          <p:cNvSpPr>
+            <a:spLocks noGrp="1"/>
+          </p:cNvSpPr>
+          <p:nvPr>
+            <p:ph idx="1"/>
+          </p:nvPr>
+        </p:nvSpPr>
+        <p:spPr/>
+        <p:txBody>
+          <a:bodyPr/>
+          <a:lstStyle/>
+          <a:p>
+            <a:pPr lvl="0"/>
+            <a:r>
+              <a:rPr/>
+              <a:t>Download the </a:t>
+            </a:r>
+            <a:r>
+              <a:rPr>
+                <a:hlinkClick r:id="rId2"/>
+              </a:rPr>
+              <a:t>Unit 04 Handout: Probability</a:t>
+            </a:r>
+            <a:r>
+              <a:rPr/>
+              <a:t> before class and bring it with you.</a:t>
+            </a:r>
+          </a:p>
+          <a:p>
+            <a:pPr lvl="0"/>
+            <a:r>
+              <a:rPr/>
+              <a:t>I will continue to post additional handouts as we progress through the course. Please watch for </a:t>
+            </a:r>
+            <a:r>
+              <a:rPr b="1"/>
+              <a:t>Canvas Announcements</a:t>
+            </a:r>
+            <a:r>
+              <a:rPr/>
+              <a:t> when a new handout becomes available.</a:t>
+            </a:r>
+          </a:p>
+          <a:p>
+            <a:pPr lvl="0"/>
+            <a:r>
+              <a:rPr/>
+              <a:t>It is very important that you </a:t>
+            </a:r>
+            <a:r>
+              <a:rPr b="1"/>
+              <a:t>bring the appropriate handout to class regularly</a:t>
+            </a:r>
+            <a:r>
+              <a:rPr/>
+              <a:t>, either as a printed copy or on your writing device.</a:t>
+            </a:r>
+          </a:p>
+        </p:txBody>
+      </p:sp>
+      <p:sp>
+        <p:nvSpPr>
+          <p:cNvPr id="4" name="Slide Number Placeholder 3"/>
+          <p:cNvSpPr>
+            <a:spLocks noGrp="1"/>
+          </p:cNvSpPr>
+          <p:nvPr>
+            <p:ph idx="10" sz="quarter" type="sldNum"/>
+          </p:nvPr>
+        </p:nvSpPr>
+        <p:spPr/>
+        <p:txBody>
+          <a:bodyPr/>
+          <a:lstStyle/>
+          <a:p>
+            <a:fld id="{9C13042B-154E-4D18-B726-07B2F714EFCF}" type="slidenum">
+              <a:rPr lang="en-US" smtClean="0"/>
+              <a:pPr/>
+              <a:t>‹#›</a:t>
+            </a:fld>
+            <a:endParaRPr dirty="0" lang="en-US"/>
+          </a:p>
+        </p:txBody>
+      </p:sp>
+    </p:spTree>
+  </p:cSld>
+  <p:timing>
+    <p:tnLst>
+      <p:par>
+        <p:cTn id="1" dur="indefinite" restart="never" nodeType="tmRoot">
+          <p:childTnLst>
+            <p:seq concurrent="1" nextAc="seek">
+              <p:cTn id="2" dur="indefinite" nodeType="mainSeq">
+                <p:childTnLst>
+                  <p:par>
+                    <p:cTn id="3" fill="hold">
+                      <p:stCondLst>
+                        <p:cond delay="indefinite"/>
+                      </p:stCondLst>
+                      <p:childTnLst>
+                        <p:par>
+                          <p:cTn id="4" fill="hold">
+                            <p:stCondLst>
+                              <p:cond delay="0"/>
+                            </p:stCondLst>
+                            <p:childTnLst>
+                              <p:par>
+                                <p:cTn id="5" presetID="1" presetClass="entr" presetSubtype="0" fill="hold" grpId="0" nodeType="clickEffect">
+                                  <p:stCondLst>
+                                    <p:cond delay="0"/>
+                                  </p:stCondLst>
+                                  <p:childTnLst>
+                                    <p:set>
+                                      <p:cBhvr>
+                                        <p:cTn id="6" dur="1" fill="hold">
+                                          <p:stCondLst>
+                                            <p:cond delay="0"/>
+                                          </p:stCondLst>
+                                        </p:cTn>
+                                        <p:tgtEl>
+                                          <p:spTgt spid="3">
+                                            <p:txEl>
+                                              <p:pRg st="0" end="0"/>
+                                            </p:txEl>
+                                          </p:spTgt>
+                                        </p:tgtEl>
+                                        <p:attrNameLst>
+                                          <p:attrName>style.visibility</p:attrName>
+                                        </p:attrNameLst>
+                                      </p:cBhvr>
+                                      <p:to>
+                                        <p:strVal val="visible"/>
+                                      </p:to>
+                                    </p:set>
+                                  </p:childTnLst>
+                                </p:cTn>
+                              </p:par>
+                            </p:childTnLst>
+                          </p:cTn>
+                        </p:par>
+                      </p:childTnLst>
+                    </p:cTn>
+                  </p:par>
+                  <p:par>
+                    <p:cTn id="7" fill="hold">
+                      <p:stCondLst>
+                        <p:cond delay="indefinite"/>
+                      </p:stCondLst>
+                      <p:childTnLst>
+                        <p:par>
+                          <p:cTn id="8" fill="hold">
+                            <p:stCondLst>
+                              <p:cond delay="0"/>
+                            </p:stCondLst>
+                            <p:childTnLst>
+                              <p:par>
+                                <p:cTn id="9" presetID="1" presetClass="entr" presetSubtype="0" fill="hold" grpId="0" nodeType="clickEffect">
+                                  <p:stCondLst>
+                                    <p:cond delay="0"/>
+                                  </p:stCondLst>
+                                  <p:childTnLst>
+                                    <p:set>
+                                      <p:cBhvr>
+                                        <p:cTn id="10" dur="1" fill="hold">
+                                          <p:stCondLst>
+                                            <p:cond delay="0"/>
+                                          </p:stCondLst>
+                                        </p:cTn>
+                                        <p:tgtEl>
+                                          <p:spTgt spid="3">
+                                            <p:txEl>
+                                              <p:pRg st="1" end="1"/>
+                                            </p:txEl>
+                                          </p:spTgt>
+                                        </p:tgtEl>
+                                        <p:attrNameLst>
+                                          <p:attrName>style.visibility</p:attrName>
+                                        </p:attrNameLst>
+                                      </p:cBhvr>
+                                      <p:to>
+                                        <p:strVal val="visible"/>
+                                      </p:to>
+                                    </p:set>
+                                  </p:childTnLst>
+                                </p:cTn>
+                              </p:par>
+                            </p:childTnLst>
+                          </p:cTn>
+                        </p:par>
+                      </p:childTnLst>
+                    </p:cTn>
+                  </p:par>
+                  <p:par>
+                    <p:cTn id="11" fill="hold">
+                      <p:stCondLst>
+                        <p:cond delay="indefinite"/>
+                      </p:stCondLst>
+                      <p:childTnLst>
+                        <p:par>
+                          <p:cTn id="12" fill="hold">
+                            <p:stCondLst>
+                              <p:cond delay="0"/>
+                            </p:stCondLst>
+                            <p:childTnLst>
+                              <p:par>
+                                <p:cTn id="13" presetID="1" presetClass="entr" presetSubtype="0" fill="hold" grpId="0" nodeType="clickEffect">
+                                  <p:stCondLst>
+                                    <p:cond delay="0"/>
+                                  </p:stCondLst>
+                                  <p:childTnLst>
+                                    <p:set>
+                                      <p:cBhvr>
+                                        <p:cTn id="14" dur="1" fill="hold">
+                                          <p:stCondLst>
+                                            <p:cond delay="0"/>
+                                          </p:stCondLst>
+                                        </p:cTn>
+                                        <p:tgtEl>
+                                          <p:spTgt spid="3">
+                                            <p:txEl>
+                                              <p:pRg st="2" end="2"/>
+                                            </p:txEl>
+                                          </p:spTgt>
+                                        </p:tgtEl>
+                                        <p:attrNameLst>
+                                          <p:attrName>style.visibility</p:attrName>
+                                        </p:attrNameLst>
+                                      </p:cBhvr>
+                                      <p:to>
+                                        <p:strVal val="visible"/>
+                                      </p:to>
+                                    </p:set>
+                                  </p:childTnLst>
+                                </p:cTn>
+                              </p:par>
+                            </p:childTnLst>
+                          </p:cTn>
+                        </p:par>
+                      </p:childTnLst>
+                    </p:cTn>
+                  </p:par>
+                </p:childTnLst>
+              </p:cTn>
+              <p:prevCondLst>
+                <p:cond evt="onPrev" delay="0">
+                  <p:tgtEl>
+                    <p:sldTgt/>
+                  </p:tgtEl>
+                </p:cond>
+              </p:prevCondLst>
+              <p:nextCondLst>
+                <p:cond evt="onNext" delay="0">
+                  <p:tgtEl>
+                    <p:sldTgt/>
+                  </p:tgtEl>
+                </p:cond>
+              </p:nextCondLst>
+            </p:seq>
+          </p:childTnLst>
+        </p:cTn>
+      </p:par>
+    </p:tnLst>
+    <p:bldLst>
+      <p:bldP spid="3" grpId="0" uiExpand="1" build="p"/>
+    </p:bldLst>
+  </p:timing>
+</p:sld>
+</file>
+
+<file path=ppt/slides/slide4.xml><?xml version="1.0" encoding="utf-8"?>
+<p:sld xmlns:a="http://schemas.openxmlformats.org/drawingml/2006/main" xmlns:r="http://schemas.openxmlformats.org/officeDocument/2006/relationships" xmlns:p="http://schemas.openxmlformats.org/presentationml/2006/main">
+  <p:cSld>
+    <p:spTree>
+      <p:nvGrpSpPr>
+        <p:cNvPr id="1" name=""/>
+        <p:cNvGrpSpPr/>
+        <p:nvPr/>
+      </p:nvGrpSpPr>
+      <p:grpSpPr>
+        <a:xfrm>
+          <a:off x="0" y="0"/>
+          <a:ext cx="0" cy="0"/>
+          <a:chOff x="0" y="0"/>
+          <a:chExt cx="0" cy="0"/>
+        </a:xfrm>
+      </p:grpSpPr>
+      <p:sp>
+        <p:nvSpPr>
+          <p:cNvPr id="2" name="Title Placeholder 1"/>
+          <p:cNvSpPr>
+            <a:spLocks noGrp="1"/>
+          </p:cNvSpPr>
+          <p:nvPr>
+            <p:ph type="title"/>
+          </p:nvPr>
+        </p:nvSpPr>
+        <p:spPr bwMode="auto">
+          <a:xfrm>
+            <a:off x="433680" y="423297"/>
+            <a:ext cx="8229600" cy="784602"/>
+          </a:xfrm>
+          <a:prstGeom prst="rect">
+            <a:avLst/>
+          </a:prstGeom>
+          <a:noFill/>
+          <a:ln w="9525">
+            <a:noFill/>
+            <a:miter lim="800000"/>
+            <a:headEnd/>
+            <a:tailEnd/>
+          </a:ln>
+        </p:spPr>
+        <p:txBody>
+          <a:bodyPr/>
+          <a:lstStyle/>
+          <a:p>
+            <a:pPr lvl="0" indent="0" marL="0">
+              <a:buNone/>
+            </a:pPr>
+            <a:r>
+              <a:rPr/>
+              <a:t>Practice Problems</a:t>
+            </a:r>
+          </a:p>
+        </p:txBody>
+      </p:sp>
+      <p:sp>
+        <p:nvSpPr>
+          <p:cNvPr id="3" name="Text Placeholder 2"/>
+          <p:cNvSpPr>
+            <a:spLocks noGrp="1"/>
+          </p:cNvSpPr>
+          <p:nvPr>
+            <p:ph idx="1"/>
+          </p:nvPr>
+        </p:nvSpPr>
+        <p:spPr/>
+        <p:txBody>
+          <a:bodyPr/>
+          <a:lstStyle/>
+          <a:p>
+            <a:pPr lvl="0"/>
+            <a:r>
+              <a:rPr b="1"/>
+              <a:t>Practice Problems (PP)</a:t>
+            </a:r>
+            <a:r>
+              <a:rPr/>
+              <a:t> are essential for strengthening your understanding, building confidence, and exploring the concepts covered in class.</a:t>
+            </a:r>
+          </a:p>
+          <a:p>
+            <a:pPr lvl="0"/>
+            <a:r>
+              <a:rPr/>
+              <a:t>The </a:t>
+            </a:r>
+            <a:r>
+              <a:rPr b="1"/>
+              <a:t>Unit 03 Practice Problems</a:t>
+            </a:r>
+            <a:r>
+              <a:rPr/>
+              <a:t> are available under the </a:t>
+            </a:r>
+            <a:r>
+              <a:rPr b="1"/>
+              <a:t>Practice Problems</a:t>
+            </a:r>
+            <a:r>
+              <a:rPr/>
+              <a:t> tab on the course website. The solutions are provided in Canvas.</a:t>
+            </a:r>
+          </a:p>
+          <a:p>
+            <a:pPr lvl="0"/>
+            <a:r>
+              <a:rPr/>
+              <a:t>Complete the relevant Practice Problems as we progress through the unit.</a:t>
+            </a:r>
+          </a:p>
+          <a:p>
+            <a:pPr lvl="0"/>
+            <a:r>
+              <a:rPr/>
+              <a:t>Make sure you have completed and reviewed the Practice Problems </a:t>
+            </a:r>
+            <a:r>
+              <a:rPr b="1"/>
+              <a:t>before attempting the corresponding HW assignment</a:t>
+            </a:r>
+            <a:r>
+              <a:rPr/>
+              <a:t>.</a:t>
+            </a:r>
+          </a:p>
+        </p:txBody>
+      </p:sp>
+      <p:sp>
+        <p:nvSpPr>
+          <p:cNvPr id="4" name="Slide Number Placeholder 3"/>
+          <p:cNvSpPr>
+            <a:spLocks noGrp="1"/>
+          </p:cNvSpPr>
+          <p:nvPr>
+            <p:ph idx="10" sz="quarter" type="sldNum"/>
+          </p:nvPr>
+        </p:nvSpPr>
+        <p:spPr/>
+        <p:txBody>
+          <a:bodyPr/>
+          <a:lstStyle/>
+          <a:p>
+            <a:fld id="{9C13042B-154E-4D18-B726-07B2F714EFCF}" type="slidenum">
+              <a:rPr lang="en-US" smtClean="0"/>
+              <a:pPr/>
+              <a:t>‹#›</a:t>
+            </a:fld>
+            <a:endParaRPr dirty="0" lang="en-US"/>
+          </a:p>
+        </p:txBody>
+      </p:sp>
+    </p:spTree>
+  </p:cSld>
+  <p:timing>
+    <p:tnLst>
+      <p:par>
+        <p:cTn id="1" dur="indefinite" restart="never" nodeType="tmRoot">
+          <p:childTnLst>
+            <p:seq concurrent="1" nextAc="seek">
+              <p:cTn id="2" dur="indefinite" nodeType="mainSeq">
+                <p:childTnLst>
+                  <p:par>
+                    <p:cTn id="3" fill="hold">
+                      <p:stCondLst>
+                        <p:cond delay="indefinite"/>
+                      </p:stCondLst>
+                      <p:childTnLst>
+                        <p:par>
+                          <p:cTn id="4" fill="hold">
+                            <p:stCondLst>
+                              <p:cond delay="0"/>
+                            </p:stCondLst>
+                            <p:childTnLst>
+                              <p:par>
+                                <p:cTn id="5" presetID="1" presetClass="entr" presetSubtype="0" fill="hold" grpId="0" nodeType="clickEffect">
+                                  <p:stCondLst>
+                                    <p:cond delay="0"/>
+                                  </p:stCondLst>
+                                  <p:childTnLst>
+                                    <p:set>
+                                      <p:cBhvr>
+                                        <p:cTn id="6" dur="1" fill="hold">
+                                          <p:stCondLst>
+                                            <p:cond delay="0"/>
+                                          </p:stCondLst>
+                                        </p:cTn>
+                                        <p:tgtEl>
+                                          <p:spTgt spid="3">
+                                            <p:txEl>
+                                              <p:pRg st="0" end="0"/>
+                                            </p:txEl>
+                                          </p:spTgt>
+                                        </p:tgtEl>
+                                        <p:attrNameLst>
+                                          <p:attrName>style.visibility</p:attrName>
+                                        </p:attrNameLst>
+                                      </p:cBhvr>
+                                      <p:to>
+                                        <p:strVal val="visible"/>
+                                      </p:to>
+                                    </p:set>
+                                  </p:childTnLst>
+                                </p:cTn>
+                              </p:par>
+                            </p:childTnLst>
+                          </p:cTn>
+                        </p:par>
+                      </p:childTnLst>
+                    </p:cTn>
+                  </p:par>
+                  <p:par>
+                    <p:cTn id="7" fill="hold">
+                      <p:stCondLst>
+                        <p:cond delay="indefinite"/>
+                      </p:stCondLst>
+                      <p:childTnLst>
+                        <p:par>
+                          <p:cTn id="8" fill="hold">
+                            <p:stCondLst>
+                              <p:cond delay="0"/>
+                            </p:stCondLst>
+                            <p:childTnLst>
+                              <p:par>
+                                <p:cTn id="9" presetID="1" presetClass="entr" presetSubtype="0" fill="hold" grpId="0" nodeType="clickEffect">
+                                  <p:stCondLst>
+                                    <p:cond delay="0"/>
+                                  </p:stCondLst>
+                                  <p:childTnLst>
+                                    <p:set>
+                                      <p:cBhvr>
+                                        <p:cTn id="10" dur="1" fill="hold">
+                                          <p:stCondLst>
+                                            <p:cond delay="0"/>
+                                          </p:stCondLst>
+                                        </p:cTn>
+                                        <p:tgtEl>
+                                          <p:spTgt spid="3">
+                                            <p:txEl>
+                                              <p:pRg st="1" end="1"/>
+                                            </p:txEl>
+                                          </p:spTgt>
+                                        </p:tgtEl>
+                                        <p:attrNameLst>
+                                          <p:attrName>style.visibility</p:attrName>
+                                        </p:attrNameLst>
+                                      </p:cBhvr>
+                                      <p:to>
+                                        <p:strVal val="visible"/>
+                                      </p:to>
+                                    </p:set>
+                                  </p:childTnLst>
+                                </p:cTn>
+                              </p:par>
+                            </p:childTnLst>
+                          </p:cTn>
+                        </p:par>
+                      </p:childTnLst>
+                    </p:cTn>
+                  </p:par>
+                  <p:par>
+                    <p:cTn id="11" fill="hold">
+                      <p:stCondLst>
+                        <p:cond delay="indefinite"/>
+                      </p:stCondLst>
+                      <p:childTnLst>
+                        <p:par>
+                          <p:cTn id="12" fill="hold">
+                            <p:stCondLst>
+                              <p:cond delay="0"/>
+                            </p:stCondLst>
+                            <p:childTnLst>
+                              <p:par>
+                                <p:cTn id="13" presetID="1" presetClass="entr" presetSubtype="0" fill="hold" grpId="0" nodeType="clickEffect">
+                                  <p:stCondLst>
+                                    <p:cond delay="0"/>
+                                  </p:stCondLst>
+                                  <p:childTnLst>
+                                    <p:set>
+                                      <p:cBhvr>
+                                        <p:cTn id="14" dur="1" fill="hold">
+                                          <p:stCondLst>
+                                            <p:cond delay="0"/>
+                                          </p:stCondLst>
+                                        </p:cTn>
+                                        <p:tgtEl>
+                                          <p:spTgt spid="3">
+                                            <p:txEl>
+                                              <p:pRg st="2" end="2"/>
+                                            </p:txEl>
+                                          </p:spTgt>
+                                        </p:tgtEl>
+                                        <p:attrNameLst>
+                                          <p:attrName>style.visibility</p:attrName>
+                                        </p:attrNameLst>
+                                      </p:cBhvr>
+                                      <p:to>
+                                        <p:strVal val="visible"/>
+                                      </p:to>
+                                    </p:set>
+                                  </p:childTnLst>
+                                </p:cTn>
+                              </p:par>
+                            </p:childTnLst>
+                          </p:cTn>
+                        </p:par>
+                      </p:childTnLst>
+                    </p:cTn>
+                  </p:par>
+                  <p:par>
+                    <p:cTn id="15" fill="hold">
+                      <p:stCondLst>
+                        <p:cond delay="indefinite"/>
+                      </p:stCondLst>
+                      <p:childTnLst>
+                        <p:par>
+                          <p:cTn id="16" fill="hold">
+                            <p:stCondLst>
+                              <p:cond delay="0"/>
+                            </p:stCondLst>
+                            <p:childTnLst>
+                              <p:par>
+                                <p:cTn id="17" presetID="1" presetClass="entr" presetSubtype="0" fill="hold" grpId="0" nodeType="clickEffect">
+                                  <p:stCondLst>
+                                    <p:cond delay="0"/>
+                                  </p:stCondLst>
+                                  <p:childTnLst>
+                                    <p:set>
+                                      <p:cBhvr>
+                                        <p:cTn id="18" dur="1" fill="hold">
+                                          <p:stCondLst>
+                                            <p:cond delay="0"/>
+                                          </p:stCondLst>
+                                        </p:cTn>
+                                        <p:tgtEl>
+                                          <p:spTgt spid="3">
+                                            <p:txEl>
+                                              <p:pRg st="3" end="3"/>
+                                            </p:txEl>
+                                          </p:spTgt>
+                                        </p:tgtEl>
+                                        <p:attrNameLst>
+                                          <p:attrName>style.visibility</p:attrName>
+                                        </p:attrNameLst>
+                                      </p:cBhvr>
+                                      <p:to>
+                                        <p:strVal val="visible"/>
+                                      </p:to>
+                                    </p:set>
+                                  </p:childTnLst>
+                                </p:cTn>
+                              </p:par>
+                            </p:childTnLst>
+                          </p:cTn>
+                        </p:par>
+                      </p:childTnLst>
+                    </p:cTn>
+                  </p:par>
+                </p:childTnLst>
+              </p:cTn>
+              <p:prevCondLst>
+                <p:cond evt="onPrev" delay="0">
+                  <p:tgtEl>
+                    <p:sldTgt/>
+                  </p:tgtEl>
+                </p:cond>
+              </p:prevCondLst>
+              <p:nextCondLst>
+                <p:cond evt="onNext" delay="0">
+                  <p:tgtEl>
+                    <p:sldTgt/>
+                  </p:tgtEl>
+                </p:cond>
+              </p:nextCondLst>
+            </p:seq>
+          </p:childTnLst>
+        </p:cTn>
+      </p:par>
+    </p:tnLst>
+    <p:bldLst>
+      <p:bldP spid="3" grpId="0" uiExpand="1" build="p"/>
+    </p:bldLst>
+  </p:timing>
+</p:sld>
+</file>
+
+<file path=ppt/slides/slide5.xml><?xml version="1.0" encoding="utf-8"?>
+<p:sld xmlns:a="http://schemas.openxmlformats.org/drawingml/2006/main" xmlns:r="http://schemas.openxmlformats.org/officeDocument/2006/relationships" xmlns:p="http://schemas.openxmlformats.org/presentationml/2006/main">
+  <p:cSld>
+    <p:spTree>
+      <p:nvGrpSpPr>
+        <p:cNvPr id="1" name=""/>
+        <p:cNvGrpSpPr/>
+        <p:nvPr/>
+      </p:nvGrpSpPr>
+      <p:grpSpPr>
+        <a:xfrm>
+          <a:off x="0" y="0"/>
+          <a:ext cx="0" cy="0"/>
+          <a:chOff x="0" y="0"/>
+          <a:chExt cx="0" cy="0"/>
+        </a:xfrm>
+      </p:grpSpPr>
+      <p:sp>
+        <p:nvSpPr>
+          <p:cNvPr id="2" name="Title 1"/>
+          <p:cNvSpPr>
+            <a:spLocks noGrp="1"/>
+          </p:cNvSpPr>
+          <p:nvPr>
+            <p:ph type="title"/>
+          </p:nvPr>
+        </p:nvSpPr>
+        <p:spPr>
+          <a:xfrm>
+            <a:off x="722313" y="1660820"/>
+            <a:ext cx="7772400" cy="4108156"/>
+          </a:xfrm>
+          <a:prstGeom prst="rect">
+            <a:avLst/>
+          </a:prstGeom>
+        </p:spPr>
+        <p:txBody>
+          <a:bodyPr/>
+          <a:lstStyle/>
+          <a:p>
+            <a:pPr lvl="0" indent="0" marL="0">
+              <a:buNone/>
+            </a:pPr>
+            <a:r>
+              <a:rPr/>
+              <a:t>Discrete Random Variable</a:t>
+            </a:r>
+          </a:p>
+        </p:txBody>
+      </p:sp>
+      <p:sp>
+        <p:nvSpPr>
+          <p:cNvPr id="3" name="Slide Number Placeholder 2"/>
+          <p:cNvSpPr>
+            <a:spLocks noGrp="1"/>
+          </p:cNvSpPr>
+          <p:nvPr>
+            <p:ph idx="10" sz="quarter" type="sldNum"/>
+          </p:nvPr>
+        </p:nvSpPr>
+        <p:spPr/>
+        <p:txBody>
+          <a:bodyPr/>
+          <a:lstStyle/>
+          <a:p>
+            <a:fld id="{9C13042B-154E-4D18-B726-07B2F714EFCF}" type="slidenum">
+              <a:rPr lang="en-US" smtClean="0"/>
+              <a:pPr/>
+              <a:t>‹#›</a:t>
+            </a:fld>
+            <a:endParaRPr dirty="0" lang="en-US"/>
+          </a:p>
+        </p:txBody>
+      </p:sp>
+    </p:spTree>
+  </p:cSld>
+</p:sld>
+</file>
+
+<file path=ppt/slides/slide6.xml><?xml version="1.0" encoding="utf-8"?>
+<p:sld xmlns:a="http://schemas.openxmlformats.org/drawingml/2006/main" xmlns:r="http://schemas.openxmlformats.org/officeDocument/2006/relationships" xmlns:p="http://schemas.openxmlformats.org/presentationml/2006/main">
+  <p:cSld>
+    <p:spTree>
+      <p:nvGrpSpPr>
+        <p:cNvPr id="1" name=""/>
+        <p:cNvGrpSpPr/>
+        <p:nvPr/>
+      </p:nvGrpSpPr>
+      <p:grpSpPr>
+        <a:xfrm>
+          <a:off x="0" y="0"/>
+          <a:ext cx="0" cy="0"/>
+          <a:chOff x="0" y="0"/>
+          <a:chExt cx="0" cy="0"/>
+        </a:xfrm>
+      </p:grpSpPr>
+      <p:sp>
+        <p:nvSpPr>
+          <p:cNvPr id="2" name="Title Placeholder 1"/>
+          <p:cNvSpPr>
+            <a:spLocks noGrp="1"/>
+          </p:cNvSpPr>
+          <p:nvPr>
+            <p:ph type="title"/>
+          </p:nvPr>
+        </p:nvSpPr>
+        <p:spPr bwMode="auto">
+          <a:xfrm>
+            <a:off x="433680" y="423297"/>
+            <a:ext cx="8229600" cy="784602"/>
+          </a:xfrm>
+          <a:prstGeom prst="rect">
+            <a:avLst/>
+          </a:prstGeom>
+          <a:noFill/>
+          <a:ln w="9525">
+            <a:noFill/>
+            <a:miter lim="800000"/>
+            <a:headEnd/>
+            <a:tailEnd/>
+          </a:ln>
+        </p:spPr>
+        <p:txBody>
+          <a:bodyPr/>
+          <a:lstStyle/>
+          <a:p>
+            <a:pPr lvl="0" indent="0" marL="0">
+              <a:buNone/>
+            </a:pPr>
+            <a:r>
+              <a:rPr/>
+              <a:t>Class Notes</a:t>
+            </a:r>
+          </a:p>
+        </p:txBody>
+      </p:sp>
+      <p:sp>
+        <p:nvSpPr>
+          <p:cNvPr id="3" name="Text Placeholder 2"/>
+          <p:cNvSpPr>
+            <a:spLocks noGrp="1"/>
+          </p:cNvSpPr>
+          <p:nvPr>
+            <p:ph idx="1"/>
+          </p:nvPr>
+        </p:nvSpPr>
+        <p:spPr/>
+        <p:txBody>
+          <a:bodyPr/>
+          <a:lstStyle/>
+          <a:p>
+            <a:pPr lvl="0"/>
+            <a:r>
+              <a:rPr/>
+              <a:t>Live class lecture notes</a:t>
+            </a:r>
+          </a:p>
+          <a:p>
+            <a:pPr lvl="0"/>
+            <a:r>
+              <a:rPr/>
+              <a:t>I usually post the class notes on Canvas by the end of the day. If you don’t see it, shoot me an email next day!</a:t>
+            </a:r>
+          </a:p>
+        </p:txBody>
+      </p:sp>
+      <p:sp>
+        <p:nvSpPr>
+          <p:cNvPr id="4" name="Slide Number Placeholder 3"/>
+          <p:cNvSpPr>
+            <a:spLocks noGrp="1"/>
+          </p:cNvSpPr>
+          <p:nvPr>
+            <p:ph idx="10" sz="quarter" type="sldNum"/>
+          </p:nvPr>
+        </p:nvSpPr>
+        <p:spPr/>
+        <p:txBody>
+          <a:bodyPr/>
+          <a:lstStyle/>
+          <a:p>
+            <a:fld id="{9C13042B-154E-4D18-B726-07B2F714EFCF}" type="slidenum">
+              <a:rPr lang="en-US" smtClean="0"/>
+              <a:pPr/>
+              <a:t>‹#›</a:t>
+            </a:fld>
+            <a:endParaRPr dirty="0" lang="en-US"/>
+          </a:p>
+        </p:txBody>
+      </p:sp>
+    </p:spTree>
+  </p:cSld>
+</p:sld>
+</file>
+
+<file path=ppt/slides/slide7.xml><?xml version="1.0" encoding="utf-8"?>
+<p:sld xmlns:a="http://schemas.openxmlformats.org/drawingml/2006/main" xmlns:r="http://schemas.openxmlformats.org/officeDocument/2006/relationships" xmlns:p="http://schemas.openxmlformats.org/presentationml/2006/main">
+  <p:cSld>
+    <p:spTree>
+      <p:nvGrpSpPr>
+        <p:cNvPr id="1" name=""/>
+        <p:cNvGrpSpPr/>
+        <p:nvPr/>
+      </p:nvGrpSpPr>
+      <p:grpSpPr>
+        <a:xfrm>
+          <a:off x="0" y="0"/>
+          <a:ext cx="0" cy="0"/>
+          <a:chOff x="0" y="0"/>
+          <a:chExt cx="0" cy="0"/>
+        </a:xfrm>
+      </p:grpSpPr>
+      <p:sp>
+        <p:nvSpPr>
+          <p:cNvPr id="2" name="Title Placeholder 1"/>
+          <p:cNvSpPr>
+            <a:spLocks noGrp="1"/>
+          </p:cNvSpPr>
+          <p:nvPr>
+            <p:ph type="title"/>
+          </p:nvPr>
+        </p:nvSpPr>
+        <p:spPr bwMode="auto">
+          <a:xfrm>
+            <a:off x="433680" y="423297"/>
+            <a:ext cx="8229600" cy="784602"/>
+          </a:xfrm>
+          <a:prstGeom prst="rect">
+            <a:avLst/>
+          </a:prstGeom>
+          <a:noFill/>
+          <a:ln w="9525">
+            <a:noFill/>
+            <a:miter lim="800000"/>
+            <a:headEnd/>
+            <a:tailEnd/>
+          </a:ln>
+        </p:spPr>
+        <p:txBody>
+          <a:bodyPr/>
+          <a:lstStyle/>
+          <a:p>
+            <a:pPr lvl="0" indent="0" marL="0">
+              <a:buNone/>
+            </a:pPr>
+            <a:r>
+              <a:rPr/>
+              <a:t>Proof: Expected Value of Linear Transformation</a:t>
+            </a:r>
+          </a:p>
+        </p:txBody>
+      </p:sp>
+      <mc:AlternateContent xmlns:mc="http://schemas.openxmlformats.org/markup-compatibility/2006">
+        <mc:Choice xmlns:a14="http://schemas.microsoft.com/office/drawing/2010/main" Requires="a14">
+          <p:sp>
+            <p:nvSpPr>
+              <p:cNvPr id="3" name="Text Placeholder 2"/>
+              <p:cNvSpPr>
+                <a:spLocks noGrp="1"/>
+              </p:cNvSpPr>
+              <p:nvPr>
+                <p:ph idx="1"/>
+              </p:nvPr>
+            </p:nvSpPr>
+            <p:spPr/>
+            <p:txBody>
+              <a:bodyPr/>
+              <a:lstStyle/>
+              <a:p>
+                <a:pPr lvl="0"/>
+                <a:r>
+                  <a:rPr/>
+                  <a:t>Let </a:t>
+                </a:r>
+                <a14:m>
+                  <m:oMath xmlns:m="http://schemas.openxmlformats.org/officeDocument/2006/math">
+                    <m:r>
+                      <m:t>a</m:t>
+                    </m:r>
+                  </m:oMath>
+                </a14:m>
+                <a:r>
+                  <a:rPr/>
+                  <a:t> and </a:t>
+                </a:r>
+                <a14:m>
+                  <m:oMath xmlns:m="http://schemas.openxmlformats.org/officeDocument/2006/math">
+                    <m:r>
+                      <m:t>b</m:t>
+                    </m:r>
+                  </m:oMath>
+                </a14:m>
+                <a:r>
+                  <a:rPr/>
+                  <a:t> be constants.</a:t>
+                </a:r>
+              </a:p>
+              <a:p>
+                <a:pPr lvl="0"/>
+                <a:r>
+                  <a:rPr/>
+                  <a:t>We want to show that</a:t>
+                </a:r>
+              </a:p>
+              <a:p>
+                <a:pPr lvl="0" indent="0" marL="0">
+                  <a:buNone/>
+                </a:pPr>
+                <a14:m>
+                  <m:oMathPara xmlns:m="http://schemas.openxmlformats.org/officeDocument/2006/math">
+                    <m:oMathParaPr>
+                      <m:jc m:val="center"/>
+                    </m:oMathParaPr>
+                    <m:oMath>
+                      <m:r>
+                        <m:t>E</m:t>
+                      </m:r>
+                      <m:d>
+                        <m:dPr>
+                          <m:begChr m:val="("/>
+                          <m:sepChr m:val=""/>
+                          <m:endChr m:val=")"/>
+                          <m:grow/>
+                        </m:dPr>
+                        <m:e>
+                          <m:r>
+                            <m:t>a</m:t>
+                          </m:r>
+                          <m:r>
+                            <m:t>X</m:t>
+                          </m:r>
+                          <m:r>
+                            <m:rPr>
+                              <m:sty m:val="p"/>
+                            </m:rPr>
+                            <m:t>+</m:t>
+                          </m:r>
+                          <m:r>
+                            <m:t>b</m:t>
+                          </m:r>
+                        </m:e>
+                      </m:d>
+                      <m:r>
+                        <m:rPr>
+                          <m:sty m:val="p"/>
+                        </m:rPr>
+                        <m:t>=</m:t>
+                      </m:r>
+                      <m:r>
+                        <m:t>a</m:t>
+                      </m:r>
+                      <m:r>
+                        <m:t>E</m:t>
+                      </m:r>
+                      <m:d>
+                        <m:dPr>
+                          <m:begChr m:val="("/>
+                          <m:sepChr m:val=""/>
+                          <m:endChr m:val=")"/>
+                          <m:grow/>
+                        </m:dPr>
+                        <m:e>
+                          <m:r>
+                            <m:t>X</m:t>
+                          </m:r>
+                        </m:e>
+                      </m:d>
+                      <m:r>
+                        <m:rPr>
+                          <m:sty m:val="p"/>
+                        </m:rPr>
+                        <m:t>+</m:t>
+                      </m:r>
+                      <m:r>
+                        <m:t>b</m:t>
+                      </m:r>
+                      <m:r>
+                        <m:rPr>
+                          <m:sty m:val="p"/>
+                        </m:rPr>
+                        <m:t>.</m:t>
+                      </m:r>
+                    </m:oMath>
+                  </m:oMathPara>
+                </a14:m>
+              </a:p>
+              <a:p>
+                <a:pPr lvl="0"/>
+                <a:r>
+                  <a:rPr/>
+                  <a:t>Start from the definition of expected value:</a:t>
+                </a:r>
+              </a:p>
+              <a:p>
+                <a:pPr lvl="0" indent="0" marL="0">
+                  <a:buNone/>
+                </a:pPr>
+                <a14:m>
+                  <m:oMathPara xmlns:m="http://schemas.openxmlformats.org/officeDocument/2006/math">
+                    <m:oMathParaPr>
+                      <m:jc m:val="center"/>
+                    </m:oMathParaPr>
+                    <m:oMath>
+                      <m:r>
+                        <m:t>E</m:t>
+                      </m:r>
+                      <m:d>
+                        <m:dPr>
+                          <m:begChr m:val="("/>
+                          <m:sepChr m:val=""/>
+                          <m:endChr m:val=")"/>
+                          <m:grow/>
+                        </m:dPr>
+                        <m:e>
+                          <m:r>
+                            <m:t>a</m:t>
+                          </m:r>
+                          <m:r>
+                            <m:t>X</m:t>
+                          </m:r>
+                          <m:r>
+                            <m:rPr>
+                              <m:sty m:val="p"/>
+                            </m:rPr>
+                            <m:t>+</m:t>
+                          </m:r>
+                          <m:r>
+                            <m:t>b</m:t>
+                          </m:r>
+                        </m:e>
+                      </m:d>
+                      <m:r>
+                        <m:rPr>
+                          <m:sty m:val="p"/>
+                        </m:rPr>
+                        <m:t>=</m:t>
+                      </m:r>
+                      <m:r>
+                        <m:rPr>
+                          <m:sty m:val="p"/>
+                        </m:rPr>
+                        <m:t>∑</m:t>
+                      </m:r>
+                      <m:d>
+                        <m:dPr>
+                          <m:begChr m:val="("/>
+                          <m:sepChr m:val=""/>
+                          <m:endChr m:val=")"/>
+                          <m:grow/>
+                        </m:dPr>
+                        <m:e>
+                          <m:r>
+                            <m:t>a</m:t>
+                          </m:r>
+                          <m:r>
+                            <m:t>x</m:t>
+                          </m:r>
+                          <m:r>
+                            <m:rPr>
+                              <m:sty m:val="p"/>
+                            </m:rPr>
+                            <m:t>+</m:t>
+                          </m:r>
+                          <m:r>
+                            <m:t>b</m:t>
+                          </m:r>
+                        </m:e>
+                      </m:d>
+                      <m:r>
+                        <m:t>p</m:t>
+                      </m:r>
+                      <m:d>
+                        <m:dPr>
+                          <m:begChr m:val="("/>
+                          <m:sepChr m:val=""/>
+                          <m:endChr m:val=")"/>
+                          <m:grow/>
+                        </m:dPr>
+                        <m:e>
+                          <m:r>
+                            <m:t>x</m:t>
+                          </m:r>
+                        </m:e>
+                      </m:d>
+                      <m:r>
+                        <m:rPr>
+                          <m:sty m:val="p"/>
+                        </m:rPr>
+                        <m:t>.</m:t>
+                      </m:r>
+                    </m:oMath>
+                  </m:oMathPara>
+                </a14:m>
+              </a:p>
+              <a:p>
+                <a:pPr lvl="0"/>
+                <a:r>
+                  <a:rPr/>
+                  <a:t>Distribute inside the summation:</a:t>
+                </a:r>
+              </a:p>
+              <a:p>
+                <a:pPr lvl="0" indent="0" marL="0">
+                  <a:buNone/>
+                </a:pPr>
+                <a14:m>
+                  <m:oMathPara xmlns:m="http://schemas.openxmlformats.org/officeDocument/2006/math">
+                    <m:oMathParaPr>
+                      <m:jc m:val="center"/>
+                    </m:oMathParaPr>
+                    <m:oMath>
+                      <m:r>
+                        <m:t>E</m:t>
+                      </m:r>
+                      <m:d>
+                        <m:dPr>
+                          <m:begChr m:val="("/>
+                          <m:sepChr m:val=""/>
+                          <m:endChr m:val=")"/>
+                          <m:grow/>
+                        </m:dPr>
+                        <m:e>
+                          <m:r>
+                            <m:t>a</m:t>
+                          </m:r>
+                          <m:r>
+                            <m:t>X</m:t>
+                          </m:r>
+                          <m:r>
+                            <m:rPr>
+                              <m:sty m:val="p"/>
+                            </m:rPr>
+                            <m:t>+</m:t>
+                          </m:r>
+                          <m:r>
+                            <m:t>b</m:t>
+                          </m:r>
+                        </m:e>
+                      </m:d>
+                      <m:r>
+                        <m:rPr>
+                          <m:sty m:val="p"/>
+                        </m:rPr>
+                        <m:t>=</m:t>
+                      </m:r>
+                      <m:r>
+                        <m:rPr>
+                          <m:sty m:val="p"/>
+                        </m:rPr>
+                        <m:t>∑</m:t>
+                      </m:r>
+                      <m:r>
+                        <m:t>a</m:t>
+                      </m:r>
+                      <m:r>
+                        <m:t>x</m:t>
+                      </m:r>
+                      <m:r>
+                        <m:t>p</m:t>
+                      </m:r>
+                      <m:d>
+                        <m:dPr>
+                          <m:begChr m:val="("/>
+                          <m:sepChr m:val=""/>
+                          <m:endChr m:val=")"/>
+                          <m:grow/>
+                        </m:dPr>
+                        <m:e>
+                          <m:r>
+                            <m:t>x</m:t>
+                          </m:r>
+                        </m:e>
+                      </m:d>
+                      <m:r>
+                        <m:rPr>
+                          <m:sty m:val="p"/>
+                        </m:rPr>
+                        <m:t>+</m:t>
+                      </m:r>
+                      <m:r>
+                        <m:rPr>
+                          <m:sty m:val="p"/>
+                        </m:rPr>
+                        <m:t>∑</m:t>
+                      </m:r>
+                      <m:r>
+                        <m:t>b</m:t>
+                      </m:r>
+                      <m:r>
+                        <m:t>p</m:t>
+                      </m:r>
+                      <m:d>
+                        <m:dPr>
+                          <m:begChr m:val="("/>
+                          <m:sepChr m:val=""/>
+                          <m:endChr m:val=")"/>
+                          <m:grow/>
+                        </m:dPr>
+                        <m:e>
+                          <m:r>
+                            <m:t>x</m:t>
+                          </m:r>
+                        </m:e>
+                      </m:d>
+                      <m:r>
+                        <m:rPr>
+                          <m:sty m:val="p"/>
+                        </m:rPr>
+                        <m:t>.</m:t>
+                      </m:r>
+                    </m:oMath>
+                  </m:oMathPara>
+                </a14:m>
+              </a:p>
+              <a:p>
+                <a:pPr lvl="0"/>
+                <a:r>
+                  <a:rPr/>
+                  <a:t>Since </a:t>
+                </a:r>
+                <a14:m>
+                  <m:oMath xmlns:m="http://schemas.openxmlformats.org/officeDocument/2006/math">
+                    <m:r>
+                      <m:t>a</m:t>
+                    </m:r>
+                  </m:oMath>
+                </a14:m>
+                <a:r>
+                  <a:rPr/>
+                  <a:t> and </a:t>
+                </a:r>
+                <a14:m>
+                  <m:oMath xmlns:m="http://schemas.openxmlformats.org/officeDocument/2006/math">
+                    <m:r>
+                      <m:t>b</m:t>
+                    </m:r>
+                  </m:oMath>
+                </a14:m>
+                <a:r>
+                  <a:rPr/>
+                  <a:t> are constants, they can be taken outside the summations:</a:t>
+                </a:r>
+              </a:p>
+              <a:p>
+                <a:pPr lvl="0" indent="0" marL="0">
+                  <a:buNone/>
+                </a:pPr>
+                <a14:m>
+                  <m:oMathPara xmlns:m="http://schemas.openxmlformats.org/officeDocument/2006/math">
+                    <m:oMathParaPr>
+                      <m:jc m:val="center"/>
+                    </m:oMathParaPr>
+                    <m:oMath>
+                      <m:r>
+                        <m:t>E</m:t>
+                      </m:r>
+                      <m:d>
+                        <m:dPr>
+                          <m:begChr m:val="("/>
+                          <m:sepChr m:val=""/>
+                          <m:endChr m:val=")"/>
+                          <m:grow/>
+                        </m:dPr>
+                        <m:e>
+                          <m:r>
+                            <m:t>a</m:t>
+                          </m:r>
+                          <m:r>
+                            <m:t>X</m:t>
+                          </m:r>
+                          <m:r>
+                            <m:rPr>
+                              <m:sty m:val="p"/>
+                            </m:rPr>
+                            <m:t>+</m:t>
+                          </m:r>
+                          <m:r>
+                            <m:t>b</m:t>
+                          </m:r>
+                        </m:e>
+                      </m:d>
+                      <m:r>
+                        <m:rPr>
+                          <m:sty m:val="p"/>
+                        </m:rPr>
+                        <m:t>=</m:t>
+                      </m:r>
+                      <m:r>
+                        <m:t>a</m:t>
+                      </m:r>
+                      <m:r>
+                        <m:rPr>
+                          <m:sty m:val="p"/>
+                        </m:rPr>
+                        <m:t>∑</m:t>
+                      </m:r>
+                      <m:r>
+                        <m:t>x</m:t>
+                      </m:r>
+                      <m:r>
+                        <m:t>p</m:t>
+                      </m:r>
+                      <m:d>
+                        <m:dPr>
+                          <m:begChr m:val="("/>
+                          <m:sepChr m:val=""/>
+                          <m:endChr m:val=")"/>
+                          <m:grow/>
+                        </m:dPr>
+                        <m:e>
+                          <m:r>
+                            <m:t>x</m:t>
+                          </m:r>
+                        </m:e>
+                      </m:d>
+                      <m:r>
+                        <m:rPr>
+                          <m:sty m:val="p"/>
+                        </m:rPr>
+                        <m:t>+</m:t>
+                      </m:r>
+                      <m:r>
+                        <m:t>b</m:t>
+                      </m:r>
+                      <m:r>
+                        <m:rPr>
+                          <m:sty m:val="p"/>
+                        </m:rPr>
+                        <m:t>∑</m:t>
+                      </m:r>
+                      <m:r>
+                        <m:t>p</m:t>
+                      </m:r>
+                      <m:d>
+                        <m:dPr>
+                          <m:begChr m:val="("/>
+                          <m:sepChr m:val=""/>
+                          <m:endChr m:val=")"/>
+                          <m:grow/>
+                        </m:dPr>
+                        <m:e>
+                          <m:r>
+                            <m:t>x</m:t>
+                          </m:r>
+                        </m:e>
+                      </m:d>
+                      <m:r>
+                        <m:rPr>
+                          <m:sty m:val="p"/>
+                        </m:rPr>
+                        <m:t>.</m:t>
+                      </m:r>
+                    </m:oMath>
+                  </m:oMathPara>
+                </a14:m>
+              </a:p>
+              <a:p>
+                <a:pPr lvl="0"/>
+                <a:r>
+                  <a:rPr/>
+                  <a:t>Recall that</a:t>
+                </a:r>
+              </a:p>
+              <a:p>
+                <a:pPr lvl="0" indent="0" marL="0">
+                  <a:buNone/>
+                </a:pPr>
+                <a14:m>
+                  <m:oMathPara xmlns:m="http://schemas.openxmlformats.org/officeDocument/2006/math">
+                    <m:oMathParaPr>
+                      <m:jc m:val="center"/>
+                    </m:oMathParaPr>
+                    <m:oMath>
+                      <m:r>
+                        <m:rPr>
+                          <m:sty m:val="p"/>
+                        </m:rPr>
+                        <m:t>∑</m:t>
+                      </m:r>
+                      <m:r>
+                        <m:t>x</m:t>
+                      </m:r>
+                      <m:r>
+                        <m:t>p</m:t>
+                      </m:r>
+                      <m:d>
+                        <m:dPr>
+                          <m:begChr m:val="("/>
+                          <m:sepChr m:val=""/>
+                          <m:endChr m:val=")"/>
+                          <m:grow/>
+                        </m:dPr>
+                        <m:e>
+                          <m:r>
+                            <m:t>x</m:t>
+                          </m:r>
+                        </m:e>
+                      </m:d>
+                      <m:r>
+                        <m:rPr>
+                          <m:sty m:val="p"/>
+                        </m:rPr>
+                        <m:t>=</m:t>
+                      </m:r>
+                      <m:r>
+                        <m:t>E</m:t>
+                      </m:r>
+                      <m:d>
+                        <m:dPr>
+                          <m:begChr m:val="("/>
+                          <m:sepChr m:val=""/>
+                          <m:endChr m:val=")"/>
+                          <m:grow/>
+                        </m:dPr>
+                        <m:e>
+                          <m:r>
+                            <m:t>X</m:t>
+                          </m:r>
+                        </m:e>
+                      </m:d>
+                    </m:oMath>
+                  </m:oMathPara>
+                </a14:m>
+              </a:p>
+              <a:p>
+                <a:pPr lvl="0" indent="0" marL="0">
+                  <a:buNone/>
+                </a:pPr>
+                <a:r>
+                  <a:rPr/>
+                  <a:t>and</a:t>
+                </a:r>
+              </a:p>
+              <a:p>
+                <a:pPr lvl="0" indent="0" marL="0">
+                  <a:buNone/>
+                </a:pPr>
+                <a14:m>
+                  <m:oMathPara xmlns:m="http://schemas.openxmlformats.org/officeDocument/2006/math">
+                    <m:oMathParaPr>
+                      <m:jc m:val="center"/>
+                    </m:oMathParaPr>
+                    <m:oMath>
+                      <m:r>
+                        <m:rPr>
+                          <m:sty m:val="p"/>
+                        </m:rPr>
+                        <m:t>∑</m:t>
+                      </m:r>
+                      <m:r>
+                        <m:t>p</m:t>
+                      </m:r>
+                      <m:d>
+                        <m:dPr>
+                          <m:begChr m:val="("/>
+                          <m:sepChr m:val=""/>
+                          <m:endChr m:val=")"/>
+                          <m:grow/>
+                        </m:dPr>
+                        <m:e>
+                          <m:r>
+                            <m:t>x</m:t>
+                          </m:r>
+                        </m:e>
+                      </m:d>
+                      <m:r>
+                        <m:rPr>
+                          <m:sty m:val="p"/>
+                        </m:rPr>
+                        <m:t>=</m:t>
+                      </m:r>
+                      <m:r>
+                        <m:t>1</m:t>
+                      </m:r>
+                      <m:r>
+                        <m:rPr>
+                          <m:sty m:val="p"/>
+                        </m:rPr>
+                        <m:t>.</m:t>
+                      </m:r>
+                    </m:oMath>
+                  </m:oMathPara>
+                </a14:m>
+              </a:p>
+              <a:p>
+                <a:pPr lvl="0"/>
+                <a:r>
+                  <a:rPr/>
+                  <a:t>Therefore,</a:t>
+                </a:r>
+              </a:p>
+              <a:p>
+                <a:pPr lvl="0" indent="0" marL="0">
+                  <a:buNone/>
+                </a:pPr>
+                <a14:m>
+                  <m:oMathPara xmlns:m="http://schemas.openxmlformats.org/officeDocument/2006/math">
+                    <m:oMathParaPr>
+                      <m:jc m:val="center"/>
+                    </m:oMathParaPr>
+                    <m:oMath>
+                      <m:r>
+                        <m:t>E</m:t>
+                      </m:r>
+                      <m:d>
+                        <m:dPr>
+                          <m:begChr m:val="("/>
+                          <m:sepChr m:val=""/>
+                          <m:endChr m:val=")"/>
+                          <m:grow/>
+                        </m:dPr>
+                        <m:e>
+                          <m:r>
+                            <m:t>a</m:t>
+                          </m:r>
+                          <m:r>
+                            <m:t>X</m:t>
+                          </m:r>
+                          <m:r>
+                            <m:rPr>
+                              <m:sty m:val="p"/>
+                            </m:rPr>
+                            <m:t>+</m:t>
+                          </m:r>
+                          <m:r>
+                            <m:t>b</m:t>
+                          </m:r>
+                        </m:e>
+                      </m:d>
+                      <m:r>
+                        <m:rPr>
+                          <m:sty m:val="p"/>
+                        </m:rPr>
+                        <m:t>=</m:t>
+                      </m:r>
+                      <m:r>
+                        <m:t>a</m:t>
+                      </m:r>
+                      <m:r>
+                        <m:t>E</m:t>
+                      </m:r>
+                      <m:d>
+                        <m:dPr>
+                          <m:begChr m:val="("/>
+                          <m:sepChr m:val=""/>
+                          <m:endChr m:val=")"/>
+                          <m:grow/>
+                        </m:dPr>
+                        <m:e>
+                          <m:r>
+                            <m:t>X</m:t>
+                          </m:r>
+                        </m:e>
+                      </m:d>
+                      <m:r>
+                        <m:rPr>
+                          <m:sty m:val="p"/>
+                        </m:rPr>
+                        <m:t>+</m:t>
+                      </m:r>
+                      <m:r>
+                        <m:t>b</m:t>
+                      </m:r>
+                      <m:d>
+                        <m:dPr>
+                          <m:begChr m:val="("/>
+                          <m:sepChr m:val=""/>
+                          <m:endChr m:val=")"/>
+                          <m:grow/>
+                        </m:dPr>
+                        <m:e>
+                          <m:r>
+                            <m:t>1</m:t>
+                          </m:r>
+                        </m:e>
+                      </m:d>
+                      <m:r>
+                        <m:rPr>
+                          <m:sty m:val="p"/>
+                        </m:rPr>
+                        <m:t>.</m:t>
+                      </m:r>
+                    </m:oMath>
+                  </m:oMathPara>
+                </a14:m>
+              </a:p>
+              <a:p>
+                <a:pPr lvl="0"/>
+                <a:r>
+                  <a:rPr/>
+                  <a:t>Hence,</a:t>
+                </a:r>
+              </a:p>
+              <a:p>
+                <a:pPr lvl="0" indent="0" marL="0">
+                  <a:buNone/>
+                </a:pPr>
+                <a14:m>
+                  <m:oMathPara xmlns:m="http://schemas.openxmlformats.org/officeDocument/2006/math">
+                    <m:oMathParaPr>
+                      <m:jc m:val="center"/>
+                    </m:oMathParaPr>
+                    <m:oMath>
+                      <m:borderBox>
+                        <m:e>
+                          <m:r>
+                            <m:t>E</m:t>
+                          </m:r>
+                          <m:d>
+                            <m:dPr>
+                              <m:begChr m:val="("/>
+                              <m:sepChr m:val=""/>
+                              <m:endChr m:val=")"/>
+                              <m:grow/>
+                            </m:dPr>
+                            <m:e>
+                              <m:r>
+                                <m:t>a</m:t>
+                              </m:r>
+                              <m:r>
+                                <m:t>X</m:t>
+                              </m:r>
+                              <m:r>
+                                <m:rPr>
+                                  <m:sty m:val="p"/>
+                                </m:rPr>
+                                <m:t>+</m:t>
+                              </m:r>
+                              <m:r>
+                                <m:t>b</m:t>
+                              </m:r>
+                            </m:e>
+                          </m:d>
+                          <m:r>
+                            <m:rPr>
+                              <m:sty m:val="p"/>
+                            </m:rPr>
+                            <m:t>=</m:t>
+                          </m:r>
+                          <m:r>
+                            <m:t>a</m:t>
+                          </m:r>
+                          <m:r>
+                            <m:t>E</m:t>
+                          </m:r>
+                          <m:d>
+                            <m:dPr>
+                              <m:begChr m:val="("/>
+                              <m:sepChr m:val=""/>
+                              <m:endChr m:val=")"/>
+                              <m:grow/>
+                            </m:dPr>
+                            <m:e>
+                              <m:r>
+                                <m:t>X</m:t>
+                              </m:r>
+                            </m:e>
+                          </m:d>
+                          <m:r>
+                            <m:rPr>
+                              <m:sty m:val="p"/>
+                            </m:rPr>
+                            <m:t>+</m:t>
+                          </m:r>
+                          <m:r>
+                            <m:t>b</m:t>
+                          </m:r>
+                        </m:e>
+                      </m:borderBox>
+                    </m:oMath>
+                  </m:oMathPara>
+                </a14:m>
+              </a:p>
+            </p:txBody>
+          </p:sp>
+        </mc:Choice>
+      </mc:AlternateContent>
+      <p:sp>
+        <p:nvSpPr>
+          <p:cNvPr id="4" name="Slide Number Placeholder 3"/>
+          <p:cNvSpPr>
+            <a:spLocks noGrp="1"/>
+          </p:cNvSpPr>
+          <p:nvPr>
+            <p:ph idx="10" sz="quarter" type="sldNum"/>
+          </p:nvPr>
+        </p:nvSpPr>
+        <p:spPr/>
+        <p:txBody>
+          <a:bodyPr/>
+          <a:lstStyle/>
+          <a:p>
+            <a:fld id="{9C13042B-154E-4D18-B726-07B2F714EFCF}" type="slidenum">
+              <a:rPr lang="en-US" smtClean="0"/>
+              <a:pPr/>
+              <a:t>‹#›</a:t>
+            </a:fld>
+            <a:endParaRPr dirty="0" lang="en-US"/>
+          </a:p>
+        </p:txBody>
+      </p:sp>
+    </p:spTree>
+  </p:cSld>
+  <p:timing>
+    <p:tnLst>
+      <p:par>
+        <p:cTn id="1" dur="indefinite" restart="never" nodeType="tmRoot">
+          <p:childTnLst>
+            <p:seq concurrent="1" nextAc="seek">
+              <p:cTn id="2" dur="indefinite" nodeType="mainSeq">
+                <p:childTnLst>
+                  <p:par>
+                    <p:cTn id="3" fill="hold">
+                      <p:stCondLst>
+                        <p:cond delay="indefinite"/>
+                      </p:stCondLst>
+                      <p:childTnLst>
+                        <p:par>
+                          <p:cTn id="4" fill="hold">
+                            <p:stCondLst>
+                              <p:cond delay="0"/>
+                            </p:stCondLst>
+                            <p:childTnLst>
+                              <p:par>
+                                <p:cTn id="5" presetID="1" presetClass="entr" presetSubtype="0" fill="hold" grpId="0" nodeType="clickEffect">
+                                  <p:stCondLst>
+                                    <p:cond delay="0"/>
+                                  </p:stCondLst>
+                                  <p:childTnLst>
+                                    <p:set>
+                                      <p:cBhvr>
+                                        <p:cTn id="6" dur="1" fill="hold">
+                                          <p:stCondLst>
+                                            <p:cond delay="0"/>
+                                          </p:stCondLst>
+                                        </p:cTn>
+                                        <p:tgtEl>
+                                          <p:spTgt spid="3">
+                                            <p:txEl>
+                                              <p:pRg st="0" end="0"/>
+                                            </p:txEl>
+                                          </p:spTgt>
+                                        </p:tgtEl>
+                                        <p:attrNameLst>
+                                          <p:attrName>style.visibility</p:attrName>
+                                        </p:attrNameLst>
+                                      </p:cBhvr>
+                                      <p:to>
+                                        <p:strVal val="visible"/>
+                                      </p:to>
+                                    </p:set>
+                                  </p:childTnLst>
+                                </p:cTn>
+                              </p:par>
+                            </p:childTnLst>
+                          </p:cTn>
+                        </p:par>
+                      </p:childTnLst>
+                    </p:cTn>
+                  </p:par>
+                  <p:par>
+                    <p:cTn id="7" fill="hold">
+                      <p:stCondLst>
+                        <p:cond delay="indefinite"/>
+                      </p:stCondLst>
+                      <p:childTnLst>
+                        <p:par>
+                          <p:cTn id="8" fill="hold">
+                            <p:stCondLst>
+                              <p:cond delay="0"/>
+                            </p:stCondLst>
+                            <p:childTnLst>
+                              <p:par>
+                                <p:cTn id="9" presetID="1" presetClass="entr" presetSubtype="0" fill="hold" grpId="0" nodeType="clickEffect">
+                                  <p:stCondLst>
+                                    <p:cond delay="0"/>
+                                  </p:stCondLst>
+                                  <p:childTnLst>
+                                    <p:set>
+                                      <p:cBhvr>
+                                        <p:cTn id="10" dur="1" fill="hold">
+                                          <p:stCondLst>
+                                            <p:cond delay="0"/>
+                                          </p:stCondLst>
+                                        </p:cTn>
+                                        <p:tgtEl>
+                                          <p:spTgt spid="3">
+                                            <p:txEl>
+                                              <p:pRg st="1" end="1"/>
+                                            </p:txEl>
+                                          </p:spTgt>
+                                        </p:tgtEl>
+                                        <p:attrNameLst>
+                                          <p:attrName>style.visibility</p:attrName>
+                                        </p:attrNameLst>
+                                      </p:cBhvr>
+                                      <p:to>
+                                        <p:strVal val="visible"/>
+                                      </p:to>
+                                    </p:set>
+                                  </p:childTnLst>
+                                </p:cTn>
+                              </p:par>
+                            </p:childTnLst>
+                          </p:cTn>
+                        </p:par>
+                      </p:childTnLst>
+                    </p:cTn>
+                  </p:par>
+                  <p:par>
+                    <p:cTn id="11" fill="hold">
+                      <p:stCondLst>
+                        <p:cond delay="indefinite"/>
+                      </p:stCondLst>
+                      <p:childTnLst>
+                        <p:par>
+                          <p:cTn id="12" fill="hold">
+                            <p:stCondLst>
+                              <p:cond delay="0"/>
+                            </p:stCondLst>
+                            <p:childTnLst>
+                              <p:par>
+                                <p:cTn id="13" presetID="1" presetClass="entr" presetSubtype="0" fill="hold" grpId="0" nodeType="clickEffect">
+                                  <p:stCondLst>
+                                    <p:cond delay="0"/>
+                                  </p:stCondLst>
+                                  <p:childTnLst>
+                                    <p:set>
+                                      <p:cBhvr>
+                                        <p:cTn id="14" dur="1" fill="hold">
+                                          <p:stCondLst>
+                                            <p:cond delay="0"/>
+                                          </p:stCondLst>
+                                        </p:cTn>
+                                        <p:tgtEl>
+                                          <p:spTgt spid="3">
+                                            <p:txEl>
+                                              <p:pRg st="3" end="3"/>
+                                            </p:txEl>
+                                          </p:spTgt>
+                                        </p:tgtEl>
+                                        <p:attrNameLst>
+                                          <p:attrName>style.visibility</p:attrName>
+                                        </p:attrNameLst>
+                                      </p:cBhvr>
+                                      <p:to>
+                                        <p:strVal val="visible"/>
+                                      </p:to>
+                                    </p:set>
+                                  </p:childTnLst>
+                                </p:cTn>
+                              </p:par>
+                            </p:childTnLst>
+                          </p:cTn>
+                        </p:par>
+                      </p:childTnLst>
+                    </p:cTn>
+                  </p:par>
+                  <p:par>
+                    <p:cTn id="15" fill="hold">
+                      <p:stCondLst>
+                        <p:cond delay="indefinite"/>
+                      </p:stCondLst>
+                      <p:childTnLst>
+                        <p:par>
+                          <p:cTn id="16" fill="hold">
+                            <p:stCondLst>
+                              <p:cond delay="0"/>
+                            </p:stCondLst>
+                            <p:childTnLst>
+                              <p:par>
+                                <p:cTn id="17" presetID="1" presetClass="entr" presetSubtype="0" fill="hold" grpId="0" nodeType="clickEffect">
+                                  <p:stCondLst>
+                                    <p:cond delay="0"/>
+                                  </p:stCondLst>
+                                  <p:childTnLst>
+                                    <p:set>
+                                      <p:cBhvr>
+                                        <p:cTn id="18" dur="1" fill="hold">
+                                          <p:stCondLst>
+                                            <p:cond delay="0"/>
+                                          </p:stCondLst>
+                                        </p:cTn>
+                                        <p:tgtEl>
+                                          <p:spTgt spid="3">
+                                            <p:txEl>
+                                              <p:pRg st="5" end="5"/>
+                                            </p:txEl>
+                                          </p:spTgt>
+                                        </p:tgtEl>
+                                        <p:attrNameLst>
+                                          <p:attrName>style.visibility</p:attrName>
+                                        </p:attrNameLst>
+                                      </p:cBhvr>
+                                      <p:to>
+                                        <p:strVal val="visible"/>
+                                      </p:to>
+                                    </p:set>
+                                  </p:childTnLst>
+                                </p:cTn>
+                              </p:par>
+                            </p:childTnLst>
+                          </p:cTn>
+                        </p:par>
+                      </p:childTnLst>
+                    </p:cTn>
+                  </p:par>
+                  <p:par>
+                    <p:cTn id="19" fill="hold">
+                      <p:stCondLst>
+                        <p:cond delay="indefinite"/>
+                      </p:stCondLst>
+                      <p:childTnLst>
+                        <p:par>
+                          <p:cTn id="20" fill="hold">
+                            <p:stCondLst>
+                              <p:cond delay="0"/>
+                            </p:stCondLst>
+                            <p:childTnLst>
+                              <p:par>
+                                <p:cTn id="21" presetID="1" presetClass="entr" presetSubtype="0" fill="hold" grpId="0" nodeType="clickEffect">
+                                  <p:stCondLst>
+                                    <p:cond delay="0"/>
+                                  </p:stCondLst>
+                                  <p:childTnLst>
+                                    <p:set>
+                                      <p:cBhvr>
+                                        <p:cTn id="22" dur="1" fill="hold">
+                                          <p:stCondLst>
+                                            <p:cond delay="0"/>
+                                          </p:stCondLst>
+                                        </p:cTn>
+                                        <p:tgtEl>
+                                          <p:spTgt spid="3">
+                                            <p:txEl>
+                                              <p:pRg st="7" end="7"/>
+                                            </p:txEl>
+                                          </p:spTgt>
+                                        </p:tgtEl>
+                                        <p:attrNameLst>
+                                          <p:attrName>style.visibility</p:attrName>
+                                        </p:attrNameLst>
+                                      </p:cBhvr>
+                                      <p:to>
+                                        <p:strVal val="visible"/>
+                                      </p:to>
+                                    </p:set>
+                                  </p:childTnLst>
+                                </p:cTn>
+                              </p:par>
+                            </p:childTnLst>
+                          </p:cTn>
+                        </p:par>
+                      </p:childTnLst>
+                    </p:cTn>
+                  </p:par>
+                  <p:par>
+                    <p:cTn id="23" fill="hold">
+                      <p:stCondLst>
+                        <p:cond delay="indefinite"/>
+                      </p:stCondLst>
+                      <p:childTnLst>
+                        <p:par>
+                          <p:cTn id="24" fill="hold">
+                            <p:stCondLst>
+                              <p:cond delay="0"/>
+                            </p:stCondLst>
+                            <p:childTnLst>
+                              <p:par>
+                                <p:cTn id="25" presetID="1" presetClass="entr" presetSubtype="0" fill="hold" grpId="0" nodeType="clickEffect">
+                                  <p:stCondLst>
+                                    <p:cond delay="0"/>
+                                  </p:stCondLst>
+                                  <p:childTnLst>
+                                    <p:set>
+                                      <p:cBhvr>
+                                        <p:cTn id="26" dur="1" fill="hold">
+                                          <p:stCondLst>
+                                            <p:cond delay="0"/>
+                                          </p:stCondLst>
+                                        </p:cTn>
+                                        <p:tgtEl>
+                                          <p:spTgt spid="3">
+                                            <p:txEl>
+                                              <p:pRg st="9" end="9"/>
+                                            </p:txEl>
+                                          </p:spTgt>
+                                        </p:tgtEl>
+                                        <p:attrNameLst>
+                                          <p:attrName>style.visibility</p:attrName>
+                                        </p:attrNameLst>
+                                      </p:cBhvr>
+                                      <p:to>
+                                        <p:strVal val="visible"/>
+                                      </p:to>
+                                    </p:set>
+                                  </p:childTnLst>
+                                </p:cTn>
+                              </p:par>
+                            </p:childTnLst>
+                          </p:cTn>
+                        </p:par>
+                      </p:childTnLst>
+                    </p:cTn>
+                  </p:par>
+                  <p:par>
+                    <p:cTn id="27" fill="hold">
+                      <p:stCondLst>
+                        <p:cond delay="indefinite"/>
+                      </p:stCondLst>
+                      <p:childTnLst>
+                        <p:par>
+                          <p:cTn id="28" fill="hold">
+                            <p:stCondLst>
+                              <p:cond delay="0"/>
+                            </p:stCondLst>
+                            <p:childTnLst>
+                              <p:par>
+                                <p:cTn id="29" presetID="1" presetClass="entr" presetSubtype="0" fill="hold" grpId="0" nodeType="clickEffect">
+                                  <p:stCondLst>
+                                    <p:cond delay="0"/>
+                                  </p:stCondLst>
+                                  <p:childTnLst>
+                                    <p:set>
+                                      <p:cBhvr>
+                                        <p:cTn id="30" dur="1" fill="hold">
+                                          <p:stCondLst>
+                                            <p:cond delay="0"/>
+                                          </p:stCondLst>
+                                        </p:cTn>
+                                        <p:tgtEl>
+                                          <p:spTgt spid="3">
+                                            <p:txEl>
+                                              <p:pRg st="13" end="13"/>
+                                            </p:txEl>
+                                          </p:spTgt>
+                                        </p:tgtEl>
+                                        <p:attrNameLst>
+                                          <p:attrName>style.visibility</p:attrName>
+                                        </p:attrNameLst>
+                                      </p:cBhvr>
+                                      <p:to>
+                                        <p:strVal val="visible"/>
+                                      </p:to>
+                                    </p:set>
+                                  </p:childTnLst>
+                                </p:cTn>
+                              </p:par>
+                            </p:childTnLst>
+                          </p:cTn>
+                        </p:par>
+                      </p:childTnLst>
+                    </p:cTn>
+                  </p:par>
+                  <p:par>
+                    <p:cTn id="31" fill="hold">
+                      <p:stCondLst>
+                        <p:cond delay="indefinite"/>
+                      </p:stCondLst>
+                      <p:childTnLst>
+                        <p:par>
+                          <p:cTn id="32" fill="hold">
+                            <p:stCondLst>
+                              <p:cond delay="0"/>
+                            </p:stCondLst>
+                            <p:childTnLst>
+                              <p:par>
+                                <p:cTn id="33" presetID="1" presetClass="entr" presetSubtype="0" fill="hold" grpId="0" nodeType="clickEffect">
+                                  <p:stCondLst>
+                                    <p:cond delay="0"/>
+                                  </p:stCondLst>
+                                  <p:childTnLst>
+                                    <p:set>
+                                      <p:cBhvr>
+                                        <p:cTn id="34" dur="1" fill="hold">
+                                          <p:stCondLst>
+                                            <p:cond delay="0"/>
+                                          </p:stCondLst>
+                                        </p:cTn>
+                                        <p:tgtEl>
+                                          <p:spTgt spid="3">
+                                            <p:txEl>
+                                              <p:pRg st="15" end="15"/>
+                                            </p:txEl>
+                                          </p:spTgt>
+                                        </p:tgtEl>
+                                        <p:attrNameLst>
+                                          <p:attrName>style.visibility</p:attrName>
+                                        </p:attrNameLst>
+                                      </p:cBhvr>
+                                      <p:to>
+                                        <p:strVal val="visible"/>
+                                      </p:to>
+                                    </p:set>
+                                  </p:childTnLst>
+                                </p:cTn>
+                              </p:par>
+                            </p:childTnLst>
+                          </p:cTn>
+                        </p:par>
+                      </p:childTnLst>
+                    </p:cTn>
+                  </p:par>
+                </p:childTnLst>
+              </p:cTn>
+              <p:prevCondLst>
+                <p:cond evt="onPrev" delay="0">
+                  <p:tgtEl>
+                    <p:sldTgt/>
+                  </p:tgtEl>
+                </p:cond>
+              </p:prevCondLst>
+              <p:nextCondLst>
+                <p:cond evt="onNext" delay="0">
+                  <p:tgtEl>
+                    <p:sldTgt/>
+                  </p:tgtEl>
+                </p:cond>
+              </p:nextCondLst>
+            </p:seq>
+          </p:childTnLst>
+        </p:cTn>
+      </p:par>
+    </p:tnLst>
+    <p:bldLst>
+      <p:bldP spid="3" grpId="0" uiExpand="1" build="p"/>
+    </p:bldLst>
+  </p:timing>
+</p:sld>
+</file>
+
+<file path=ppt/slides/slide8.xml><?xml version="1.0" encoding="utf-8"?>
+<p:sld xmlns:a="http://schemas.openxmlformats.org/drawingml/2006/main" xmlns:r="http://schemas.openxmlformats.org/officeDocument/2006/relationships" xmlns:p="http://schemas.openxmlformats.org/presentationml/2006/main">
+  <p:cSld>
+    <p:spTree>
+      <p:nvGrpSpPr>
+        <p:cNvPr id="1" name=""/>
+        <p:cNvGrpSpPr/>
+        <p:nvPr/>
+      </p:nvGrpSpPr>
+      <p:grpSpPr>
+        <a:xfrm>
+          <a:off x="0" y="0"/>
+          <a:ext cx="0" cy="0"/>
+          <a:chOff x="0" y="0"/>
+          <a:chExt cx="0" cy="0"/>
+        </a:xfrm>
+      </p:grpSpPr>
+      <p:sp>
+        <p:nvSpPr>
+          <p:cNvPr id="2" name="Title Placeholder 1"/>
+          <p:cNvSpPr>
+            <a:spLocks noGrp="1"/>
+          </p:cNvSpPr>
+          <p:nvPr>
+            <p:ph type="title"/>
+          </p:nvPr>
+        </p:nvSpPr>
+        <p:spPr bwMode="auto">
+          <a:xfrm>
+            <a:off x="433680" y="423297"/>
+            <a:ext cx="8229600" cy="784602"/>
+          </a:xfrm>
+          <a:prstGeom prst="rect">
+            <a:avLst/>
+          </a:prstGeom>
+          <a:noFill/>
+          <a:ln w="9525">
+            <a:noFill/>
+            <a:miter lim="800000"/>
+            <a:headEnd/>
+            <a:tailEnd/>
+          </a:ln>
+        </p:spPr>
+        <p:txBody>
+          <a:bodyPr/>
+          <a:lstStyle/>
+          <a:p>
+            <a:pPr lvl="0" indent="0" marL="0">
+              <a:buNone/>
+            </a:pPr>
+            <a:r>
+              <a:rPr/>
+              <a:t>Variance of a Discrete Random Variable</a:t>
+            </a:r>
+          </a:p>
+        </p:txBody>
+      </p:sp>
+      <mc:AlternateContent xmlns:mc="http://schemas.openxmlformats.org/markup-compatibility/2006">
+        <mc:Choice xmlns:a14="http://schemas.microsoft.com/office/drawing/2010/main" Requires="a14">
+          <p:sp>
+            <p:nvSpPr>
+              <p:cNvPr id="3" name="Text Placeholder 2"/>
+              <p:cNvSpPr>
+                <a:spLocks noGrp="1"/>
+              </p:cNvSpPr>
+              <p:nvPr>
+                <p:ph idx="1"/>
+              </p:nvPr>
+            </p:nvSpPr>
+            <p:spPr/>
+            <p:txBody>
+              <a:bodyPr/>
+              <a:lstStyle/>
+              <a:p>
+                <a:pPr lvl="0"/>
+                <a:r>
+                  <a:rPr/>
+                  <a:t>Recall that the variance of a discrete random variable </a:t>
+                </a:r>
+                <a14:m>
+                  <m:oMath xmlns:m="http://schemas.openxmlformats.org/officeDocument/2006/math">
+                    <m:r>
+                      <m:t>X</m:t>
+                    </m:r>
+                  </m:oMath>
+                </a14:m>
+                <a:r>
+                  <a:rPr/>
+                  <a:t> is</a:t>
+                </a:r>
+              </a:p>
+              <a:p>
+                <a:pPr lvl="0" indent="0" marL="0">
+                  <a:buNone/>
+                </a:pPr>
+                <a14:m>
+                  <m:oMathPara xmlns:m="http://schemas.openxmlformats.org/officeDocument/2006/math">
+                    <m:oMathParaPr>
+                      <m:jc m:val="center"/>
+                    </m:oMathParaPr>
+                    <m:oMath>
+                      <m:r>
+                        <m:t>V</m:t>
+                      </m:r>
+                      <m:d>
+                        <m:dPr>
+                          <m:begChr m:val="("/>
+                          <m:sepChr m:val=""/>
+                          <m:endChr m:val=")"/>
+                          <m:grow/>
+                        </m:dPr>
+                        <m:e>
+                          <m:r>
+                            <m:t>X</m:t>
+                          </m:r>
+                        </m:e>
+                      </m:d>
+                      <m:r>
+                        <m:rPr>
+                          <m:sty m:val="p"/>
+                        </m:rPr>
+                        <m:t>=</m:t>
+                      </m:r>
+                      <m:r>
+                        <m:rPr>
+                          <m:sty m:val="p"/>
+                        </m:rPr>
+                        <m:t>∑</m:t>
+                      </m:r>
+                      <m:sSup>
+                        <m:e>
+                          <m:d>
+                            <m:dPr>
+                              <m:begChr m:val="("/>
+                              <m:sepChr m:val=""/>
+                              <m:endChr m:val=")"/>
+                              <m:grow/>
+                            </m:dPr>
+                            <m:e>
+                              <m:r>
+                                <m:t>x</m:t>
+                              </m:r>
+                              <m:r>
+                                <m:rPr>
+                                  <m:sty m:val="p"/>
+                                </m:rPr>
+                                <m:t>−</m:t>
+                              </m:r>
+                              <m:r>
+                                <m:t>μ</m:t>
+                              </m:r>
+                            </m:e>
+                          </m:d>
+                        </m:e>
+                        <m:sup>
+                          <m:r>
+                            <m:t>2</m:t>
+                          </m:r>
+                        </m:sup>
+                      </m:sSup>
+                      <m:r>
+                        <m:t>P</m:t>
+                      </m:r>
+                      <m:d>
+                        <m:dPr>
+                          <m:begChr m:val="("/>
+                          <m:sepChr m:val=""/>
+                          <m:endChr m:val=")"/>
+                          <m:grow/>
+                        </m:dPr>
+                        <m:e>
+                          <m:r>
+                            <m:t>X</m:t>
+                          </m:r>
+                          <m:r>
+                            <m:rPr>
+                              <m:sty m:val="p"/>
+                            </m:rPr>
+                            <m:t>=</m:t>
+                          </m:r>
+                          <m:r>
+                            <m:t>x</m:t>
+                          </m:r>
+                        </m:e>
+                      </m:d>
+                      <m:r>
+                        <m:rPr>
+                          <m:sty m:val="p"/>
+                        </m:rPr>
+                        <m:t>.</m:t>
+                      </m:r>
+                    </m:oMath>
+                  </m:oMathPara>
+                </a14:m>
+              </a:p>
+              <a:p>
+                <a:pPr lvl="0"/>
+                <a:r>
+                  <a:rPr/>
+                  <a:t>Since</a:t>
+                </a:r>
+              </a:p>
+              <a:p>
+                <a:pPr lvl="0" indent="0" marL="0">
+                  <a:buNone/>
+                </a:pPr>
+                <a14:m>
+                  <m:oMathPara xmlns:m="http://schemas.openxmlformats.org/officeDocument/2006/math">
+                    <m:oMathParaPr>
+                      <m:jc m:val="center"/>
+                    </m:oMathParaPr>
+                    <m:oMath>
+                      <m:r>
+                        <m:t>P</m:t>
+                      </m:r>
+                      <m:d>
+                        <m:dPr>
+                          <m:begChr m:val="("/>
+                          <m:sepChr m:val=""/>
+                          <m:endChr m:val=")"/>
+                          <m:grow/>
+                        </m:dPr>
+                        <m:e>
+                          <m:r>
+                            <m:t>X</m:t>
+                          </m:r>
+                          <m:r>
+                            <m:rPr>
+                              <m:sty m:val="p"/>
+                            </m:rPr>
+                            <m:t>=</m:t>
+                          </m:r>
+                          <m:r>
+                            <m:t>x</m:t>
+                          </m:r>
+                        </m:e>
+                      </m:d>
+                      <m:r>
+                        <m:rPr>
+                          <m:sty m:val="p"/>
+                        </m:rPr>
+                        <m:t>=</m:t>
+                      </m:r>
+                      <m:r>
+                        <m:t>p</m:t>
+                      </m:r>
+                      <m:d>
+                        <m:dPr>
+                          <m:begChr m:val="("/>
+                          <m:sepChr m:val=""/>
+                          <m:endChr m:val=")"/>
+                          <m:grow/>
+                        </m:dPr>
+                        <m:e>
+                          <m:r>
+                            <m:t>x</m:t>
+                          </m:r>
+                        </m:e>
+                      </m:d>
+                      <m:r>
+                        <m:rPr>
+                          <m:sty m:val="p"/>
+                        </m:rPr>
+                        <m:t>,</m:t>
+                      </m:r>
+                    </m:oMath>
+                  </m:oMathPara>
+                </a14:m>
+              </a:p>
+              <a:p>
+                <a:pPr lvl="0" indent="0" marL="0">
+                  <a:buNone/>
+                </a:pPr>
+                <a:r>
+                  <a:rPr/>
+                  <a:t>we can write</a:t>
+                </a:r>
+              </a:p>
+              <a:p>
+                <a:pPr lvl="0" indent="0" marL="0">
+                  <a:buNone/>
+                </a:pPr>
+                <a14:m>
+                  <m:oMathPara xmlns:m="http://schemas.openxmlformats.org/officeDocument/2006/math">
+                    <m:oMathParaPr>
+                      <m:jc m:val="center"/>
+                    </m:oMathParaPr>
+                    <m:oMath>
+                      <m:r>
+                        <m:t>V</m:t>
+                      </m:r>
+                      <m:d>
+                        <m:dPr>
+                          <m:begChr m:val="("/>
+                          <m:sepChr m:val=""/>
+                          <m:endChr m:val=")"/>
+                          <m:grow/>
+                        </m:dPr>
+                        <m:e>
+                          <m:r>
+                            <m:t>X</m:t>
+                          </m:r>
+                        </m:e>
+                      </m:d>
+                      <m:r>
+                        <m:rPr>
+                          <m:sty m:val="p"/>
+                        </m:rPr>
+                        <m:t>=</m:t>
+                      </m:r>
+                      <m:r>
+                        <m:rPr>
+                          <m:sty m:val="p"/>
+                        </m:rPr>
+                        <m:t>∑</m:t>
+                      </m:r>
+                      <m:sSup>
+                        <m:e>
+                          <m:d>
+                            <m:dPr>
+                              <m:begChr m:val="("/>
+                              <m:sepChr m:val=""/>
+                              <m:endChr m:val=")"/>
+                              <m:grow/>
+                            </m:dPr>
+                            <m:e>
+                              <m:r>
+                                <m:t>x</m:t>
+                              </m:r>
+                              <m:r>
+                                <m:rPr>
+                                  <m:sty m:val="p"/>
+                                </m:rPr>
+                                <m:t>−</m:t>
+                              </m:r>
+                              <m:r>
+                                <m:t>μ</m:t>
+                              </m:r>
+                            </m:e>
+                          </m:d>
+                        </m:e>
+                        <m:sup>
+                          <m:r>
+                            <m:t>2</m:t>
+                          </m:r>
+                        </m:sup>
+                      </m:sSup>
+                      <m:r>
+                        <m:t>p</m:t>
+                      </m:r>
+                      <m:d>
+                        <m:dPr>
+                          <m:begChr m:val="("/>
+                          <m:sepChr m:val=""/>
+                          <m:endChr m:val=")"/>
+                          <m:grow/>
+                        </m:dPr>
+                        <m:e>
+                          <m:r>
+                            <m:t>x</m:t>
+                          </m:r>
+                        </m:e>
+                      </m:d>
+                      <m:r>
+                        <m:rPr>
+                          <m:sty m:val="p"/>
+                        </m:rPr>
+                        <m:t>.</m:t>
+                      </m:r>
+                    </m:oMath>
+                  </m:oMathPara>
+                </a14:m>
+              </a:p>
+              <a:p>
+                <a:pPr lvl="0"/>
+                <a:r>
+                  <a:rPr/>
+                  <a:t>Expand the squared term:</a:t>
+                </a:r>
+              </a:p>
+              <a:p>
+                <a:pPr lvl="0" indent="0" marL="0">
+                  <a:buNone/>
+                </a:pPr>
+                <a14:m>
+                  <m:oMathPara xmlns:m="http://schemas.openxmlformats.org/officeDocument/2006/math">
+                    <m:oMathParaPr>
+                      <m:jc m:val="center"/>
+                    </m:oMathParaPr>
+                    <m:oMath>
+                      <m:r>
+                        <m:t>V</m:t>
+                      </m:r>
+                      <m:d>
+                        <m:dPr>
+                          <m:begChr m:val="("/>
+                          <m:sepChr m:val=""/>
+                          <m:endChr m:val=")"/>
+                          <m:grow/>
+                        </m:dPr>
+                        <m:e>
+                          <m:r>
+                            <m:t>X</m:t>
+                          </m:r>
+                        </m:e>
+                      </m:d>
+                      <m:r>
+                        <m:rPr>
+                          <m:sty m:val="p"/>
+                        </m:rPr>
+                        <m:t>=</m:t>
+                      </m:r>
+                      <m:r>
+                        <m:rPr>
+                          <m:sty m:val="p"/>
+                        </m:rPr>
+                        <m:t>∑</m:t>
+                      </m:r>
+                      <m:d>
+                        <m:dPr>
+                          <m:begChr m:val="("/>
+                          <m:sepChr m:val=""/>
+                          <m:endChr m:val=")"/>
+                          <m:grow/>
+                        </m:dPr>
+                        <m:e>
+                          <m:sSup>
+                            <m:e>
+                              <m:r>
+                                <m:t>x</m:t>
+                              </m:r>
+                            </m:e>
+                            <m:sup>
+                              <m:r>
+                                <m:t>2</m:t>
+                              </m:r>
+                            </m:sup>
+                          </m:sSup>
+                          <m:r>
+                            <m:rPr>
+                              <m:sty m:val="p"/>
+                            </m:rPr>
+                            <m:t>−</m:t>
+                          </m:r>
+                          <m:r>
+                            <m:t>2</m:t>
+                          </m:r>
+                          <m:r>
+                            <m:t>μ</m:t>
+                          </m:r>
+                          <m:r>
+                            <m:t>x</m:t>
+                          </m:r>
+                          <m:r>
+                            <m:rPr>
+                              <m:sty m:val="p"/>
+                            </m:rPr>
+                            <m:t>+</m:t>
+                          </m:r>
+                          <m:sSup>
+                            <m:e>
+                              <m:r>
+                                <m:t>μ</m:t>
+                              </m:r>
+                            </m:e>
+                            <m:sup>
+                              <m:r>
+                                <m:t>2</m:t>
+                              </m:r>
+                            </m:sup>
+                          </m:sSup>
+                        </m:e>
+                      </m:d>
+                      <m:r>
+                        <m:t>p</m:t>
+                      </m:r>
+                      <m:d>
+                        <m:dPr>
+                          <m:begChr m:val="("/>
+                          <m:sepChr m:val=""/>
+                          <m:endChr m:val=")"/>
+                          <m:grow/>
+                        </m:dPr>
+                        <m:e>
+                          <m:r>
+                            <m:t>x</m:t>
+                          </m:r>
+                        </m:e>
+                      </m:d>
+                      <m:r>
+                        <m:rPr>
+                          <m:sty m:val="p"/>
+                        </m:rPr>
+                        <m:t>.</m:t>
+                      </m:r>
+                    </m:oMath>
+                  </m:oMathPara>
+                </a14:m>
+              </a:p>
+              <a:p>
+                <a:pPr lvl="0"/>
+                <a:r>
+                  <a:rPr/>
+                  <a:t>Distribute </a:t>
+                </a:r>
+                <a14:m>
+                  <m:oMath xmlns:m="http://schemas.openxmlformats.org/officeDocument/2006/math">
+                    <m:r>
+                      <m:t>f</m:t>
+                    </m:r>
+                    <m:d>
+                      <m:dPr>
+                        <m:begChr m:val="("/>
+                        <m:sepChr m:val=""/>
+                        <m:endChr m:val=")"/>
+                        <m:grow/>
+                      </m:dPr>
+                      <m:e>
+                        <m:r>
+                          <m:t>x</m:t>
+                        </m:r>
+                      </m:e>
+                    </m:d>
+                  </m:oMath>
+                </a14:m>
+                <a:r>
+                  <a:rPr/>
+                  <a:t>:</a:t>
+                </a:r>
+              </a:p>
+              <a:p>
+                <a:pPr lvl="0" indent="0" marL="0">
+                  <a:buNone/>
+                </a:pPr>
+                <a14:m>
+                  <m:oMathPara xmlns:m="http://schemas.openxmlformats.org/officeDocument/2006/math">
+                    <m:oMathParaPr>
+                      <m:jc m:val="center"/>
+                    </m:oMathParaPr>
+                    <m:oMath>
+                      <m:r>
+                        <m:t>V</m:t>
+                      </m:r>
+                      <m:d>
+                        <m:dPr>
+                          <m:begChr m:val="("/>
+                          <m:sepChr m:val=""/>
+                          <m:endChr m:val=")"/>
+                          <m:grow/>
+                        </m:dPr>
+                        <m:e>
+                          <m:r>
+                            <m:t>X</m:t>
+                          </m:r>
+                        </m:e>
+                      </m:d>
+                      <m:r>
+                        <m:rPr>
+                          <m:sty m:val="p"/>
+                        </m:rPr>
+                        <m:t>=</m:t>
+                      </m:r>
+                      <m:r>
+                        <m:rPr>
+                          <m:sty m:val="p"/>
+                        </m:rPr>
+                        <m:t>∑</m:t>
+                      </m:r>
+                      <m:sSup>
+                        <m:e>
+                          <m:r>
+                            <m:t>x</m:t>
+                          </m:r>
+                        </m:e>
+                        <m:sup>
+                          <m:r>
+                            <m:t>2</m:t>
+                          </m:r>
+                        </m:sup>
+                      </m:sSup>
+                      <m:r>
+                        <m:t>p</m:t>
+                      </m:r>
+                      <m:d>
+                        <m:dPr>
+                          <m:begChr m:val="("/>
+                          <m:sepChr m:val=""/>
+                          <m:endChr m:val=")"/>
+                          <m:grow/>
+                        </m:dPr>
+                        <m:e>
+                          <m:r>
+                            <m:t>x</m:t>
+                          </m:r>
+                        </m:e>
+                      </m:d>
+                      <m:r>
+                        <m:rPr>
+                          <m:sty m:val="p"/>
+                        </m:rPr>
+                        <m:t>−</m:t>
+                      </m:r>
+                      <m:r>
+                        <m:t>2</m:t>
+                      </m:r>
+                      <m:r>
+                        <m:t>μ</m:t>
+                      </m:r>
+                      <m:r>
+                        <m:rPr>
+                          <m:sty m:val="p"/>
+                        </m:rPr>
+                        <m:t>∑</m:t>
+                      </m:r>
+                      <m:r>
+                        <m:t>x</m:t>
+                      </m:r>
+                      <m:r>
+                        <m:t>p</m:t>
+                      </m:r>
+                      <m:d>
+                        <m:dPr>
+                          <m:begChr m:val="("/>
+                          <m:sepChr m:val=""/>
+                          <m:endChr m:val=")"/>
+                          <m:grow/>
+                        </m:dPr>
+                        <m:e>
+                          <m:r>
+                            <m:t>x</m:t>
+                          </m:r>
+                        </m:e>
+                      </m:d>
+                      <m:r>
+                        <m:rPr>
+                          <m:sty m:val="p"/>
+                        </m:rPr>
+                        <m:t>+</m:t>
+                      </m:r>
+                      <m:sSup>
+                        <m:e>
+                          <m:r>
+                            <m:t>μ</m:t>
+                          </m:r>
+                        </m:e>
+                        <m:sup>
+                          <m:r>
+                            <m:t>2</m:t>
+                          </m:r>
+                        </m:sup>
+                      </m:sSup>
+                      <m:r>
+                        <m:rPr>
+                          <m:sty m:val="p"/>
+                        </m:rPr>
+                        <m:t>∑</m:t>
+                      </m:r>
+                      <m:r>
+                        <m:t>p</m:t>
+                      </m:r>
+                      <m:d>
+                        <m:dPr>
+                          <m:begChr m:val="("/>
+                          <m:sepChr m:val=""/>
+                          <m:endChr m:val=")"/>
+                          <m:grow/>
+                        </m:dPr>
+                        <m:e>
+                          <m:r>
+                            <m:t>x</m:t>
+                          </m:r>
+                        </m:e>
+                      </m:d>
+                      <m:r>
+                        <m:rPr>
+                          <m:sty m:val="p"/>
+                        </m:rPr>
+                        <m:t>.</m:t>
+                      </m:r>
+                    </m:oMath>
+                  </m:oMathPara>
+                </a14:m>
+              </a:p>
+              <a:p>
+                <a:pPr lvl="0"/>
+                <a:r>
+                  <a:rPr/>
+                  <a:t>Recall that</a:t>
+                </a:r>
+              </a:p>
+              <a:p>
+                <a:pPr lvl="0" indent="0" marL="0">
+                  <a:buNone/>
+                </a:pPr>
+                <a14:m>
+                  <m:oMathPara xmlns:m="http://schemas.openxmlformats.org/officeDocument/2006/math">
+                    <m:oMathParaPr>
+                      <m:jc m:val="center"/>
+                    </m:oMathParaPr>
+                    <m:oMath>
+                      <m:r>
+                        <m:rPr>
+                          <m:sty m:val="p"/>
+                        </m:rPr>
+                        <m:t>∑</m:t>
+                      </m:r>
+                      <m:r>
+                        <m:t>x</m:t>
+                      </m:r>
+                      <m:r>
+                        <m:t>p</m:t>
+                      </m:r>
+                      <m:d>
+                        <m:dPr>
+                          <m:begChr m:val="("/>
+                          <m:sepChr m:val=""/>
+                          <m:endChr m:val=")"/>
+                          <m:grow/>
+                        </m:dPr>
+                        <m:e>
+                          <m:r>
+                            <m:t>x</m:t>
+                          </m:r>
+                        </m:e>
+                      </m:d>
+                      <m:r>
+                        <m:rPr>
+                          <m:sty m:val="p"/>
+                        </m:rPr>
+                        <m:t>=</m:t>
+                      </m:r>
+                      <m:r>
+                        <m:t>E</m:t>
+                      </m:r>
+                      <m:d>
+                        <m:dPr>
+                          <m:begChr m:val="("/>
+                          <m:sepChr m:val=""/>
+                          <m:endChr m:val=")"/>
+                          <m:grow/>
+                        </m:dPr>
+                        <m:e>
+                          <m:r>
+                            <m:t>X</m:t>
+                          </m:r>
+                        </m:e>
+                      </m:d>
+                      <m:r>
+                        <m:rPr>
+                          <m:sty m:val="p"/>
+                        </m:rPr>
+                        <m:t>=</m:t>
+                      </m:r>
+                      <m:r>
+                        <m:t>μ</m:t>
+                      </m:r>
+                    </m:oMath>
+                  </m:oMathPara>
+                </a14:m>
+              </a:p>
+              <a:p>
+                <a:pPr lvl="0" indent="0" marL="0">
+                  <a:buNone/>
+                </a:pPr>
+                <a:r>
+                  <a:rPr/>
+                  <a:t>and</a:t>
+                </a:r>
+              </a:p>
+              <a:p>
+                <a:pPr lvl="0" indent="0" marL="0">
+                  <a:buNone/>
+                </a:pPr>
+                <a14:m>
+                  <m:oMathPara xmlns:m="http://schemas.openxmlformats.org/officeDocument/2006/math">
+                    <m:oMathParaPr>
+                      <m:jc m:val="center"/>
+                    </m:oMathParaPr>
+                    <m:oMath>
+                      <m:r>
+                        <m:rPr>
+                          <m:sty m:val="p"/>
+                        </m:rPr>
+                        <m:t>∑</m:t>
+                      </m:r>
+                      <m:r>
+                        <m:t>p</m:t>
+                      </m:r>
+                      <m:d>
+                        <m:dPr>
+                          <m:begChr m:val="("/>
+                          <m:sepChr m:val=""/>
+                          <m:endChr m:val=")"/>
+                          <m:grow/>
+                        </m:dPr>
+                        <m:e>
+                          <m:r>
+                            <m:t>x</m:t>
+                          </m:r>
+                        </m:e>
+                      </m:d>
+                      <m:r>
+                        <m:rPr>
+                          <m:sty m:val="p"/>
+                        </m:rPr>
+                        <m:t>=</m:t>
+                      </m:r>
+                      <m:r>
+                        <m:t>1</m:t>
+                      </m:r>
+                      <m:r>
+                        <m:rPr>
+                          <m:sty m:val="p"/>
+                        </m:rPr>
+                        <m:t>.</m:t>
+                      </m:r>
+                    </m:oMath>
+                  </m:oMathPara>
+                </a14:m>
+              </a:p>
+              <a:p>
+                <a:pPr lvl="0"/>
+                <a:r>
+                  <a:rPr/>
+                  <a:t>Therefore,</a:t>
+                </a:r>
+              </a:p>
+              <a:p>
+                <a:pPr lvl="0" indent="0" marL="0">
+                  <a:buNone/>
+                </a:pPr>
+                <a14:m>
+                  <m:oMathPara xmlns:m="http://schemas.openxmlformats.org/officeDocument/2006/math">
+                    <m:oMathParaPr>
+                      <m:jc m:val="center"/>
+                    </m:oMathParaPr>
+                    <m:oMath>
+                      <m:r>
+                        <m:t>V</m:t>
+                      </m:r>
+                      <m:d>
+                        <m:dPr>
+                          <m:begChr m:val="("/>
+                          <m:sepChr m:val=""/>
+                          <m:endChr m:val=")"/>
+                          <m:grow/>
+                        </m:dPr>
+                        <m:e>
+                          <m:r>
+                            <m:t>X</m:t>
+                          </m:r>
+                        </m:e>
+                      </m:d>
+                      <m:r>
+                        <m:rPr>
+                          <m:sty m:val="p"/>
+                        </m:rPr>
+                        <m:t>=</m:t>
+                      </m:r>
+                      <m:r>
+                        <m:rPr>
+                          <m:sty m:val="p"/>
+                        </m:rPr>
+                        <m:t>∑</m:t>
+                      </m:r>
+                      <m:sSup>
+                        <m:e>
+                          <m:r>
+                            <m:t>x</m:t>
+                          </m:r>
+                        </m:e>
+                        <m:sup>
+                          <m:r>
+                            <m:t>2</m:t>
+                          </m:r>
+                        </m:sup>
+                      </m:sSup>
+                      <m:r>
+                        <m:t>p</m:t>
+                      </m:r>
+                      <m:d>
+                        <m:dPr>
+                          <m:begChr m:val="("/>
+                          <m:sepChr m:val=""/>
+                          <m:endChr m:val=")"/>
+                          <m:grow/>
+                        </m:dPr>
+                        <m:e>
+                          <m:r>
+                            <m:t>x</m:t>
+                          </m:r>
+                        </m:e>
+                      </m:d>
+                      <m:r>
+                        <m:rPr>
+                          <m:sty m:val="p"/>
+                        </m:rPr>
+                        <m:t>−</m:t>
+                      </m:r>
+                      <m:r>
+                        <m:t>2</m:t>
+                      </m:r>
+                      <m:r>
+                        <m:t>μ</m:t>
+                      </m:r>
+                      <m:d>
+                        <m:dPr>
+                          <m:begChr m:val="("/>
+                          <m:sepChr m:val=""/>
+                          <m:endChr m:val=")"/>
+                          <m:grow/>
+                        </m:dPr>
+                        <m:e>
+                          <m:r>
+                            <m:t>μ</m:t>
+                          </m:r>
+                        </m:e>
+                      </m:d>
+                      <m:r>
+                        <m:rPr>
+                          <m:sty m:val="p"/>
+                        </m:rPr>
+                        <m:t>+</m:t>
+                      </m:r>
+                      <m:sSup>
+                        <m:e>
+                          <m:r>
+                            <m:t>μ</m:t>
+                          </m:r>
+                        </m:e>
+                        <m:sup>
+                          <m:r>
+                            <m:t>2</m:t>
+                          </m:r>
+                        </m:sup>
+                      </m:sSup>
+                      <m:d>
+                        <m:dPr>
+                          <m:begChr m:val="("/>
+                          <m:sepChr m:val=""/>
+                          <m:endChr m:val=")"/>
+                          <m:grow/>
+                        </m:dPr>
+                        <m:e>
+                          <m:r>
+                            <m:t>1</m:t>
+                          </m:r>
+                        </m:e>
+                      </m:d>
+                      <m:r>
+                        <m:rPr>
+                          <m:sty m:val="p"/>
+                        </m:rPr>
+                        <m:t>.</m:t>
+                      </m:r>
+                    </m:oMath>
+                  </m:oMathPara>
+                </a14:m>
+              </a:p>
+              <a:p>
+                <a:pPr lvl="0"/>
+                <a:r>
+                  <a:rPr/>
+                  <a:t>Hence,</a:t>
+                </a:r>
+              </a:p>
+              <a:p>
+                <a:pPr lvl="0" indent="0" marL="0">
+                  <a:buNone/>
+                </a:pPr>
+                <a14:m>
+                  <m:oMathPara xmlns:m="http://schemas.openxmlformats.org/officeDocument/2006/math">
+                    <m:oMathParaPr>
+                      <m:jc m:val="center"/>
+                    </m:oMathParaPr>
+                    <m:oMath>
+                      <m:r>
+                        <m:t>V</m:t>
+                      </m:r>
+                      <m:d>
+                        <m:dPr>
+                          <m:begChr m:val="("/>
+                          <m:sepChr m:val=""/>
+                          <m:endChr m:val=")"/>
+                          <m:grow/>
+                        </m:dPr>
+                        <m:e>
+                          <m:r>
+                            <m:t>X</m:t>
+                          </m:r>
+                        </m:e>
+                      </m:d>
+                      <m:r>
+                        <m:rPr>
+                          <m:sty m:val="p"/>
+                        </m:rPr>
+                        <m:t>=</m:t>
+                      </m:r>
+                      <m:r>
+                        <m:rPr>
+                          <m:sty m:val="p"/>
+                        </m:rPr>
+                        <m:t>∑</m:t>
+                      </m:r>
+                      <m:sSup>
+                        <m:e>
+                          <m:r>
+                            <m:t>x</m:t>
+                          </m:r>
+                        </m:e>
+                        <m:sup>
+                          <m:r>
+                            <m:t>2</m:t>
+                          </m:r>
+                        </m:sup>
+                      </m:sSup>
+                      <m:r>
+                        <m:t>p</m:t>
+                      </m:r>
+                      <m:d>
+                        <m:dPr>
+                          <m:begChr m:val="("/>
+                          <m:sepChr m:val=""/>
+                          <m:endChr m:val=")"/>
+                          <m:grow/>
+                        </m:dPr>
+                        <m:e>
+                          <m:r>
+                            <m:t>x</m:t>
+                          </m:r>
+                        </m:e>
+                      </m:d>
+                      <m:r>
+                        <m:rPr>
+                          <m:sty m:val="p"/>
+                        </m:rPr>
+                        <m:t>−</m:t>
+                      </m:r>
+                      <m:sSup>
+                        <m:e>
+                          <m:r>
+                            <m:t>μ</m:t>
+                          </m:r>
+                        </m:e>
+                        <m:sup>
+                          <m:r>
+                            <m:t>2</m:t>
+                          </m:r>
+                        </m:sup>
+                      </m:sSup>
+                      <m:r>
+                        <m:rPr>
+                          <m:sty m:val="p"/>
+                        </m:rPr>
+                        <m:t>.</m:t>
+                      </m:r>
+                    </m:oMath>
+                  </m:oMathPara>
+                </a14:m>
+              </a:p>
+              <a:p>
+                <a:pPr lvl="0"/>
+                <a:r>
+                  <a:rPr/>
+                  <a:t>Since</a:t>
+                </a:r>
+              </a:p>
+              <a:p>
+                <a:pPr lvl="0" indent="0" marL="0">
+                  <a:buNone/>
+                </a:pPr>
+                <a14:m>
+                  <m:oMathPara xmlns:m="http://schemas.openxmlformats.org/officeDocument/2006/math">
+                    <m:oMathParaPr>
+                      <m:jc m:val="center"/>
+                    </m:oMathParaPr>
+                    <m:oMath>
+                      <m:r>
+                        <m:t>E</m:t>
+                      </m:r>
+                      <m:d>
+                        <m:dPr>
+                          <m:begChr m:val="("/>
+                          <m:sepChr m:val=""/>
+                          <m:endChr m:val=")"/>
+                          <m:grow/>
+                        </m:dPr>
+                        <m:e>
+                          <m:sSup>
+                            <m:e>
+                              <m:r>
+                                <m:t>X</m:t>
+                              </m:r>
+                            </m:e>
+                            <m:sup>
+                              <m:r>
+                                <m:t>2</m:t>
+                              </m:r>
+                            </m:sup>
+                          </m:sSup>
+                        </m:e>
+                      </m:d>
+                      <m:r>
+                        <m:rPr>
+                          <m:sty m:val="p"/>
+                        </m:rPr>
+                        <m:t>=</m:t>
+                      </m:r>
+                      <m:r>
+                        <m:rPr>
+                          <m:sty m:val="p"/>
+                        </m:rPr>
+                        <m:t>∑</m:t>
+                      </m:r>
+                      <m:sSup>
+                        <m:e>
+                          <m:r>
+                            <m:t>x</m:t>
+                          </m:r>
+                        </m:e>
+                        <m:sup>
+                          <m:r>
+                            <m:t>2</m:t>
+                          </m:r>
+                        </m:sup>
+                      </m:sSup>
+                      <m:r>
+                        <m:t>p</m:t>
+                      </m:r>
+                      <m:d>
+                        <m:dPr>
+                          <m:begChr m:val="("/>
+                          <m:sepChr m:val=""/>
+                          <m:endChr m:val=")"/>
+                          <m:grow/>
+                        </m:dPr>
+                        <m:e>
+                          <m:r>
+                            <m:t>x</m:t>
+                          </m:r>
+                        </m:e>
+                      </m:d>
+                      <m:r>
+                        <m:rPr>
+                          <m:sty m:val="p"/>
+                        </m:rPr>
+                        <m:t>,</m:t>
+                      </m:r>
+                    </m:oMath>
+                  </m:oMathPara>
+                </a14:m>
+              </a:p>
+              <a:p>
+                <a:pPr lvl="0" indent="0" marL="0">
+                  <a:buNone/>
+                </a:pPr>
+                <a:r>
+                  <a:rPr/>
+                  <a:t>we obtain the useful variance formula</a:t>
+                </a:r>
+              </a:p>
+              <a:p>
+                <a:pPr lvl="0" indent="0" marL="0">
+                  <a:buNone/>
+                </a:pPr>
+                <a14:m>
+                  <m:oMathPara xmlns:m="http://schemas.openxmlformats.org/officeDocument/2006/math">
+                    <m:oMathParaPr>
+                      <m:jc m:val="center"/>
+                    </m:oMathParaPr>
+                    <m:oMath>
+                      <m:borderBox>
+                        <m:e>
+                          <m:r>
+                            <m:t>V</m:t>
+                          </m:r>
+                          <m:d>
+                            <m:dPr>
+                              <m:begChr m:val="("/>
+                              <m:sepChr m:val=""/>
+                              <m:endChr m:val=")"/>
+                              <m:grow/>
+                            </m:dPr>
+                            <m:e>
+                              <m:r>
+                                <m:t>X</m:t>
+                              </m:r>
+                            </m:e>
+                          </m:d>
+                          <m:r>
+                            <m:rPr>
+                              <m:sty m:val="p"/>
+                            </m:rPr>
+                            <m:t>=</m:t>
+                          </m:r>
+                          <m:r>
+                            <m:t>E</m:t>
+                          </m:r>
+                          <m:d>
+                            <m:dPr>
+                              <m:begChr m:val="("/>
+                              <m:sepChr m:val=""/>
+                              <m:endChr m:val=")"/>
+                              <m:grow/>
+                            </m:dPr>
+                            <m:e>
+                              <m:sSup>
+                                <m:e>
+                                  <m:r>
+                                    <m:t>X</m:t>
+                                  </m:r>
+                                </m:e>
+                                <m:sup>
+                                  <m:r>
+                                    <m:t>2</m:t>
+                                  </m:r>
+                                </m:sup>
+                              </m:sSup>
+                            </m:e>
+                          </m:d>
+                          <m:r>
+                            <m:rPr>
+                              <m:sty m:val="p"/>
+                            </m:rPr>
+                            <m:t>−</m:t>
+                          </m:r>
+                          <m:sSup>
+                            <m:e>
+                              <m:d>
+                                <m:dPr>
+                                  <m:begChr m:val="["/>
+                                  <m:sepChr m:val=""/>
+                                  <m:endChr m:val="]"/>
+                                  <m:grow/>
+                                </m:dPr>
+                                <m:e>
+                                  <m:r>
+                                    <m:t>E</m:t>
+                                  </m:r>
+                                  <m:d>
+                                    <m:dPr>
+                                      <m:begChr m:val="("/>
+                                      <m:sepChr m:val=""/>
+                                      <m:endChr m:val=")"/>
+                                      <m:grow/>
+                                    </m:dPr>
+                                    <m:e>
+                                      <m:r>
+                                        <m:t>X</m:t>
+                                      </m:r>
+                                    </m:e>
+                                  </m:d>
+                                </m:e>
+                              </m:d>
+                            </m:e>
+                            <m:sup>
+                              <m:r>
+                                <m:t>2</m:t>
+                              </m:r>
+                            </m:sup>
+                          </m:sSup>
+                        </m:e>
+                      </m:borderBox>
+                    </m:oMath>
+                  </m:oMathPara>
+                </a14:m>
+              </a:p>
+            </p:txBody>
+          </p:sp>
+        </mc:Choice>
+      </mc:AlternateContent>
+      <p:sp>
+        <p:nvSpPr>
+          <p:cNvPr id="4" name="Slide Number Placeholder 3"/>
+          <p:cNvSpPr>
+            <a:spLocks noGrp="1"/>
+          </p:cNvSpPr>
+          <p:nvPr>
+            <p:ph idx="10" sz="quarter" type="sldNum"/>
+          </p:nvPr>
+        </p:nvSpPr>
+        <p:spPr/>
+        <p:txBody>
+          <a:bodyPr/>
+          <a:lstStyle/>
+          <a:p>
+            <a:fld id="{9C13042B-154E-4D18-B726-07B2F714EFCF}" type="slidenum">
+              <a:rPr lang="en-US" smtClean="0"/>
+              <a:pPr/>
+              <a:t>‹#›</a:t>
+            </a:fld>
+            <a:endParaRPr dirty="0" lang="en-US"/>
+          </a:p>
+        </p:txBody>
+      </p:sp>
+    </p:spTree>
+  </p:cSld>
+  <p:timing>
+    <p:tnLst>
+      <p:par>
+        <p:cTn id="1" dur="indefinite" restart="never" nodeType="tmRoot">
+          <p:childTnLst>
+            <p:seq concurrent="1" nextAc="seek">
+              <p:cTn id="2" dur="indefinite" nodeType="mainSeq">
+                <p:childTnLst>
+                  <p:par>
+                    <p:cTn id="3" fill="hold">
+                      <p:stCondLst>
+                        <p:cond delay="indefinite"/>
+                      </p:stCondLst>
+                      <p:childTnLst>
+                        <p:par>
+                          <p:cTn id="4" fill="hold">
+                            <p:stCondLst>
+                              <p:cond delay="0"/>
+                            </p:stCondLst>
+                            <p:childTnLst>
+                              <p:par>
+                                <p:cTn id="5" presetID="1" presetClass="entr" presetSubtype="0" fill="hold" grpId="0" nodeType="clickEffect">
+                                  <p:stCondLst>
+                                    <p:cond delay="0"/>
+                                  </p:stCondLst>
+                                  <p:childTnLst>
+                                    <p:set>
+                                      <p:cBhvr>
+                                        <p:cTn id="6" dur="1" fill="hold">
+                                          <p:stCondLst>
+                                            <p:cond delay="0"/>
+                                          </p:stCondLst>
+                                        </p:cTn>
+                                        <p:tgtEl>
+                                          <p:spTgt spid="3">
+                                            <p:txEl>
+                                              <p:pRg st="0" end="0"/>
+                                            </p:txEl>
+                                          </p:spTgt>
+                                        </p:tgtEl>
+                                        <p:attrNameLst>
+                                          <p:attrName>style.visibility</p:attrName>
+                                        </p:attrNameLst>
+                                      </p:cBhvr>
+                                      <p:to>
+                                        <p:strVal val="visible"/>
+                                      </p:to>
+                                    </p:set>
+                                  </p:childTnLst>
+                                </p:cTn>
+                              </p:par>
+                            </p:childTnLst>
+                          </p:cTn>
+                        </p:par>
+                      </p:childTnLst>
+                    </p:cTn>
+                  </p:par>
+                  <p:par>
+                    <p:cTn id="7" fill="hold">
+                      <p:stCondLst>
+                        <p:cond delay="indefinite"/>
+                      </p:stCondLst>
+                      <p:childTnLst>
+                        <p:par>
+                          <p:cTn id="8" fill="hold">
+                            <p:stCondLst>
+                              <p:cond delay="0"/>
+                            </p:stCondLst>
+                            <p:childTnLst>
+                              <p:par>
+                                <p:cTn id="9" presetID="1" presetClass="entr" presetSubtype="0" fill="hold" grpId="0" nodeType="clickEffect">
+                                  <p:stCondLst>
+                                    <p:cond delay="0"/>
+                                  </p:stCondLst>
+                                  <p:childTnLst>
+                                    <p:set>
+                                      <p:cBhvr>
+                                        <p:cTn id="10" dur="1" fill="hold">
+                                          <p:stCondLst>
+                                            <p:cond delay="0"/>
+                                          </p:stCondLst>
+                                        </p:cTn>
+                                        <p:tgtEl>
+                                          <p:spTgt spid="3">
+                                            <p:txEl>
+                                              <p:pRg st="2" end="2"/>
+                                            </p:txEl>
+                                          </p:spTgt>
+                                        </p:tgtEl>
+                                        <p:attrNameLst>
+                                          <p:attrName>style.visibility</p:attrName>
+                                        </p:attrNameLst>
+                                      </p:cBhvr>
+                                      <p:to>
+                                        <p:strVal val="visible"/>
+                                      </p:to>
+                                    </p:set>
+                                  </p:childTnLst>
+                                </p:cTn>
+                              </p:par>
+                            </p:childTnLst>
+                          </p:cTn>
+                        </p:par>
+                      </p:childTnLst>
+                    </p:cTn>
+                  </p:par>
+                  <p:par>
+                    <p:cTn id="11" fill="hold">
+                      <p:stCondLst>
+                        <p:cond delay="indefinite"/>
+                      </p:stCondLst>
+                      <p:childTnLst>
+                        <p:par>
+                          <p:cTn id="12" fill="hold">
+                            <p:stCondLst>
+                              <p:cond delay="0"/>
+                            </p:stCondLst>
+                            <p:childTnLst>
+                              <p:par>
+                                <p:cTn id="13" presetID="1" presetClass="entr" presetSubtype="0" fill="hold" grpId="0" nodeType="clickEffect">
+                                  <p:stCondLst>
+                                    <p:cond delay="0"/>
+                                  </p:stCondLst>
+                                  <p:childTnLst>
+                                    <p:set>
+                                      <p:cBhvr>
+                                        <p:cTn id="14" dur="1" fill="hold">
+                                          <p:stCondLst>
+                                            <p:cond delay="0"/>
+                                          </p:stCondLst>
+                                        </p:cTn>
+                                        <p:tgtEl>
+                                          <p:spTgt spid="3">
+                                            <p:txEl>
+                                              <p:pRg st="6" end="6"/>
+                                            </p:txEl>
+                                          </p:spTgt>
+                                        </p:tgtEl>
+                                        <p:attrNameLst>
+                                          <p:attrName>style.visibility</p:attrName>
+                                        </p:attrNameLst>
+                                      </p:cBhvr>
+                                      <p:to>
+                                        <p:strVal val="visible"/>
+                                      </p:to>
+                                    </p:set>
+                                  </p:childTnLst>
+                                </p:cTn>
+                              </p:par>
+                            </p:childTnLst>
+                          </p:cTn>
+                        </p:par>
+                      </p:childTnLst>
+                    </p:cTn>
+                  </p:par>
+                  <p:par>
+                    <p:cTn id="15" fill="hold">
+                      <p:stCondLst>
+                        <p:cond delay="indefinite"/>
+                      </p:stCondLst>
+                      <p:childTnLst>
+                        <p:par>
+                          <p:cTn id="16" fill="hold">
+                            <p:stCondLst>
+                              <p:cond delay="0"/>
+                            </p:stCondLst>
+                            <p:childTnLst>
+                              <p:par>
+                                <p:cTn id="17" presetID="1" presetClass="entr" presetSubtype="0" fill="hold" grpId="0" nodeType="clickEffect">
+                                  <p:stCondLst>
+                                    <p:cond delay="0"/>
+                                  </p:stCondLst>
+                                  <p:childTnLst>
+                                    <p:set>
+                                      <p:cBhvr>
+                                        <p:cTn id="18" dur="1" fill="hold">
+                                          <p:stCondLst>
+                                            <p:cond delay="0"/>
+                                          </p:stCondLst>
+                                        </p:cTn>
+                                        <p:tgtEl>
+                                          <p:spTgt spid="3">
+                                            <p:txEl>
+                                              <p:pRg st="8" end="8"/>
+                                            </p:txEl>
+                                          </p:spTgt>
+                                        </p:tgtEl>
+                                        <p:attrNameLst>
+                                          <p:attrName>style.visibility</p:attrName>
+                                        </p:attrNameLst>
+                                      </p:cBhvr>
+                                      <p:to>
+                                        <p:strVal val="visible"/>
+                                      </p:to>
+                                    </p:set>
+                                  </p:childTnLst>
+                                </p:cTn>
+                              </p:par>
+                            </p:childTnLst>
+                          </p:cTn>
+                        </p:par>
+                      </p:childTnLst>
+                    </p:cTn>
+                  </p:par>
+                  <p:par>
+                    <p:cTn id="19" fill="hold">
+                      <p:stCondLst>
+                        <p:cond delay="indefinite"/>
+                      </p:stCondLst>
+                      <p:childTnLst>
+                        <p:par>
+                          <p:cTn id="20" fill="hold">
+                            <p:stCondLst>
+                              <p:cond delay="0"/>
+                            </p:stCondLst>
+                            <p:childTnLst>
+                              <p:par>
+                                <p:cTn id="21" presetID="1" presetClass="entr" presetSubtype="0" fill="hold" grpId="0" nodeType="clickEffect">
+                                  <p:stCondLst>
+                                    <p:cond delay="0"/>
+                                  </p:stCondLst>
+                                  <p:childTnLst>
+                                    <p:set>
+                                      <p:cBhvr>
+                                        <p:cTn id="22" dur="1" fill="hold">
+                                          <p:stCondLst>
+                                            <p:cond delay="0"/>
+                                          </p:stCondLst>
+                                        </p:cTn>
+                                        <p:tgtEl>
+                                          <p:spTgt spid="3">
+                                            <p:txEl>
+                                              <p:pRg st="10" end="10"/>
+                                            </p:txEl>
+                                          </p:spTgt>
+                                        </p:tgtEl>
+                                        <p:attrNameLst>
+                                          <p:attrName>style.visibility</p:attrName>
+                                        </p:attrNameLst>
+                                      </p:cBhvr>
+                                      <p:to>
+                                        <p:strVal val="visible"/>
+                                      </p:to>
+                                    </p:set>
+                                  </p:childTnLst>
+                                </p:cTn>
+                              </p:par>
+                            </p:childTnLst>
+                          </p:cTn>
+                        </p:par>
+                      </p:childTnLst>
+                    </p:cTn>
+                  </p:par>
+                  <p:par>
+                    <p:cTn id="23" fill="hold">
+                      <p:stCondLst>
+                        <p:cond delay="indefinite"/>
+                      </p:stCondLst>
+                      <p:childTnLst>
+                        <p:par>
+                          <p:cTn id="24" fill="hold">
+                            <p:stCondLst>
+                              <p:cond delay="0"/>
+                            </p:stCondLst>
+                            <p:childTnLst>
+                              <p:par>
+                                <p:cTn id="25" presetID="1" presetClass="entr" presetSubtype="0" fill="hold" grpId="0" nodeType="clickEffect">
+                                  <p:stCondLst>
+                                    <p:cond delay="0"/>
+                                  </p:stCondLst>
+                                  <p:childTnLst>
+                                    <p:set>
+                                      <p:cBhvr>
+                                        <p:cTn id="26" dur="1" fill="hold">
+                                          <p:stCondLst>
+                                            <p:cond delay="0"/>
+                                          </p:stCondLst>
+                                        </p:cTn>
+                                        <p:tgtEl>
+                                          <p:spTgt spid="3">
+                                            <p:txEl>
+                                              <p:pRg st="14" end="14"/>
+                                            </p:txEl>
+                                          </p:spTgt>
+                                        </p:tgtEl>
+                                        <p:attrNameLst>
+                                          <p:attrName>style.visibility</p:attrName>
+                                        </p:attrNameLst>
+                                      </p:cBhvr>
+                                      <p:to>
+                                        <p:strVal val="visible"/>
+                                      </p:to>
+                                    </p:set>
+                                  </p:childTnLst>
+                                </p:cTn>
+                              </p:par>
+                            </p:childTnLst>
+                          </p:cTn>
+                        </p:par>
+                      </p:childTnLst>
+                    </p:cTn>
+                  </p:par>
+                  <p:par>
+                    <p:cTn id="27" fill="hold">
+                      <p:stCondLst>
+                        <p:cond delay="indefinite"/>
+                      </p:stCondLst>
+                      <p:childTnLst>
+                        <p:par>
+                          <p:cTn id="28" fill="hold">
+                            <p:stCondLst>
+                              <p:cond delay="0"/>
+                            </p:stCondLst>
+                            <p:childTnLst>
+                              <p:par>
+                                <p:cTn id="29" presetID="1" presetClass="entr" presetSubtype="0" fill="hold" grpId="0" nodeType="clickEffect">
+                                  <p:stCondLst>
+                                    <p:cond delay="0"/>
+                                  </p:stCondLst>
+                                  <p:childTnLst>
+                                    <p:set>
+                                      <p:cBhvr>
+                                        <p:cTn id="30" dur="1" fill="hold">
+                                          <p:stCondLst>
+                                            <p:cond delay="0"/>
+                                          </p:stCondLst>
+                                        </p:cTn>
+                                        <p:tgtEl>
+                                          <p:spTgt spid="3">
+                                            <p:txEl>
+                                              <p:pRg st="16" end="16"/>
+                                            </p:txEl>
+                                          </p:spTgt>
+                                        </p:tgtEl>
+                                        <p:attrNameLst>
+                                          <p:attrName>style.visibility</p:attrName>
+                                        </p:attrNameLst>
+                                      </p:cBhvr>
+                                      <p:to>
+                                        <p:strVal val="visible"/>
+                                      </p:to>
+                                    </p:set>
+                                  </p:childTnLst>
+                                </p:cTn>
+                              </p:par>
+                            </p:childTnLst>
+                          </p:cTn>
+                        </p:par>
+                      </p:childTnLst>
+                    </p:cTn>
+                  </p:par>
+                  <p:par>
+                    <p:cTn id="31" fill="hold">
+                      <p:stCondLst>
+                        <p:cond delay="indefinite"/>
+                      </p:stCondLst>
+                      <p:childTnLst>
+                        <p:par>
+                          <p:cTn id="32" fill="hold">
+                            <p:stCondLst>
+                              <p:cond delay="0"/>
+                            </p:stCondLst>
+                            <p:childTnLst>
+                              <p:par>
+                                <p:cTn id="33" presetID="1" presetClass="entr" presetSubtype="0" fill="hold" grpId="0" nodeType="clickEffect">
+                                  <p:stCondLst>
+                                    <p:cond delay="0"/>
+                                  </p:stCondLst>
+                                  <p:childTnLst>
+                                    <p:set>
+                                      <p:cBhvr>
+                                        <p:cTn id="34" dur="1" fill="hold">
+                                          <p:stCondLst>
+                                            <p:cond delay="0"/>
+                                          </p:stCondLst>
+                                        </p:cTn>
+                                        <p:tgtEl>
+                                          <p:spTgt spid="3">
+                                            <p:txEl>
+                                              <p:pRg st="18" end="18"/>
+                                            </p:txEl>
+                                          </p:spTgt>
+                                        </p:tgtEl>
+                                        <p:attrNameLst>
+                                          <p:attrName>style.visibility</p:attrName>
+                                        </p:attrNameLst>
+                                      </p:cBhvr>
+                                      <p:to>
+                                        <p:strVal val="visible"/>
+                                      </p:to>
+                                    </p:set>
+                                  </p:childTnLst>
+                                </p:cTn>
+                              </p:par>
+                            </p:childTnLst>
+                          </p:cTn>
+                        </p:par>
+                      </p:childTnLst>
+                    </p:cTn>
+                  </p:par>
+                </p:childTnLst>
+              </p:cTn>
+              <p:prevCondLst>
+                <p:cond evt="onPrev" delay="0">
+                  <p:tgtEl>
+                    <p:sldTgt/>
+                  </p:tgtEl>
+                </p:cond>
+              </p:prevCondLst>
+              <p:nextCondLst>
+                <p:cond evt="onNext" delay="0">
+                  <p:tgtEl>
+                    <p:sldTgt/>
+                  </p:tgtEl>
+                </p:cond>
+              </p:nextCondLst>
+            </p:seq>
+          </p:childTnLst>
+        </p:cTn>
+      </p:par>
+    </p:tnLst>
+    <p:bldLst>
+      <p:bldP spid="3" grpId="0" uiExpand="1" build="p"/>
+    </p:bldLst>
+  </p:timing>
+</p:sld>
+</file>
+
+<file path=ppt/slides/slide9.xml><?xml version="1.0" encoding="utf-8"?>
+<p:sld xmlns:a="http://schemas.openxmlformats.org/drawingml/2006/main" xmlns:r="http://schemas.openxmlformats.org/officeDocument/2006/relationships" xmlns:p="http://schemas.openxmlformats.org/presentationml/2006/main">
+  <p:cSld>
+    <p:spTree>
+      <p:nvGrpSpPr>
+        <p:cNvPr id="1" name=""/>
+        <p:cNvGrpSpPr/>
+        <p:nvPr/>
+      </p:nvGrpSpPr>
+      <p:grpSpPr>
+        <a:xfrm>
+          <a:off x="0" y="0"/>
+          <a:ext cx="0" cy="0"/>
+          <a:chOff x="0" y="0"/>
+          <a:chExt cx="0" cy="0"/>
+        </a:xfrm>
+      </p:grpSpPr>
+      <p:sp>
+        <p:nvSpPr>
+          <p:cNvPr id="2" name="Title Placeholder 1"/>
+          <p:cNvSpPr>
+            <a:spLocks noGrp="1"/>
+          </p:cNvSpPr>
+          <p:nvPr>
+            <p:ph type="title"/>
+          </p:nvPr>
+        </p:nvSpPr>
+        <p:spPr bwMode="auto">
+          <a:xfrm>
+            <a:off x="433680" y="423297"/>
+            <a:ext cx="8229600" cy="784602"/>
+          </a:xfrm>
+          <a:prstGeom prst="rect">
+            <a:avLst/>
+          </a:prstGeom>
+          <a:noFill/>
+          <a:ln w="9525">
+            <a:noFill/>
+            <a:miter lim="800000"/>
+            <a:headEnd/>
+            <a:tailEnd/>
+          </a:ln>
+        </p:spPr>
+        <p:txBody>
+          <a:bodyPr/>
+          <a:lstStyle/>
+          <a:p>
+            <a:pPr lvl="0" indent="0" marL="0">
+              <a:buNone/>
+            </a:pPr>
+            <a:r>
+              <a:rPr/>
+              <a:t>Proof: Variance of a Linear Transformation</a:t>
+            </a:r>
+          </a:p>
+        </p:txBody>
+      </p:sp>
+      <mc:AlternateContent xmlns:mc="http://schemas.openxmlformats.org/markup-compatibility/2006">
+        <mc:Choice xmlns:a14="http://schemas.microsoft.com/office/drawing/2010/main" Requires="a14">
+          <p:sp>
+            <p:nvSpPr>
+              <p:cNvPr id="3" name="Text Placeholder 2"/>
+              <p:cNvSpPr>
+                <a:spLocks noGrp="1"/>
+              </p:cNvSpPr>
+              <p:nvPr>
+                <p:ph idx="1"/>
+              </p:nvPr>
+            </p:nvSpPr>
+            <p:spPr/>
+            <p:txBody>
+              <a:bodyPr/>
+              <a:lstStyle/>
+              <a:p>
+                <a:pPr lvl="0"/>
+                <a:r>
+                  <a:rPr/>
+                  <a:t>We want to show that</a:t>
+                </a:r>
+              </a:p>
+              <a:p>
+                <a:pPr lvl="0" indent="0" marL="0">
+                  <a:buNone/>
+                </a:pPr>
+                <a14:m>
+                  <m:oMathPara xmlns:m="http://schemas.openxmlformats.org/officeDocument/2006/math">
+                    <m:oMathParaPr>
+                      <m:jc m:val="center"/>
+                    </m:oMathParaPr>
+                    <m:oMath>
+                      <m:r>
+                        <m:t>V</m:t>
+                      </m:r>
+                      <m:d>
+                        <m:dPr>
+                          <m:begChr m:val="("/>
+                          <m:sepChr m:val=""/>
+                          <m:endChr m:val=")"/>
+                          <m:grow/>
+                        </m:dPr>
+                        <m:e>
+                          <m:r>
+                            <m:t>a</m:t>
+                          </m:r>
+                          <m:r>
+                            <m:t>X</m:t>
+                          </m:r>
+                          <m:r>
+                            <m:rPr>
+                              <m:sty m:val="p"/>
+                            </m:rPr>
+                            <m:t>+</m:t>
+                          </m:r>
+                          <m:r>
+                            <m:t>b</m:t>
+                          </m:r>
+                        </m:e>
+                      </m:d>
+                      <m:r>
+                        <m:rPr>
+                          <m:sty m:val="p"/>
+                        </m:rPr>
+                        <m:t>=</m:t>
+                      </m:r>
+                      <m:sSup>
+                        <m:e>
+                          <m:r>
+                            <m:t>a</m:t>
+                          </m:r>
+                        </m:e>
+                        <m:sup>
+                          <m:r>
+                            <m:t>2</m:t>
+                          </m:r>
+                        </m:sup>
+                      </m:sSup>
+                      <m:r>
+                        <m:t>V</m:t>
+                      </m:r>
+                      <m:d>
+                        <m:dPr>
+                          <m:begChr m:val="("/>
+                          <m:sepChr m:val=""/>
+                          <m:endChr m:val=")"/>
+                          <m:grow/>
+                        </m:dPr>
+                        <m:e>
+                          <m:r>
+                            <m:t>X</m:t>
+                          </m:r>
+                        </m:e>
+                      </m:d>
+                      <m:r>
+                        <m:rPr>
+                          <m:sty m:val="p"/>
+                        </m:rPr>
+                        <m:t>.</m:t>
+                      </m:r>
+                    </m:oMath>
+                  </m:oMathPara>
+                </a14:m>
+              </a:p>
+              <a:p>
+                <a:pPr lvl="0"/>
+                <a:r>
+                  <a:rPr/>
+                  <a:t>By the definition of variance,</a:t>
+                </a:r>
+              </a:p>
+              <a:p>
+                <a:pPr lvl="0" indent="0" marL="0">
+                  <a:buNone/>
+                </a:pPr>
+                <a14:m>
+                  <m:oMathPara xmlns:m="http://schemas.openxmlformats.org/officeDocument/2006/math">
+                    <m:oMathParaPr>
+                      <m:jc m:val="center"/>
+                    </m:oMathParaPr>
+                    <m:oMath>
+                      <m:r>
+                        <m:t>V</m:t>
+                      </m:r>
+                      <m:d>
+                        <m:dPr>
+                          <m:begChr m:val="("/>
+                          <m:sepChr m:val=""/>
+                          <m:endChr m:val=")"/>
+                          <m:grow/>
+                        </m:dPr>
+                        <m:e>
+                          <m:r>
+                            <m:t>a</m:t>
+                          </m:r>
+                          <m:r>
+                            <m:t>X</m:t>
+                          </m:r>
+                          <m:r>
+                            <m:rPr>
+                              <m:sty m:val="p"/>
+                            </m:rPr>
+                            <m:t>+</m:t>
+                          </m:r>
+                          <m:r>
+                            <m:t>b</m:t>
+                          </m:r>
+                        </m:e>
+                      </m:d>
+                      <m:r>
+                        <m:rPr>
+                          <m:sty m:val="p"/>
+                        </m:rPr>
+                        <m:t>=</m:t>
+                      </m:r>
+                      <m:r>
+                        <m:rPr>
+                          <m:sty m:val="p"/>
+                        </m:rPr>
+                        <m:t>∑</m:t>
+                      </m:r>
+                      <m:sSup>
+                        <m:e>
+                          <m:d>
+                            <m:dPr>
+                              <m:begChr m:val="["/>
+                              <m:sepChr m:val=""/>
+                              <m:endChr m:val="]"/>
+                              <m:grow/>
+                            </m:dPr>
+                            <m:e>
+                              <m:d>
+                                <m:dPr>
+                                  <m:begChr m:val="("/>
+                                  <m:sepChr m:val=""/>
+                                  <m:endChr m:val=")"/>
+                                  <m:grow/>
+                                </m:dPr>
+                                <m:e>
+                                  <m:r>
+                                    <m:t>a</m:t>
+                                  </m:r>
+                                  <m:r>
+                                    <m:t>x</m:t>
+                                  </m:r>
+                                  <m:r>
+                                    <m:rPr>
+                                      <m:sty m:val="p"/>
+                                    </m:rPr>
+                                    <m:t>+</m:t>
+                                  </m:r>
+                                  <m:r>
+                                    <m:t>b</m:t>
+                                  </m:r>
+                                </m:e>
+                              </m:d>
+                              <m:r>
+                                <m:rPr>
+                                  <m:sty m:val="p"/>
+                                </m:rPr>
+                                <m:t>−</m:t>
+                              </m:r>
+                              <m:r>
+                                <m:t>E</m:t>
+                              </m:r>
+                              <m:d>
+                                <m:dPr>
+                                  <m:begChr m:val="("/>
+                                  <m:sepChr m:val=""/>
+                                  <m:endChr m:val=")"/>
+                                  <m:grow/>
+                                </m:dPr>
+                                <m:e>
+                                  <m:r>
+                                    <m:t>a</m:t>
+                                  </m:r>
+                                  <m:r>
+                                    <m:t>X</m:t>
+                                  </m:r>
+                                  <m:r>
+                                    <m:rPr>
+                                      <m:sty m:val="p"/>
+                                    </m:rPr>
+                                    <m:t>+</m:t>
+                                  </m:r>
+                                  <m:r>
+                                    <m:t>b</m:t>
+                                  </m:r>
+                                </m:e>
+                              </m:d>
+                            </m:e>
+                          </m:d>
+                        </m:e>
+                        <m:sup>
+                          <m:r>
+                            <m:t>2</m:t>
+                          </m:r>
+                        </m:sup>
+                      </m:sSup>
+                      <m:r>
+                        <m:t>p</m:t>
+                      </m:r>
+                      <m:d>
+                        <m:dPr>
+                          <m:begChr m:val="("/>
+                          <m:sepChr m:val=""/>
+                          <m:endChr m:val=")"/>
+                          <m:grow/>
+                        </m:dPr>
+                        <m:e>
+                          <m:r>
+                            <m:t>x</m:t>
+                          </m:r>
+                        </m:e>
+                      </m:d>
+                      <m:r>
+                        <m:rPr>
+                          <m:sty m:val="p"/>
+                        </m:rPr>
+                        <m:t>.</m:t>
+                      </m:r>
+                    </m:oMath>
+                  </m:oMathPara>
+                </a14:m>
+              </a:p>
+              <a:p>
+                <a:pPr lvl="0"/>
+                <a:r>
+                  <a:rPr/>
+                  <a:t>Using</a:t>
+                </a:r>
+              </a:p>
+              <a:p>
+                <a:pPr lvl="0" indent="0" marL="0">
+                  <a:buNone/>
+                </a:pPr>
+                <a14:m>
+                  <m:oMathPara xmlns:m="http://schemas.openxmlformats.org/officeDocument/2006/math">
+                    <m:oMathParaPr>
+                      <m:jc m:val="center"/>
+                    </m:oMathParaPr>
+                    <m:oMath>
+                      <m:r>
+                        <m:t>E</m:t>
+                      </m:r>
+                      <m:d>
+                        <m:dPr>
+                          <m:begChr m:val="("/>
+                          <m:sepChr m:val=""/>
+                          <m:endChr m:val=")"/>
+                          <m:grow/>
+                        </m:dPr>
+                        <m:e>
+                          <m:r>
+                            <m:t>a</m:t>
+                          </m:r>
+                          <m:r>
+                            <m:t>X</m:t>
+                          </m:r>
+                          <m:r>
+                            <m:rPr>
+                              <m:sty m:val="p"/>
+                            </m:rPr>
+                            <m:t>+</m:t>
+                          </m:r>
+                          <m:r>
+                            <m:t>b</m:t>
+                          </m:r>
+                        </m:e>
+                      </m:d>
+                      <m:r>
+                        <m:rPr>
+                          <m:sty m:val="p"/>
+                        </m:rPr>
+                        <m:t>=</m:t>
+                      </m:r>
+                      <m:r>
+                        <m:t>a</m:t>
+                      </m:r>
+                      <m:r>
+                        <m:t>E</m:t>
+                      </m:r>
+                      <m:d>
+                        <m:dPr>
+                          <m:begChr m:val="("/>
+                          <m:sepChr m:val=""/>
+                          <m:endChr m:val=")"/>
+                          <m:grow/>
+                        </m:dPr>
+                        <m:e>
+                          <m:r>
+                            <m:t>X</m:t>
+                          </m:r>
+                        </m:e>
+                      </m:d>
+                      <m:r>
+                        <m:rPr>
+                          <m:sty m:val="p"/>
+                        </m:rPr>
+                        <m:t>+</m:t>
+                      </m:r>
+                      <m:r>
+                        <m:t>b</m:t>
+                      </m:r>
+                      <m:r>
+                        <m:rPr>
+                          <m:sty m:val="p"/>
+                        </m:rPr>
+                        <m:t>,</m:t>
+                      </m:r>
+                    </m:oMath>
+                  </m:oMathPara>
+                </a14:m>
+              </a:p>
+              <a:p>
+                <a:pPr lvl="0" indent="0" marL="0">
+                  <a:buNone/>
+                </a:pPr>
+                <a:r>
+                  <a:rPr/>
+                  <a:t>we get</a:t>
+                </a:r>
+              </a:p>
+              <a:p>
+                <a:pPr lvl="0" indent="0" marL="0">
+                  <a:buNone/>
+                </a:pPr>
+                <a14:m>
+                  <m:oMathPara xmlns:m="http://schemas.openxmlformats.org/officeDocument/2006/math">
+                    <m:oMathParaPr>
+                      <m:jc m:val="center"/>
+                    </m:oMathParaPr>
+                    <m:oMath>
+                      <m:r>
+                        <m:t>V</m:t>
+                      </m:r>
+                      <m:d>
+                        <m:dPr>
+                          <m:begChr m:val="("/>
+                          <m:sepChr m:val=""/>
+                          <m:endChr m:val=")"/>
+                          <m:grow/>
+                        </m:dPr>
+                        <m:e>
+                          <m:r>
+                            <m:t>a</m:t>
+                          </m:r>
+                          <m:r>
+                            <m:t>X</m:t>
+                          </m:r>
+                          <m:r>
+                            <m:rPr>
+                              <m:sty m:val="p"/>
+                            </m:rPr>
+                            <m:t>+</m:t>
+                          </m:r>
+                          <m:r>
+                            <m:t>b</m:t>
+                          </m:r>
+                        </m:e>
+                      </m:d>
+                      <m:r>
+                        <m:rPr>
+                          <m:sty m:val="p"/>
+                        </m:rPr>
+                        <m:t>=</m:t>
+                      </m:r>
+                      <m:r>
+                        <m:rPr>
+                          <m:sty m:val="p"/>
+                        </m:rPr>
+                        <m:t>∑</m:t>
+                      </m:r>
+                      <m:sSup>
+                        <m:e>
+                          <m:d>
+                            <m:dPr>
+                              <m:begChr m:val="["/>
+                              <m:sepChr m:val=""/>
+                              <m:endChr m:val="]"/>
+                              <m:grow/>
+                            </m:dPr>
+                            <m:e>
+                              <m:r>
+                                <m:t>a</m:t>
+                              </m:r>
+                              <m:r>
+                                <m:t>x</m:t>
+                              </m:r>
+                              <m:r>
+                                <m:rPr>
+                                  <m:sty m:val="p"/>
+                                </m:rPr>
+                                <m:t>+</m:t>
+                              </m:r>
+                              <m:r>
+                                <m:t>b</m:t>
+                              </m:r>
+                              <m:r>
+                                <m:rPr>
+                                  <m:sty m:val="p"/>
+                                </m:rPr>
+                                <m:t>−</m:t>
+                              </m:r>
+                              <m:r>
+                                <m:t>a</m:t>
+                              </m:r>
+                              <m:r>
+                                <m:t>E</m:t>
+                              </m:r>
+                              <m:d>
+                                <m:dPr>
+                                  <m:begChr m:val="("/>
+                                  <m:sepChr m:val=""/>
+                                  <m:endChr m:val=")"/>
+                                  <m:grow/>
+                                </m:dPr>
+                                <m:e>
+                                  <m:r>
+                                    <m:t>X</m:t>
+                                  </m:r>
+                                </m:e>
+                              </m:d>
+                              <m:r>
+                                <m:rPr>
+                                  <m:sty m:val="p"/>
+                                </m:rPr>
+                                <m:t>−</m:t>
+                              </m:r>
+                              <m:r>
+                                <m:t>b</m:t>
+                              </m:r>
+                            </m:e>
+                          </m:d>
+                        </m:e>
+                        <m:sup>
+                          <m:r>
+                            <m:t>2</m:t>
+                          </m:r>
+                        </m:sup>
+                      </m:sSup>
+                      <m:r>
+                        <m:t>p</m:t>
+                      </m:r>
+                      <m:d>
+                        <m:dPr>
+                          <m:begChr m:val="("/>
+                          <m:sepChr m:val=""/>
+                          <m:endChr m:val=")"/>
+                          <m:grow/>
+                        </m:dPr>
+                        <m:e>
+                          <m:r>
+                            <m:t>x</m:t>
+                          </m:r>
+                        </m:e>
+                      </m:d>
+                      <m:r>
+                        <m:rPr>
+                          <m:sty m:val="p"/>
+                        </m:rPr>
+                        <m:t>.</m:t>
+                      </m:r>
+                    </m:oMath>
+                  </m:oMathPara>
+                </a14:m>
+              </a:p>
+              <a:p>
+                <a:pPr lvl="0"/>
+                <a:r>
+                  <a:rPr/>
+                  <a:t>Simplifying,</a:t>
+                </a:r>
+              </a:p>
+              <a:p>
+                <a:pPr lvl="0" indent="0" marL="0">
+                  <a:buNone/>
+                </a:pPr>
+                <a14:m>
+                  <m:oMathPara xmlns:m="http://schemas.openxmlformats.org/officeDocument/2006/math">
+                    <m:oMathParaPr>
+                      <m:jc m:val="center"/>
+                    </m:oMathParaPr>
+                    <m:oMath>
+                      <m:r>
+                        <m:t>V</m:t>
+                      </m:r>
+                      <m:d>
+                        <m:dPr>
+                          <m:begChr m:val="("/>
+                          <m:sepChr m:val=""/>
+                          <m:endChr m:val=")"/>
+                          <m:grow/>
+                        </m:dPr>
+                        <m:e>
+                          <m:r>
+                            <m:t>a</m:t>
+                          </m:r>
+                          <m:r>
+                            <m:t>X</m:t>
+                          </m:r>
+                          <m:r>
+                            <m:rPr>
+                              <m:sty m:val="p"/>
+                            </m:rPr>
+                            <m:t>+</m:t>
+                          </m:r>
+                          <m:r>
+                            <m:t>b</m:t>
+                          </m:r>
+                        </m:e>
+                      </m:d>
+                      <m:r>
+                        <m:rPr>
+                          <m:sty m:val="p"/>
+                        </m:rPr>
+                        <m:t>=</m:t>
+                      </m:r>
+                      <m:r>
+                        <m:rPr>
+                          <m:sty m:val="p"/>
+                        </m:rPr>
+                        <m:t>∑</m:t>
+                      </m:r>
+                      <m:sSup>
+                        <m:e>
+                          <m:d>
+                            <m:dPr>
+                              <m:begChr m:val="["/>
+                              <m:sepChr m:val=""/>
+                              <m:endChr m:val="]"/>
+                              <m:grow/>
+                            </m:dPr>
+                            <m:e>
+                              <m:r>
+                                <m:t>a</m:t>
+                              </m:r>
+                              <m:r>
+                                <m:t>x</m:t>
+                              </m:r>
+                              <m:r>
+                                <m:rPr>
+                                  <m:sty m:val="p"/>
+                                </m:rPr>
+                                <m:t>−</m:t>
+                              </m:r>
+                              <m:r>
+                                <m:t>a</m:t>
+                              </m:r>
+                              <m:r>
+                                <m:t>E</m:t>
+                              </m:r>
+                              <m:d>
+                                <m:dPr>
+                                  <m:begChr m:val="("/>
+                                  <m:sepChr m:val=""/>
+                                  <m:endChr m:val=")"/>
+                                  <m:grow/>
+                                </m:dPr>
+                                <m:e>
+                                  <m:r>
+                                    <m:t>X</m:t>
+                                  </m:r>
+                                </m:e>
+                              </m:d>
+                            </m:e>
+                          </m:d>
+                        </m:e>
+                        <m:sup>
+                          <m:r>
+                            <m:t>2</m:t>
+                          </m:r>
+                        </m:sup>
+                      </m:sSup>
+                      <m:r>
+                        <m:t>p</m:t>
+                      </m:r>
+                      <m:d>
+                        <m:dPr>
+                          <m:begChr m:val="("/>
+                          <m:sepChr m:val=""/>
+                          <m:endChr m:val=")"/>
+                          <m:grow/>
+                        </m:dPr>
+                        <m:e>
+                          <m:r>
+                            <m:t>x</m:t>
+                          </m:r>
+                        </m:e>
+                      </m:d>
+                      <m:r>
+                        <m:rPr>
+                          <m:sty m:val="p"/>
+                        </m:rPr>
+                        <m:t>.</m:t>
+                      </m:r>
+                    </m:oMath>
+                  </m:oMathPara>
+                </a14:m>
+              </a:p>
+              <a:p>
+                <a:pPr lvl="0"/>
+                <a:r>
+                  <a:rPr/>
+                  <a:t>Factor out </a:t>
+                </a:r>
+                <a14:m>
+                  <m:oMath xmlns:m="http://schemas.openxmlformats.org/officeDocument/2006/math">
+                    <m:r>
+                      <m:t>a</m:t>
+                    </m:r>
+                  </m:oMath>
+                </a14:m>
+                <a:r>
+                  <a:rPr/>
+                  <a:t>:</a:t>
+                </a:r>
+              </a:p>
+              <a:p>
+                <a:pPr lvl="0" indent="0" marL="0">
+                  <a:buNone/>
+                </a:pPr>
+                <a14:m>
+                  <m:oMathPara xmlns:m="http://schemas.openxmlformats.org/officeDocument/2006/math">
+                    <m:oMathParaPr>
+                      <m:jc m:val="center"/>
+                    </m:oMathParaPr>
+                    <m:oMath>
+                      <m:r>
+                        <m:t>V</m:t>
+                      </m:r>
+                      <m:d>
+                        <m:dPr>
+                          <m:begChr m:val="("/>
+                          <m:sepChr m:val=""/>
+                          <m:endChr m:val=")"/>
+                          <m:grow/>
+                        </m:dPr>
+                        <m:e>
+                          <m:r>
+                            <m:t>a</m:t>
+                          </m:r>
+                          <m:r>
+                            <m:t>X</m:t>
+                          </m:r>
+                          <m:r>
+                            <m:rPr>
+                              <m:sty m:val="p"/>
+                            </m:rPr>
+                            <m:t>+</m:t>
+                          </m:r>
+                          <m:r>
+                            <m:t>b</m:t>
+                          </m:r>
+                        </m:e>
+                      </m:d>
+                      <m:r>
+                        <m:rPr>
+                          <m:sty m:val="p"/>
+                        </m:rPr>
+                        <m:t>=</m:t>
+                      </m:r>
+                      <m:r>
+                        <m:rPr>
+                          <m:sty m:val="p"/>
+                        </m:rPr>
+                        <m:t>∑</m:t>
+                      </m:r>
+                      <m:sSup>
+                        <m:e>
+                          <m:d>
+                            <m:dPr>
+                              <m:begChr m:val="["/>
+                              <m:sepChr m:val=""/>
+                              <m:endChr m:val="]"/>
+                              <m:grow/>
+                            </m:dPr>
+                            <m:e>
+                              <m:r>
+                                <m:t>a</m:t>
+                              </m:r>
+                              <m:d>
+                                <m:dPr>
+                                  <m:begChr m:val="("/>
+                                  <m:sepChr m:val=""/>
+                                  <m:endChr m:val=")"/>
+                                  <m:grow/>
+                                </m:dPr>
+                                <m:e>
+                                  <m:r>
+                                    <m:t>x</m:t>
+                                  </m:r>
+                                  <m:r>
+                                    <m:rPr>
+                                      <m:sty m:val="p"/>
+                                    </m:rPr>
+                                    <m:t>−</m:t>
+                                  </m:r>
+                                  <m:r>
+                                    <m:t>E</m:t>
+                                  </m:r>
+                                  <m:d>
+                                    <m:dPr>
+                                      <m:begChr m:val="("/>
+                                      <m:sepChr m:val=""/>
+                                      <m:endChr m:val=")"/>
+                                      <m:grow/>
+                                    </m:dPr>
+                                    <m:e>
+                                      <m:r>
+                                        <m:t>X</m:t>
+                                      </m:r>
+                                    </m:e>
+                                  </m:d>
+                                </m:e>
+                              </m:d>
+                            </m:e>
+                          </m:d>
+                        </m:e>
+                        <m:sup>
+                          <m:r>
+                            <m:t>2</m:t>
+                          </m:r>
+                        </m:sup>
+                      </m:sSup>
+                      <m:r>
+                        <m:t>p</m:t>
+                      </m:r>
+                      <m:d>
+                        <m:dPr>
+                          <m:begChr m:val="("/>
+                          <m:sepChr m:val=""/>
+                          <m:endChr m:val=")"/>
+                          <m:grow/>
+                        </m:dPr>
+                        <m:e>
+                          <m:r>
+                            <m:t>x</m:t>
+                          </m:r>
+                        </m:e>
+                      </m:d>
+                      <m:r>
+                        <m:rPr>
+                          <m:sty m:val="p"/>
+                        </m:rPr>
+                        <m:t>.</m:t>
+                      </m:r>
+                    </m:oMath>
+                  </m:oMathPara>
+                </a14:m>
+              </a:p>
+              <a:p>
+                <a:pPr lvl="0"/>
+                <a:r>
+                  <a:rPr/>
+                  <a:t>Therefore,</a:t>
+                </a:r>
+              </a:p>
+              <a:p>
+                <a:pPr lvl="0" indent="0" marL="0">
+                  <a:buNone/>
+                </a:pPr>
+                <a14:m>
+                  <m:oMathPara xmlns:m="http://schemas.openxmlformats.org/officeDocument/2006/math">
+                    <m:oMathParaPr>
+                      <m:jc m:val="center"/>
+                    </m:oMathParaPr>
+                    <m:oMath>
+                      <m:r>
+                        <m:t>V</m:t>
+                      </m:r>
+                      <m:d>
+                        <m:dPr>
+                          <m:begChr m:val="("/>
+                          <m:sepChr m:val=""/>
+                          <m:endChr m:val=")"/>
+                          <m:grow/>
+                        </m:dPr>
+                        <m:e>
+                          <m:r>
+                            <m:t>a</m:t>
+                          </m:r>
+                          <m:r>
+                            <m:t>X</m:t>
+                          </m:r>
+                          <m:r>
+                            <m:rPr>
+                              <m:sty m:val="p"/>
+                            </m:rPr>
+                            <m:t>+</m:t>
+                          </m:r>
+                          <m:r>
+                            <m:t>b</m:t>
+                          </m:r>
+                        </m:e>
+                      </m:d>
+                      <m:r>
+                        <m:rPr>
+                          <m:sty m:val="p"/>
+                        </m:rPr>
+                        <m:t>=</m:t>
+                      </m:r>
+                      <m:r>
+                        <m:rPr>
+                          <m:sty m:val="p"/>
+                        </m:rPr>
+                        <m:t>∑</m:t>
+                      </m:r>
+                      <m:sSup>
+                        <m:e>
+                          <m:r>
+                            <m:t>a</m:t>
+                          </m:r>
+                        </m:e>
+                        <m:sup>
+                          <m:r>
+                            <m:t>2</m:t>
+                          </m:r>
+                        </m:sup>
+                      </m:sSup>
+                      <m:sSup>
+                        <m:e>
+                          <m:d>
+                            <m:dPr>
+                              <m:begChr m:val="["/>
+                              <m:sepChr m:val=""/>
+                              <m:endChr m:val="]"/>
+                              <m:grow/>
+                            </m:dPr>
+                            <m:e>
+                              <m:r>
+                                <m:t>x</m:t>
+                              </m:r>
+                              <m:r>
+                                <m:rPr>
+                                  <m:sty m:val="p"/>
+                                </m:rPr>
+                                <m:t>−</m:t>
+                              </m:r>
+                              <m:r>
+                                <m:t>E</m:t>
+                              </m:r>
+                              <m:d>
+                                <m:dPr>
+                                  <m:begChr m:val="("/>
+                                  <m:sepChr m:val=""/>
+                                  <m:endChr m:val=")"/>
+                                  <m:grow/>
+                                </m:dPr>
+                                <m:e>
+                                  <m:r>
+                                    <m:t>X</m:t>
+                                  </m:r>
+                                </m:e>
+                              </m:d>
+                            </m:e>
+                          </m:d>
+                        </m:e>
+                        <m:sup>
+                          <m:r>
+                            <m:t>2</m:t>
+                          </m:r>
+                        </m:sup>
+                      </m:sSup>
+                      <m:r>
+                        <m:t>p</m:t>
+                      </m:r>
+                      <m:d>
+                        <m:dPr>
+                          <m:begChr m:val="("/>
+                          <m:sepChr m:val=""/>
+                          <m:endChr m:val=")"/>
+                          <m:grow/>
+                        </m:dPr>
+                        <m:e>
+                          <m:r>
+                            <m:t>x</m:t>
+                          </m:r>
+                        </m:e>
+                      </m:d>
+                      <m:r>
+                        <m:rPr>
+                          <m:sty m:val="p"/>
+                        </m:rPr>
+                        <m:t>.</m:t>
+                      </m:r>
+                    </m:oMath>
+                  </m:oMathPara>
+                </a14:m>
+              </a:p>
+              <a:p>
+                <a:pPr lvl="0"/>
+                <a:r>
+                  <a:rPr/>
+                  <a:t>Since </a:t>
+                </a:r>
+                <a14:m>
+                  <m:oMath xmlns:m="http://schemas.openxmlformats.org/officeDocument/2006/math">
+                    <m:sSup>
+                      <m:e>
+                        <m:r>
+                          <m:t>a</m:t>
+                        </m:r>
+                      </m:e>
+                      <m:sup>
+                        <m:r>
+                          <m:t>2</m:t>
+                        </m:r>
+                      </m:sup>
+                    </m:sSup>
+                  </m:oMath>
+                </a14:m>
+                <a:r>
+                  <a:rPr/>
+                  <a:t> is a constant,</a:t>
+                </a:r>
+              </a:p>
+              <a:p>
+                <a:pPr lvl="0" indent="0" marL="0">
+                  <a:buNone/>
+                </a:pPr>
+                <a14:m>
+                  <m:oMathPara xmlns:m="http://schemas.openxmlformats.org/officeDocument/2006/math">
+                    <m:oMathParaPr>
+                      <m:jc m:val="center"/>
+                    </m:oMathParaPr>
+                    <m:oMath>
+                      <m:r>
+                        <m:t>V</m:t>
+                      </m:r>
+                      <m:d>
+                        <m:dPr>
+                          <m:begChr m:val="("/>
+                          <m:sepChr m:val=""/>
+                          <m:endChr m:val=")"/>
+                          <m:grow/>
+                        </m:dPr>
+                        <m:e>
+                          <m:r>
+                            <m:t>a</m:t>
+                          </m:r>
+                          <m:r>
+                            <m:t>X</m:t>
+                          </m:r>
+                          <m:r>
+                            <m:rPr>
+                              <m:sty m:val="p"/>
+                            </m:rPr>
+                            <m:t>+</m:t>
+                          </m:r>
+                          <m:r>
+                            <m:t>b</m:t>
+                          </m:r>
+                        </m:e>
+                      </m:d>
+                      <m:r>
+                        <m:rPr>
+                          <m:sty m:val="p"/>
+                        </m:rPr>
+                        <m:t>=</m:t>
+                      </m:r>
+                      <m:sSup>
+                        <m:e>
+                          <m:r>
+                            <m:t>a</m:t>
+                          </m:r>
+                        </m:e>
+                        <m:sup>
+                          <m:r>
+                            <m:t>2</m:t>
+                          </m:r>
+                        </m:sup>
+                      </m:sSup>
+                      <m:r>
+                        <m:rPr>
+                          <m:sty m:val="p"/>
+                        </m:rPr>
+                        <m:t>∑</m:t>
+                      </m:r>
+                      <m:sSup>
+                        <m:e>
+                          <m:d>
+                            <m:dPr>
+                              <m:begChr m:val="["/>
+                              <m:sepChr m:val=""/>
+                              <m:endChr m:val="]"/>
+                              <m:grow/>
+                            </m:dPr>
+                            <m:e>
+                              <m:r>
+                                <m:t>x</m:t>
+                              </m:r>
+                              <m:r>
+                                <m:rPr>
+                                  <m:sty m:val="p"/>
+                                </m:rPr>
+                                <m:t>−</m:t>
+                              </m:r>
+                              <m:r>
+                                <m:t>E</m:t>
+                              </m:r>
+                              <m:d>
+                                <m:dPr>
+                                  <m:begChr m:val="("/>
+                                  <m:sepChr m:val=""/>
+                                  <m:endChr m:val=")"/>
+                                  <m:grow/>
+                                </m:dPr>
+                                <m:e>
+                                  <m:r>
+                                    <m:t>X</m:t>
+                                  </m:r>
+                                </m:e>
+                              </m:d>
+                            </m:e>
+                          </m:d>
+                        </m:e>
+                        <m:sup>
+                          <m:r>
+                            <m:t>2</m:t>
+                          </m:r>
+                        </m:sup>
+                      </m:sSup>
+                      <m:r>
+                        <m:t>p</m:t>
+                      </m:r>
+                      <m:d>
+                        <m:dPr>
+                          <m:begChr m:val="("/>
+                          <m:sepChr m:val=""/>
+                          <m:endChr m:val=")"/>
+                          <m:grow/>
+                        </m:dPr>
+                        <m:e>
+                          <m:r>
+                            <m:t>x</m:t>
+                          </m:r>
+                        </m:e>
+                      </m:d>
+                      <m:r>
+                        <m:rPr>
+                          <m:sty m:val="p"/>
+                        </m:rPr>
+                        <m:t>.</m:t>
+                      </m:r>
+                    </m:oMath>
+                  </m:oMathPara>
+                </a14:m>
+              </a:p>
+              <a:p>
+                <a:pPr lvl="0"/>
+                <a:r>
+                  <a:rPr/>
+                  <a:t>But</a:t>
+                </a:r>
+              </a:p>
+              <a:p>
+                <a:pPr lvl="0" indent="0" marL="0">
+                  <a:buNone/>
+                </a:pPr>
+                <a14:m>
+                  <m:oMathPara xmlns:m="http://schemas.openxmlformats.org/officeDocument/2006/math">
+                    <m:oMathParaPr>
+                      <m:jc m:val="center"/>
+                    </m:oMathParaPr>
+                    <m:oMath>
+                      <m:r>
+                        <m:rPr>
+                          <m:sty m:val="p"/>
+                        </m:rPr>
+                        <m:t>∑</m:t>
+                      </m:r>
+                      <m:sSup>
+                        <m:e>
+                          <m:d>
+                            <m:dPr>
+                              <m:begChr m:val="["/>
+                              <m:sepChr m:val=""/>
+                              <m:endChr m:val="]"/>
+                              <m:grow/>
+                            </m:dPr>
+                            <m:e>
+                              <m:r>
+                                <m:t>x</m:t>
+                              </m:r>
+                              <m:r>
+                                <m:rPr>
+                                  <m:sty m:val="p"/>
+                                </m:rPr>
+                                <m:t>−</m:t>
+                              </m:r>
+                              <m:r>
+                                <m:t>E</m:t>
+                              </m:r>
+                              <m:d>
+                                <m:dPr>
+                                  <m:begChr m:val="("/>
+                                  <m:sepChr m:val=""/>
+                                  <m:endChr m:val=")"/>
+                                  <m:grow/>
+                                </m:dPr>
+                                <m:e>
+                                  <m:r>
+                                    <m:t>X</m:t>
+                                  </m:r>
+                                </m:e>
+                              </m:d>
+                            </m:e>
+                          </m:d>
+                        </m:e>
+                        <m:sup>
+                          <m:r>
+                            <m:t>2</m:t>
+                          </m:r>
+                        </m:sup>
+                      </m:sSup>
+                      <m:r>
+                        <m:t>p</m:t>
+                      </m:r>
+                      <m:d>
+                        <m:dPr>
+                          <m:begChr m:val="("/>
+                          <m:sepChr m:val=""/>
+                          <m:endChr m:val=")"/>
+                          <m:grow/>
+                        </m:dPr>
+                        <m:e>
+                          <m:r>
+                            <m:t>x</m:t>
+                          </m:r>
+                        </m:e>
+                      </m:d>
+                      <m:r>
+                        <m:rPr>
+                          <m:sty m:val="p"/>
+                        </m:rPr>
+                        <m:t>=</m:t>
+                      </m:r>
+                      <m:r>
+                        <m:t>V</m:t>
+                      </m:r>
+                      <m:d>
+                        <m:dPr>
+                          <m:begChr m:val="("/>
+                          <m:sepChr m:val=""/>
+                          <m:endChr m:val=")"/>
+                          <m:grow/>
+                        </m:dPr>
+                        <m:e>
+                          <m:r>
+                            <m:t>X</m:t>
+                          </m:r>
+                        </m:e>
+                      </m:d>
+                      <m:r>
+                        <m:rPr>
+                          <m:sty m:val="p"/>
+                        </m:rPr>
+                        <m:t>.</m:t>
+                      </m:r>
+                    </m:oMath>
+                  </m:oMathPara>
+                </a14:m>
+              </a:p>
+              <a:p>
+                <a:pPr lvl="0"/>
+                <a:r>
+                  <a:rPr/>
+                  <a:t>Hence,</a:t>
+                </a:r>
+              </a:p>
+              <a:p>
+                <a:pPr lvl="0" indent="0" marL="0">
+                  <a:buNone/>
+                </a:pPr>
+                <a14:m>
+                  <m:oMathPara xmlns:m="http://schemas.openxmlformats.org/officeDocument/2006/math">
+                    <m:oMathParaPr>
+                      <m:jc m:val="center"/>
+                    </m:oMathParaPr>
+                    <m:oMath>
+                      <m:borderBox>
+                        <m:e>
+                          <m:r>
+                            <m:t>V</m:t>
+                          </m:r>
+                          <m:d>
+                            <m:dPr>
+                              <m:begChr m:val="("/>
+                              <m:sepChr m:val=""/>
+                              <m:endChr m:val=")"/>
+                              <m:grow/>
+                            </m:dPr>
+                            <m:e>
+                              <m:r>
+                                <m:t>a</m:t>
+                              </m:r>
+                              <m:r>
+                                <m:t>X</m:t>
+                              </m:r>
+                              <m:r>
+                                <m:rPr>
+                                  <m:sty m:val="p"/>
+                                </m:rPr>
+                                <m:t>+</m:t>
+                              </m:r>
+                              <m:r>
+                                <m:t>b</m:t>
+                              </m:r>
+                            </m:e>
+                          </m:d>
+                          <m:r>
+                            <m:rPr>
+                              <m:sty m:val="p"/>
+                            </m:rPr>
+                            <m:t>=</m:t>
+                          </m:r>
+                          <m:sSup>
+                            <m:e>
+                              <m:r>
+                                <m:t>a</m:t>
+                              </m:r>
+                            </m:e>
+                            <m:sup>
+                              <m:r>
+                                <m:t>2</m:t>
+                              </m:r>
+                            </m:sup>
+                          </m:sSup>
+                          <m:r>
+                            <m:t>V</m:t>
+                          </m:r>
+                          <m:d>
+                            <m:dPr>
+                              <m:begChr m:val="("/>
+                              <m:sepChr m:val=""/>
+                              <m:endChr m:val=")"/>
+                              <m:grow/>
+                            </m:dPr>
+                            <m:e>
+                              <m:r>
+                                <m:t>X</m:t>
+                              </m:r>
+                            </m:e>
+                          </m:d>
+                        </m:e>
+                      </m:borderBox>
+                    </m:oMath>
+                  </m:oMathPara>
+                </a14:m>
+              </a:p>
+              <a:p>
+                <a:pPr lvl="0"/>
+                <a:r>
+                  <a:rPr/>
+                  <a:t>The other two properties are special cases:</a:t>
+                </a:r>
+              </a:p>
+              <a:p>
+                <a:pPr lvl="0" indent="0" marL="0">
+                  <a:buNone/>
+                </a:pPr>
+                <a14:m>
+                  <m:oMathPara xmlns:m="http://schemas.openxmlformats.org/officeDocument/2006/math">
+                    <m:oMathParaPr>
+                      <m:jc m:val="center"/>
+                    </m:oMathParaPr>
+                    <m:oMath>
+                      <m:r>
+                        <m:t>V</m:t>
+                      </m:r>
+                      <m:d>
+                        <m:dPr>
+                          <m:begChr m:val="("/>
+                          <m:sepChr m:val=""/>
+                          <m:endChr m:val=")"/>
+                          <m:grow/>
+                        </m:dPr>
+                        <m:e>
+                          <m:r>
+                            <m:t>a</m:t>
+                          </m:r>
+                          <m:r>
+                            <m:t>X</m:t>
+                          </m:r>
+                        </m:e>
+                      </m:d>
+                      <m:r>
+                        <m:rPr>
+                          <m:sty m:val="p"/>
+                        </m:rPr>
+                        <m:t>=</m:t>
+                      </m:r>
+                      <m:sSup>
+                        <m:e>
+                          <m:r>
+                            <m:t>a</m:t>
+                          </m:r>
+                        </m:e>
+                        <m:sup>
+                          <m:r>
+                            <m:t>2</m:t>
+                          </m:r>
+                        </m:sup>
+                      </m:sSup>
+                      <m:r>
+                        <m:t>V</m:t>
+                      </m:r>
+                      <m:d>
+                        <m:dPr>
+                          <m:begChr m:val="("/>
+                          <m:sepChr m:val=""/>
+                          <m:endChr m:val=")"/>
+                          <m:grow/>
+                        </m:dPr>
+                        <m:e>
+                          <m:r>
+                            <m:t>X</m:t>
+                          </m:r>
+                        </m:e>
+                      </m:d>
+                    </m:oMath>
+                  </m:oMathPara>
+                </a14:m>
+              </a:p>
+              <a:p>
+                <a:pPr lvl="0" indent="0" marL="0">
+                  <a:buNone/>
+                </a:pPr>
+                <a:r>
+                  <a:rPr/>
+                  <a:t>when </a:t>
+                </a:r>
+                <a14:m>
+                  <m:oMath xmlns:m="http://schemas.openxmlformats.org/officeDocument/2006/math">
+                    <m:r>
+                      <m:t>b</m:t>
+                    </m:r>
+                    <m:r>
+                      <m:rPr>
+                        <m:sty m:val="p"/>
+                      </m:rPr>
+                      <m:t>=</m:t>
+                    </m:r>
+                    <m:r>
+                      <m:t>0</m:t>
+                    </m:r>
+                  </m:oMath>
+                </a14:m>
+                <a:r>
+                  <a:rPr/>
+                  <a:t>, and</a:t>
+                </a:r>
+              </a:p>
+              <a:p>
+                <a:pPr lvl="0" indent="0" marL="0">
+                  <a:buNone/>
+                </a:pPr>
+                <a14:m>
+                  <m:oMathPara xmlns:m="http://schemas.openxmlformats.org/officeDocument/2006/math">
+                    <m:oMathParaPr>
+                      <m:jc m:val="center"/>
+                    </m:oMathParaPr>
+                    <m:oMath>
+                      <m:r>
+                        <m:t>V</m:t>
+                      </m:r>
+                      <m:d>
+                        <m:dPr>
+                          <m:begChr m:val="("/>
+                          <m:sepChr m:val=""/>
+                          <m:endChr m:val=")"/>
+                          <m:grow/>
+                        </m:dPr>
+                        <m:e>
+                          <m:r>
+                            <m:t>X</m:t>
+                          </m:r>
+                          <m:r>
+                            <m:rPr>
+                              <m:sty m:val="p"/>
+                            </m:rPr>
+                            <m:t>+</m:t>
+                          </m:r>
+                          <m:r>
+                            <m:t>b</m:t>
+                          </m:r>
+                        </m:e>
+                      </m:d>
+                      <m:r>
+                        <m:rPr>
+                          <m:sty m:val="p"/>
+                        </m:rPr>
+                        <m:t>=</m:t>
+                      </m:r>
+                      <m:r>
+                        <m:t>V</m:t>
+                      </m:r>
+                      <m:d>
+                        <m:dPr>
+                          <m:begChr m:val="("/>
+                          <m:sepChr m:val=""/>
+                          <m:endChr m:val=")"/>
+                          <m:grow/>
+                        </m:dPr>
+                        <m:e>
+                          <m:r>
+                            <m:t>X</m:t>
+                          </m:r>
+                        </m:e>
+                      </m:d>
+                    </m:oMath>
+                  </m:oMathPara>
+                </a14:m>
+              </a:p>
+              <a:p>
+                <a:pPr lvl="0" indent="0" marL="0">
+                  <a:buNone/>
+                </a:pPr>
+                <a:r>
+                  <a:rPr/>
+                  <a:t>when </a:t>
+                </a:r>
+                <a14:m>
+                  <m:oMath xmlns:m="http://schemas.openxmlformats.org/officeDocument/2006/math">
+                    <m:r>
+                      <m:t>a</m:t>
+                    </m:r>
+                    <m:r>
+                      <m:rPr>
+                        <m:sty m:val="p"/>
+                      </m:rPr>
+                      <m:t>=</m:t>
+                    </m:r>
+                    <m:r>
+                      <m:t>1</m:t>
+                    </m:r>
+                  </m:oMath>
+                </a14:m>
+                <a:r>
+                  <a:rPr/>
+                  <a:t>.</a:t>
+                </a:r>
+              </a:p>
+            </p:txBody>
+          </p:sp>
+        </mc:Choice>
+      </mc:AlternateContent>
+      <p:sp>
+        <p:nvSpPr>
+          <p:cNvPr id="4" name="Slide Number Placeholder 3"/>
+          <p:cNvSpPr>
+            <a:spLocks noGrp="1"/>
+          </p:cNvSpPr>
+          <p:nvPr>
+            <p:ph idx="10" sz="quarter" type="sldNum"/>
+          </p:nvPr>
+        </p:nvSpPr>
+        <p:spPr/>
+        <p:txBody>
+          <a:bodyPr/>
+          <a:lstStyle/>
+          <a:p>
+            <a:fld id="{9C13042B-154E-4D18-B726-07B2F714EFCF}" type="slidenum">
+              <a:rPr lang="en-US" smtClean="0"/>
+              <a:pPr/>
+              <a:t>‹#›</a:t>
+            </a:fld>
+            <a:endParaRPr dirty="0" lang="en-US"/>
+          </a:p>
+        </p:txBody>
+      </p:sp>
+    </p:spTree>
+  </p:cSld>
+  <p:timing>
+    <p:tnLst>
+      <p:par>
+        <p:cTn id="1" dur="indefinite" restart="never" nodeType="tmRoot">
+          <p:childTnLst>
+            <p:seq concurrent="1" nextAc="seek">
+              <p:cTn id="2" dur="indefinite" nodeType="mainSeq">
+                <p:childTnLst>
+                  <p:par>
+                    <p:cTn id="3" fill="hold">
+                      <p:stCondLst>
+                        <p:cond delay="indefinite"/>
+                      </p:stCondLst>
+                      <p:childTnLst>
+                        <p:par>
+                          <p:cTn id="4" fill="hold">
+                            <p:stCondLst>
+                              <p:cond delay="0"/>
+                            </p:stCondLst>
+                            <p:childTnLst>
+                              <p:par>
+                                <p:cTn id="5" presetID="1" presetClass="entr" presetSubtype="0" fill="hold" grpId="0" nodeType="clickEffect">
+                                  <p:stCondLst>
+                                    <p:cond delay="0"/>
+                                  </p:stCondLst>
+                                  <p:childTnLst>
+                                    <p:set>
+                                      <p:cBhvr>
+                                        <p:cTn id="6" dur="1" fill="hold">
+                                          <p:stCondLst>
+                                            <p:cond delay="0"/>
+                                          </p:stCondLst>
+                                        </p:cTn>
+                                        <p:tgtEl>
+                                          <p:spTgt spid="3">
+                                            <p:txEl>
+                                              <p:pRg st="0" end="0"/>
+                                            </p:txEl>
+                                          </p:spTgt>
+                                        </p:tgtEl>
+                                        <p:attrNameLst>
+                                          <p:attrName>style.visibility</p:attrName>
+                                        </p:attrNameLst>
+                                      </p:cBhvr>
+                                      <p:to>
+                                        <p:strVal val="visible"/>
+                                      </p:to>
+                                    </p:set>
+                                  </p:childTnLst>
+                                </p:cTn>
+                              </p:par>
+                            </p:childTnLst>
+                          </p:cTn>
+                        </p:par>
+                      </p:childTnLst>
+                    </p:cTn>
+                  </p:par>
+                  <p:par>
+                    <p:cTn id="7" fill="hold">
+                      <p:stCondLst>
+                        <p:cond delay="indefinite"/>
+                      </p:stCondLst>
+                      <p:childTnLst>
+                        <p:par>
+                          <p:cTn id="8" fill="hold">
+                            <p:stCondLst>
+                              <p:cond delay="0"/>
+                            </p:stCondLst>
+                            <p:childTnLst>
+                              <p:par>
+                                <p:cTn id="9" presetID="1" presetClass="entr" presetSubtype="0" fill="hold" grpId="0" nodeType="clickEffect">
+                                  <p:stCondLst>
+                                    <p:cond delay="0"/>
+                                  </p:stCondLst>
+                                  <p:childTnLst>
+                                    <p:set>
+                                      <p:cBhvr>
+                                        <p:cTn id="10" dur="1" fill="hold">
+                                          <p:stCondLst>
+                                            <p:cond delay="0"/>
+                                          </p:stCondLst>
+                                        </p:cTn>
+                                        <p:tgtEl>
+                                          <p:spTgt spid="3">
+                                            <p:txEl>
+                                              <p:pRg st="2" end="2"/>
+                                            </p:txEl>
+                                          </p:spTgt>
+                                        </p:tgtEl>
+                                        <p:attrNameLst>
+                                          <p:attrName>style.visibility</p:attrName>
+                                        </p:attrNameLst>
+                                      </p:cBhvr>
+                                      <p:to>
+                                        <p:strVal val="visible"/>
+                                      </p:to>
+                                    </p:set>
+                                  </p:childTnLst>
+                                </p:cTn>
+                              </p:par>
+                            </p:childTnLst>
+                          </p:cTn>
+                        </p:par>
+                      </p:childTnLst>
+                    </p:cTn>
+                  </p:par>
+                  <p:par>
+                    <p:cTn id="11" fill="hold">
+                      <p:stCondLst>
+                        <p:cond delay="indefinite"/>
+                      </p:stCondLst>
+                      <p:childTnLst>
+                        <p:par>
+                          <p:cTn id="12" fill="hold">
+                            <p:stCondLst>
+                              <p:cond delay="0"/>
+                            </p:stCondLst>
+                            <p:childTnLst>
+                              <p:par>
+                                <p:cTn id="13" presetID="1" presetClass="entr" presetSubtype="0" fill="hold" grpId="0" nodeType="clickEffect">
+                                  <p:stCondLst>
+                                    <p:cond delay="0"/>
+                                  </p:stCondLst>
+                                  <p:childTnLst>
+                                    <p:set>
+                                      <p:cBhvr>
+                                        <p:cTn id="14" dur="1" fill="hold">
+                                          <p:stCondLst>
+                                            <p:cond delay="0"/>
+                                          </p:stCondLst>
+                                        </p:cTn>
+                                        <p:tgtEl>
+                                          <p:spTgt spid="3">
+                                            <p:txEl>
+                                              <p:pRg st="4" end="4"/>
+                                            </p:txEl>
+                                          </p:spTgt>
+                                        </p:tgtEl>
+                                        <p:attrNameLst>
+                                          <p:attrName>style.visibility</p:attrName>
+                                        </p:attrNameLst>
+                                      </p:cBhvr>
+                                      <p:to>
+                                        <p:strVal val="visible"/>
+                                      </p:to>
+                                    </p:set>
+                                  </p:childTnLst>
+                                </p:cTn>
+                              </p:par>
+                            </p:childTnLst>
+                          </p:cTn>
+                        </p:par>
+                      </p:childTnLst>
+                    </p:cTn>
+                  </p:par>
+                  <p:par>
+                    <p:cTn id="15" fill="hold">
+                      <p:stCondLst>
+                        <p:cond delay="indefinite"/>
+                      </p:stCondLst>
+                      <p:childTnLst>
+                        <p:par>
+                          <p:cTn id="16" fill="hold">
+                            <p:stCondLst>
+                              <p:cond delay="0"/>
+                            </p:stCondLst>
+                            <p:childTnLst>
+                              <p:par>
+                                <p:cTn id="17" presetID="1" presetClass="entr" presetSubtype="0" fill="hold" grpId="0" nodeType="clickEffect">
+                                  <p:stCondLst>
+                                    <p:cond delay="0"/>
+                                  </p:stCondLst>
+                                  <p:childTnLst>
+                                    <p:set>
+                                      <p:cBhvr>
+                                        <p:cTn id="18" dur="1" fill="hold">
+                                          <p:stCondLst>
+                                            <p:cond delay="0"/>
+                                          </p:stCondLst>
+                                        </p:cTn>
+                                        <p:tgtEl>
+                                          <p:spTgt spid="3">
+                                            <p:txEl>
+                                              <p:pRg st="8" end="8"/>
+                                            </p:txEl>
+                                          </p:spTgt>
+                                        </p:tgtEl>
+                                        <p:attrNameLst>
+                                          <p:attrName>style.visibility</p:attrName>
+                                        </p:attrNameLst>
+                                      </p:cBhvr>
+                                      <p:to>
+                                        <p:strVal val="visible"/>
+                                      </p:to>
+                                    </p:set>
+                                  </p:childTnLst>
+                                </p:cTn>
+                              </p:par>
+                            </p:childTnLst>
+                          </p:cTn>
+                        </p:par>
+                      </p:childTnLst>
+                    </p:cTn>
+                  </p:par>
+                  <p:par>
+                    <p:cTn id="19" fill="hold">
+                      <p:stCondLst>
+                        <p:cond delay="indefinite"/>
+                      </p:stCondLst>
+                      <p:childTnLst>
+                        <p:par>
+                          <p:cTn id="20" fill="hold">
+                            <p:stCondLst>
+                              <p:cond delay="0"/>
+                            </p:stCondLst>
+                            <p:childTnLst>
+                              <p:par>
+                                <p:cTn id="21" presetID="1" presetClass="entr" presetSubtype="0" fill="hold" grpId="0" nodeType="clickEffect">
+                                  <p:stCondLst>
+                                    <p:cond delay="0"/>
+                                  </p:stCondLst>
+                                  <p:childTnLst>
+                                    <p:set>
+                                      <p:cBhvr>
+                                        <p:cTn id="22" dur="1" fill="hold">
+                                          <p:stCondLst>
+                                            <p:cond delay="0"/>
+                                          </p:stCondLst>
+                                        </p:cTn>
+                                        <p:tgtEl>
+                                          <p:spTgt spid="3">
+                                            <p:txEl>
+                                              <p:pRg st="10" end="10"/>
+                                            </p:txEl>
+                                          </p:spTgt>
+                                        </p:tgtEl>
+                                        <p:attrNameLst>
+                                          <p:attrName>style.visibility</p:attrName>
+                                        </p:attrNameLst>
+                                      </p:cBhvr>
+                                      <p:to>
+                                        <p:strVal val="visible"/>
+                                      </p:to>
+                                    </p:set>
+                                  </p:childTnLst>
+                                </p:cTn>
+                              </p:par>
+                            </p:childTnLst>
+                          </p:cTn>
+                        </p:par>
+                      </p:childTnLst>
+                    </p:cTn>
+                  </p:par>
+                  <p:par>
+                    <p:cTn id="23" fill="hold">
+                      <p:stCondLst>
+                        <p:cond delay="indefinite"/>
+                      </p:stCondLst>
+                      <p:childTnLst>
+                        <p:par>
+                          <p:cTn id="24" fill="hold">
+                            <p:stCondLst>
+                              <p:cond delay="0"/>
+                            </p:stCondLst>
+                            <p:childTnLst>
+                              <p:par>
+                                <p:cTn id="25" presetID="1" presetClass="entr" presetSubtype="0" fill="hold" grpId="0" nodeType="clickEffect">
+                                  <p:stCondLst>
+                                    <p:cond delay="0"/>
+                                  </p:stCondLst>
+                                  <p:childTnLst>
+                                    <p:set>
+                                      <p:cBhvr>
+                                        <p:cTn id="26" dur="1" fill="hold">
+                                          <p:stCondLst>
+                                            <p:cond delay="0"/>
+                                          </p:stCondLst>
+                                        </p:cTn>
+                                        <p:tgtEl>
+                                          <p:spTgt spid="3">
+                                            <p:txEl>
+                                              <p:pRg st="12" end="12"/>
+                                            </p:txEl>
+                                          </p:spTgt>
+                                        </p:tgtEl>
+                                        <p:attrNameLst>
+                                          <p:attrName>style.visibility</p:attrName>
+                                        </p:attrNameLst>
+                                      </p:cBhvr>
+                                      <p:to>
+                                        <p:strVal val="visible"/>
+                                      </p:to>
+                                    </p:set>
+                                  </p:childTnLst>
+                                </p:cTn>
+                              </p:par>
+                            </p:childTnLst>
+                          </p:cTn>
+                        </p:par>
+                      </p:childTnLst>
+                    </p:cTn>
+                  </p:par>
+                  <p:par>
+                    <p:cTn id="27" fill="hold">
+                      <p:stCondLst>
+                        <p:cond delay="indefinite"/>
+                      </p:stCondLst>
+                      <p:childTnLst>
+                        <p:par>
+                          <p:cTn id="28" fill="hold">
+                            <p:stCondLst>
+                              <p:cond delay="0"/>
+                            </p:stCondLst>
+                            <p:childTnLst>
+                              <p:par>
+                                <p:cTn id="29" presetID="1" presetClass="entr" presetSubtype="0" fill="hold" grpId="0" nodeType="clickEffect">
+                                  <p:stCondLst>
+                                    <p:cond delay="0"/>
+                                  </p:stCondLst>
+                                  <p:childTnLst>
+                                    <p:set>
+                                      <p:cBhvr>
+                                        <p:cTn id="30" dur="1" fill="hold">
+                                          <p:stCondLst>
+                                            <p:cond delay="0"/>
+                                          </p:stCondLst>
+                                        </p:cTn>
+                                        <p:tgtEl>
+                                          <p:spTgt spid="3">
+                                            <p:txEl>
+                                              <p:pRg st="14" end="14"/>
+                                            </p:txEl>
+                                          </p:spTgt>
+                                        </p:tgtEl>
+                                        <p:attrNameLst>
+                                          <p:attrName>style.visibility</p:attrName>
+                                        </p:attrNameLst>
+                                      </p:cBhvr>
+                                      <p:to>
+                                        <p:strVal val="visible"/>
+                                      </p:to>
+                                    </p:set>
+                                  </p:childTnLst>
+                                </p:cTn>
+                              </p:par>
+                            </p:childTnLst>
+                          </p:cTn>
+                        </p:par>
+                      </p:childTnLst>
+                    </p:cTn>
+                  </p:par>
+                  <p:par>
+                    <p:cTn id="31" fill="hold">
+                      <p:stCondLst>
+                        <p:cond delay="indefinite"/>
+                      </p:stCondLst>
+                      <p:childTnLst>
+                        <p:par>
+                          <p:cTn id="32" fill="hold">
+                            <p:stCondLst>
+                              <p:cond delay="0"/>
+                            </p:stCondLst>
+                            <p:childTnLst>
+                              <p:par>
+                                <p:cTn id="33" presetID="1" presetClass="entr" presetSubtype="0" fill="hold" grpId="0" nodeType="clickEffect">
+                                  <p:stCondLst>
+                                    <p:cond delay="0"/>
+                                  </p:stCondLst>
+                                  <p:childTnLst>
+                                    <p:set>
+                                      <p:cBhvr>
+                                        <p:cTn id="34" dur="1" fill="hold">
+                                          <p:stCondLst>
+                                            <p:cond delay="0"/>
+                                          </p:stCondLst>
+                                        </p:cTn>
+                                        <p:tgtEl>
+                                          <p:spTgt spid="3">
+                                            <p:txEl>
+                                              <p:pRg st="16" end="16"/>
+                                            </p:txEl>
+                                          </p:spTgt>
+                                        </p:tgtEl>
+                                        <p:attrNameLst>
+                                          <p:attrName>style.visibility</p:attrName>
+                                        </p:attrNameLst>
+                                      </p:cBhvr>
+                                      <p:to>
+                                        <p:strVal val="visible"/>
+                                      </p:to>
+                                    </p:set>
+                                  </p:childTnLst>
+                                </p:cTn>
+                              </p:par>
+                            </p:childTnLst>
+                          </p:cTn>
+                        </p:par>
+                      </p:childTnLst>
+                    </p:cTn>
+                  </p:par>
+                  <p:par>
+                    <p:cTn id="35" fill="hold">
+                      <p:stCondLst>
+                        <p:cond delay="indefinite"/>
+                      </p:stCondLst>
+                      <p:childTnLst>
+                        <p:par>
+                          <p:cTn id="36" fill="hold">
+                            <p:stCondLst>
+                              <p:cond delay="0"/>
+                            </p:stCondLst>
+                            <p:childTnLst>
+                              <p:par>
+                                <p:cTn id="37" presetID="1" presetClass="entr" presetSubtype="0" fill="hold" grpId="0" nodeType="clickEffect">
+                                  <p:stCondLst>
+                                    <p:cond delay="0"/>
+                                  </p:stCondLst>
+                                  <p:childTnLst>
+                                    <p:set>
+                                      <p:cBhvr>
+                                        <p:cTn id="38" dur="1" fill="hold">
+                                          <p:stCondLst>
+                                            <p:cond delay="0"/>
+                                          </p:stCondLst>
+                                        </p:cTn>
+                                        <p:tgtEl>
+                                          <p:spTgt spid="3">
+                                            <p:txEl>
+                                              <p:pRg st="18" end="18"/>
+                                            </p:txEl>
+                                          </p:spTgt>
+                                        </p:tgtEl>
+                                        <p:attrNameLst>
+                                          <p:attrName>style.visibility</p:attrName>
+                                        </p:attrNameLst>
+                                      </p:cBhvr>
+                                      <p:to>
+                                        <p:strVal val="visible"/>
+                                      </p:to>
+                                    </p:set>
+                                  </p:childTnLst>
+                                </p:cTn>
+                              </p:par>
+                            </p:childTnLst>
+                          </p:cTn>
+                        </p:par>
+                      </p:childTnLst>
+                    </p:cTn>
+                  </p:par>
+                  <p:par>
+                    <p:cTn id="39" fill="hold">
+                      <p:stCondLst>
+                        <p:cond delay="indefinite"/>
+                      </p:stCondLst>
+                      <p:childTnLst>
+                        <p:par>
+                          <p:cTn id="40" fill="hold">
+                            <p:stCondLst>
+                              <p:cond delay="0"/>
+                            </p:stCondLst>
+                            <p:childTnLst>
+                              <p:par>
+                                <p:cTn id="41" presetID="1" presetClass="entr" presetSubtype="0" fill="hold" grpId="0" nodeType="clickEffect">
+                                  <p:stCondLst>
+                                    <p:cond delay="0"/>
+                                  </p:stCondLst>
+                                  <p:childTnLst>
+                                    <p:set>
+                                      <p:cBhvr>
+                                        <p:cTn id="42" dur="1" fill="hold">
+                                          <p:stCondLst>
+                                            <p:cond delay="0"/>
+                                          </p:stCondLst>
+                                        </p:cTn>
+                                        <p:tgtEl>
+                                          <p:spTgt spid="3">
+                                            <p:txEl>
+                                              <p:pRg st="20" end="20"/>
                                             </p:txEl>
                                           </p:spTgt>
                                         </p:tgtEl>

--- a/docs/activities/Unit-04-Discrete.pptx
+++ b/docs/activities/Unit-04-Discrete.pptx
@@ -17,6 +17,7 @@
     <p:sldId id="265" r:id="rId11"/>
     <p:sldId id="266" r:id="rId12"/>
     <p:sldId id="267" r:id="rId13"/>
+    <p:sldId id="268" r:id="rId14"/>
   </p:sldIdLst>
   <p:sldSz cx="9144000" cy="6858000" type="screen4x3"/>
   <p:notesSz cx="6858000" cy="9144000"/>
@@ -2732,6 +2733,212 @@
             </a:pPr>
             <a:r>
               <a:rPr/>
+              <a:t>Simulating Roulette!</a:t>
+            </a:r>
+          </a:p>
+        </p:txBody>
+      </p:sp>
+      <p:pic>
+        <p:nvPicPr>
+          <p:cNvPr descr="../images/roulette.png" id="0" name="Picture 1"/>
+          <p:cNvPicPr>
+            <a:picLocks noGrp="1" noChangeAspect="1"/>
+          </p:cNvPicPr>
+          <p:nvPr/>
+        </p:nvPicPr>
+        <p:blipFill>
+          <a:blip r:embed="rId2"/>
+          <a:stretch>
+            <a:fillRect/>
+          </a:stretch>
+        </p:blipFill>
+        <p:spPr bwMode="auto">
+          <a:xfrm>
+            <a:off x="2324100" y="1778000"/>
+            <a:ext cx="4191000" cy="3149600"/>
+          </a:xfrm>
+          <a:prstGeom prst="rect">
+            <a:avLst/>
+          </a:prstGeom>
+          <a:noFill/>
+          <a:ln w="9525">
+            <a:noFill/>
+            <a:headEnd/>
+            <a:tailEnd/>
+          </a:ln>
+        </p:spPr>
+      </p:pic>
+      <p:sp>
+        <p:nvSpPr>
+          <p:cNvPr id="1" name="TextBox 3"/>
+          <p:cNvSpPr txBox="1"/>
+          <p:nvPr/>
+        </p:nvSpPr>
+        <p:spPr>
+          <a:xfrm>
+            <a:off x="533400" y="4927600"/>
+            <a:ext cx="7772400" cy="508000"/>
+          </a:xfrm>
+          <a:prstGeom prst="rect">
+            <a:avLst/>
+          </a:prstGeom>
+          <a:noFill/>
+        </p:spPr>
+        <p:txBody>
+          <a:bodyPr/>
+          <a:lstStyle/>
+          <a:p>
+            <a:pPr lvl="0" indent="0" marL="0" algn="ctr">
+              <a:buNone/>
+            </a:pPr>
+            <a:r>
+              <a:rPr/>
+              <a:t>One Player - 250 Games.</a:t>
+            </a:r>
+          </a:p>
+        </p:txBody>
+      </p:sp>
+      <p:pic>
+        <p:nvPicPr>
+          <p:cNvPr descr="../images/roulette-2.png" id="0" name="Picture 1"/>
+          <p:cNvPicPr>
+            <a:picLocks noGrp="1" noChangeAspect="1"/>
+          </p:cNvPicPr>
+          <p:nvPr/>
+        </p:nvPicPr>
+        <p:blipFill>
+          <a:blip r:embed="rId3"/>
+          <a:stretch>
+            <a:fillRect/>
+          </a:stretch>
+        </p:blipFill>
+        <p:spPr bwMode="auto">
+          <a:xfrm>
+            <a:off x="2336800" y="1778000"/>
+            <a:ext cx="4165600" cy="3149600"/>
+          </a:xfrm>
+          <a:prstGeom prst="rect">
+            <a:avLst/>
+          </a:prstGeom>
+          <a:noFill/>
+          <a:ln w="9525">
+            <a:noFill/>
+            <a:headEnd/>
+            <a:tailEnd/>
+          </a:ln>
+        </p:spPr>
+      </p:pic>
+      <p:sp>
+        <p:nvSpPr>
+          <p:cNvPr id="1" name="TextBox 3"/>
+          <p:cNvSpPr txBox="1"/>
+          <p:nvPr/>
+        </p:nvSpPr>
+        <p:spPr>
+          <a:xfrm>
+            <a:off x="533400" y="4927600"/>
+            <a:ext cx="7772400" cy="508000"/>
+          </a:xfrm>
+          <a:prstGeom prst="rect">
+            <a:avLst/>
+          </a:prstGeom>
+          <a:noFill/>
+        </p:spPr>
+        <p:txBody>
+          <a:bodyPr/>
+          <a:lstStyle/>
+          <a:p>
+            <a:pPr lvl="0" indent="0" marL="0" algn="ctr">
+              <a:buNone/>
+            </a:pPr>
+            <a:r>
+              <a:rPr/>
+              <a:t>Ten Players - 250 Games.</a:t>
+            </a:r>
+          </a:p>
+        </p:txBody>
+      </p:sp>
+      <p:sp>
+        <p:nvSpPr>
+          <p:cNvPr id="4" name="Slide Number Placeholder 3"/>
+          <p:cNvSpPr>
+            <a:spLocks noGrp="1"/>
+          </p:cNvSpPr>
+          <p:nvPr>
+            <p:ph idx="10" sz="quarter" type="sldNum"/>
+          </p:nvPr>
+        </p:nvSpPr>
+        <p:spPr/>
+        <p:txBody>
+          <a:bodyPr/>
+          <a:lstStyle/>
+          <a:p>
+            <a:fld id="{9C13042B-154E-4D18-B726-07B2F714EFCF}" type="slidenum">
+              <a:rPr lang="en-US" smtClean="0"/>
+              <a:pPr/>
+              <a:t>‹#›</a:t>
+            </a:fld>
+            <a:endParaRPr dirty="0" lang="en-US"/>
+          </a:p>
+        </p:txBody>
+      </p:sp>
+    </p:spTree>
+  </p:cSld>
+</p:sld>
+</file>
+
+<file path=ppt/slides/slide11.xml><?xml version="1.0" encoding="utf-8"?>
+<p:sld xmlns:a="http://schemas.openxmlformats.org/drawingml/2006/main" xmlns:r="http://schemas.openxmlformats.org/officeDocument/2006/relationships" xmlns:p="http://schemas.openxmlformats.org/presentationml/2006/main">
+  <p:cSld>
+    <p:spTree>
+      <p:nvGrpSpPr>
+        <p:cNvPr id="1" name=""/>
+        <p:cNvGrpSpPr/>
+        <p:nvPr/>
+      </p:nvGrpSpPr>
+      <p:grpSpPr>
+        <a:xfrm>
+          <a:off x="0" y="0"/>
+          <a:ext cx="0" cy="0"/>
+          <a:chOff x="0" y="0"/>
+          <a:chExt cx="0" cy="0"/>
+        </a:xfrm>
+      </p:grpSpPr>
+      <p:sp>
+        <p:nvSpPr>
+          <p:cNvPr id="2" name="Title Placeholder 1"/>
+          <p:cNvSpPr>
+            <a:spLocks noGrp="1"/>
+          </p:cNvSpPr>
+          <p:nvPr>
+            <p:ph type="title"/>
+          </p:nvPr>
+        </p:nvSpPr>
+        <p:spPr bwMode="auto">
+          <a:xfrm>
+            <a:off x="433680" y="423297"/>
+            <a:ext cx="8229600" cy="784602"/>
+          </a:xfrm>
+          <a:prstGeom prst="rect">
+            <a:avLst/>
+          </a:prstGeom>
+          <a:noFill/>
+          <a:ln w="9525">
+            <a:noFill/>
+            <a:miter lim="800000"/>
+            <a:headEnd/>
+            <a:tailEnd/>
+          </a:ln>
+        </p:spPr>
+        <p:txBody>
+          <a:bodyPr/>
+          <a:lstStyle/>
+          <a:p>
+            <a:pPr lvl="0" indent="0" marL="0">
+              <a:buNone/>
+            </a:pPr>
+            <a:r>
+              <a:rPr/>
               <a:t>Bernoulli Distribution</a:t>
             </a:r>
           </a:p>
@@ -8787,7 +8994,7 @@
 </p:sld>
 </file>
 
-<file path=ppt/slides/slide11.xml><?xml version="1.0" encoding="utf-8"?>
+<file path=ppt/slides/slide12.xml><?xml version="1.0" encoding="utf-8"?>
 <p:sld xmlns:a="http://schemas.openxmlformats.org/drawingml/2006/main" xmlns:r="http://schemas.openxmlformats.org/officeDocument/2006/relationships" xmlns:p="http://schemas.openxmlformats.org/presentationml/2006/main">
   <p:cSld>
     <p:spTree>
@@ -9687,7 +9894,7 @@
 </p:sld>
 </file>
 
-<file path=ppt/slides/slide12.xml><?xml version="1.0" encoding="utf-8"?>
+<file path=ppt/slides/slide13.xml><?xml version="1.0" encoding="utf-8"?>
 <p:sld xmlns:a="http://schemas.openxmlformats.org/drawingml/2006/main" xmlns:r="http://schemas.openxmlformats.org/officeDocument/2006/relationships" xmlns:p="http://schemas.openxmlformats.org/presentationml/2006/main">
   <p:cSld>
     <p:spTree>

--- a/docs/activities/Unit-04-Discrete.pptx
+++ b/docs/activities/Unit-04-Discrete.pptx
@@ -4830,343 +4830,520 @@
                       <m:jc m:val="center"/>
                     </m:oMathParaPr>
                     <m:oMath>
-                      <m:r>
-                        <m:t>P</m:t>
-                      </m:r>
-                      <m:d>
-                        <m:dPr>
-                          <m:begChr m:val="("/>
-                          <m:sepChr m:val=""/>
-                          <m:endChr m:val=")"/>
-                          <m:grow/>
-                        </m:dPr>
-                        <m:e>
-                          <m:r>
-                            <m:t>A</m:t>
-                          </m:r>
-                          <m:r>
-                            <m:t>A</m:t>
-                          </m:r>
-                          <m:r>
-                            <m:t>B</m:t>
-                          </m:r>
-                          <m:r>
-                            <m:t>A</m:t>
-                          </m:r>
-                          <m:r>
-                            <m:t>B</m:t>
-                          </m:r>
-                        </m:e>
-                      </m:d>
-                      <m:r>
-                        <m:rPr>
-                          <m:sty m:val="p"/>
-                        </m:rPr>
-                        <m:t>=</m:t>
-                      </m:r>
-                      <m:r>
-                        <m:t>P</m:t>
-                      </m:r>
-                      <m:d>
-                        <m:dPr>
-                          <m:begChr m:val="("/>
-                          <m:sepChr m:val=""/>
-                          <m:endChr m:val=")"/>
-                          <m:grow/>
-                        </m:dPr>
-                        <m:e>
-                          <m:sSub>
-                            <m:e>
-                              <m:r>
-                                <m:t>X</m:t>
-                              </m:r>
-                            </m:e>
-                            <m:sub>
-                              <m:r>
-                                <m:t>1</m:t>
-                              </m:r>
-                            </m:sub>
-                          </m:sSub>
-                          <m:r>
-                            <m:rPr>
-                              <m:sty m:val="p"/>
-                            </m:rPr>
-                            <m:t>=</m:t>
-                          </m:r>
-                          <m:r>
-                            <m:t>0</m:t>
-                          </m:r>
-                          <m:r>
-                            <m:rPr>
-                              <m:nor/>
-                              <m:sty m:val="p"/>
-                            </m:rPr>
-                            <m:t> and </m:t>
-                          </m:r>
-                          <m:sSub>
-                            <m:e>
-                              <m:r>
-                                <m:t>X</m:t>
-                              </m:r>
-                            </m:e>
-                            <m:sub>
-                              <m:r>
-                                <m:t>2</m:t>
-                              </m:r>
-                            </m:sub>
-                          </m:sSub>
-                          <m:r>
-                            <m:rPr>
-                              <m:sty m:val="p"/>
-                            </m:rPr>
-                            <m:t>=</m:t>
-                          </m:r>
-                          <m:r>
-                            <m:t>0</m:t>
-                          </m:r>
-                          <m:r>
-                            <m:rPr>
-                              <m:nor/>
-                              <m:sty m:val="p"/>
-                            </m:rPr>
-                            <m:t> and </m:t>
-                          </m:r>
-                          <m:sSub>
-                            <m:e>
-                              <m:r>
-                                <m:t>X</m:t>
-                              </m:r>
-                            </m:e>
-                            <m:sub>
-                              <m:r>
-                                <m:t>3</m:t>
-                              </m:r>
-                            </m:sub>
-                          </m:sSub>
-                          <m:r>
-                            <m:rPr>
-                              <m:sty m:val="p"/>
-                            </m:rPr>
-                            <m:t>=</m:t>
-                          </m:r>
-                          <m:r>
-                            <m:t>1</m:t>
-                          </m:r>
-                          <m:r>
-                            <m:rPr>
-                              <m:nor/>
-                              <m:sty m:val="p"/>
-                            </m:rPr>
-                            <m:t> and </m:t>
-                          </m:r>
-                          <m:sSub>
-                            <m:e>
-                              <m:r>
-                                <m:t>X</m:t>
-                              </m:r>
-                            </m:e>
-                            <m:sub>
-                              <m:r>
-                                <m:t>4</m:t>
-                              </m:r>
-                            </m:sub>
-                          </m:sSub>
-                          <m:r>
-                            <m:rPr>
-                              <m:sty m:val="p"/>
-                            </m:rPr>
-                            <m:t>=</m:t>
-                          </m:r>
-                          <m:r>
-                            <m:t>0</m:t>
-                          </m:r>
-                          <m:r>
-                            <m:rPr>
-                              <m:nor/>
-                              <m:sty m:val="p"/>
-                            </m:rPr>
-                            <m:t> and </m:t>
-                          </m:r>
-                          <m:sSub>
-                            <m:e>
-                              <m:r>
-                                <m:t>X</m:t>
-                              </m:r>
-                            </m:e>
-                            <m:sub>
-                              <m:r>
-                                <m:t>5</m:t>
-                              </m:r>
-                            </m:sub>
-                          </m:sSub>
-                          <m:r>
-                            <m:rPr>
-                              <m:sty m:val="p"/>
-                            </m:rPr>
-                            <m:t>=</m:t>
-                          </m:r>
-                          <m:r>
-                            <m:t>1</m:t>
-                          </m:r>
-                        </m:e>
-                      </m:d>
-                    </m:oMath>
-                  </m:oMathPara>
-                </a14:m>
-              </a:p>
-              <a:p>
-                <a:pPr lvl="0" indent="0" marL="0">
-                  <a:buNone/>
-                </a:pPr>
-                <a:r>
-                  <a:rPr/>
-                  <a:t>$$</a:t>
-                </a:r>
-              </a:p>
-              <a:p>
-                <a:pPr lvl="0" indent="0" marL="0">
-                  <a:buNone/>
-                </a:pPr>
-                <a:r>
-                  <a:rPr/>
-                  <a:t>P(X_1=0) P(X_2=0) P(X_3=1) P(X_4=0) P(X_5=1) $$</a:t>
-                </a:r>
-              </a:p>
-              <a:p>
-                <a:pPr lvl="0" indent="0" marL="0">
-                  <a:buNone/>
-                </a:pPr>
-                <a14:m>
-                  <m:oMathPara xmlns:m="http://schemas.openxmlformats.org/officeDocument/2006/math">
-                    <m:oMathParaPr>
-                      <m:jc m:val="center"/>
-                    </m:oMathParaPr>
-                    <m:oMath>
-                      <m:r>
-                        <m:rPr>
-                          <m:sty m:val="p"/>
-                        </m:rPr>
-                        <m:t>=</m:t>
-                      </m:r>
-                      <m:d>
-                        <m:dPr>
-                          <m:begChr m:val="("/>
-                          <m:sepChr m:val=""/>
-                          <m:endChr m:val=")"/>
-                          <m:grow/>
-                        </m:dPr>
-                        <m:e>
-                          <m:r>
-                            <m:t>0.95</m:t>
-                          </m:r>
-                        </m:e>
-                      </m:d>
-                      <m:d>
-                        <m:dPr>
-                          <m:begChr m:val="("/>
-                          <m:sepChr m:val=""/>
-                          <m:endChr m:val=")"/>
-                          <m:grow/>
-                        </m:dPr>
-                        <m:e>
-                          <m:r>
-                            <m:t>0.95</m:t>
-                          </m:r>
-                        </m:e>
-                      </m:d>
-                      <m:d>
-                        <m:dPr>
-                          <m:begChr m:val="("/>
-                          <m:sepChr m:val=""/>
-                          <m:endChr m:val=")"/>
-                          <m:grow/>
-                        </m:dPr>
-                        <m:e>
-                          <m:r>
-                            <m:t>0.05</m:t>
-                          </m:r>
-                        </m:e>
-                      </m:d>
-                      <m:d>
-                        <m:dPr>
-                          <m:begChr m:val="("/>
-                          <m:sepChr m:val=""/>
-                          <m:endChr m:val=")"/>
-                          <m:grow/>
-                        </m:dPr>
-                        <m:e>
-                          <m:r>
-                            <m:t>0.95</m:t>
-                          </m:r>
-                        </m:e>
-                      </m:d>
-                      <m:d>
-                        <m:dPr>
-                          <m:begChr m:val="("/>
-                          <m:sepChr m:val=""/>
-                          <m:endChr m:val=")"/>
-                          <m:grow/>
-                        </m:dPr>
-                        <m:e>
-                          <m:r>
-                            <m:t>0.05</m:t>
-                          </m:r>
-                        </m:e>
-                      </m:d>
-                    </m:oMath>
-                  </m:oMathPara>
-                </a14:m>
-              </a:p>
-              <a:p>
-                <a:pPr lvl="0" indent="0" marL="0">
-                  <a:buNone/>
-                </a:pPr>
-                <a14:m>
-                  <m:oMathPara xmlns:m="http://schemas.openxmlformats.org/officeDocument/2006/math">
-                    <m:oMathParaPr>
-                      <m:jc m:val="center"/>
-                    </m:oMathParaPr>
-                    <m:oMath>
-                      <m:r>
-                        <m:rPr>
-                          <m:sty m:val="p"/>
-                        </m:rPr>
-                        <m:t>=</m:t>
-                      </m:r>
-                      <m:sSup>
-                        <m:e>
-                          <m:r>
-                            <m:t>0.05</m:t>
-                          </m:r>
-                        </m:e>
-                        <m:sup>
-                          <m:r>
-                            <m:t>2</m:t>
-                          </m:r>
-                        </m:sup>
-                      </m:sSup>
-                      <m:sSup>
-                        <m:e>
-                          <m:d>
-                            <m:dPr>
-                              <m:begChr m:val="("/>
-                              <m:sepChr m:val=""/>
-                              <m:endChr m:val=")"/>
-                              <m:grow/>
-                            </m:dPr>
-                            <m:e>
-                              <m:r>
-                                <m:t>0.95</m:t>
-                              </m:r>
-                            </m:e>
-                          </m:d>
-                        </m:e>
-                        <m:sup>
-                          <m:r>
-                            <m:t>3</m:t>
-                          </m:r>
-                        </m:sup>
-                      </m:sSup>
+                      <m:m>
+                        <m:mPr>
+                          <m:baseJc m:val="center"/>
+                          <m:plcHide m:val="on"/>
+                          <m:mcs>
+                            <m:mc>
+                              <m:mcPr>
+                                <m:mcJc m:val="right"/>
+                                <m:count m:val="1"/>
+                              </m:mcPr>
+                            </m:mc>
+                            <m:mc>
+                              <m:mcPr>
+                                <m:mcJc m:val="left"/>
+                                <m:count m:val="1"/>
+                              </m:mcPr>
+                            </m:mc>
+                          </m:mcs>
+                        </m:mPr>
+                        <m:mr>
+                          <m:e>
+                            <m:r>
+                              <m:t>P</m:t>
+                            </m:r>
+                            <m:d>
+                              <m:dPr>
+                                <m:begChr m:val="("/>
+                                <m:sepChr m:val=""/>
+                                <m:endChr m:val=")"/>
+                                <m:grow/>
+                              </m:dPr>
+                              <m:e>
+                                <m:r>
+                                  <m:t>A</m:t>
+                                </m:r>
+                                <m:r>
+                                  <m:t>A</m:t>
+                                </m:r>
+                                <m:r>
+                                  <m:t>B</m:t>
+                                </m:r>
+                                <m:r>
+                                  <m:t>A</m:t>
+                                </m:r>
+                                <m:r>
+                                  <m:t>B</m:t>
+                                </m:r>
+                              </m:e>
+                            </m:d>
+                          </m:e>
+                          <m:e>
+                            <m:r>
+                              <m:rPr>
+                                <m:sty m:val="p"/>
+                              </m:rPr>
+                              <m:t>=</m:t>
+                            </m:r>
+                            <m:r>
+                              <m:t>P</m:t>
+                            </m:r>
+                            <m:d>
+                              <m:dPr>
+                                <m:begChr m:val="("/>
+                                <m:sepChr m:val=""/>
+                                <m:endChr m:val=")"/>
+                                <m:grow/>
+                              </m:dPr>
+                              <m:e>
+                                <m:sSub>
+                                  <m:e>
+                                    <m:r>
+                                      <m:t>X</m:t>
+                                    </m:r>
+                                  </m:e>
+                                  <m:sub>
+                                    <m:r>
+                                      <m:t>1</m:t>
+                                    </m:r>
+                                  </m:sub>
+                                </m:sSub>
+                                <m:r>
+                                  <m:rPr>
+                                    <m:sty m:val="p"/>
+                                  </m:rPr>
+                                  <m:t>=</m:t>
+                                </m:r>
+                                <m:r>
+                                  <m:t>0</m:t>
+                                </m:r>
+                                <m:r>
+                                  <m:rPr>
+                                    <m:nor/>
+                                    <m:sty m:val="p"/>
+                                  </m:rPr>
+                                  <m:t> and </m:t>
+                                </m:r>
+                                <m:sSub>
+                                  <m:e>
+                                    <m:r>
+                                      <m:t>X</m:t>
+                                    </m:r>
+                                  </m:e>
+                                  <m:sub>
+                                    <m:r>
+                                      <m:t>2</m:t>
+                                    </m:r>
+                                  </m:sub>
+                                </m:sSub>
+                                <m:r>
+                                  <m:rPr>
+                                    <m:sty m:val="p"/>
+                                  </m:rPr>
+                                  <m:t>=</m:t>
+                                </m:r>
+                                <m:r>
+                                  <m:t>0</m:t>
+                                </m:r>
+                                <m:r>
+                                  <m:rPr>
+                                    <m:nor/>
+                                    <m:sty m:val="p"/>
+                                  </m:rPr>
+                                  <m:t> and </m:t>
+                                </m:r>
+                                <m:sSub>
+                                  <m:e>
+                                    <m:r>
+                                      <m:t>X</m:t>
+                                    </m:r>
+                                  </m:e>
+                                  <m:sub>
+                                    <m:r>
+                                      <m:t>3</m:t>
+                                    </m:r>
+                                  </m:sub>
+                                </m:sSub>
+                                <m:r>
+                                  <m:rPr>
+                                    <m:sty m:val="p"/>
+                                  </m:rPr>
+                                  <m:t>=</m:t>
+                                </m:r>
+                                <m:r>
+                                  <m:t>1</m:t>
+                                </m:r>
+                                <m:r>
+                                  <m:rPr>
+                                    <m:nor/>
+                                    <m:sty m:val="p"/>
+                                  </m:rPr>
+                                  <m:t> and </m:t>
+                                </m:r>
+                                <m:sSub>
+                                  <m:e>
+                                    <m:r>
+                                      <m:t>X</m:t>
+                                    </m:r>
+                                  </m:e>
+                                  <m:sub>
+                                    <m:r>
+                                      <m:t>4</m:t>
+                                    </m:r>
+                                  </m:sub>
+                                </m:sSub>
+                                <m:r>
+                                  <m:rPr>
+                                    <m:sty m:val="p"/>
+                                  </m:rPr>
+                                  <m:t>=</m:t>
+                                </m:r>
+                                <m:r>
+                                  <m:t>0</m:t>
+                                </m:r>
+                                <m:r>
+                                  <m:rPr>
+                                    <m:nor/>
+                                    <m:sty m:val="p"/>
+                                  </m:rPr>
+                                  <m:t> and </m:t>
+                                </m:r>
+                                <m:sSub>
+                                  <m:e>
+                                    <m:r>
+                                      <m:t>X</m:t>
+                                    </m:r>
+                                  </m:e>
+                                  <m:sub>
+                                    <m:r>
+                                      <m:t>5</m:t>
+                                    </m:r>
+                                  </m:sub>
+                                </m:sSub>
+                                <m:r>
+                                  <m:rPr>
+                                    <m:sty m:val="p"/>
+                                  </m:rPr>
+                                  <m:t>=</m:t>
+                                </m:r>
+                                <m:r>
+                                  <m:t>1</m:t>
+                                </m:r>
+                              </m:e>
+                            </m:d>
+                          </m:e>
+                        </m:mr>
+                        <m:mr>
+                          <m:e/>
+                          <m:e>
+                            <m:r>
+                              <m:rPr>
+                                <m:sty m:val="p"/>
+                              </m:rPr>
+                              <m:t>=</m:t>
+                            </m:r>
+                            <m:r>
+                              <m:t>P</m:t>
+                            </m:r>
+                            <m:d>
+                              <m:dPr>
+                                <m:begChr m:val="("/>
+                                <m:sepChr m:val=""/>
+                                <m:endChr m:val=")"/>
+                                <m:grow/>
+                              </m:dPr>
+                              <m:e>
+                                <m:sSub>
+                                  <m:e>
+                                    <m:r>
+                                      <m:t>X</m:t>
+                                    </m:r>
+                                  </m:e>
+                                  <m:sub>
+                                    <m:r>
+                                      <m:t>1</m:t>
+                                    </m:r>
+                                  </m:sub>
+                                </m:sSub>
+                                <m:r>
+                                  <m:rPr>
+                                    <m:sty m:val="p"/>
+                                  </m:rPr>
+                                  <m:t>=</m:t>
+                                </m:r>
+                                <m:r>
+                                  <m:t>0</m:t>
+                                </m:r>
+                              </m:e>
+                            </m:d>
+                            <m:r>
+                              <m:t>P</m:t>
+                            </m:r>
+                            <m:d>
+                              <m:dPr>
+                                <m:begChr m:val="("/>
+                                <m:sepChr m:val=""/>
+                                <m:endChr m:val=")"/>
+                                <m:grow/>
+                              </m:dPr>
+                              <m:e>
+                                <m:sSub>
+                                  <m:e>
+                                    <m:r>
+                                      <m:t>X</m:t>
+                                    </m:r>
+                                  </m:e>
+                                  <m:sub>
+                                    <m:r>
+                                      <m:t>2</m:t>
+                                    </m:r>
+                                  </m:sub>
+                                </m:sSub>
+                                <m:r>
+                                  <m:rPr>
+                                    <m:sty m:val="p"/>
+                                  </m:rPr>
+                                  <m:t>=</m:t>
+                                </m:r>
+                                <m:r>
+                                  <m:t>0</m:t>
+                                </m:r>
+                              </m:e>
+                            </m:d>
+                            <m:r>
+                              <m:t>P</m:t>
+                            </m:r>
+                            <m:d>
+                              <m:dPr>
+                                <m:begChr m:val="("/>
+                                <m:sepChr m:val=""/>
+                                <m:endChr m:val=")"/>
+                                <m:grow/>
+                              </m:dPr>
+                              <m:e>
+                                <m:sSub>
+                                  <m:e>
+                                    <m:r>
+                                      <m:t>X</m:t>
+                                    </m:r>
+                                  </m:e>
+                                  <m:sub>
+                                    <m:r>
+                                      <m:t>3</m:t>
+                                    </m:r>
+                                  </m:sub>
+                                </m:sSub>
+                                <m:r>
+                                  <m:rPr>
+                                    <m:sty m:val="p"/>
+                                  </m:rPr>
+                                  <m:t>=</m:t>
+                                </m:r>
+                                <m:r>
+                                  <m:t>1</m:t>
+                                </m:r>
+                              </m:e>
+                            </m:d>
+                            <m:r>
+                              <m:t>P</m:t>
+                            </m:r>
+                            <m:d>
+                              <m:dPr>
+                                <m:begChr m:val="("/>
+                                <m:sepChr m:val=""/>
+                                <m:endChr m:val=")"/>
+                                <m:grow/>
+                              </m:dPr>
+                              <m:e>
+                                <m:sSub>
+                                  <m:e>
+                                    <m:r>
+                                      <m:t>X</m:t>
+                                    </m:r>
+                                  </m:e>
+                                  <m:sub>
+                                    <m:r>
+                                      <m:t>4</m:t>
+                                    </m:r>
+                                  </m:sub>
+                                </m:sSub>
+                                <m:r>
+                                  <m:rPr>
+                                    <m:sty m:val="p"/>
+                                  </m:rPr>
+                                  <m:t>=</m:t>
+                                </m:r>
+                                <m:r>
+                                  <m:t>0</m:t>
+                                </m:r>
+                              </m:e>
+                            </m:d>
+                            <m:r>
+                              <m:t>P</m:t>
+                            </m:r>
+                            <m:d>
+                              <m:dPr>
+                                <m:begChr m:val="("/>
+                                <m:sepChr m:val=""/>
+                                <m:endChr m:val=")"/>
+                                <m:grow/>
+                              </m:dPr>
+                              <m:e>
+                                <m:sSub>
+                                  <m:e>
+                                    <m:r>
+                                      <m:t>X</m:t>
+                                    </m:r>
+                                  </m:e>
+                                  <m:sub>
+                                    <m:r>
+                                      <m:t>5</m:t>
+                                    </m:r>
+                                  </m:sub>
+                                </m:sSub>
+                                <m:r>
+                                  <m:rPr>
+                                    <m:sty m:val="p"/>
+                                  </m:rPr>
+                                  <m:t>=</m:t>
+                                </m:r>
+                                <m:r>
+                                  <m:t>1</m:t>
+                                </m:r>
+                              </m:e>
+                            </m:d>
+                          </m:e>
+                        </m:mr>
+                        <m:mr>
+                          <m:e/>
+                          <m:e>
+                            <m:r>
+                              <m:rPr>
+                                <m:sty m:val="p"/>
+                              </m:rPr>
+                              <m:t>=</m:t>
+                            </m:r>
+                            <m:d>
+                              <m:dPr>
+                                <m:begChr m:val="("/>
+                                <m:sepChr m:val=""/>
+                                <m:endChr m:val=")"/>
+                                <m:grow/>
+                              </m:dPr>
+                              <m:e>
+                                <m:r>
+                                  <m:t>0.95</m:t>
+                                </m:r>
+                              </m:e>
+                            </m:d>
+                            <m:d>
+                              <m:dPr>
+                                <m:begChr m:val="("/>
+                                <m:sepChr m:val=""/>
+                                <m:endChr m:val=")"/>
+                                <m:grow/>
+                              </m:dPr>
+                              <m:e>
+                                <m:r>
+                                  <m:t>0.95</m:t>
+                                </m:r>
+                              </m:e>
+                            </m:d>
+                            <m:d>
+                              <m:dPr>
+                                <m:begChr m:val="("/>
+                                <m:sepChr m:val=""/>
+                                <m:endChr m:val=")"/>
+                                <m:grow/>
+                              </m:dPr>
+                              <m:e>
+                                <m:r>
+                                  <m:t>0.05</m:t>
+                                </m:r>
+                              </m:e>
+                            </m:d>
+                            <m:d>
+                              <m:dPr>
+                                <m:begChr m:val="("/>
+                                <m:sepChr m:val=""/>
+                                <m:endChr m:val=")"/>
+                                <m:grow/>
+                              </m:dPr>
+                              <m:e>
+                                <m:r>
+                                  <m:t>0.95</m:t>
+                                </m:r>
+                              </m:e>
+                            </m:d>
+                            <m:d>
+                              <m:dPr>
+                                <m:begChr m:val="("/>
+                                <m:sepChr m:val=""/>
+                                <m:endChr m:val=")"/>
+                                <m:grow/>
+                              </m:dPr>
+                              <m:e>
+                                <m:r>
+                                  <m:t>0.05</m:t>
+                                </m:r>
+                              </m:e>
+                            </m:d>
+                          </m:e>
+                        </m:mr>
+                        <m:mr>
+                          <m:e/>
+                          <m:e>
+                            <m:r>
+                              <m:rPr>
+                                <m:sty m:val="p"/>
+                              </m:rPr>
+                              <m:t>=</m:t>
+                            </m:r>
+                            <m:sSup>
+                              <m:e>
+                                <m:r>
+                                  <m:t>0.05</m:t>
+                                </m:r>
+                              </m:e>
+                              <m:sup>
+                                <m:r>
+                                  <m:t>2</m:t>
+                                </m:r>
+                              </m:sup>
+                            </m:sSup>
+                            <m:sSup>
+                              <m:e>
+                                <m:d>
+                                  <m:dPr>
+                                    <m:begChr m:val="("/>
+                                    <m:sepChr m:val=""/>
+                                    <m:endChr m:val=")"/>
+                                    <m:grow/>
+                                  </m:dPr>
+                                  <m:e>
+                                    <m:r>
+                                      <m:t>0.95</m:t>
+                                    </m:r>
+                                  </m:e>
+                                </m:d>
+                              </m:e>
+                              <m:sup>
+                                <m:r>
+                                  <m:t>3</m:t>
+                                </m:r>
+                              </m:sup>
+                            </m:sSup>
+                            <m:r>
+                              <m:rPr>
+                                <m:sty m:val="p"/>
+                              </m:rPr>
+                              <m:t>.</m:t>
+                            </m:r>
+                          </m:e>
+                        </m:mr>
+                      </m:m>
                     </m:oMath>
                   </m:oMathPara>
                 </a14:m>
@@ -8455,7 +8632,7 @@
                                         <p:tgtEl>
                                           <p:spTgt spid="3">
                                             <p:txEl>
-                                              <p:pRg st="64" end="64"/>
+                                              <p:pRg st="60" end="60"/>
                                             </p:txEl>
                                           </p:spTgt>
                                         </p:tgtEl>
@@ -8504,7 +8681,7 @@
                                         <p:tgtEl>
                                           <p:spTgt spid="3">
                                             <p:txEl>
-                                              <p:pRg st="66" end="66"/>
+                                              <p:pRg st="62" end="62"/>
                                             </p:txEl>
                                           </p:spTgt>
                                         </p:tgtEl>
@@ -8553,7 +8730,7 @@
                                         <p:tgtEl>
                                           <p:spTgt spid="3">
                                             <p:txEl>
-                                              <p:pRg st="69" end="69"/>
+                                              <p:pRg st="65" end="65"/>
                                             </p:txEl>
                                           </p:spTgt>
                                         </p:tgtEl>
@@ -8602,7 +8779,7 @@
                                         <p:tgtEl>
                                           <p:spTgt spid="3">
                                             <p:txEl>
-                                              <p:pRg st="71" end="71"/>
+                                              <p:pRg st="67" end="67"/>
                                             </p:txEl>
                                           </p:spTgt>
                                         </p:tgtEl>
@@ -8651,7 +8828,7 @@
                                         <p:tgtEl>
                                           <p:spTgt spid="3">
                                             <p:txEl>
-                                              <p:pRg st="73" end="73"/>
+                                              <p:pRg st="69" end="69"/>
                                             </p:txEl>
                                           </p:spTgt>
                                         </p:tgtEl>
@@ -8700,7 +8877,7 @@
                                         <p:tgtEl>
                                           <p:spTgt spid="3">
                                             <p:txEl>
-                                              <p:pRg st="75" end="75"/>
+                                              <p:pRg st="71" end="71"/>
                                             </p:txEl>
                                           </p:spTgt>
                                         </p:tgtEl>
@@ -8749,7 +8926,7 @@
                                         <p:tgtEl>
                                           <p:spTgt spid="3">
                                             <p:txEl>
-                                              <p:pRg st="77" end="77"/>
+                                              <p:pRg st="73" end="73"/>
                                             </p:txEl>
                                           </p:spTgt>
                                         </p:tgtEl>
@@ -8798,7 +8975,7 @@
                                         <p:tgtEl>
                                           <p:spTgt spid="3">
                                             <p:txEl>
-                                              <p:pRg st="80" end="80"/>
+                                              <p:pRg st="76" end="76"/>
                                             </p:txEl>
                                           </p:spTgt>
                                         </p:tgtEl>
@@ -8847,7 +9024,7 @@
                                         <p:tgtEl>
                                           <p:spTgt spid="3">
                                             <p:txEl>
-                                              <p:pRg st="81" end="81"/>
+                                              <p:pRg st="77" end="77"/>
                                             </p:txEl>
                                           </p:spTgt>
                                         </p:tgtEl>
@@ -8896,7 +9073,7 @@
                                         <p:tgtEl>
                                           <p:spTgt spid="3">
                                             <p:txEl>
-                                              <p:pRg st="89" end="89"/>
+                                              <p:pRg st="85" end="85"/>
                                             </p:txEl>
                                           </p:spTgt>
                                         </p:tgtEl>
@@ -8945,7 +9122,7 @@
                                         <p:tgtEl>
                                           <p:spTgt spid="3">
                                             <p:txEl>
-                                              <p:pRg st="91" end="91"/>
+                                              <p:pRg st="87" end="87"/>
                                             </p:txEl>
                                           </p:spTgt>
                                         </p:tgtEl>

--- a/docs/activities/Unit-04-Discrete.pptx
+++ b/docs/activities/Unit-04-Discrete.pptx
@@ -11426,7 +11426,7 @@
             </a:r>
             <a:r>
               <a:rPr b="1"/>
-              <a:t>Unit 03 Practice Problems</a:t>
+              <a:t>Unit 04 Practice Problems</a:t>
             </a:r>
             <a:r>
               <a:rPr/>
